--- a/NMGone_Praesentation_Geschaeftsfuehrung.pptx
+++ b/NMGone_Praesentation_Geschaeftsfuehrung.pptx
@@ -5,20 +5,20 @@
     <p:sldMasterId id="2147483648" r:id="rId1"/>
   </p:sldMasterIdLst>
   <p:sldIdLst>
-    <p:sldId id="256" r:id="rId2"/>
-    <p:sldId id="257" r:id="rId3"/>
-    <p:sldId id="258" r:id="rId4"/>
-    <p:sldId id="259" r:id="rId5"/>
-    <p:sldId id="260" r:id="rId6"/>
-    <p:sldId id="261" r:id="rId7"/>
-    <p:sldId id="262" r:id="rId8"/>
-    <p:sldId id="263" r:id="rId9"/>
-    <p:sldId id="264" r:id="rId10"/>
-    <p:sldId id="265" r:id="rId11"/>
-    <p:sldId id="266" r:id="rId12"/>
-    <p:sldId id="267" r:id="rId13"/>
+    <p:sldId id="256" r:id="rId7"/>
+    <p:sldId id="257" r:id="rId8"/>
+    <p:sldId id="258" r:id="rId9"/>
+    <p:sldId id="259" r:id="rId10"/>
+    <p:sldId id="260" r:id="rId11"/>
+    <p:sldId id="261" r:id="rId12"/>
+    <p:sldId id="262" r:id="rId13"/>
+    <p:sldId id="263" r:id="rId14"/>
+    <p:sldId id="264" r:id="rId15"/>
+    <p:sldId id="265" r:id="rId16"/>
+    <p:sldId id="266" r:id="rId17"/>
+    <p:sldId id="267" r:id="rId18"/>
   </p:sldIdLst>
-  <p:sldSz cx="12192000" cy="6858000"/>
+  <p:sldSz cx="12191695" cy="6858000" type="screen4x3"/>
   <p:notesSz cx="6858000" cy="9144000"/>
   <p:defaultTextStyle>
     <a:defPPr>
@@ -115,22 +115,6 @@
       </a:defRPr>
     </a:lvl9pPr>
   </p:defaultTextStyle>
-  <p:extLst>
-    <p:ext uri="{EFAFB233-063F-42B5-8137-9DF3F51BA10A}">
-      <p15:sldGuideLst xmlns:p15="http://schemas.microsoft.com/office/powerpoint/2012/main">
-        <p15:guide id="1" orient="horz" pos="2160">
-          <p15:clr>
-            <a:srgbClr val="A4A3A4"/>
-          </p15:clr>
-        </p15:guide>
-        <p15:guide id="2" pos="2880">
-          <p15:clr>
-            <a:srgbClr val="A4A3A4"/>
-          </p15:clr>
-        </p15:guide>
-      </p15:sldGuideLst>
-    </p:ext>
-  </p:extLst>
 </p:presentation>
 </file>
 
@@ -172,9 +156,10 @@
           <a:lstStyle/>
           <a:p>
             <a:r>
-              <a:rPr lang="en-US"/>
+              <a:rPr lang="en-US" smtClean="0"/>
               <a:t>Click to edit Master title style</a:t>
             </a:r>
+            <a:endParaRPr lang="en-US"/>
           </a:p>
         </p:txBody>
       </p:sp>
@@ -290,9 +275,10 @@
           </a:lstStyle>
           <a:p>
             <a:r>
-              <a:rPr lang="en-US"/>
+              <a:rPr lang="en-US" smtClean="0"/>
               <a:t>Click to edit Master subtitle style</a:t>
             </a:r>
+            <a:endParaRPr lang="en-US"/>
           </a:p>
         </p:txBody>
       </p:sp>
@@ -313,7 +299,7 @@
           <a:p>
             <a:fld id="{5BCAD085-E8A6-8845-BD4E-CB4CCA059FC4}" type="datetimeFigureOut">
               <a:rPr lang="en-US" smtClean="0"/>
-              <a:t>6/22/2026</a:t>
+              <a:t>1/27/13</a:t>
             </a:fld>
             <a:endParaRPr lang="en-US"/>
           </a:p>
@@ -355,7 +341,7 @@
           <a:p>
             <a:fld id="{C1FF6DA9-008F-8B48-92A6-B652298478BF}" type="slidenum">
               <a:rPr lang="en-US" smtClean="0"/>
-              <a:t>‹Nr.›</a:t>
+              <a:t>‹#›</a:t>
             </a:fld>
             <a:endParaRPr lang="en-US"/>
           </a:p>
@@ -407,9 +393,10 @@
           <a:lstStyle/>
           <a:p>
             <a:r>
-              <a:rPr lang="en-US"/>
+              <a:rPr lang="en-US" smtClean="0"/>
               <a:t>Click to edit Master title style</a:t>
             </a:r>
+            <a:endParaRPr lang="en-US"/>
           </a:p>
         </p:txBody>
       </p:sp>
@@ -430,37 +417,38 @@
           <a:p>
             <a:pPr lvl="0"/>
             <a:r>
-              <a:rPr lang="en-US"/>
+              <a:rPr lang="en-US" smtClean="0"/>
               <a:t>Click to edit Master text styles</a:t>
             </a:r>
           </a:p>
           <a:p>
             <a:pPr lvl="1"/>
             <a:r>
-              <a:rPr lang="en-US"/>
+              <a:rPr lang="en-US" smtClean="0"/>
               <a:t>Second level</a:t>
             </a:r>
           </a:p>
           <a:p>
             <a:pPr lvl="2"/>
             <a:r>
-              <a:rPr lang="en-US"/>
+              <a:rPr lang="en-US" smtClean="0"/>
               <a:t>Third level</a:t>
             </a:r>
           </a:p>
           <a:p>
             <a:pPr lvl="3"/>
             <a:r>
-              <a:rPr lang="en-US"/>
+              <a:rPr lang="en-US" smtClean="0"/>
               <a:t>Fourth level</a:t>
             </a:r>
           </a:p>
           <a:p>
             <a:pPr lvl="4"/>
             <a:r>
-              <a:rPr lang="en-US"/>
+              <a:rPr lang="en-US" smtClean="0"/>
               <a:t>Fifth level</a:t>
             </a:r>
+            <a:endParaRPr lang="en-US"/>
           </a:p>
         </p:txBody>
       </p:sp>
@@ -481,7 +469,7 @@
           <a:p>
             <a:fld id="{5BCAD085-E8A6-8845-BD4E-CB4CCA059FC4}" type="datetimeFigureOut">
               <a:rPr lang="en-US" smtClean="0"/>
-              <a:t>6/22/2026</a:t>
+              <a:t>1/27/13</a:t>
             </a:fld>
             <a:endParaRPr lang="en-US"/>
           </a:p>
@@ -523,7 +511,7 @@
           <a:p>
             <a:fld id="{C1FF6DA9-008F-8B48-92A6-B652298478BF}" type="slidenum">
               <a:rPr lang="en-US" smtClean="0"/>
-              <a:t>‹Nr.›</a:t>
+              <a:t>‹#›</a:t>
             </a:fld>
             <a:endParaRPr lang="en-US"/>
           </a:p>
@@ -580,9 +568,10 @@
           <a:lstStyle/>
           <a:p>
             <a:r>
-              <a:rPr lang="en-US"/>
+              <a:rPr lang="en-US" smtClean="0"/>
               <a:t>Click to edit Master title style</a:t>
             </a:r>
+            <a:endParaRPr lang="en-US"/>
           </a:p>
         </p:txBody>
       </p:sp>
@@ -608,37 +597,38 @@
           <a:p>
             <a:pPr lvl="0"/>
             <a:r>
-              <a:rPr lang="en-US"/>
+              <a:rPr lang="en-US" smtClean="0"/>
               <a:t>Click to edit Master text styles</a:t>
             </a:r>
           </a:p>
           <a:p>
             <a:pPr lvl="1"/>
             <a:r>
-              <a:rPr lang="en-US"/>
+              <a:rPr lang="en-US" smtClean="0"/>
               <a:t>Second level</a:t>
             </a:r>
           </a:p>
           <a:p>
             <a:pPr lvl="2"/>
             <a:r>
-              <a:rPr lang="en-US"/>
+              <a:rPr lang="en-US" smtClean="0"/>
               <a:t>Third level</a:t>
             </a:r>
           </a:p>
           <a:p>
             <a:pPr lvl="3"/>
             <a:r>
-              <a:rPr lang="en-US"/>
+              <a:rPr lang="en-US" smtClean="0"/>
               <a:t>Fourth level</a:t>
             </a:r>
           </a:p>
           <a:p>
             <a:pPr lvl="4"/>
             <a:r>
-              <a:rPr lang="en-US"/>
+              <a:rPr lang="en-US" smtClean="0"/>
               <a:t>Fifth level</a:t>
             </a:r>
+            <a:endParaRPr lang="en-US"/>
           </a:p>
         </p:txBody>
       </p:sp>
@@ -659,7 +649,7 @@
           <a:p>
             <a:fld id="{5BCAD085-E8A6-8845-BD4E-CB4CCA059FC4}" type="datetimeFigureOut">
               <a:rPr lang="en-US" smtClean="0"/>
-              <a:t>6/22/2026</a:t>
+              <a:t>1/27/13</a:t>
             </a:fld>
             <a:endParaRPr lang="en-US"/>
           </a:p>
@@ -701,7 +691,7 @@
           <a:p>
             <a:fld id="{C1FF6DA9-008F-8B48-92A6-B652298478BF}" type="slidenum">
               <a:rPr lang="en-US" smtClean="0"/>
-              <a:t>‹Nr.›</a:t>
+              <a:t>‹#›</a:t>
             </a:fld>
             <a:endParaRPr lang="en-US"/>
           </a:p>
@@ -753,9 +743,10 @@
           <a:lstStyle/>
           <a:p>
             <a:r>
-              <a:rPr lang="en-US"/>
+              <a:rPr lang="en-US" smtClean="0"/>
               <a:t>Click to edit Master title style</a:t>
             </a:r>
+            <a:endParaRPr lang="en-US"/>
           </a:p>
         </p:txBody>
       </p:sp>
@@ -776,37 +767,38 @@
           <a:p>
             <a:pPr lvl="0"/>
             <a:r>
-              <a:rPr lang="en-US"/>
+              <a:rPr lang="en-US" smtClean="0"/>
               <a:t>Click to edit Master text styles</a:t>
             </a:r>
           </a:p>
           <a:p>
             <a:pPr lvl="1"/>
             <a:r>
-              <a:rPr lang="en-US"/>
+              <a:rPr lang="en-US" smtClean="0"/>
               <a:t>Second level</a:t>
             </a:r>
           </a:p>
           <a:p>
             <a:pPr lvl="2"/>
             <a:r>
-              <a:rPr lang="en-US"/>
+              <a:rPr lang="en-US" smtClean="0"/>
               <a:t>Third level</a:t>
             </a:r>
           </a:p>
           <a:p>
             <a:pPr lvl="3"/>
             <a:r>
-              <a:rPr lang="en-US"/>
+              <a:rPr lang="en-US" smtClean="0"/>
               <a:t>Fourth level</a:t>
             </a:r>
           </a:p>
           <a:p>
             <a:pPr lvl="4"/>
             <a:r>
-              <a:rPr lang="en-US"/>
+              <a:rPr lang="en-US" smtClean="0"/>
               <a:t>Fifth level</a:t>
             </a:r>
+            <a:endParaRPr lang="en-US"/>
           </a:p>
         </p:txBody>
       </p:sp>
@@ -827,7 +819,7 @@
           <a:p>
             <a:fld id="{5BCAD085-E8A6-8845-BD4E-CB4CCA059FC4}" type="datetimeFigureOut">
               <a:rPr lang="en-US" smtClean="0"/>
-              <a:t>6/22/2026</a:t>
+              <a:t>1/27/13</a:t>
             </a:fld>
             <a:endParaRPr lang="en-US"/>
           </a:p>
@@ -869,7 +861,7 @@
           <a:p>
             <a:fld id="{C1FF6DA9-008F-8B48-92A6-B652298478BF}" type="slidenum">
               <a:rPr lang="en-US" smtClean="0"/>
-              <a:t>‹Nr.›</a:t>
+              <a:t>‹#›</a:t>
             </a:fld>
             <a:endParaRPr lang="en-US"/>
           </a:p>
@@ -930,9 +922,10 @@
           </a:lstStyle>
           <a:p>
             <a:r>
-              <a:rPr lang="en-US"/>
+              <a:rPr lang="en-US" smtClean="0"/>
               <a:t>Click to edit Master title style</a:t>
             </a:r>
+            <a:endParaRPr lang="en-US"/>
           </a:p>
         </p:txBody>
       </p:sp>
@@ -1049,7 +1042,7 @@
           <a:p>
             <a:pPr lvl="0"/>
             <a:r>
-              <a:rPr lang="en-US"/>
+              <a:rPr lang="en-US" smtClean="0"/>
               <a:t>Click to edit Master text styles</a:t>
             </a:r>
           </a:p>
@@ -1072,7 +1065,7 @@
           <a:p>
             <a:fld id="{5BCAD085-E8A6-8845-BD4E-CB4CCA059FC4}" type="datetimeFigureOut">
               <a:rPr lang="en-US" smtClean="0"/>
-              <a:t>6/22/2026</a:t>
+              <a:t>1/27/13</a:t>
             </a:fld>
             <a:endParaRPr lang="en-US"/>
           </a:p>
@@ -1114,7 +1107,7 @@
           <a:p>
             <a:fld id="{C1FF6DA9-008F-8B48-92A6-B652298478BF}" type="slidenum">
               <a:rPr lang="en-US" smtClean="0"/>
-              <a:t>‹Nr.›</a:t>
+              <a:t>‹#›</a:t>
             </a:fld>
             <a:endParaRPr lang="en-US"/>
           </a:p>
@@ -1166,9 +1159,10 @@
           <a:lstStyle/>
           <a:p>
             <a:r>
-              <a:rPr lang="en-US"/>
+              <a:rPr lang="en-US" smtClean="0"/>
               <a:t>Click to edit Master title style</a:t>
             </a:r>
+            <a:endParaRPr lang="en-US"/>
           </a:p>
         </p:txBody>
       </p:sp>
@@ -1222,37 +1216,38 @@
           <a:p>
             <a:pPr lvl="0"/>
             <a:r>
-              <a:rPr lang="en-US"/>
+              <a:rPr lang="en-US" smtClean="0"/>
               <a:t>Click to edit Master text styles</a:t>
             </a:r>
           </a:p>
           <a:p>
             <a:pPr lvl="1"/>
             <a:r>
-              <a:rPr lang="en-US"/>
+              <a:rPr lang="en-US" smtClean="0"/>
               <a:t>Second level</a:t>
             </a:r>
           </a:p>
           <a:p>
             <a:pPr lvl="2"/>
             <a:r>
-              <a:rPr lang="en-US"/>
+              <a:rPr lang="en-US" smtClean="0"/>
               <a:t>Third level</a:t>
             </a:r>
           </a:p>
           <a:p>
             <a:pPr lvl="3"/>
             <a:r>
-              <a:rPr lang="en-US"/>
+              <a:rPr lang="en-US" smtClean="0"/>
               <a:t>Fourth level</a:t>
             </a:r>
           </a:p>
           <a:p>
             <a:pPr lvl="4"/>
             <a:r>
-              <a:rPr lang="en-US"/>
+              <a:rPr lang="en-US" smtClean="0"/>
               <a:t>Fifth level</a:t>
             </a:r>
+            <a:endParaRPr lang="en-US"/>
           </a:p>
         </p:txBody>
       </p:sp>
@@ -1306,37 +1301,38 @@
           <a:p>
             <a:pPr lvl="0"/>
             <a:r>
-              <a:rPr lang="en-US"/>
+              <a:rPr lang="en-US" smtClean="0"/>
               <a:t>Click to edit Master text styles</a:t>
             </a:r>
           </a:p>
           <a:p>
             <a:pPr lvl="1"/>
             <a:r>
-              <a:rPr lang="en-US"/>
+              <a:rPr lang="en-US" smtClean="0"/>
               <a:t>Second level</a:t>
             </a:r>
           </a:p>
           <a:p>
             <a:pPr lvl="2"/>
             <a:r>
-              <a:rPr lang="en-US"/>
+              <a:rPr lang="en-US" smtClean="0"/>
               <a:t>Third level</a:t>
             </a:r>
           </a:p>
           <a:p>
             <a:pPr lvl="3"/>
             <a:r>
-              <a:rPr lang="en-US"/>
+              <a:rPr lang="en-US" smtClean="0"/>
               <a:t>Fourth level</a:t>
             </a:r>
           </a:p>
           <a:p>
             <a:pPr lvl="4"/>
             <a:r>
-              <a:rPr lang="en-US"/>
+              <a:rPr lang="en-US" smtClean="0"/>
               <a:t>Fifth level</a:t>
             </a:r>
+            <a:endParaRPr lang="en-US"/>
           </a:p>
         </p:txBody>
       </p:sp>
@@ -1357,7 +1353,7 @@
           <a:p>
             <a:fld id="{5BCAD085-E8A6-8845-BD4E-CB4CCA059FC4}" type="datetimeFigureOut">
               <a:rPr lang="en-US" smtClean="0"/>
-              <a:t>6/22/2026</a:t>
+              <a:t>1/27/13</a:t>
             </a:fld>
             <a:endParaRPr lang="en-US"/>
           </a:p>
@@ -1399,7 +1395,7 @@
           <a:p>
             <a:fld id="{C1FF6DA9-008F-8B48-92A6-B652298478BF}" type="slidenum">
               <a:rPr lang="en-US" smtClean="0"/>
-              <a:t>‹Nr.›</a:t>
+              <a:t>‹#›</a:t>
             </a:fld>
             <a:endParaRPr lang="en-US"/>
           </a:p>
@@ -1455,9 +1451,10 @@
           </a:lstStyle>
           <a:p>
             <a:r>
-              <a:rPr lang="en-US"/>
+              <a:rPr lang="en-US" smtClean="0"/>
               <a:t>Click to edit Master title style</a:t>
             </a:r>
+            <a:endParaRPr lang="en-US"/>
           </a:p>
         </p:txBody>
       </p:sp>
@@ -1520,7 +1517,7 @@
           <a:p>
             <a:pPr lvl="0"/>
             <a:r>
-              <a:rPr lang="en-US"/>
+              <a:rPr lang="en-US" smtClean="0"/>
               <a:t>Click to edit Master text styles</a:t>
             </a:r>
           </a:p>
@@ -1576,37 +1573,38 @@
           <a:p>
             <a:pPr lvl="0"/>
             <a:r>
-              <a:rPr lang="en-US"/>
+              <a:rPr lang="en-US" smtClean="0"/>
               <a:t>Click to edit Master text styles</a:t>
             </a:r>
           </a:p>
           <a:p>
             <a:pPr lvl="1"/>
             <a:r>
-              <a:rPr lang="en-US"/>
+              <a:rPr lang="en-US" smtClean="0"/>
               <a:t>Second level</a:t>
             </a:r>
           </a:p>
           <a:p>
             <a:pPr lvl="2"/>
             <a:r>
-              <a:rPr lang="en-US"/>
+              <a:rPr lang="en-US" smtClean="0"/>
               <a:t>Third level</a:t>
             </a:r>
           </a:p>
           <a:p>
             <a:pPr lvl="3"/>
             <a:r>
-              <a:rPr lang="en-US"/>
+              <a:rPr lang="en-US" smtClean="0"/>
               <a:t>Fourth level</a:t>
             </a:r>
           </a:p>
           <a:p>
             <a:pPr lvl="4"/>
             <a:r>
-              <a:rPr lang="en-US"/>
+              <a:rPr lang="en-US" smtClean="0"/>
               <a:t>Fifth level</a:t>
             </a:r>
+            <a:endParaRPr lang="en-US"/>
           </a:p>
         </p:txBody>
       </p:sp>
@@ -1669,7 +1667,7 @@
           <a:p>
             <a:pPr lvl="0"/>
             <a:r>
-              <a:rPr lang="en-US"/>
+              <a:rPr lang="en-US" smtClean="0"/>
               <a:t>Click to edit Master text styles</a:t>
             </a:r>
           </a:p>
@@ -1725,37 +1723,38 @@
           <a:p>
             <a:pPr lvl="0"/>
             <a:r>
-              <a:rPr lang="en-US"/>
+              <a:rPr lang="en-US" smtClean="0"/>
               <a:t>Click to edit Master text styles</a:t>
             </a:r>
           </a:p>
           <a:p>
             <a:pPr lvl="1"/>
             <a:r>
-              <a:rPr lang="en-US"/>
+              <a:rPr lang="en-US" smtClean="0"/>
               <a:t>Second level</a:t>
             </a:r>
           </a:p>
           <a:p>
             <a:pPr lvl="2"/>
             <a:r>
-              <a:rPr lang="en-US"/>
+              <a:rPr lang="en-US" smtClean="0"/>
               <a:t>Third level</a:t>
             </a:r>
           </a:p>
           <a:p>
             <a:pPr lvl="3"/>
             <a:r>
-              <a:rPr lang="en-US"/>
+              <a:rPr lang="en-US" smtClean="0"/>
               <a:t>Fourth level</a:t>
             </a:r>
           </a:p>
           <a:p>
             <a:pPr lvl="4"/>
             <a:r>
-              <a:rPr lang="en-US"/>
+              <a:rPr lang="en-US" smtClean="0"/>
               <a:t>Fifth level</a:t>
             </a:r>
+            <a:endParaRPr lang="en-US"/>
           </a:p>
         </p:txBody>
       </p:sp>
@@ -1776,7 +1775,7 @@
           <a:p>
             <a:fld id="{5BCAD085-E8A6-8845-BD4E-CB4CCA059FC4}" type="datetimeFigureOut">
               <a:rPr lang="en-US" smtClean="0"/>
-              <a:t>6/22/2026</a:t>
+              <a:t>1/27/13</a:t>
             </a:fld>
             <a:endParaRPr lang="en-US"/>
           </a:p>
@@ -1818,7 +1817,7 @@
           <a:p>
             <a:fld id="{C1FF6DA9-008F-8B48-92A6-B652298478BF}" type="slidenum">
               <a:rPr lang="en-US" smtClean="0"/>
-              <a:t>‹Nr.›</a:t>
+              <a:t>‹#›</a:t>
             </a:fld>
             <a:endParaRPr lang="en-US"/>
           </a:p>
@@ -1870,9 +1869,10 @@
           <a:lstStyle/>
           <a:p>
             <a:r>
-              <a:rPr lang="en-US"/>
+              <a:rPr lang="en-US" smtClean="0"/>
               <a:t>Click to edit Master title style</a:t>
             </a:r>
+            <a:endParaRPr lang="en-US"/>
           </a:p>
         </p:txBody>
       </p:sp>
@@ -1893,7 +1893,7 @@
           <a:p>
             <a:fld id="{5BCAD085-E8A6-8845-BD4E-CB4CCA059FC4}" type="datetimeFigureOut">
               <a:rPr lang="en-US" smtClean="0"/>
-              <a:t>6/22/2026</a:t>
+              <a:t>1/27/13</a:t>
             </a:fld>
             <a:endParaRPr lang="en-US"/>
           </a:p>
@@ -1935,7 +1935,7 @@
           <a:p>
             <a:fld id="{C1FF6DA9-008F-8B48-92A6-B652298478BF}" type="slidenum">
               <a:rPr lang="en-US" smtClean="0"/>
-              <a:t>‹Nr.›</a:t>
+              <a:t>‹#›</a:t>
             </a:fld>
             <a:endParaRPr lang="en-US"/>
           </a:p>
@@ -1988,7 +1988,7 @@
           <a:p>
             <a:fld id="{5BCAD085-E8A6-8845-BD4E-CB4CCA059FC4}" type="datetimeFigureOut">
               <a:rPr lang="en-US" smtClean="0"/>
-              <a:t>6/22/2026</a:t>
+              <a:t>1/27/13</a:t>
             </a:fld>
             <a:endParaRPr lang="en-US"/>
           </a:p>
@@ -2030,7 +2030,7 @@
           <a:p>
             <a:fld id="{C1FF6DA9-008F-8B48-92A6-B652298478BF}" type="slidenum">
               <a:rPr lang="en-US" smtClean="0"/>
-              <a:t>‹Nr.›</a:t>
+              <a:t>‹#›</a:t>
             </a:fld>
             <a:endParaRPr lang="en-US"/>
           </a:p>
@@ -2091,9 +2091,10 @@
           </a:lstStyle>
           <a:p>
             <a:r>
-              <a:rPr lang="en-US"/>
+              <a:rPr lang="en-US" smtClean="0"/>
               <a:t>Click to edit Master title style</a:t>
             </a:r>
+            <a:endParaRPr lang="en-US"/>
           </a:p>
         </p:txBody>
       </p:sp>
@@ -2147,37 +2148,38 @@
           <a:p>
             <a:pPr lvl="0"/>
             <a:r>
-              <a:rPr lang="en-US"/>
+              <a:rPr lang="en-US" smtClean="0"/>
               <a:t>Click to edit Master text styles</a:t>
             </a:r>
           </a:p>
           <a:p>
             <a:pPr lvl="1"/>
             <a:r>
-              <a:rPr lang="en-US"/>
+              <a:rPr lang="en-US" smtClean="0"/>
               <a:t>Second level</a:t>
             </a:r>
           </a:p>
           <a:p>
             <a:pPr lvl="2"/>
             <a:r>
-              <a:rPr lang="en-US"/>
+              <a:rPr lang="en-US" smtClean="0"/>
               <a:t>Third level</a:t>
             </a:r>
           </a:p>
           <a:p>
             <a:pPr lvl="3"/>
             <a:r>
-              <a:rPr lang="en-US"/>
+              <a:rPr lang="en-US" smtClean="0"/>
               <a:t>Fourth level</a:t>
             </a:r>
           </a:p>
           <a:p>
             <a:pPr lvl="4"/>
             <a:r>
-              <a:rPr lang="en-US"/>
+              <a:rPr lang="en-US" smtClean="0"/>
               <a:t>Fifth level</a:t>
             </a:r>
+            <a:endParaRPr lang="en-US"/>
           </a:p>
         </p:txBody>
       </p:sp>
@@ -2240,7 +2242,7 @@
           <a:p>
             <a:pPr lvl="0"/>
             <a:r>
-              <a:rPr lang="en-US"/>
+              <a:rPr lang="en-US" smtClean="0"/>
               <a:t>Click to edit Master text styles</a:t>
             </a:r>
           </a:p>
@@ -2263,7 +2265,7 @@
           <a:p>
             <a:fld id="{5BCAD085-E8A6-8845-BD4E-CB4CCA059FC4}" type="datetimeFigureOut">
               <a:rPr lang="en-US" smtClean="0"/>
-              <a:t>6/22/2026</a:t>
+              <a:t>1/27/13</a:t>
             </a:fld>
             <a:endParaRPr lang="en-US"/>
           </a:p>
@@ -2305,7 +2307,7 @@
           <a:p>
             <a:fld id="{C1FF6DA9-008F-8B48-92A6-B652298478BF}" type="slidenum">
               <a:rPr lang="en-US" smtClean="0"/>
-              <a:t>‹Nr.›</a:t>
+              <a:t>‹#›</a:t>
             </a:fld>
             <a:endParaRPr lang="en-US"/>
           </a:p>
@@ -2366,9 +2368,10 @@
           </a:lstStyle>
           <a:p>
             <a:r>
-              <a:rPr lang="en-US"/>
+              <a:rPr lang="en-US" smtClean="0"/>
               <a:t>Click to edit Master title style</a:t>
             </a:r>
+            <a:endParaRPr lang="en-US"/>
           </a:p>
         </p:txBody>
       </p:sp>
@@ -2492,7 +2495,7 @@
           <a:p>
             <a:pPr lvl="0"/>
             <a:r>
-              <a:rPr lang="en-US"/>
+              <a:rPr lang="en-US" smtClean="0"/>
               <a:t>Click to edit Master text styles</a:t>
             </a:r>
           </a:p>
@@ -2515,7 +2518,7 @@
           <a:p>
             <a:fld id="{5BCAD085-E8A6-8845-BD4E-CB4CCA059FC4}" type="datetimeFigureOut">
               <a:rPr lang="en-US" smtClean="0"/>
-              <a:t>6/22/2026</a:t>
+              <a:t>1/27/13</a:t>
             </a:fld>
             <a:endParaRPr lang="en-US"/>
           </a:p>
@@ -2557,7 +2560,7 @@
           <a:p>
             <a:fld id="{C1FF6DA9-008F-8B48-92A6-B652298478BF}" type="slidenum">
               <a:rPr lang="en-US" smtClean="0"/>
-              <a:t>‹Nr.›</a:t>
+              <a:t>‹#›</a:t>
             </a:fld>
             <a:endParaRPr lang="en-US"/>
           </a:p>
@@ -2624,9 +2627,10 @@
           <a:lstStyle/>
           <a:p>
             <a:r>
-              <a:rPr lang="en-US"/>
+              <a:rPr lang="en-US" smtClean="0"/>
               <a:t>Click to edit Master title style</a:t>
             </a:r>
+            <a:endParaRPr lang="en-US"/>
           </a:p>
         </p:txBody>
       </p:sp>
@@ -2657,37 +2661,38 @@
           <a:p>
             <a:pPr lvl="0"/>
             <a:r>
-              <a:rPr lang="en-US"/>
+              <a:rPr lang="en-US" smtClean="0"/>
               <a:t>Click to edit Master text styles</a:t>
             </a:r>
           </a:p>
           <a:p>
             <a:pPr lvl="1"/>
             <a:r>
-              <a:rPr lang="en-US"/>
+              <a:rPr lang="en-US" smtClean="0"/>
               <a:t>Second level</a:t>
             </a:r>
           </a:p>
           <a:p>
             <a:pPr lvl="2"/>
             <a:r>
-              <a:rPr lang="en-US"/>
+              <a:rPr lang="en-US" smtClean="0"/>
               <a:t>Third level</a:t>
             </a:r>
           </a:p>
           <a:p>
             <a:pPr lvl="3"/>
             <a:r>
-              <a:rPr lang="en-US"/>
+              <a:rPr lang="en-US" smtClean="0"/>
               <a:t>Fourth level</a:t>
             </a:r>
           </a:p>
           <a:p>
             <a:pPr lvl="4"/>
             <a:r>
-              <a:rPr lang="en-US"/>
+              <a:rPr lang="en-US" smtClean="0"/>
               <a:t>Fifth level</a:t>
             </a:r>
+            <a:endParaRPr lang="en-US"/>
           </a:p>
         </p:txBody>
       </p:sp>
@@ -2726,7 +2731,7 @@
           <a:p>
             <a:fld id="{5BCAD085-E8A6-8845-BD4E-CB4CCA059FC4}" type="datetimeFigureOut">
               <a:rPr lang="en-US" smtClean="0"/>
-              <a:t>6/22/2026</a:t>
+              <a:t>1/27/13</a:t>
             </a:fld>
             <a:endParaRPr lang="en-US"/>
           </a:p>
@@ -2804,7 +2809,7 @@
           <a:p>
             <a:fld id="{C1FF6DA9-008F-8B48-92A6-B652298478BF}" type="slidenum">
               <a:rPr lang="en-US" smtClean="0"/>
-              <a:t>‹Nr.›</a:t>
+              <a:t>‹#›</a:t>
             </a:fld>
             <a:endParaRPr lang="en-US"/>
           </a:p>
@@ -3085,7 +3090,7 @@
 </file>
 
 <file path=ppt/slides/slide1.xml><?xml version="1.0" encoding="utf-8"?>
-<p:sld xmlns:a="http://schemas.openxmlformats.org/drawingml/2006/main" xmlns:r="http://schemas.openxmlformats.org/officeDocument/2006/relationships" xmlns:p="http://schemas.openxmlformats.org/presentationml/2006/main">
+<p:sld xmlns:a="http://schemas.openxmlformats.org/drawingml/2006/main" xmlns:p="http://schemas.openxmlformats.org/presentationml/2006/main" xmlns:r="http://schemas.openxmlformats.org/officeDocument/2006/relationships">
   <p:cSld>
     <p:bg>
       <p:bgPr>
@@ -3101,14 +3106,7 @@
         <p:cNvGrpSpPr/>
         <p:nvPr/>
       </p:nvGrpSpPr>
-      <p:grpSpPr>
-        <a:xfrm>
-          <a:off x="0" y="0"/>
-          <a:ext cx="0" cy="0"/>
-          <a:chOff x="0" y="0"/>
-          <a:chExt cx="0" cy="0"/>
-        </a:xfrm>
-      </p:grpSpPr>
+      <p:grpSpPr/>
       <p:sp>
         <p:nvSpPr>
           <p:cNvPr id="2" name="Rectangle 1"/>
@@ -3150,7 +3148,6 @@
           <a:lstStyle/>
           <a:p>
             <a:pPr algn="ctr"/>
-            <a:endParaRPr/>
           </a:p>
         </p:txBody>
       </p:sp>
@@ -3203,7 +3200,6 @@
           <a:lstStyle/>
           <a:p>
             <a:pPr algn="ctr"/>
-            <a:endParaRPr/>
           </a:p>
         </p:txBody>
       </p:sp>
@@ -3274,7 +3270,6 @@
           <a:lstStyle/>
           <a:p>
             <a:pPr algn="ctr"/>
-            <a:endParaRPr/>
           </a:p>
         </p:txBody>
       </p:sp>
@@ -3321,7 +3316,6 @@
           <a:lstStyle/>
           <a:p>
             <a:pPr algn="ctr"/>
-            <a:endParaRPr/>
           </a:p>
         </p:txBody>
       </p:sp>
@@ -3368,7 +3362,6 @@
           <a:lstStyle/>
           <a:p>
             <a:pPr algn="ctr"/>
-            <a:endParaRPr/>
           </a:p>
         </p:txBody>
       </p:sp>
@@ -3415,7 +3408,6 @@
           <a:lstStyle/>
           <a:p>
             <a:pPr algn="ctr"/>
-            <a:endParaRPr/>
           </a:p>
         </p:txBody>
       </p:sp>
@@ -3462,7 +3454,6 @@
           <a:lstStyle/>
           <a:p>
             <a:pPr algn="ctr"/>
-            <a:endParaRPr/>
           </a:p>
         </p:txBody>
       </p:sp>
@@ -3483,7 +3474,7 @@
           <a:noFill/>
         </p:spPr>
         <p:txBody>
-          <a:bodyPr wrap="square" lIns="0" tIns="0" rIns="0" bIns="0" anchor="t">
+          <a:bodyPr wrap="square" anchor="t" lIns="0" rIns="0" tIns="0" bIns="0">
             <a:spAutoFit/>
           </a:bodyPr>
           <a:lstStyle/>
@@ -3574,7 +3565,6 @@
           <a:lstStyle/>
           <a:p>
             <a:pPr algn="ctr"/>
-            <a:endParaRPr/>
           </a:p>
         </p:txBody>
       </p:sp>
@@ -3587,7 +3577,7 @@
         <p:spPr>
           <a:xfrm>
             <a:off x="914400" y="5166360"/>
-            <a:ext cx="10332720" cy="246221"/>
+            <a:ext cx="10332720" cy="1097280"/>
           </a:xfrm>
           <a:prstGeom prst="rect">
             <a:avLst/>
@@ -3595,7 +3585,7 @@
           <a:noFill/>
         </p:spPr>
         <p:txBody>
-          <a:bodyPr wrap="square" lIns="0" tIns="0" rIns="0" bIns="0" anchor="t">
+          <a:bodyPr wrap="square" anchor="t" lIns="0" rIns="0" tIns="0" bIns="0">
             <a:spAutoFit/>
           </a:bodyPr>
           <a:lstStyle/>
@@ -3612,40 +3602,35 @@
               </a:spcAft>
             </a:pPr>
             <a:r>
-              <a:rPr sz="1600" b="1" i="0" dirty="0" err="1">
+              <a:rPr sz="1600" b="1" i="0">
                 <a:solidFill>
                   <a:srgbClr val="B9CDE8"/>
                 </a:solidFill>
                 <a:latin typeface="Calibri"/>
               </a:rPr>
-              <a:t>Eigenentwicklung</a:t>
-            </a:r>
-            <a:r>
-              <a:rPr sz="1600" b="1" i="0" dirty="0">
-                <a:solidFill>
-                  <a:srgbClr val="B9CDE8"/>
+              <a:t>Eigenentwicklung  ·  Stand V2.0  ·  Juni 2026</a:t>
+            </a:r>
+          </a:p>
+          <a:p>
+            <a:pPr algn="l">
+              <a:lnSpc>
+                <a:spcPct val="100000"/>
+              </a:lnSpc>
+              <a:spcBef>
+                <a:spcPts val="0"/>
+              </a:spcBef>
+              <a:spcAft>
+                <a:spcPts val="400"/>
+              </a:spcAft>
+            </a:pPr>
+            <a:r>
+              <a:rPr sz="1500" b="0" i="0">
+                <a:solidFill>
+                  <a:srgbClr val="9FB6D6"/>
                 </a:solidFill>
                 <a:latin typeface="Calibri"/>
               </a:rPr>
-              <a:t>  ·  Stand V1.2 SP</a:t>
-            </a:r>
-            <a:r>
-              <a:rPr lang="de-DE" sz="1600" b="1" i="0" dirty="0">
-                <a:solidFill>
-                  <a:srgbClr val="B9CDE8"/>
-                </a:solidFill>
-                <a:latin typeface="Calibri"/>
-              </a:rPr>
-              <a:t>2</a:t>
-            </a:r>
-            <a:r>
-              <a:rPr sz="1600" b="1" i="0" dirty="0">
-                <a:solidFill>
-                  <a:srgbClr val="B9CDE8"/>
-                </a:solidFill>
-                <a:latin typeface="Calibri"/>
-              </a:rPr>
-              <a:t>  ·  Juni 2026</a:t>
+              <a:t>Präsentation für die Geschäftsführung</a:t>
             </a:r>
           </a:p>
         </p:txBody>
@@ -3659,7 +3644,7 @@
 </file>
 
 <file path=ppt/slides/slide10.xml><?xml version="1.0" encoding="utf-8"?>
-<p:sld xmlns:a="http://schemas.openxmlformats.org/drawingml/2006/main" xmlns:r="http://schemas.openxmlformats.org/officeDocument/2006/relationships" xmlns:p="http://schemas.openxmlformats.org/presentationml/2006/main">
+<p:sld xmlns:a="http://schemas.openxmlformats.org/drawingml/2006/main" xmlns:p="http://schemas.openxmlformats.org/presentationml/2006/main" xmlns:r="http://schemas.openxmlformats.org/officeDocument/2006/relationships">
   <p:cSld>
     <p:bg>
       <p:bgPr>
@@ -3675,14 +3660,7 @@
         <p:cNvGrpSpPr/>
         <p:nvPr/>
       </p:nvGrpSpPr>
-      <p:grpSpPr>
-        <a:xfrm>
-          <a:off x="0" y="0"/>
-          <a:ext cx="0" cy="0"/>
-          <a:chOff x="0" y="0"/>
-          <a:chExt cx="0" cy="0"/>
-        </a:xfrm>
-      </p:grpSpPr>
+      <p:grpSpPr/>
       <p:sp>
         <p:nvSpPr>
           <p:cNvPr id="2" name="TextBox 1"/>
@@ -3700,7 +3678,7 @@
           <a:noFill/>
         </p:spPr>
         <p:txBody>
-          <a:bodyPr wrap="square" lIns="0" tIns="0" rIns="0" bIns="0" anchor="t">
+          <a:bodyPr wrap="square" anchor="t" lIns="0" rIns="0" tIns="0" bIns="0">
             <a:spAutoFit/>
           </a:bodyPr>
           <a:lstStyle/>
@@ -3745,7 +3723,7 @@
           <a:noFill/>
         </p:spPr>
         <p:txBody>
-          <a:bodyPr wrap="square" lIns="0" tIns="0" rIns="0" bIns="0" anchor="t">
+          <a:bodyPr wrap="square" anchor="t" lIns="0" rIns="0" tIns="0" bIns="0">
             <a:spAutoFit/>
           </a:bodyPr>
           <a:lstStyle/>
@@ -3814,7 +3792,6 @@
           <a:lstStyle/>
           <a:p>
             <a:pPr algn="ctr"/>
-            <a:endParaRPr/>
           </a:p>
         </p:txBody>
       </p:sp>
@@ -3835,7 +3812,7 @@
           <a:noFill/>
         </p:spPr>
         <p:txBody>
-          <a:bodyPr wrap="square" lIns="0" tIns="0" rIns="0" bIns="0" anchor="t">
+          <a:bodyPr wrap="square" anchor="t" lIns="0" rIns="0" tIns="0" bIns="0">
             <a:spAutoFit/>
           </a:bodyPr>
           <a:lstStyle/>
@@ -3904,7 +3881,6 @@
           <a:lstStyle/>
           <a:p>
             <a:pPr algn="ctr"/>
-            <a:endParaRPr/>
           </a:p>
         </p:txBody>
       </p:sp>
@@ -3959,7 +3935,6 @@
           <a:lstStyle/>
           <a:p>
             <a:pPr algn="ctr"/>
-            <a:endParaRPr/>
           </a:p>
         </p:txBody>
       </p:sp>
@@ -4006,7 +3981,6 @@
           <a:lstStyle/>
           <a:p>
             <a:pPr algn="ctr"/>
-            <a:endParaRPr/>
           </a:p>
         </p:txBody>
       </p:sp>
@@ -4018,8 +3992,8 @@
         </p:nvSpPr>
         <p:spPr>
           <a:xfrm>
-            <a:off x="640080" y="3785224"/>
-            <a:ext cx="2240280" cy="238527"/>
+            <a:off x="640080" y="3584448"/>
+            <a:ext cx="2240280" cy="640080"/>
           </a:xfrm>
           <a:prstGeom prst="rect">
             <a:avLst/>
@@ -4027,7 +4001,7 @@
           <a:noFill/>
         </p:spPr>
         <p:txBody>
-          <a:bodyPr wrap="square" lIns="0" tIns="0" rIns="0" bIns="0" anchor="ctr">
+          <a:bodyPr wrap="square" anchor="ctr" lIns="0" rIns="0" tIns="0" bIns="0">
             <a:spAutoFit/>
           </a:bodyPr>
           <a:lstStyle/>
@@ -4044,65 +4018,14 @@
               </a:spcAft>
             </a:pPr>
             <a:r>
-              <a:rPr sz="1550" b="1" i="0" dirty="0">
+              <a:rPr sz="1550" b="1" i="0">
                 <a:solidFill>
                   <a:srgbClr val="1B2633"/>
                 </a:solidFill>
                 <a:latin typeface="Trebuchet MS"/>
               </a:rPr>
-              <a:t>V1.2 SP</a:t>
-            </a:r>
-            <a:r>
-              <a:rPr lang="de-DE" sz="1550" b="1" i="0" dirty="0">
-                <a:solidFill>
-                  <a:srgbClr val="1B2633"/>
-                </a:solidFill>
-                <a:latin typeface="Trebuchet MS"/>
-              </a:rPr>
-              <a:t>2</a:t>
-            </a:r>
-            <a:r>
-              <a:rPr sz="1550" b="1" i="0" dirty="0">
-                <a:solidFill>
-                  <a:srgbClr val="1B2633"/>
-                </a:solidFill>
-                <a:latin typeface="Trebuchet MS"/>
-              </a:rPr>
-              <a:t> </a:t>
-            </a:r>
-            <a:r>
-              <a:rPr sz="1550" b="1" i="0" dirty="0" err="1">
-                <a:solidFill>
-                  <a:srgbClr val="1B2633"/>
-                </a:solidFill>
-                <a:latin typeface="Trebuchet MS"/>
-              </a:rPr>
-              <a:t>im</a:t>
-            </a:r>
-            <a:r>
-              <a:rPr sz="1550" b="1" i="0" dirty="0">
-                <a:solidFill>
-                  <a:srgbClr val="1B2633"/>
-                </a:solidFill>
-                <a:latin typeface="Trebuchet MS"/>
-              </a:rPr>
-              <a:t> </a:t>
-            </a:r>
-            <a:r>
-              <a:rPr lang="de-DE" sz="1550" b="1" dirty="0">
-                <a:solidFill>
-                  <a:srgbClr val="1B2633"/>
-                </a:solidFill>
-                <a:latin typeface="Trebuchet MS"/>
-              </a:rPr>
-              <a:t>Test</a:t>
-            </a:r>
-            <a:endParaRPr sz="1550" b="1" i="0" dirty="0">
-              <a:solidFill>
-                <a:srgbClr val="1B2633"/>
-              </a:solidFill>
-              <a:latin typeface="Trebuchet MS"/>
-            </a:endParaRPr>
+              <a:t>V2.0 im Einsatz</a:t>
+            </a:r>
           </a:p>
         </p:txBody>
       </p:sp>
@@ -4123,7 +4046,7 @@
           <a:noFill/>
         </p:spPr>
         <p:txBody>
-          <a:bodyPr wrap="square" lIns="0" tIns="0" rIns="0" bIns="0" anchor="t">
+          <a:bodyPr wrap="square" anchor="t" lIns="0" rIns="0" tIns="0" bIns="0">
             <a:spAutoFit/>
           </a:bodyPr>
           <a:lstStyle/>
@@ -4146,7 +4069,7 @@
                 </a:solidFill>
                 <a:latin typeface="Calibri"/>
               </a:rPr>
-              <a:t>Kasse, Rabatte und Analyse</a:t>
+              <a:t>Bedarfsanalyse, Mitarbeiter,</a:t>
             </a:r>
           </a:p>
           <a:p>
@@ -4168,7 +4091,7 @@
                 </a:solidFill>
                 <a:latin typeface="Calibri"/>
               </a:rPr>
-              <a:t>produktiv nutzbar</a:t>
+              <a:t>Hilfe &amp; Report neu dabei</a:t>
             </a:r>
           </a:p>
         </p:txBody>
@@ -4190,7 +4113,7 @@
           <a:noFill/>
         </p:spPr>
         <p:txBody>
-          <a:bodyPr wrap="square" lIns="0" tIns="0" rIns="0" bIns="0" anchor="t">
+          <a:bodyPr wrap="square" anchor="t" lIns="0" rIns="0" tIns="0" bIns="0">
             <a:spAutoFit/>
           </a:bodyPr>
           <a:lstStyle/>
@@ -4213,7 +4136,7 @@
                 </a:solidFill>
                 <a:latin typeface="Calibri"/>
               </a:rPr>
-              <a:t>GEPLANT</a:t>
+              <a:t>IN ARBEIT</a:t>
             </a:r>
           </a:p>
         </p:txBody>
@@ -4259,7 +4182,6 @@
           <a:lstStyle/>
           <a:p>
             <a:pPr algn="ctr"/>
-            <a:endParaRPr/>
           </a:p>
         </p:txBody>
       </p:sp>
@@ -4314,7 +4236,6 @@
           <a:lstStyle/>
           <a:p>
             <a:pPr algn="ctr"/>
-            <a:endParaRPr/>
           </a:p>
         </p:txBody>
       </p:sp>
@@ -4361,7 +4282,6 @@
           <a:lstStyle/>
           <a:p>
             <a:pPr algn="ctr"/>
-            <a:endParaRPr/>
           </a:p>
         </p:txBody>
       </p:sp>
@@ -4382,7 +4302,7 @@
           <a:noFill/>
         </p:spPr>
         <p:txBody>
-          <a:bodyPr wrap="square" lIns="0" tIns="0" rIns="0" bIns="0" anchor="ctr">
+          <a:bodyPr wrap="square" anchor="ctr" lIns="0" rIns="0" tIns="0" bIns="0">
             <a:spAutoFit/>
           </a:bodyPr>
           <a:lstStyle/>
@@ -4405,7 +4325,7 @@
                 </a:solidFill>
                 <a:latin typeface="Trebuchet MS"/>
               </a:rPr>
-              <a:t>Mitarbeiter-Programm</a:t>
+              <a:t>Organigramm-Grafik</a:t>
             </a:r>
           </a:p>
         </p:txBody>
@@ -4427,7 +4347,7 @@
           <a:noFill/>
         </p:spPr>
         <p:txBody>
-          <a:bodyPr wrap="square" lIns="0" tIns="0" rIns="0" bIns="0" anchor="t">
+          <a:bodyPr wrap="square" anchor="t" lIns="0" rIns="0" tIns="0" bIns="0">
             <a:spAutoFit/>
           </a:bodyPr>
           <a:lstStyle/>
@@ -4450,7 +4370,7 @@
                 </a:solidFill>
                 <a:latin typeface="Calibri"/>
               </a:rPr>
-              <a:t>Wer macht was, Organigramm</a:t>
+              <a:t>Mitarbeiter-Struktur</a:t>
             </a:r>
           </a:p>
           <a:p>
@@ -4472,7 +4392,7 @@
                 </a:solidFill>
                 <a:latin typeface="Calibri"/>
               </a:rPr>
-              <a:t>&amp; Zuständigkeiten</a:t>
+              <a:t>visuell darstellen</a:t>
             </a:r>
           </a:p>
         </p:txBody>
@@ -4494,7 +4414,7 @@
           <a:noFill/>
         </p:spPr>
         <p:txBody>
-          <a:bodyPr wrap="square" lIns="0" tIns="0" rIns="0" bIns="0" anchor="t">
+          <a:bodyPr wrap="square" anchor="t" lIns="0" rIns="0" tIns="0" bIns="0">
             <a:spAutoFit/>
           </a:bodyPr>
           <a:lstStyle/>
@@ -4563,7 +4483,6 @@
           <a:lstStyle/>
           <a:p>
             <a:pPr algn="ctr"/>
-            <a:endParaRPr/>
           </a:p>
         </p:txBody>
       </p:sp>
@@ -4618,7 +4537,6 @@
           <a:lstStyle/>
           <a:p>
             <a:pPr algn="ctr"/>
-            <a:endParaRPr/>
           </a:p>
         </p:txBody>
       </p:sp>
@@ -4665,7 +4583,6 @@
           <a:lstStyle/>
           <a:p>
             <a:pPr algn="ctr"/>
-            <a:endParaRPr/>
           </a:p>
         </p:txBody>
       </p:sp>
@@ -4686,7 +4603,7 @@
           <a:noFill/>
         </p:spPr>
         <p:txBody>
-          <a:bodyPr wrap="square" lIns="0" tIns="0" rIns="0" bIns="0" anchor="ctr">
+          <a:bodyPr wrap="square" anchor="ctr" lIns="0" rIns="0" tIns="0" bIns="0">
             <a:spAutoFit/>
           </a:bodyPr>
           <a:lstStyle/>
@@ -4709,7 +4626,7 @@
                 </a:solidFill>
                 <a:latin typeface="Trebuchet MS"/>
               </a:rPr>
-              <a:t>Report-Programm</a:t>
+              <a:t>Biosimilar-Wissen</a:t>
             </a:r>
           </a:p>
         </p:txBody>
@@ -4731,7 +4648,7 @@
           <a:noFill/>
         </p:spPr>
         <p:txBody>
-          <a:bodyPr wrap="square" lIns="0" tIns="0" rIns="0" bIns="0" anchor="t">
+          <a:bodyPr wrap="square" anchor="t" lIns="0" rIns="0" tIns="0" bIns="0">
             <a:spAutoFit/>
           </a:bodyPr>
           <a:lstStyle/>
@@ -4754,7 +4671,7 @@
                 </a:solidFill>
                 <a:latin typeface="Calibri"/>
               </a:rPr>
-              <a:t>Modulübergreifende</a:t>
+              <a:t>Wirkstoff-Zuordnung in</a:t>
             </a:r>
           </a:p>
           <a:p>
@@ -4776,7 +4693,7 @@
                 </a:solidFill>
                 <a:latin typeface="Calibri"/>
               </a:rPr>
-              <a:t>Auswertung aller Module</a:t>
+              <a:t>der Bedarfsanalyse</a:t>
             </a:r>
           </a:p>
         </p:txBody>
@@ -4798,7 +4715,7 @@
           <a:noFill/>
         </p:spPr>
         <p:txBody>
-          <a:bodyPr wrap="square" lIns="0" tIns="0" rIns="0" bIns="0" anchor="t">
+          <a:bodyPr wrap="square" anchor="t" lIns="0" rIns="0" tIns="0" bIns="0">
             <a:spAutoFit/>
           </a:bodyPr>
           <a:lstStyle/>
@@ -4867,7 +4784,6 @@
           <a:lstStyle/>
           <a:p>
             <a:pPr algn="ctr"/>
-            <a:endParaRPr/>
           </a:p>
         </p:txBody>
       </p:sp>
@@ -4922,7 +4838,6 @@
           <a:lstStyle/>
           <a:p>
             <a:pPr algn="ctr"/>
-            <a:endParaRPr/>
           </a:p>
         </p:txBody>
       </p:sp>
@@ -4969,7 +4884,6 @@
           <a:lstStyle/>
           <a:p>
             <a:pPr algn="ctr"/>
-            <a:endParaRPr/>
           </a:p>
         </p:txBody>
       </p:sp>
@@ -4990,7 +4904,7 @@
           <a:noFill/>
         </p:spPr>
         <p:txBody>
-          <a:bodyPr wrap="square" lIns="0" tIns="0" rIns="0" bIns="0" anchor="ctr">
+          <a:bodyPr wrap="square" anchor="ctr" lIns="0" rIns="0" tIns="0" bIns="0">
             <a:spAutoFit/>
           </a:bodyPr>
           <a:lstStyle/>
@@ -5035,7 +4949,7 @@
           <a:noFill/>
         </p:spPr>
         <p:txBody>
-          <a:bodyPr wrap="square" lIns="0" tIns="0" rIns="0" bIns="0" anchor="t">
+          <a:bodyPr wrap="square" anchor="t" lIns="0" rIns="0" tIns="0" bIns="0">
             <a:spAutoFit/>
           </a:bodyPr>
           <a:lstStyle/>
@@ -5102,7 +5016,7 @@
           <a:noFill/>
         </p:spPr>
         <p:txBody>
-          <a:bodyPr wrap="square" lIns="0" tIns="0" rIns="0" bIns="0" anchor="t">
+          <a:bodyPr wrap="square" anchor="t" lIns="0" rIns="0" tIns="0" bIns="0">
             <a:spAutoFit/>
           </a:bodyPr>
           <a:lstStyle/>
@@ -5139,7 +5053,7 @@
 </file>
 
 <file path=ppt/slides/slide11.xml><?xml version="1.0" encoding="utf-8"?>
-<p:sld xmlns:a="http://schemas.openxmlformats.org/drawingml/2006/main" xmlns:r="http://schemas.openxmlformats.org/officeDocument/2006/relationships" xmlns:p="http://schemas.openxmlformats.org/presentationml/2006/main">
+<p:sld xmlns:a="http://schemas.openxmlformats.org/drawingml/2006/main" xmlns:p="http://schemas.openxmlformats.org/presentationml/2006/main" xmlns:r="http://schemas.openxmlformats.org/officeDocument/2006/relationships">
   <p:cSld>
     <p:bg>
       <p:bgPr>
@@ -5155,14 +5069,7 @@
         <p:cNvGrpSpPr/>
         <p:nvPr/>
       </p:nvGrpSpPr>
-      <p:grpSpPr>
-        <a:xfrm>
-          <a:off x="0" y="0"/>
-          <a:ext cx="0" cy="0"/>
-          <a:chOff x="0" y="0"/>
-          <a:chExt cx="0" cy="0"/>
-        </a:xfrm>
-      </p:grpSpPr>
+      <p:grpSpPr/>
       <p:sp>
         <p:nvSpPr>
           <p:cNvPr id="2" name="TextBox 1"/>
@@ -5180,7 +5087,7 @@
           <a:noFill/>
         </p:spPr>
         <p:txBody>
-          <a:bodyPr wrap="square" lIns="0" tIns="0" rIns="0" bIns="0" anchor="t">
+          <a:bodyPr wrap="square" anchor="t" lIns="0" rIns="0" tIns="0" bIns="0">
             <a:spAutoFit/>
           </a:bodyPr>
           <a:lstStyle/>
@@ -5225,7 +5132,7 @@
           <a:noFill/>
         </p:spPr>
         <p:txBody>
-          <a:bodyPr wrap="square" lIns="0" tIns="0" rIns="0" bIns="0" anchor="t">
+          <a:bodyPr wrap="square" anchor="t" lIns="0" rIns="0" tIns="0" bIns="0">
             <a:spAutoFit/>
           </a:bodyPr>
           <a:lstStyle/>
@@ -5296,7 +5203,6 @@
           <a:lstStyle/>
           <a:p>
             <a:pPr algn="ctr"/>
-            <a:endParaRPr/>
           </a:p>
         </p:txBody>
       </p:sp>
@@ -5317,7 +5223,7 @@
           <a:noFill/>
         </p:spPr>
         <p:txBody>
-          <a:bodyPr wrap="square" lIns="0" tIns="0" rIns="0" bIns="0" anchor="ctr">
+          <a:bodyPr wrap="square" anchor="ctr" lIns="0" rIns="0" tIns="0" bIns="0">
             <a:spAutoFit/>
           </a:bodyPr>
           <a:lstStyle/>
@@ -5362,7 +5268,7 @@
           <a:noFill/>
         </p:spPr>
         <p:txBody>
-          <a:bodyPr wrap="square" lIns="0" tIns="0" rIns="0" bIns="0" anchor="t">
+          <a:bodyPr wrap="square" anchor="t" lIns="0" rIns="0" tIns="0" bIns="0">
             <a:spAutoFit/>
           </a:bodyPr>
           <a:lstStyle/>
@@ -5455,7 +5361,6 @@
           <a:lstStyle/>
           <a:p>
             <a:pPr algn="ctr"/>
-            <a:endParaRPr/>
           </a:p>
         </p:txBody>
       </p:sp>
@@ -5476,7 +5381,7 @@
           <a:noFill/>
         </p:spPr>
         <p:txBody>
-          <a:bodyPr wrap="square" lIns="0" tIns="0" rIns="0" bIns="0" anchor="ctr">
+          <a:bodyPr wrap="square" anchor="ctr" lIns="0" rIns="0" tIns="0" bIns="0">
             <a:spAutoFit/>
           </a:bodyPr>
           <a:lstStyle/>
@@ -5521,7 +5426,7 @@
           <a:noFill/>
         </p:spPr>
         <p:txBody>
-          <a:bodyPr wrap="square" lIns="0" tIns="0" rIns="0" bIns="0" anchor="t">
+          <a:bodyPr wrap="square" anchor="t" lIns="0" rIns="0" tIns="0" bIns="0">
             <a:spAutoFit/>
           </a:bodyPr>
           <a:lstStyle/>
@@ -5614,7 +5519,6 @@
           <a:lstStyle/>
           <a:p>
             <a:pPr algn="ctr"/>
-            <a:endParaRPr/>
           </a:p>
         </p:txBody>
       </p:sp>
@@ -5635,7 +5539,7 @@
           <a:noFill/>
         </p:spPr>
         <p:txBody>
-          <a:bodyPr wrap="square" lIns="0" tIns="0" rIns="0" bIns="0" anchor="ctr">
+          <a:bodyPr wrap="square" anchor="ctr" lIns="0" rIns="0" tIns="0" bIns="0">
             <a:spAutoFit/>
           </a:bodyPr>
           <a:lstStyle/>
@@ -5680,7 +5584,7 @@
           <a:noFill/>
         </p:spPr>
         <p:txBody>
-          <a:bodyPr wrap="square" lIns="0" tIns="0" rIns="0" bIns="0" anchor="t">
+          <a:bodyPr wrap="square" anchor="t" lIns="0" rIns="0" tIns="0" bIns="0">
             <a:spAutoFit/>
           </a:bodyPr>
           <a:lstStyle/>
@@ -5773,7 +5677,6 @@
           <a:lstStyle/>
           <a:p>
             <a:pPr algn="ctr"/>
-            <a:endParaRPr/>
           </a:p>
         </p:txBody>
       </p:sp>
@@ -5794,7 +5697,7 @@
           <a:noFill/>
         </p:spPr>
         <p:txBody>
-          <a:bodyPr wrap="square" lIns="0" tIns="0" rIns="0" bIns="0" anchor="ctr">
+          <a:bodyPr wrap="square" anchor="ctr" lIns="0" rIns="0" tIns="0" bIns="0">
             <a:spAutoFit/>
           </a:bodyPr>
           <a:lstStyle/>
@@ -5839,7 +5742,7 @@
           <a:noFill/>
         </p:spPr>
         <p:txBody>
-          <a:bodyPr wrap="square" lIns="0" tIns="0" rIns="0" bIns="0" anchor="t">
+          <a:bodyPr wrap="square" anchor="t" lIns="0" rIns="0" tIns="0" bIns="0">
             <a:spAutoFit/>
           </a:bodyPr>
           <a:lstStyle/>
@@ -5940,7 +5843,6 @@
           <a:lstStyle/>
           <a:p>
             <a:pPr algn="ctr"/>
-            <a:endParaRPr/>
           </a:p>
         </p:txBody>
       </p:sp>
@@ -5985,7 +5887,6 @@
           <a:lstStyle/>
           <a:p>
             <a:pPr algn="ctr"/>
-            <a:endParaRPr/>
           </a:p>
         </p:txBody>
       </p:sp>
@@ -6006,7 +5907,7 @@
           <a:noFill/>
         </p:spPr>
         <p:txBody>
-          <a:bodyPr wrap="square" lIns="0" tIns="0" rIns="0" bIns="0" anchor="ctr">
+          <a:bodyPr wrap="square" anchor="ctr" lIns="0" rIns="0" tIns="0" bIns="0">
             <a:spAutoFit/>
           </a:bodyPr>
           <a:lstStyle/>
@@ -6107,7 +6008,6 @@
           <a:lstStyle/>
           <a:p>
             <a:pPr algn="ctr"/>
-            <a:endParaRPr/>
           </a:p>
         </p:txBody>
       </p:sp>
@@ -6152,7 +6052,6 @@
           <a:lstStyle/>
           <a:p>
             <a:pPr algn="ctr"/>
-            <a:endParaRPr/>
           </a:p>
         </p:txBody>
       </p:sp>
@@ -6173,7 +6072,7 @@
           <a:noFill/>
         </p:spPr>
         <p:txBody>
-          <a:bodyPr wrap="square" lIns="0" tIns="0" rIns="0" bIns="0" anchor="ctr">
+          <a:bodyPr wrap="square" anchor="ctr" lIns="0" rIns="0" tIns="0" bIns="0">
             <a:spAutoFit/>
           </a:bodyPr>
           <a:lstStyle/>
@@ -6264,7 +6163,6 @@
           <a:lstStyle/>
           <a:p>
             <a:pPr algn="ctr"/>
-            <a:endParaRPr/>
           </a:p>
         </p:txBody>
       </p:sp>
@@ -6309,7 +6207,6 @@
           <a:lstStyle/>
           <a:p>
             <a:pPr algn="ctr"/>
-            <a:endParaRPr/>
           </a:p>
         </p:txBody>
       </p:sp>
@@ -6362,7 +6259,6 @@
           <a:lstStyle/>
           <a:p>
             <a:pPr algn="ctr"/>
-            <a:endParaRPr/>
           </a:p>
         </p:txBody>
       </p:sp>
@@ -6383,7 +6279,7 @@
           <a:noFill/>
         </p:spPr>
         <p:txBody>
-          <a:bodyPr wrap="square" lIns="0" tIns="0" rIns="0" bIns="0" anchor="ctr">
+          <a:bodyPr wrap="square" anchor="ctr" lIns="0" rIns="0" tIns="0" bIns="0">
             <a:spAutoFit/>
           </a:bodyPr>
           <a:lstStyle/>
@@ -6474,7 +6370,6 @@
           <a:lstStyle/>
           <a:p>
             <a:pPr algn="ctr"/>
-            <a:endParaRPr/>
           </a:p>
         </p:txBody>
       </p:sp>
@@ -6527,7 +6422,6 @@
           <a:lstStyle/>
           <a:p>
             <a:pPr algn="ctr"/>
-            <a:endParaRPr/>
           </a:p>
         </p:txBody>
       </p:sp>
@@ -6548,7 +6442,7 @@
           <a:noFill/>
         </p:spPr>
         <p:txBody>
-          <a:bodyPr wrap="square" lIns="0" tIns="0" rIns="0" bIns="0" anchor="ctr">
+          <a:bodyPr wrap="square" anchor="ctr" lIns="0" rIns="0" tIns="0" bIns="0">
             <a:spAutoFit/>
           </a:bodyPr>
           <a:lstStyle/>
@@ -6615,7 +6509,7 @@
           <a:noFill/>
         </p:spPr>
         <p:txBody>
-          <a:bodyPr wrap="square" lIns="0" tIns="0" rIns="0" bIns="0" anchor="t">
+          <a:bodyPr wrap="square" anchor="t" lIns="0" rIns="0" tIns="0" bIns="0">
             <a:spAutoFit/>
           </a:bodyPr>
           <a:lstStyle/>
@@ -6700,7 +6594,7 @@
           <a:noFill/>
         </p:spPr>
         <p:txBody>
-          <a:bodyPr wrap="square" lIns="0" tIns="0" rIns="0" bIns="0" anchor="t">
+          <a:bodyPr wrap="square" anchor="t" lIns="0" rIns="0" tIns="0" bIns="0">
             <a:spAutoFit/>
           </a:bodyPr>
           <a:lstStyle/>
@@ -6737,7 +6631,7 @@
 </file>
 
 <file path=ppt/slides/slide12.xml><?xml version="1.0" encoding="utf-8"?>
-<p:sld xmlns:a="http://schemas.openxmlformats.org/drawingml/2006/main" xmlns:r="http://schemas.openxmlformats.org/officeDocument/2006/relationships" xmlns:p="http://schemas.openxmlformats.org/presentationml/2006/main">
+<p:sld xmlns:a="http://schemas.openxmlformats.org/drawingml/2006/main" xmlns:p="http://schemas.openxmlformats.org/presentationml/2006/main" xmlns:r="http://schemas.openxmlformats.org/officeDocument/2006/relationships">
   <p:cSld>
     <p:bg>
       <p:bgPr>
@@ -6753,14 +6647,7 @@
         <p:cNvGrpSpPr/>
         <p:nvPr/>
       </p:nvGrpSpPr>
-      <p:grpSpPr>
-        <a:xfrm>
-          <a:off x="0" y="0"/>
-          <a:ext cx="0" cy="0"/>
-          <a:chOff x="0" y="0"/>
-          <a:chExt cx="0" cy="0"/>
-        </a:xfrm>
-      </p:grpSpPr>
+      <p:grpSpPr/>
       <p:sp>
         <p:nvSpPr>
           <p:cNvPr id="2" name="Rectangle 1"/>
@@ -6802,7 +6689,6 @@
           <a:lstStyle/>
           <a:p>
             <a:pPr algn="ctr"/>
-            <a:endParaRPr/>
           </a:p>
         </p:txBody>
       </p:sp>
@@ -6849,7 +6735,6 @@
           <a:lstStyle/>
           <a:p>
             <a:pPr algn="ctr"/>
-            <a:endParaRPr/>
           </a:p>
         </p:txBody>
       </p:sp>
@@ -6896,7 +6781,6 @@
           <a:lstStyle/>
           <a:p>
             <a:pPr algn="ctr"/>
-            <a:endParaRPr/>
           </a:p>
         </p:txBody>
       </p:sp>
@@ -6943,7 +6827,6 @@
           <a:lstStyle/>
           <a:p>
             <a:pPr algn="ctr"/>
-            <a:endParaRPr/>
           </a:p>
         </p:txBody>
       </p:sp>
@@ -6990,7 +6873,6 @@
           <a:lstStyle/>
           <a:p>
             <a:pPr algn="ctr"/>
-            <a:endParaRPr/>
           </a:p>
         </p:txBody>
       </p:sp>
@@ -7037,7 +6919,6 @@
           <a:lstStyle/>
           <a:p>
             <a:pPr algn="ctr"/>
-            <a:endParaRPr/>
           </a:p>
         </p:txBody>
       </p:sp>
@@ -7084,7 +6965,6 @@
           <a:lstStyle/>
           <a:p>
             <a:pPr algn="ctr"/>
-            <a:endParaRPr/>
           </a:p>
         </p:txBody>
       </p:sp>
@@ -7097,7 +6977,7 @@
         <p:spPr>
           <a:xfrm>
             <a:off x="914400" y="2286000"/>
-            <a:ext cx="10332720" cy="1256754"/>
+            <a:ext cx="10332720" cy="1463040"/>
           </a:xfrm>
           <a:prstGeom prst="rect">
             <a:avLst/>
@@ -7105,7 +6985,7 @@
           <a:noFill/>
         </p:spPr>
         <p:txBody>
-          <a:bodyPr wrap="square" lIns="0" tIns="0" rIns="0" bIns="0" anchor="t">
+          <a:bodyPr wrap="square" anchor="t" lIns="0" rIns="0" tIns="0" bIns="0">
             <a:spAutoFit/>
           </a:bodyPr>
           <a:lstStyle/>
@@ -7122,107 +7002,35 @@
               </a:spcAft>
             </a:pPr>
             <a:r>
-              <a:rPr sz="4000" b="1" i="0" dirty="0">
+              <a:rPr sz="4000" b="1" i="0">
                 <a:solidFill>
                   <a:srgbClr val="FFFFFF"/>
                 </a:solidFill>
                 <a:latin typeface="Trebuchet MS"/>
               </a:rPr>
-              <a:t>Eine </a:t>
-            </a:r>
-            <a:r>
-              <a:rPr sz="4000" b="1" i="0" dirty="0" err="1">
-                <a:solidFill>
-                  <a:srgbClr val="FFFFFF"/>
+              <a:t>Eine Plattform. Alle Prozesse.</a:t>
+            </a:r>
+          </a:p>
+          <a:p>
+            <a:pPr algn="l">
+              <a:lnSpc>
+                <a:spcPct val="100000"/>
+              </a:lnSpc>
+              <a:spcBef>
+                <a:spcPts val="0"/>
+              </a:spcBef>
+              <a:spcAft>
+                <a:spcPts val="200"/>
+              </a:spcAft>
+            </a:pPr>
+            <a:r>
+              <a:rPr sz="4000" b="1" i="0">
+                <a:solidFill>
+                  <a:srgbClr val="3867B7"/>
                 </a:solidFill>
                 <a:latin typeface="Trebuchet MS"/>
               </a:rPr>
-              <a:t>Plattform</a:t>
-            </a:r>
-            <a:r>
-              <a:rPr sz="4000" b="1" i="0" dirty="0">
-                <a:solidFill>
-                  <a:srgbClr val="FFFFFF"/>
-                </a:solidFill>
-                <a:latin typeface="Trebuchet MS"/>
-              </a:rPr>
-              <a:t>. Alle </a:t>
-            </a:r>
-            <a:r>
-              <a:rPr sz="4000" b="1" i="0" dirty="0" err="1">
-                <a:solidFill>
-                  <a:srgbClr val="FFFFFF"/>
-                </a:solidFill>
-                <a:latin typeface="Trebuchet MS"/>
-              </a:rPr>
-              <a:t>Prozesse</a:t>
-            </a:r>
-            <a:r>
-              <a:rPr sz="4000" b="1" i="0" dirty="0">
-                <a:solidFill>
-                  <a:srgbClr val="FFFFFF"/>
-                </a:solidFill>
-                <a:latin typeface="Trebuchet MS"/>
-              </a:rPr>
-              <a:t>.</a:t>
-            </a:r>
-          </a:p>
-          <a:p>
-            <a:pPr algn="l">
-              <a:lnSpc>
-                <a:spcPct val="100000"/>
-              </a:lnSpc>
-              <a:spcBef>
-                <a:spcPts val="0"/>
-              </a:spcBef>
-              <a:spcAft>
-                <a:spcPts val="200"/>
-              </a:spcAft>
-            </a:pPr>
-            <a:r>
-              <a:rPr lang="de-DE" sz="4000" b="1" dirty="0">
-                <a:solidFill>
-                  <a:srgbClr val="3867B7"/>
-                </a:solidFill>
-                <a:latin typeface="Trebuchet MS"/>
-              </a:rPr>
-              <a:t>Für NMG-</a:t>
-            </a:r>
-            <a:r>
-              <a:rPr lang="de-DE" sz="4000" b="1" dirty="0" err="1">
-                <a:solidFill>
-                  <a:srgbClr val="3867B7"/>
-                </a:solidFill>
-                <a:latin typeface="Trebuchet MS"/>
-              </a:rPr>
-              <a:t>Pharma</a:t>
-            </a:r>
-            <a:r>
-              <a:rPr sz="4000" b="1" i="0" dirty="0">
-                <a:solidFill>
-                  <a:srgbClr val="3867B7"/>
-                </a:solidFill>
-                <a:latin typeface="Trebuchet MS"/>
-              </a:rPr>
-              <a:t> </a:t>
-            </a:r>
-            <a:r>
-              <a:rPr sz="4000" b="1" i="0" dirty="0" err="1">
-                <a:solidFill>
-                  <a:srgbClr val="3867B7"/>
-                </a:solidFill>
-                <a:latin typeface="Trebuchet MS"/>
-              </a:rPr>
-              <a:t>gebaut</a:t>
-            </a:r>
-            <a:r>
-              <a:rPr sz="4000" b="1" i="0" dirty="0">
-                <a:solidFill>
-                  <a:srgbClr val="3867B7"/>
-                </a:solidFill>
-                <a:latin typeface="Trebuchet MS"/>
-              </a:rPr>
-              <a:t>.</a:t>
+              <a:t>Im Haus gebaut.</a:t>
             </a:r>
           </a:p>
         </p:txBody>
@@ -7244,7 +7052,7 @@
           <a:noFill/>
         </p:spPr>
         <p:txBody>
-          <a:bodyPr wrap="square" lIns="0" tIns="0" rIns="0" bIns="0" anchor="t">
+          <a:bodyPr wrap="square" anchor="t" lIns="0" rIns="0" tIns="0" bIns="0">
             <a:spAutoFit/>
           </a:bodyPr>
           <a:lstStyle/>
@@ -7313,7 +7121,6 @@
           <a:lstStyle/>
           <a:p>
             <a:pPr algn="ctr"/>
-            <a:endParaRPr/>
           </a:p>
         </p:txBody>
       </p:sp>
@@ -7334,7 +7141,7 @@
           <a:noFill/>
         </p:spPr>
         <p:txBody>
-          <a:bodyPr wrap="square" lIns="0" tIns="0" rIns="0" bIns="0" anchor="t">
+          <a:bodyPr wrap="square" anchor="t" lIns="0" rIns="0" tIns="0" bIns="0">
             <a:spAutoFit/>
           </a:bodyPr>
           <a:lstStyle/>
@@ -7411,7 +7218,6 @@
           <a:lstStyle/>
           <a:p>
             <a:pPr algn="ctr"/>
-            <a:endParaRPr/>
           </a:p>
         </p:txBody>
       </p:sp>
@@ -7448,7 +7254,7 @@
 </file>
 
 <file path=ppt/slides/slide2.xml><?xml version="1.0" encoding="utf-8"?>
-<p:sld xmlns:a="http://schemas.openxmlformats.org/drawingml/2006/main" xmlns:r="http://schemas.openxmlformats.org/officeDocument/2006/relationships" xmlns:p="http://schemas.openxmlformats.org/presentationml/2006/main">
+<p:sld xmlns:a="http://schemas.openxmlformats.org/drawingml/2006/main" xmlns:p="http://schemas.openxmlformats.org/presentationml/2006/main" xmlns:r="http://schemas.openxmlformats.org/officeDocument/2006/relationships">
   <p:cSld>
     <p:bg>
       <p:bgPr>
@@ -7464,14 +7270,7 @@
         <p:cNvGrpSpPr/>
         <p:nvPr/>
       </p:nvGrpSpPr>
-      <p:grpSpPr>
-        <a:xfrm>
-          <a:off x="0" y="0"/>
-          <a:ext cx="0" cy="0"/>
-          <a:chOff x="0" y="0"/>
-          <a:chExt cx="0" cy="0"/>
-        </a:xfrm>
-      </p:grpSpPr>
+      <p:grpSpPr/>
       <p:sp>
         <p:nvSpPr>
           <p:cNvPr id="2" name="TextBox 1"/>
@@ -7489,7 +7288,7 @@
           <a:noFill/>
         </p:spPr>
         <p:txBody>
-          <a:bodyPr wrap="square" lIns="0" tIns="0" rIns="0" bIns="0" anchor="t">
+          <a:bodyPr wrap="square" anchor="t" lIns="0" rIns="0" tIns="0" bIns="0">
             <a:spAutoFit/>
           </a:bodyPr>
           <a:lstStyle/>
@@ -7534,7 +7333,7 @@
           <a:noFill/>
         </p:spPr>
         <p:txBody>
-          <a:bodyPr wrap="square" lIns="0" tIns="0" rIns="0" bIns="0" anchor="t">
+          <a:bodyPr wrap="square" anchor="t" lIns="0" rIns="0" tIns="0" bIns="0">
             <a:spAutoFit/>
           </a:bodyPr>
           <a:lstStyle/>
@@ -7631,7 +7430,6 @@
           <a:lstStyle/>
           <a:p>
             <a:pPr algn="ctr"/>
-            <a:endParaRPr/>
           </a:p>
         </p:txBody>
       </p:sp>
@@ -7678,7 +7476,6 @@
           <a:lstStyle/>
           <a:p>
             <a:pPr algn="ctr"/>
-            <a:endParaRPr/>
           </a:p>
         </p:txBody>
       </p:sp>
@@ -7699,7 +7496,7 @@
           <a:noFill/>
         </p:spPr>
         <p:txBody>
-          <a:bodyPr wrap="square" lIns="0" tIns="0" rIns="0" bIns="0" anchor="ctr">
+          <a:bodyPr wrap="square" anchor="ctr" lIns="0" rIns="0" tIns="0" bIns="0">
             <a:spAutoFit/>
           </a:bodyPr>
           <a:lstStyle/>
@@ -7744,7 +7541,7 @@
           <a:noFill/>
         </p:spPr>
         <p:txBody>
-          <a:bodyPr wrap="square" lIns="0" tIns="0" rIns="0" bIns="0" anchor="t">
+          <a:bodyPr wrap="square" anchor="t" lIns="0" rIns="0" tIns="0" bIns="0">
             <a:spAutoFit/>
           </a:bodyPr>
           <a:lstStyle/>
@@ -7845,7 +7642,6 @@
           <a:lstStyle/>
           <a:p>
             <a:pPr algn="ctr"/>
-            <a:endParaRPr/>
           </a:p>
         </p:txBody>
       </p:sp>
@@ -7892,7 +7688,6 @@
           <a:lstStyle/>
           <a:p>
             <a:pPr algn="ctr"/>
-            <a:endParaRPr/>
           </a:p>
         </p:txBody>
       </p:sp>
@@ -7913,7 +7708,7 @@
           <a:noFill/>
         </p:spPr>
         <p:txBody>
-          <a:bodyPr wrap="square" lIns="0" tIns="0" rIns="0" bIns="0" anchor="ctr">
+          <a:bodyPr wrap="square" anchor="ctr" lIns="0" rIns="0" tIns="0" bIns="0">
             <a:spAutoFit/>
           </a:bodyPr>
           <a:lstStyle/>
@@ -7958,7 +7753,7 @@
           <a:noFill/>
         </p:spPr>
         <p:txBody>
-          <a:bodyPr wrap="square" lIns="0" tIns="0" rIns="0" bIns="0" anchor="t">
+          <a:bodyPr wrap="square" anchor="t" lIns="0" rIns="0" tIns="0" bIns="0">
             <a:spAutoFit/>
           </a:bodyPr>
           <a:lstStyle/>
@@ -8059,7 +7854,6 @@
           <a:lstStyle/>
           <a:p>
             <a:pPr algn="ctr"/>
-            <a:endParaRPr/>
           </a:p>
         </p:txBody>
       </p:sp>
@@ -8106,7 +7900,6 @@
           <a:lstStyle/>
           <a:p>
             <a:pPr algn="ctr"/>
-            <a:endParaRPr/>
           </a:p>
         </p:txBody>
       </p:sp>
@@ -8118,8 +7911,8 @@
         </p:nvSpPr>
         <p:spPr>
           <a:xfrm>
-            <a:off x="6373368" y="3320385"/>
-            <a:ext cx="2148840" cy="400110"/>
+            <a:off x="6373368" y="3063240"/>
+            <a:ext cx="2148840" cy="914400"/>
           </a:xfrm>
           <a:prstGeom prst="rect">
             <a:avLst/>
@@ -8127,7 +7920,7 @@
           <a:noFill/>
         </p:spPr>
         <p:txBody>
-          <a:bodyPr wrap="square" lIns="0" tIns="0" rIns="0" bIns="0" anchor="ctr">
+          <a:bodyPr wrap="square" anchor="ctr" lIns="0" rIns="0" tIns="0" bIns="0">
             <a:spAutoFit/>
           </a:bodyPr>
           <a:lstStyle/>
@@ -8144,29 +7937,14 @@
               </a:spcAft>
             </a:pPr>
             <a:r>
-              <a:rPr sz="2600" b="1" i="0" dirty="0">
+              <a:rPr sz="3200" b="1" i="0">
                 <a:solidFill>
                   <a:srgbClr val="8B5A00"/>
                 </a:solidFill>
                 <a:latin typeface="Trebuchet MS"/>
               </a:rPr>
-              <a:t>V1.2 SP</a:t>
-            </a:r>
-            <a:r>
-              <a:rPr lang="de-DE" sz="2600" b="1" i="0" dirty="0">
-                <a:solidFill>
-                  <a:srgbClr val="8B5A00"/>
-                </a:solidFill>
-                <a:latin typeface="Trebuchet MS"/>
-              </a:rPr>
-              <a:t>2</a:t>
-            </a:r>
-            <a:endParaRPr sz="2600" b="1" i="0" dirty="0">
-              <a:solidFill>
-                <a:srgbClr val="8B5A00"/>
-              </a:solidFill>
-              <a:latin typeface="Trebuchet MS"/>
-            </a:endParaRPr>
+              <a:t>V2.0</a:t>
+            </a:r>
           </a:p>
         </p:txBody>
       </p:sp>
@@ -8187,7 +7965,7 @@
           <a:noFill/>
         </p:spPr>
         <p:txBody>
-          <a:bodyPr wrap="square" lIns="0" tIns="0" rIns="0" bIns="0" anchor="t">
+          <a:bodyPr wrap="square" anchor="t" lIns="0" rIns="0" tIns="0" bIns="0">
             <a:spAutoFit/>
           </a:bodyPr>
           <a:lstStyle/>
@@ -8288,7 +8066,6 @@
           <a:lstStyle/>
           <a:p>
             <a:pPr algn="ctr"/>
-            <a:endParaRPr/>
           </a:p>
         </p:txBody>
       </p:sp>
@@ -8335,7 +8112,6 @@
           <a:lstStyle/>
           <a:p>
             <a:pPr algn="ctr"/>
-            <a:endParaRPr/>
           </a:p>
         </p:txBody>
       </p:sp>
@@ -8356,7 +8132,7 @@
           <a:noFill/>
         </p:spPr>
         <p:txBody>
-          <a:bodyPr wrap="square" lIns="0" tIns="0" rIns="0" bIns="0" anchor="ctr">
+          <a:bodyPr wrap="square" anchor="ctr" lIns="0" rIns="0" tIns="0" bIns="0">
             <a:spAutoFit/>
           </a:bodyPr>
           <a:lstStyle/>
@@ -8401,7 +8177,7 @@
           <a:noFill/>
         </p:spPr>
         <p:txBody>
-          <a:bodyPr wrap="square" lIns="0" tIns="0" rIns="0" bIns="0" anchor="t">
+          <a:bodyPr wrap="square" anchor="t" lIns="0" rIns="0" tIns="0" bIns="0">
             <a:spAutoFit/>
           </a:bodyPr>
           <a:lstStyle/>
@@ -8468,7 +8244,7 @@
           <a:noFill/>
         </p:spPr>
         <p:txBody>
-          <a:bodyPr wrap="square" lIns="0" tIns="0" rIns="0" bIns="0" anchor="t">
+          <a:bodyPr wrap="square" anchor="t" lIns="0" rIns="0" tIns="0" bIns="0">
             <a:spAutoFit/>
           </a:bodyPr>
           <a:lstStyle/>
@@ -8522,7 +8298,7 @@
           <a:noFill/>
         </p:spPr>
         <p:txBody>
-          <a:bodyPr wrap="square" lIns="0" tIns="0" rIns="0" bIns="0" anchor="t">
+          <a:bodyPr wrap="square" anchor="t" lIns="0" rIns="0" tIns="0" bIns="0">
             <a:spAutoFit/>
           </a:bodyPr>
           <a:lstStyle/>
@@ -8559,7 +8335,7 @@
 </file>
 
 <file path=ppt/slides/slide3.xml><?xml version="1.0" encoding="utf-8"?>
-<p:sld xmlns:a="http://schemas.openxmlformats.org/drawingml/2006/main" xmlns:r="http://schemas.openxmlformats.org/officeDocument/2006/relationships" xmlns:p="http://schemas.openxmlformats.org/presentationml/2006/main">
+<p:sld xmlns:a="http://schemas.openxmlformats.org/drawingml/2006/main" xmlns:p="http://schemas.openxmlformats.org/presentationml/2006/main" xmlns:r="http://schemas.openxmlformats.org/officeDocument/2006/relationships">
   <p:cSld>
     <p:bg>
       <p:bgPr>
@@ -8575,14 +8351,7 @@
         <p:cNvGrpSpPr/>
         <p:nvPr/>
       </p:nvGrpSpPr>
-      <p:grpSpPr>
-        <a:xfrm>
-          <a:off x="0" y="0"/>
-          <a:ext cx="0" cy="0"/>
-          <a:chOff x="0" y="0"/>
-          <a:chExt cx="0" cy="0"/>
-        </a:xfrm>
-      </p:grpSpPr>
+      <p:grpSpPr/>
       <p:sp>
         <p:nvSpPr>
           <p:cNvPr id="2" name="TextBox 1"/>
@@ -8600,7 +8369,7 @@
           <a:noFill/>
         </p:spPr>
         <p:txBody>
-          <a:bodyPr wrap="square" lIns="0" tIns="0" rIns="0" bIns="0" anchor="t">
+          <a:bodyPr wrap="square" anchor="t" lIns="0" rIns="0" tIns="0" bIns="0">
             <a:spAutoFit/>
           </a:bodyPr>
           <a:lstStyle/>
@@ -8645,7 +8414,7 @@
           <a:noFill/>
         </p:spPr>
         <p:txBody>
-          <a:bodyPr wrap="square" lIns="0" tIns="0" rIns="0" bIns="0" anchor="t">
+          <a:bodyPr wrap="square" anchor="t" lIns="0" rIns="0" tIns="0" bIns="0">
             <a:spAutoFit/>
           </a:bodyPr>
           <a:lstStyle/>
@@ -8716,7 +8485,6 @@
           <a:lstStyle/>
           <a:p>
             <a:pPr algn="ctr"/>
-            <a:endParaRPr/>
           </a:p>
         </p:txBody>
       </p:sp>
@@ -8737,7 +8505,7 @@
           <a:noFill/>
         </p:spPr>
         <p:txBody>
-          <a:bodyPr wrap="square" lIns="0" tIns="0" rIns="0" bIns="0" anchor="ctr">
+          <a:bodyPr wrap="square" anchor="ctr" lIns="0" rIns="0" tIns="0" bIns="0">
             <a:spAutoFit/>
           </a:bodyPr>
           <a:lstStyle/>
@@ -8782,7 +8550,7 @@
           <a:noFill/>
         </p:spPr>
         <p:txBody>
-          <a:bodyPr wrap="square" lIns="0" tIns="0" rIns="0" bIns="0" anchor="t">
+          <a:bodyPr wrap="square" anchor="t" lIns="0" rIns="0" tIns="0" bIns="0">
             <a:spAutoFit/>
           </a:bodyPr>
           <a:lstStyle/>
@@ -8875,7 +8643,6 @@
           <a:lstStyle/>
           <a:p>
             <a:pPr algn="ctr"/>
-            <a:endParaRPr/>
           </a:p>
         </p:txBody>
       </p:sp>
@@ -8896,7 +8663,7 @@
           <a:noFill/>
         </p:spPr>
         <p:txBody>
-          <a:bodyPr wrap="square" lIns="0" tIns="0" rIns="0" bIns="0" anchor="ctr">
+          <a:bodyPr wrap="square" anchor="ctr" lIns="0" rIns="0" tIns="0" bIns="0">
             <a:spAutoFit/>
           </a:bodyPr>
           <a:lstStyle/>
@@ -8941,7 +8708,7 @@
           <a:noFill/>
         </p:spPr>
         <p:txBody>
-          <a:bodyPr wrap="square" lIns="0" tIns="0" rIns="0" bIns="0" anchor="t">
+          <a:bodyPr wrap="square" anchor="t" lIns="0" rIns="0" tIns="0" bIns="0">
             <a:spAutoFit/>
           </a:bodyPr>
           <a:lstStyle/>
@@ -9034,7 +8801,6 @@
           <a:lstStyle/>
           <a:p>
             <a:pPr algn="ctr"/>
-            <a:endParaRPr/>
           </a:p>
         </p:txBody>
       </p:sp>
@@ -9055,7 +8821,7 @@
           <a:noFill/>
         </p:spPr>
         <p:txBody>
-          <a:bodyPr wrap="square" lIns="0" tIns="0" rIns="0" bIns="0" anchor="ctr">
+          <a:bodyPr wrap="square" anchor="ctr" lIns="0" rIns="0" tIns="0" bIns="0">
             <a:spAutoFit/>
           </a:bodyPr>
           <a:lstStyle/>
@@ -9100,7 +8866,7 @@
           <a:noFill/>
         </p:spPr>
         <p:txBody>
-          <a:bodyPr wrap="square" lIns="0" tIns="0" rIns="0" bIns="0" anchor="t">
+          <a:bodyPr wrap="square" anchor="t" lIns="0" rIns="0" tIns="0" bIns="0">
             <a:spAutoFit/>
           </a:bodyPr>
           <a:lstStyle/>
@@ -9193,7 +8959,6 @@
           <a:lstStyle/>
           <a:p>
             <a:pPr algn="ctr"/>
-            <a:endParaRPr/>
           </a:p>
         </p:txBody>
       </p:sp>
@@ -9214,7 +8979,7 @@
           <a:noFill/>
         </p:spPr>
         <p:txBody>
-          <a:bodyPr wrap="square" lIns="0" tIns="0" rIns="0" bIns="0" anchor="ctr">
+          <a:bodyPr wrap="square" anchor="ctr" lIns="0" rIns="0" tIns="0" bIns="0">
             <a:spAutoFit/>
           </a:bodyPr>
           <a:lstStyle/>
@@ -9259,7 +9024,7 @@
           <a:noFill/>
         </p:spPr>
         <p:txBody>
-          <a:bodyPr wrap="square" lIns="0" tIns="0" rIns="0" bIns="0" anchor="t">
+          <a:bodyPr wrap="square" anchor="t" lIns="0" rIns="0" tIns="0" bIns="0">
             <a:spAutoFit/>
           </a:bodyPr>
           <a:lstStyle/>
@@ -9358,7 +9123,6 @@
           <a:lstStyle/>
           <a:p>
             <a:pPr algn="ctr"/>
-            <a:endParaRPr/>
           </a:p>
         </p:txBody>
       </p:sp>
@@ -9379,7 +9143,7 @@
           <a:noFill/>
         </p:spPr>
         <p:txBody>
-          <a:bodyPr wrap="square" lIns="0" tIns="0" rIns="0" bIns="0" anchor="t">
+          <a:bodyPr wrap="square" anchor="t" lIns="0" rIns="0" tIns="0" bIns="0">
             <a:spAutoFit/>
           </a:bodyPr>
           <a:lstStyle/>
@@ -9424,7 +9188,7 @@
           <a:noFill/>
         </p:spPr>
         <p:txBody>
-          <a:bodyPr wrap="square" lIns="0" tIns="0" rIns="0" bIns="0" anchor="t">
+          <a:bodyPr wrap="square" anchor="t" lIns="0" rIns="0" tIns="0" bIns="0">
             <a:spAutoFit/>
           </a:bodyPr>
           <a:lstStyle/>
@@ -9462,12 +9226,15 @@
                 <a:spcPts val="300"/>
               </a:spcAft>
             </a:pPr>
-            <a:endParaRPr sz="1500" b="1" i="0">
-              <a:solidFill>
-                <a:srgbClr val="E8F1FB"/>
-              </a:solidFill>
-              <a:latin typeface="Calibri"/>
-            </a:endParaRPr>
+            <a:r>
+              <a:rPr sz="600" b="0" i="0">
+                <a:solidFill>
+                  <a:srgbClr val="E8F1FB"/>
+                </a:solidFill>
+                <a:latin typeface="Calibri"/>
+              </a:rPr>
+              <a:t/>
+            </a:r>
           </a:p>
           <a:p>
             <a:pPr algn="l">
@@ -9503,12 +9270,15 @@
                 <a:spcPts val="300"/>
               </a:spcAft>
             </a:pPr>
-            <a:endParaRPr sz="1450" b="0" i="0">
-              <a:solidFill>
-                <a:srgbClr val="FFFFFF"/>
-              </a:solidFill>
-              <a:latin typeface="Calibri"/>
-            </a:endParaRPr>
+            <a:r>
+              <a:rPr sz="600" b="0" i="0">
+                <a:solidFill>
+                  <a:srgbClr val="E8F1FB"/>
+                </a:solidFill>
+                <a:latin typeface="Calibri"/>
+              </a:rPr>
+              <a:t/>
+            </a:r>
           </a:p>
           <a:p>
             <a:pPr algn="l">
@@ -9544,12 +9314,15 @@
                 <a:spcPts val="300"/>
               </a:spcAft>
             </a:pPr>
-            <a:endParaRPr sz="1450" b="0" i="0">
-              <a:solidFill>
-                <a:srgbClr val="FFFFFF"/>
-              </a:solidFill>
-              <a:latin typeface="Calibri"/>
-            </a:endParaRPr>
+            <a:r>
+              <a:rPr sz="600" b="0" i="0">
+                <a:solidFill>
+                  <a:srgbClr val="E8F1FB"/>
+                </a:solidFill>
+                <a:latin typeface="Calibri"/>
+              </a:rPr>
+              <a:t/>
+            </a:r>
           </a:p>
           <a:p>
             <a:pPr algn="l">
@@ -9592,7 +9365,7 @@
           <a:noFill/>
         </p:spPr>
         <p:txBody>
-          <a:bodyPr wrap="square" lIns="0" tIns="0" rIns="0" bIns="0" anchor="t">
+          <a:bodyPr wrap="square" anchor="t" lIns="0" rIns="0" tIns="0" bIns="0">
             <a:spAutoFit/>
           </a:bodyPr>
           <a:lstStyle/>
@@ -9629,7 +9402,7 @@
 </file>
 
 <file path=ppt/slides/slide4.xml><?xml version="1.0" encoding="utf-8"?>
-<p:sld xmlns:a="http://schemas.openxmlformats.org/drawingml/2006/main" xmlns:r="http://schemas.openxmlformats.org/officeDocument/2006/relationships" xmlns:p="http://schemas.openxmlformats.org/presentationml/2006/main">
+<p:sld xmlns:a="http://schemas.openxmlformats.org/drawingml/2006/main" xmlns:p="http://schemas.openxmlformats.org/presentationml/2006/main" xmlns:r="http://schemas.openxmlformats.org/officeDocument/2006/relationships">
   <p:cSld>
     <p:bg>
       <p:bgPr>
@@ -9645,14 +9418,7 @@
         <p:cNvGrpSpPr/>
         <p:nvPr/>
       </p:nvGrpSpPr>
-      <p:grpSpPr>
-        <a:xfrm>
-          <a:off x="0" y="0"/>
-          <a:ext cx="0" cy="0"/>
-          <a:chOff x="0" y="0"/>
-          <a:chExt cx="0" cy="0"/>
-        </a:xfrm>
-      </p:grpSpPr>
+      <p:grpSpPr/>
       <p:sp>
         <p:nvSpPr>
           <p:cNvPr id="2" name="TextBox 1"/>
@@ -9670,7 +9436,7 @@
           <a:noFill/>
         </p:spPr>
         <p:txBody>
-          <a:bodyPr wrap="square" lIns="0" tIns="0" rIns="0" bIns="0" anchor="t">
+          <a:bodyPr wrap="square" anchor="t" lIns="0" rIns="0" tIns="0" bIns="0">
             <a:spAutoFit/>
           </a:bodyPr>
           <a:lstStyle/>
@@ -9715,7 +9481,7 @@
           <a:noFill/>
         </p:spPr>
         <p:txBody>
-          <a:bodyPr wrap="square" lIns="0" tIns="0" rIns="0" bIns="0" anchor="t">
+          <a:bodyPr wrap="square" anchor="t" lIns="0" rIns="0" tIns="0" bIns="0">
             <a:spAutoFit/>
           </a:bodyPr>
           <a:lstStyle/>
@@ -9794,7 +9560,6 @@
           <a:lstStyle/>
           <a:p>
             <a:pPr algn="ctr"/>
-            <a:endParaRPr/>
           </a:p>
         </p:txBody>
       </p:sp>
@@ -9839,7 +9604,6 @@
           <a:lstStyle/>
           <a:p>
             <a:pPr algn="ctr"/>
-            <a:endParaRPr/>
           </a:p>
         </p:txBody>
       </p:sp>
@@ -9860,7 +9624,7 @@
           <a:noFill/>
         </p:spPr>
         <p:txBody>
-          <a:bodyPr wrap="square" lIns="0" tIns="0" rIns="0" bIns="0" anchor="t">
+          <a:bodyPr wrap="square" anchor="t" lIns="0" rIns="0" tIns="0" bIns="0">
             <a:spAutoFit/>
           </a:bodyPr>
           <a:lstStyle/>
@@ -9883,7 +9647,7 @@
                 </a:solidFill>
                 <a:latin typeface="Calibri"/>
               </a:rPr>
-              <a:t>Neue Auswertung</a:t>
+              <a:t>Bedarfsanalyse</a:t>
             </a:r>
           </a:p>
         </p:txBody>
@@ -9905,7 +9669,7 @@
           <a:noFill/>
         </p:spPr>
         <p:txBody>
-          <a:bodyPr wrap="square" lIns="0" tIns="0" rIns="0" bIns="0" anchor="t">
+          <a:bodyPr wrap="square" anchor="t" lIns="0" rIns="0" tIns="0" bIns="0">
             <a:spAutoFit/>
           </a:bodyPr>
           <a:lstStyle/>
@@ -9928,7 +9692,7 @@
                 </a:solidFill>
                 <a:latin typeface="Calibri"/>
               </a:rPr>
-              <a:t>PK-/ZF-Marktanalysen starten</a:t>
+              <a:t>PK-/ZW-Marktanalysen starten</a:t>
             </a:r>
           </a:p>
         </p:txBody>
@@ -9984,7 +9748,6 @@
           <a:lstStyle/>
           <a:p>
             <a:pPr algn="ctr"/>
-            <a:endParaRPr/>
           </a:p>
         </p:txBody>
       </p:sp>
@@ -10029,7 +9792,6 @@
           <a:lstStyle/>
           <a:p>
             <a:pPr algn="ctr"/>
-            <a:endParaRPr/>
           </a:p>
         </p:txBody>
       </p:sp>
@@ -10050,7 +9812,7 @@
           <a:noFill/>
         </p:spPr>
         <p:txBody>
-          <a:bodyPr wrap="square" lIns="0" tIns="0" rIns="0" bIns="0" anchor="t">
+          <a:bodyPr wrap="square" anchor="t" lIns="0" rIns="0" tIns="0" bIns="0">
             <a:spAutoFit/>
           </a:bodyPr>
           <a:lstStyle/>
@@ -10095,7 +9857,7 @@
           <a:noFill/>
         </p:spPr>
         <p:txBody>
-          <a:bodyPr wrap="square" lIns="0" tIns="0" rIns="0" bIns="0" anchor="t">
+          <a:bodyPr wrap="square" anchor="t" lIns="0" rIns="0" tIns="0" bIns="0">
             <a:spAutoFit/>
           </a:bodyPr>
           <a:lstStyle/>
@@ -10174,7 +9936,6 @@
           <a:lstStyle/>
           <a:p>
             <a:pPr algn="ctr"/>
-            <a:endParaRPr/>
           </a:p>
         </p:txBody>
       </p:sp>
@@ -10219,7 +9980,6 @@
           <a:lstStyle/>
           <a:p>
             <a:pPr algn="ctr"/>
-            <a:endParaRPr/>
           </a:p>
         </p:txBody>
       </p:sp>
@@ -10240,7 +10000,7 @@
           <a:noFill/>
         </p:spPr>
         <p:txBody>
-          <a:bodyPr wrap="square" lIns="0" tIns="0" rIns="0" bIns="0" anchor="t">
+          <a:bodyPr wrap="square" anchor="t" lIns="0" rIns="0" tIns="0" bIns="0">
             <a:spAutoFit/>
           </a:bodyPr>
           <a:lstStyle/>
@@ -10285,7 +10045,7 @@
           <a:noFill/>
         </p:spPr>
         <p:txBody>
-          <a:bodyPr wrap="square" lIns="0" tIns="0" rIns="0" bIns="0" anchor="t">
+          <a:bodyPr wrap="square" anchor="t" lIns="0" rIns="0" tIns="0" bIns="0">
             <a:spAutoFit/>
           </a:bodyPr>
           <a:lstStyle/>
@@ -10364,7 +10124,6 @@
           <a:lstStyle/>
           <a:p>
             <a:pPr algn="ctr"/>
-            <a:endParaRPr/>
           </a:p>
         </p:txBody>
       </p:sp>
@@ -10409,7 +10168,6 @@
           <a:lstStyle/>
           <a:p>
             <a:pPr algn="ctr"/>
-            <a:endParaRPr/>
           </a:p>
         </p:txBody>
       </p:sp>
@@ -10430,7 +10188,7 @@
           <a:noFill/>
         </p:spPr>
         <p:txBody>
-          <a:bodyPr wrap="square" lIns="0" tIns="0" rIns="0" bIns="0" anchor="t">
+          <a:bodyPr wrap="square" anchor="t" lIns="0" rIns="0" tIns="0" bIns="0">
             <a:spAutoFit/>
           </a:bodyPr>
           <a:lstStyle/>
@@ -10475,7 +10233,7 @@
           <a:noFill/>
         </p:spPr>
         <p:txBody>
-          <a:bodyPr wrap="square" lIns="0" tIns="0" rIns="0" bIns="0" anchor="t">
+          <a:bodyPr wrap="square" anchor="t" lIns="0" rIns="0" tIns="0" bIns="0">
             <a:spAutoFit/>
           </a:bodyPr>
           <a:lstStyle/>
@@ -10554,7 +10312,6 @@
           <a:lstStyle/>
           <a:p>
             <a:pPr algn="ctr"/>
-            <a:endParaRPr/>
           </a:p>
         </p:txBody>
       </p:sp>
@@ -10599,7 +10356,6 @@
           <a:lstStyle/>
           <a:p>
             <a:pPr algn="ctr"/>
-            <a:endParaRPr/>
           </a:p>
         </p:txBody>
       </p:sp>
@@ -10620,7 +10376,7 @@
           <a:noFill/>
         </p:spPr>
         <p:txBody>
-          <a:bodyPr wrap="square" lIns="0" tIns="0" rIns="0" bIns="0" anchor="t">
+          <a:bodyPr wrap="square" anchor="t" lIns="0" rIns="0" tIns="0" bIns="0">
             <a:spAutoFit/>
           </a:bodyPr>
           <a:lstStyle/>
@@ -10665,7 +10421,7 @@
           <a:noFill/>
         </p:spPr>
         <p:txBody>
-          <a:bodyPr wrap="square" lIns="0" tIns="0" rIns="0" bIns="0" anchor="t">
+          <a:bodyPr wrap="square" anchor="t" lIns="0" rIns="0" tIns="0" bIns="0">
             <a:spAutoFit/>
           </a:bodyPr>
           <a:lstStyle/>
@@ -10744,7 +10500,6 @@
           <a:lstStyle/>
           <a:p>
             <a:pPr algn="ctr"/>
-            <a:endParaRPr/>
           </a:p>
         </p:txBody>
       </p:sp>
@@ -10789,7 +10544,6 @@
           <a:lstStyle/>
           <a:p>
             <a:pPr algn="ctr"/>
-            <a:endParaRPr/>
           </a:p>
         </p:txBody>
       </p:sp>
@@ -10810,7 +10564,7 @@
           <a:noFill/>
         </p:spPr>
         <p:txBody>
-          <a:bodyPr wrap="square" lIns="0" tIns="0" rIns="0" bIns="0" anchor="t">
+          <a:bodyPr wrap="square" anchor="t" lIns="0" rIns="0" tIns="0" bIns="0">
             <a:spAutoFit/>
           </a:bodyPr>
           <a:lstStyle/>
@@ -10855,7 +10609,7 @@
           <a:noFill/>
         </p:spPr>
         <p:txBody>
-          <a:bodyPr wrap="square" lIns="0" tIns="0" rIns="0" bIns="0" anchor="t">
+          <a:bodyPr wrap="square" anchor="t" lIns="0" rIns="0" tIns="0" bIns="0">
             <a:spAutoFit/>
           </a:bodyPr>
           <a:lstStyle/>
@@ -10934,7 +10688,6 @@
           <a:lstStyle/>
           <a:p>
             <a:pPr algn="ctr"/>
-            <a:endParaRPr/>
           </a:p>
         </p:txBody>
       </p:sp>
@@ -10979,7 +10732,6 @@
           <a:lstStyle/>
           <a:p>
             <a:pPr algn="ctr"/>
-            <a:endParaRPr/>
           </a:p>
         </p:txBody>
       </p:sp>
@@ -11000,7 +10752,7 @@
           <a:noFill/>
         </p:spPr>
         <p:txBody>
-          <a:bodyPr wrap="square" lIns="0" tIns="0" rIns="0" bIns="0" anchor="t">
+          <a:bodyPr wrap="square" anchor="t" lIns="0" rIns="0" tIns="0" bIns="0">
             <a:spAutoFit/>
           </a:bodyPr>
           <a:lstStyle/>
@@ -11045,7 +10797,7 @@
           <a:noFill/>
         </p:spPr>
         <p:txBody>
-          <a:bodyPr wrap="square" lIns="0" tIns="0" rIns="0" bIns="0" anchor="t">
+          <a:bodyPr wrap="square" anchor="t" lIns="0" rIns="0" tIns="0" bIns="0">
             <a:spAutoFit/>
           </a:bodyPr>
           <a:lstStyle/>
@@ -11124,7 +10876,6 @@
           <a:lstStyle/>
           <a:p>
             <a:pPr algn="ctr"/>
-            <a:endParaRPr/>
           </a:p>
         </p:txBody>
       </p:sp>
@@ -11169,7 +10920,6 @@
           <a:lstStyle/>
           <a:p>
             <a:pPr algn="ctr"/>
-            <a:endParaRPr/>
           </a:p>
         </p:txBody>
       </p:sp>
@@ -11190,7 +10940,7 @@
           <a:noFill/>
         </p:spPr>
         <p:txBody>
-          <a:bodyPr wrap="square" lIns="0" tIns="0" rIns="0" bIns="0" anchor="t">
+          <a:bodyPr wrap="square" anchor="t" lIns="0" rIns="0" tIns="0" bIns="0">
             <a:spAutoFit/>
           </a:bodyPr>
           <a:lstStyle/>
@@ -11235,7 +10985,7 @@
           <a:noFill/>
         </p:spPr>
         <p:txBody>
-          <a:bodyPr wrap="square" lIns="0" tIns="0" rIns="0" bIns="0" anchor="t">
+          <a:bodyPr wrap="square" anchor="t" lIns="0" rIns="0" tIns="0" bIns="0">
             <a:spAutoFit/>
           </a:bodyPr>
           <a:lstStyle/>
@@ -11314,7 +11064,6 @@
           <a:lstStyle/>
           <a:p>
             <a:pPr algn="ctr"/>
-            <a:endParaRPr/>
           </a:p>
         </p:txBody>
       </p:sp>
@@ -11359,7 +11108,6 @@
           <a:lstStyle/>
           <a:p>
             <a:pPr algn="ctr"/>
-            <a:endParaRPr/>
           </a:p>
         </p:txBody>
       </p:sp>
@@ -11380,7 +11128,7 @@
           <a:noFill/>
         </p:spPr>
         <p:txBody>
-          <a:bodyPr wrap="square" lIns="0" tIns="0" rIns="0" bIns="0" anchor="t">
+          <a:bodyPr wrap="square" anchor="t" lIns="0" rIns="0" tIns="0" bIns="0">
             <a:spAutoFit/>
           </a:bodyPr>
           <a:lstStyle/>
@@ -11425,7 +11173,7 @@
           <a:noFill/>
         </p:spPr>
         <p:txBody>
-          <a:bodyPr wrap="square" lIns="0" tIns="0" rIns="0" bIns="0" anchor="t">
+          <a:bodyPr wrap="square" anchor="t" lIns="0" rIns="0" tIns="0" bIns="0">
             <a:spAutoFit/>
           </a:bodyPr>
           <a:lstStyle/>
@@ -11504,7 +11252,6 @@
           <a:lstStyle/>
           <a:p>
             <a:pPr algn="ctr"/>
-            <a:endParaRPr/>
           </a:p>
         </p:txBody>
       </p:sp>
@@ -11549,7 +11296,6 @@
           <a:lstStyle/>
           <a:p>
             <a:pPr algn="ctr"/>
-            <a:endParaRPr/>
           </a:p>
         </p:txBody>
       </p:sp>
@@ -11570,7 +11316,7 @@
           <a:noFill/>
         </p:spPr>
         <p:txBody>
-          <a:bodyPr wrap="square" lIns="0" tIns="0" rIns="0" bIns="0" anchor="t">
+          <a:bodyPr wrap="square" anchor="t" lIns="0" rIns="0" tIns="0" bIns="0">
             <a:spAutoFit/>
           </a:bodyPr>
           <a:lstStyle/>
@@ -11615,7 +11361,7 @@
           <a:noFill/>
         </p:spPr>
         <p:txBody>
-          <a:bodyPr wrap="square" lIns="0" tIns="0" rIns="0" bIns="0" anchor="t">
+          <a:bodyPr wrap="square" anchor="t" lIns="0" rIns="0" tIns="0" bIns="0">
             <a:spAutoFit/>
           </a:bodyPr>
           <a:lstStyle/>
@@ -11694,7 +11440,6 @@
           <a:lstStyle/>
           <a:p>
             <a:pPr algn="ctr"/>
-            <a:endParaRPr/>
           </a:p>
         </p:txBody>
       </p:sp>
@@ -11739,7 +11484,6 @@
           <a:lstStyle/>
           <a:p>
             <a:pPr algn="ctr"/>
-            <a:endParaRPr/>
           </a:p>
         </p:txBody>
       </p:sp>
@@ -11760,7 +11504,7 @@
           <a:noFill/>
         </p:spPr>
         <p:txBody>
-          <a:bodyPr wrap="square" lIns="0" tIns="0" rIns="0" bIns="0" anchor="t">
+          <a:bodyPr wrap="square" anchor="t" lIns="0" rIns="0" tIns="0" bIns="0">
             <a:spAutoFit/>
           </a:bodyPr>
           <a:lstStyle/>
@@ -11805,7 +11549,7 @@
           <a:noFill/>
         </p:spPr>
         <p:txBody>
-          <a:bodyPr wrap="square" lIns="0" tIns="0" rIns="0" bIns="0" anchor="t">
+          <a:bodyPr wrap="square" anchor="t" lIns="0" rIns="0" tIns="0" bIns="0">
             <a:spAutoFit/>
           </a:bodyPr>
           <a:lstStyle/>
@@ -11884,7 +11628,6 @@
           <a:lstStyle/>
           <a:p>
             <a:pPr algn="ctr"/>
-            <a:endParaRPr/>
           </a:p>
         </p:txBody>
       </p:sp>
@@ -11929,7 +11672,6 @@
           <a:lstStyle/>
           <a:p>
             <a:pPr algn="ctr"/>
-            <a:endParaRPr/>
           </a:p>
         </p:txBody>
       </p:sp>
@@ -11950,7 +11692,7 @@
           <a:noFill/>
         </p:spPr>
         <p:txBody>
-          <a:bodyPr wrap="square" lIns="0" tIns="0" rIns="0" bIns="0" anchor="t">
+          <a:bodyPr wrap="square" anchor="t" lIns="0" rIns="0" tIns="0" bIns="0">
             <a:spAutoFit/>
           </a:bodyPr>
           <a:lstStyle/>
@@ -11995,7 +11737,7 @@
           <a:noFill/>
         </p:spPr>
         <p:txBody>
-          <a:bodyPr wrap="square" lIns="0" tIns="0" rIns="0" bIns="0" anchor="t">
+          <a:bodyPr wrap="square" anchor="t" lIns="0" rIns="0" tIns="0" bIns="0">
             <a:spAutoFit/>
           </a:bodyPr>
           <a:lstStyle/>
@@ -12040,7 +11782,7 @@
           <a:noFill/>
         </p:spPr>
         <p:txBody>
-          <a:bodyPr wrap="square" lIns="0" tIns="0" rIns="0" bIns="0" anchor="t">
+          <a:bodyPr wrap="square" anchor="t" lIns="0" rIns="0" tIns="0" bIns="0">
             <a:spAutoFit/>
           </a:bodyPr>
           <a:lstStyle/>
@@ -12077,7 +11819,7 @@
 </file>
 
 <file path=ppt/slides/slide5.xml><?xml version="1.0" encoding="utf-8"?>
-<p:sld xmlns:a="http://schemas.openxmlformats.org/drawingml/2006/main" xmlns:r="http://schemas.openxmlformats.org/officeDocument/2006/relationships" xmlns:p="http://schemas.openxmlformats.org/presentationml/2006/main">
+<p:sld xmlns:a="http://schemas.openxmlformats.org/drawingml/2006/main" xmlns:p="http://schemas.openxmlformats.org/presentationml/2006/main" xmlns:r="http://schemas.openxmlformats.org/officeDocument/2006/relationships">
   <p:cSld>
     <p:bg>
       <p:bgPr>
@@ -12093,14 +11835,7 @@
         <p:cNvGrpSpPr/>
         <p:nvPr/>
       </p:nvGrpSpPr>
-      <p:grpSpPr>
-        <a:xfrm>
-          <a:off x="0" y="0"/>
-          <a:ext cx="0" cy="0"/>
-          <a:chOff x="0" y="0"/>
-          <a:chExt cx="0" cy="0"/>
-        </a:xfrm>
-      </p:grpSpPr>
+      <p:grpSpPr/>
       <p:sp>
         <p:nvSpPr>
           <p:cNvPr id="2" name="TextBox 1"/>
@@ -12118,7 +11853,7 @@
           <a:noFill/>
         </p:spPr>
         <p:txBody>
-          <a:bodyPr wrap="square" lIns="0" tIns="0" rIns="0" bIns="0" anchor="t">
+          <a:bodyPr wrap="square" anchor="t" lIns="0" rIns="0" tIns="0" bIns="0">
             <a:spAutoFit/>
           </a:bodyPr>
           <a:lstStyle/>
@@ -12163,7 +11898,7 @@
           <a:noFill/>
         </p:spPr>
         <p:txBody>
-          <a:bodyPr wrap="square" lIns="0" tIns="0" rIns="0" bIns="0" anchor="t">
+          <a:bodyPr wrap="square" anchor="t" lIns="0" rIns="0" tIns="0" bIns="0">
             <a:spAutoFit/>
           </a:bodyPr>
           <a:lstStyle/>
@@ -12242,7 +11977,6 @@
           <a:lstStyle/>
           <a:p>
             <a:pPr algn="ctr"/>
-            <a:endParaRPr/>
           </a:p>
         </p:txBody>
       </p:sp>
@@ -12287,7 +12021,7 @@
           <a:noFill/>
         </p:spPr>
         <p:txBody>
-          <a:bodyPr wrap="square" lIns="0" tIns="0" rIns="0" bIns="0" anchor="t">
+          <a:bodyPr wrap="square" anchor="t" lIns="0" rIns="0" tIns="0" bIns="0">
             <a:spAutoFit/>
           </a:bodyPr>
           <a:lstStyle/>
@@ -12366,7 +12100,6 @@
           <a:lstStyle/>
           <a:p>
             <a:pPr algn="ctr"/>
-            <a:endParaRPr/>
           </a:p>
         </p:txBody>
       </p:sp>
@@ -12411,7 +12144,7 @@
           <a:noFill/>
         </p:spPr>
         <p:txBody>
-          <a:bodyPr wrap="square" lIns="0" tIns="0" rIns="0" bIns="0" anchor="t">
+          <a:bodyPr wrap="square" anchor="t" lIns="0" rIns="0" tIns="0" bIns="0">
             <a:spAutoFit/>
           </a:bodyPr>
           <a:lstStyle/>
@@ -12490,7 +12223,6 @@
           <a:lstStyle/>
           <a:p>
             <a:pPr algn="ctr"/>
-            <a:endParaRPr/>
           </a:p>
         </p:txBody>
       </p:sp>
@@ -12535,7 +12267,7 @@
           <a:noFill/>
         </p:spPr>
         <p:txBody>
-          <a:bodyPr wrap="square" lIns="0" tIns="0" rIns="0" bIns="0" anchor="t">
+          <a:bodyPr wrap="square" anchor="t" lIns="0" rIns="0" tIns="0" bIns="0">
             <a:spAutoFit/>
           </a:bodyPr>
           <a:lstStyle/>
@@ -12580,7 +12312,7 @@
           <a:noFill/>
         </p:spPr>
         <p:txBody>
-          <a:bodyPr wrap="square" lIns="0" tIns="0" rIns="0" bIns="0" anchor="t">
+          <a:bodyPr wrap="square" anchor="t" lIns="0" rIns="0" tIns="0" bIns="0">
             <a:spAutoFit/>
           </a:bodyPr>
           <a:lstStyle/>
@@ -12617,7 +12349,7 @@
 </file>
 
 <file path=ppt/slides/slide6.xml><?xml version="1.0" encoding="utf-8"?>
-<p:sld xmlns:a="http://schemas.openxmlformats.org/drawingml/2006/main" xmlns:r="http://schemas.openxmlformats.org/officeDocument/2006/relationships" xmlns:p="http://schemas.openxmlformats.org/presentationml/2006/main">
+<p:sld xmlns:a="http://schemas.openxmlformats.org/drawingml/2006/main" xmlns:p="http://schemas.openxmlformats.org/presentationml/2006/main" xmlns:r="http://schemas.openxmlformats.org/officeDocument/2006/relationships">
   <p:cSld>
     <p:bg>
       <p:bgPr>
@@ -12633,14 +12365,7 @@
         <p:cNvGrpSpPr/>
         <p:nvPr/>
       </p:nvGrpSpPr>
-      <p:grpSpPr>
-        <a:xfrm>
-          <a:off x="0" y="0"/>
-          <a:ext cx="0" cy="0"/>
-          <a:chOff x="0" y="0"/>
-          <a:chExt cx="0" cy="0"/>
-        </a:xfrm>
-      </p:grpSpPr>
+      <p:grpSpPr/>
       <p:sp>
         <p:nvSpPr>
           <p:cNvPr id="2" name="TextBox 1"/>
@@ -12658,7 +12383,7 @@
           <a:noFill/>
         </p:spPr>
         <p:txBody>
-          <a:bodyPr wrap="square" lIns="0" tIns="0" rIns="0" bIns="0" anchor="t">
+          <a:bodyPr wrap="square" anchor="t" lIns="0" rIns="0" tIns="0" bIns="0">
             <a:spAutoFit/>
           </a:bodyPr>
           <a:lstStyle/>
@@ -12737,7 +12462,6 @@
           <a:lstStyle/>
           <a:p>
             <a:pPr algn="ctr"/>
-            <a:endParaRPr/>
           </a:p>
         </p:txBody>
       </p:sp>
@@ -12784,7 +12508,6 @@
           <a:lstStyle/>
           <a:p>
             <a:pPr algn="ctr"/>
-            <a:endParaRPr/>
           </a:p>
         </p:txBody>
       </p:sp>
@@ -12829,7 +12552,6 @@
           <a:lstStyle/>
           <a:p>
             <a:pPr algn="ctr"/>
-            <a:endParaRPr/>
           </a:p>
         </p:txBody>
       </p:sp>
@@ -12850,7 +12572,7 @@
           <a:noFill/>
         </p:spPr>
         <p:txBody>
-          <a:bodyPr wrap="square" lIns="0" tIns="0" rIns="0" bIns="0" anchor="ctr">
+          <a:bodyPr wrap="square" anchor="ctr" lIns="0" rIns="0" tIns="0" bIns="0">
             <a:spAutoFit/>
           </a:bodyPr>
           <a:lstStyle/>
@@ -12887,7 +12609,7 @@
         <p:spPr>
           <a:xfrm>
             <a:off x="1097280" y="2697480"/>
-            <a:ext cx="2871216" cy="1641860"/>
+            <a:ext cx="2871216" cy="3108960"/>
           </a:xfrm>
           <a:prstGeom prst="rect">
             <a:avLst/>
@@ -12895,7 +12617,7 @@
           <a:noFill/>
         </p:spPr>
         <p:txBody>
-          <a:bodyPr wrap="square" lIns="0" tIns="0" rIns="0" bIns="0">
+          <a:bodyPr wrap="square" lIns="0" rIns="0" tIns="0" bIns="0">
             <a:spAutoFit/>
           </a:bodyPr>
           <a:lstStyle/>
@@ -12909,7 +12631,7 @@
               </a:spcAft>
             </a:pPr>
             <a:r>
-              <a:rPr sz="1400" b="1" dirty="0">
+              <a:rPr b="1" sz="1400">
                 <a:solidFill>
                   <a:srgbClr val="0B4A86"/>
                 </a:solidFill>
@@ -12918,187 +12640,70 @@
               <a:t>—  </a:t>
             </a:r>
             <a:r>
-              <a:rPr sz="1400" dirty="0">
+              <a:rPr sz="1400">
                 <a:solidFill>
                   <a:srgbClr val="1B2633"/>
                 </a:solidFill>
                 <a:latin typeface="Calibri"/>
               </a:rPr>
-              <a:t>PK- und Z</a:t>
-            </a:r>
-            <a:r>
-              <a:rPr lang="de-DE" sz="1400" dirty="0">
+              <a:t>PK- und ZF-Auswertungen auf Knopfdruck</a:t>
+            </a:r>
+          </a:p>
+          <a:p>
+            <a:pPr>
+              <a:lnSpc>
+                <a:spcPct val="108000"/>
+              </a:lnSpc>
+              <a:spcAft>
+                <a:spcPts val="1000"/>
+              </a:spcAft>
+            </a:pPr>
+            <a:r>
+              <a:rPr b="1" sz="1400">
+                <a:solidFill>
+                  <a:srgbClr val="0B4A86"/>
+                </a:solidFill>
+                <a:latin typeface="Calibri"/>
+              </a:rPr>
+              <a:t>—  </a:t>
+            </a:r>
+            <a:r>
+              <a:rPr sz="1400">
                 <a:solidFill>
                   <a:srgbClr val="1B2633"/>
                 </a:solidFill>
                 <a:latin typeface="Calibri"/>
               </a:rPr>
-              <a:t>W</a:t>
-            </a:r>
-            <a:r>
-              <a:rPr sz="1400" dirty="0">
+              <a:t>Produktchancen &amp; Abweichungs-Analyse</a:t>
+            </a:r>
+          </a:p>
+          <a:p>
+            <a:pPr>
+              <a:lnSpc>
+                <a:spcPct val="108000"/>
+              </a:lnSpc>
+              <a:spcAft>
+                <a:spcPts val="1000"/>
+              </a:spcAft>
+            </a:pPr>
+            <a:r>
+              <a:rPr b="1" sz="1400">
+                <a:solidFill>
+                  <a:srgbClr val="0B4A86"/>
+                </a:solidFill>
+                <a:latin typeface="Calibri"/>
+              </a:rPr>
+              <a:t>—  </a:t>
+            </a:r>
+            <a:r>
+              <a:rPr sz="1400">
                 <a:solidFill>
                   <a:srgbClr val="1B2633"/>
                 </a:solidFill>
                 <a:latin typeface="Calibri"/>
               </a:rPr>
-              <a:t>-</a:t>
-            </a:r>
-            <a:r>
-              <a:rPr sz="1400" dirty="0" err="1">
-                <a:solidFill>
-                  <a:srgbClr val="1B2633"/>
-                </a:solidFill>
-                <a:latin typeface="Calibri"/>
-              </a:rPr>
-              <a:t>Auswertungen</a:t>
-            </a:r>
-            <a:r>
-              <a:rPr sz="1400" dirty="0">
-                <a:solidFill>
-                  <a:srgbClr val="1B2633"/>
-                </a:solidFill>
-                <a:latin typeface="Calibri"/>
-              </a:rPr>
-              <a:t> auf </a:t>
-            </a:r>
-            <a:r>
-              <a:rPr sz="1400" dirty="0" err="1">
-                <a:solidFill>
-                  <a:srgbClr val="1B2633"/>
-                </a:solidFill>
-                <a:latin typeface="Calibri"/>
-              </a:rPr>
-              <a:t>Knopfdruck</a:t>
-            </a:r>
-            <a:endParaRPr sz="1400" dirty="0">
-              <a:solidFill>
-                <a:srgbClr val="1B2633"/>
-              </a:solidFill>
-              <a:latin typeface="Calibri"/>
-            </a:endParaRPr>
-          </a:p>
-          <a:p>
-            <a:pPr>
-              <a:lnSpc>
-                <a:spcPct val="108000"/>
-              </a:lnSpc>
-              <a:spcAft>
-                <a:spcPts val="1000"/>
-              </a:spcAft>
-            </a:pPr>
-            <a:r>
-              <a:rPr sz="1400" b="1" dirty="0">
-                <a:solidFill>
-                  <a:srgbClr val="0B4A86"/>
-                </a:solidFill>
-                <a:latin typeface="Calibri"/>
-              </a:rPr>
-              <a:t>—  </a:t>
-            </a:r>
-            <a:r>
-              <a:rPr sz="1400" dirty="0" err="1">
-                <a:solidFill>
-                  <a:srgbClr val="1B2633"/>
-                </a:solidFill>
-                <a:latin typeface="Calibri"/>
-              </a:rPr>
-              <a:t>Produktchancen</a:t>
-            </a:r>
-            <a:r>
-              <a:rPr sz="1400" dirty="0">
-                <a:solidFill>
-                  <a:srgbClr val="1B2633"/>
-                </a:solidFill>
-                <a:latin typeface="Calibri"/>
-              </a:rPr>
-              <a:t> &amp; </a:t>
-            </a:r>
-            <a:r>
-              <a:rPr sz="1400" dirty="0" err="1">
-                <a:solidFill>
-                  <a:srgbClr val="1B2633"/>
-                </a:solidFill>
-                <a:latin typeface="Calibri"/>
-              </a:rPr>
-              <a:t>Abweichungs-Analyse</a:t>
-            </a:r>
-            <a:endParaRPr sz="1400" dirty="0">
-              <a:solidFill>
-                <a:srgbClr val="1B2633"/>
-              </a:solidFill>
-              <a:latin typeface="Calibri"/>
-            </a:endParaRPr>
-          </a:p>
-          <a:p>
-            <a:pPr>
-              <a:lnSpc>
-                <a:spcPct val="108000"/>
-              </a:lnSpc>
-              <a:spcAft>
-                <a:spcPts val="1000"/>
-              </a:spcAft>
-            </a:pPr>
-            <a:r>
-              <a:rPr sz="1400" b="1" dirty="0">
-                <a:solidFill>
-                  <a:srgbClr val="0B4A86"/>
-                </a:solidFill>
-                <a:latin typeface="Calibri"/>
-              </a:rPr>
-              <a:t>—  </a:t>
-            </a:r>
-            <a:r>
-              <a:rPr sz="1400" dirty="0" err="1">
-                <a:solidFill>
-                  <a:srgbClr val="1B2633"/>
-                </a:solidFill>
-                <a:latin typeface="Calibri"/>
-              </a:rPr>
-              <a:t>Ergebnisse</a:t>
-            </a:r>
-            <a:r>
-              <a:rPr sz="1400" dirty="0">
-                <a:solidFill>
-                  <a:srgbClr val="1B2633"/>
-                </a:solidFill>
-                <a:latin typeface="Calibri"/>
-              </a:rPr>
-              <a:t> </a:t>
-            </a:r>
-            <a:r>
-              <a:rPr sz="1400" dirty="0" err="1">
-                <a:solidFill>
-                  <a:srgbClr val="1B2633"/>
-                </a:solidFill>
-                <a:latin typeface="Calibri"/>
-              </a:rPr>
-              <a:t>speichern</a:t>
-            </a:r>
-            <a:r>
-              <a:rPr sz="1400" dirty="0">
-                <a:solidFill>
-                  <a:srgbClr val="1B2633"/>
-                </a:solidFill>
-                <a:latin typeface="Calibri"/>
-              </a:rPr>
-              <a:t> und </a:t>
-            </a:r>
-            <a:r>
-              <a:rPr sz="1400" dirty="0" err="1">
-                <a:solidFill>
-                  <a:srgbClr val="1B2633"/>
-                </a:solidFill>
-                <a:latin typeface="Calibri"/>
-              </a:rPr>
-              <a:t>wiederfinden</a:t>
-            </a:r>
-            <a:endParaRPr sz="1400" dirty="0">
-              <a:solidFill>
-                <a:srgbClr val="1B2633"/>
-              </a:solidFill>
-              <a:latin typeface="Calibri"/>
-            </a:endParaRPr>
+              <a:t>Ergebnisse speichern und wiederfinden</a:t>
+            </a:r>
           </a:p>
         </p:txBody>
       </p:sp>
@@ -13153,7 +12758,6 @@
           <a:lstStyle/>
           <a:p>
             <a:pPr algn="ctr"/>
-            <a:endParaRPr/>
           </a:p>
         </p:txBody>
       </p:sp>
@@ -13200,7 +12804,6 @@
           <a:lstStyle/>
           <a:p>
             <a:pPr algn="ctr"/>
-            <a:endParaRPr/>
           </a:p>
         </p:txBody>
       </p:sp>
@@ -13245,7 +12848,6 @@
           <a:lstStyle/>
           <a:p>
             <a:pPr algn="ctr"/>
-            <a:endParaRPr/>
           </a:p>
         </p:txBody>
       </p:sp>
@@ -13266,7 +12868,7 @@
           <a:noFill/>
         </p:spPr>
         <p:txBody>
-          <a:bodyPr wrap="square" lIns="0" tIns="0" rIns="0" bIns="0" anchor="ctr">
+          <a:bodyPr wrap="square" anchor="ctr" lIns="0" rIns="0" tIns="0" bIns="0">
             <a:spAutoFit/>
           </a:bodyPr>
           <a:lstStyle/>
@@ -13303,7 +12905,7 @@
         <p:spPr>
           <a:xfrm>
             <a:off x="4764024" y="2697480"/>
-            <a:ext cx="2871216" cy="1641860"/>
+            <a:ext cx="2871216" cy="3108960"/>
           </a:xfrm>
           <a:prstGeom prst="rect">
             <a:avLst/>
@@ -13311,7 +12913,7 @@
           <a:noFill/>
         </p:spPr>
         <p:txBody>
-          <a:bodyPr wrap="square" lIns="0" tIns="0" rIns="0" bIns="0">
+          <a:bodyPr wrap="square" lIns="0" rIns="0" tIns="0" bIns="0">
             <a:spAutoFit/>
           </a:bodyPr>
           <a:lstStyle/>
@@ -13325,7 +12927,7 @@
               </a:spcAft>
             </a:pPr>
             <a:r>
-              <a:rPr sz="1400" b="1" dirty="0">
+              <a:rPr b="1" sz="1400">
                 <a:solidFill>
                   <a:srgbClr val="6B4FB3"/>
                 </a:solidFill>
@@ -13334,250 +12936,70 @@
               <a:t>—  </a:t>
             </a:r>
             <a:r>
-              <a:rPr sz="1400" dirty="0">
+              <a:rPr sz="1400">
                 <a:solidFill>
                   <a:srgbClr val="1B2633"/>
                 </a:solidFill>
                 <a:latin typeface="Calibri"/>
               </a:rPr>
-              <a:t>NMG-</a:t>
-            </a:r>
-            <a:r>
-              <a:rPr sz="1400" dirty="0" err="1">
+              <a:t>NMG-Rabatte zentral pflegen – mit Verlauf</a:t>
+            </a:r>
+          </a:p>
+          <a:p>
+            <a:pPr>
+              <a:lnSpc>
+                <a:spcPct val="108000"/>
+              </a:lnSpc>
+              <a:spcAft>
+                <a:spcPts val="1000"/>
+              </a:spcAft>
+            </a:pPr>
+            <a:r>
+              <a:rPr b="1" sz="1400">
+                <a:solidFill>
+                  <a:srgbClr val="6B4FB3"/>
+                </a:solidFill>
+                <a:latin typeface="Calibri"/>
+              </a:rPr>
+              <a:t>—  </a:t>
+            </a:r>
+            <a:r>
+              <a:rPr sz="1400">
                 <a:solidFill>
                   <a:srgbClr val="1B2633"/>
                 </a:solidFill>
                 <a:latin typeface="Calibri"/>
               </a:rPr>
-              <a:t>Rabatte</a:t>
-            </a:r>
-            <a:r>
-              <a:rPr sz="1400" dirty="0">
+              <a:t>Kundenindividuelle PK-Konditionen</a:t>
+            </a:r>
+          </a:p>
+          <a:p>
+            <a:pPr>
+              <a:lnSpc>
+                <a:spcPct val="108000"/>
+              </a:lnSpc>
+              <a:spcAft>
+                <a:spcPts val="1000"/>
+              </a:spcAft>
+            </a:pPr>
+            <a:r>
+              <a:rPr b="1" sz="1400">
+                <a:solidFill>
+                  <a:srgbClr val="6B4FB3"/>
+                </a:solidFill>
+                <a:latin typeface="Calibri"/>
+              </a:rPr>
+              <a:t>—  </a:t>
+            </a:r>
+            <a:r>
+              <a:rPr sz="1400">
                 <a:solidFill>
                   <a:srgbClr val="1B2633"/>
                 </a:solidFill>
                 <a:latin typeface="Calibri"/>
               </a:rPr>
-              <a:t> </a:t>
-            </a:r>
-            <a:r>
-              <a:rPr sz="1400" dirty="0" err="1">
-                <a:solidFill>
-                  <a:srgbClr val="1B2633"/>
-                </a:solidFill>
-                <a:latin typeface="Calibri"/>
-              </a:rPr>
-              <a:t>zentral</a:t>
-            </a:r>
-            <a:r>
-              <a:rPr sz="1400" dirty="0">
-                <a:solidFill>
-                  <a:srgbClr val="1B2633"/>
-                </a:solidFill>
-                <a:latin typeface="Calibri"/>
-              </a:rPr>
-              <a:t> </a:t>
-            </a:r>
-            <a:r>
-              <a:rPr sz="1400" dirty="0" err="1">
-                <a:solidFill>
-                  <a:srgbClr val="1B2633"/>
-                </a:solidFill>
-                <a:latin typeface="Calibri"/>
-              </a:rPr>
-              <a:t>pflegen</a:t>
-            </a:r>
-            <a:r>
-              <a:rPr sz="1400" dirty="0">
-                <a:solidFill>
-                  <a:srgbClr val="1B2633"/>
-                </a:solidFill>
-                <a:latin typeface="Calibri"/>
-              </a:rPr>
-              <a:t> – </a:t>
-            </a:r>
-            <a:r>
-              <a:rPr sz="1400" dirty="0" err="1">
-                <a:solidFill>
-                  <a:srgbClr val="1B2633"/>
-                </a:solidFill>
-                <a:latin typeface="Calibri"/>
-              </a:rPr>
-              <a:t>mit</a:t>
-            </a:r>
-            <a:r>
-              <a:rPr sz="1400" dirty="0">
-                <a:solidFill>
-                  <a:srgbClr val="1B2633"/>
-                </a:solidFill>
-                <a:latin typeface="Calibri"/>
-              </a:rPr>
-              <a:t> </a:t>
-            </a:r>
-            <a:r>
-              <a:rPr sz="1400" dirty="0" err="1">
-                <a:solidFill>
-                  <a:srgbClr val="1B2633"/>
-                </a:solidFill>
-                <a:latin typeface="Calibri"/>
-              </a:rPr>
-              <a:t>Verlauf</a:t>
-            </a:r>
-            <a:endParaRPr sz="1400" dirty="0">
-              <a:solidFill>
-                <a:srgbClr val="1B2633"/>
-              </a:solidFill>
-              <a:latin typeface="Calibri"/>
-            </a:endParaRPr>
-          </a:p>
-          <a:p>
-            <a:pPr>
-              <a:lnSpc>
-                <a:spcPct val="108000"/>
-              </a:lnSpc>
-              <a:spcAft>
-                <a:spcPts val="1000"/>
-              </a:spcAft>
-            </a:pPr>
-            <a:r>
-              <a:rPr sz="1400" b="1" dirty="0">
-                <a:solidFill>
-                  <a:srgbClr val="6B4FB3"/>
-                </a:solidFill>
-                <a:latin typeface="Calibri"/>
-              </a:rPr>
-              <a:t>—  </a:t>
-            </a:r>
-            <a:r>
-              <a:rPr sz="1400" dirty="0" err="1">
-                <a:solidFill>
-                  <a:srgbClr val="1B2633"/>
-                </a:solidFill>
-                <a:latin typeface="Calibri"/>
-              </a:rPr>
-              <a:t>Kundenindividuelle</a:t>
-            </a:r>
-            <a:r>
-              <a:rPr sz="1400" dirty="0">
-                <a:solidFill>
-                  <a:srgbClr val="1B2633"/>
-                </a:solidFill>
-                <a:latin typeface="Calibri"/>
-              </a:rPr>
-              <a:t> P</a:t>
-            </a:r>
-            <a:r>
-              <a:rPr lang="de-DE" sz="1400" dirty="0" err="1">
-                <a:solidFill>
-                  <a:srgbClr val="1B2633"/>
-                </a:solidFill>
-                <a:latin typeface="Calibri"/>
-              </a:rPr>
-              <a:t>artnerk</a:t>
-            </a:r>
-            <a:r>
-              <a:rPr sz="1400" dirty="0" err="1">
-                <a:solidFill>
-                  <a:srgbClr val="1B2633"/>
-                </a:solidFill>
-                <a:latin typeface="Calibri"/>
-              </a:rPr>
-              <a:t>onditionen</a:t>
-            </a:r>
-            <a:endParaRPr sz="1400" dirty="0">
-              <a:solidFill>
-                <a:srgbClr val="1B2633"/>
-              </a:solidFill>
-              <a:latin typeface="Calibri"/>
-            </a:endParaRPr>
-          </a:p>
-          <a:p>
-            <a:pPr>
-              <a:lnSpc>
-                <a:spcPct val="108000"/>
-              </a:lnSpc>
-              <a:spcAft>
-                <a:spcPts val="1000"/>
-              </a:spcAft>
-            </a:pPr>
-            <a:r>
-              <a:rPr sz="1400" b="1" dirty="0">
-                <a:solidFill>
-                  <a:srgbClr val="6B4FB3"/>
-                </a:solidFill>
-                <a:latin typeface="Calibri"/>
-              </a:rPr>
-              <a:t>—  </a:t>
-            </a:r>
-            <a:r>
-              <a:rPr sz="1400" dirty="0" err="1">
-                <a:solidFill>
-                  <a:srgbClr val="1B2633"/>
-                </a:solidFill>
-                <a:latin typeface="Calibri"/>
-              </a:rPr>
-              <a:t>Rabatt</a:t>
-            </a:r>
-            <a:r>
-              <a:rPr sz="1400" dirty="0">
-                <a:solidFill>
-                  <a:srgbClr val="1B2633"/>
-                </a:solidFill>
-                <a:latin typeface="Calibri"/>
-              </a:rPr>
-              <a:t>-Kaskade </a:t>
-            </a:r>
-            <a:r>
-              <a:rPr sz="1400" dirty="0" err="1">
-                <a:solidFill>
-                  <a:srgbClr val="1B2633"/>
-                </a:solidFill>
-                <a:latin typeface="Calibri"/>
-              </a:rPr>
-              <a:t>automatisch</a:t>
-            </a:r>
-            <a:r>
-              <a:rPr sz="1400" dirty="0">
-                <a:solidFill>
-                  <a:srgbClr val="1B2633"/>
-                </a:solidFill>
-                <a:latin typeface="Calibri"/>
-              </a:rPr>
-              <a:t> </a:t>
-            </a:r>
-            <a:r>
-              <a:rPr sz="1400" dirty="0" err="1">
-                <a:solidFill>
-                  <a:srgbClr val="1B2633"/>
-                </a:solidFill>
-                <a:latin typeface="Calibri"/>
-              </a:rPr>
-              <a:t>im</a:t>
-            </a:r>
-            <a:r>
-              <a:rPr sz="1400" dirty="0">
-                <a:solidFill>
-                  <a:srgbClr val="1B2633"/>
-                </a:solidFill>
-                <a:latin typeface="Calibri"/>
-              </a:rPr>
-              <a:t> </a:t>
-            </a:r>
-            <a:r>
-              <a:rPr sz="1400" dirty="0" err="1">
-                <a:solidFill>
-                  <a:srgbClr val="1B2633"/>
-                </a:solidFill>
-                <a:latin typeface="Calibri"/>
-              </a:rPr>
-              <a:t>Verkauf</a:t>
-            </a:r>
-            <a:endParaRPr sz="1400" dirty="0">
-              <a:solidFill>
-                <a:srgbClr val="1B2633"/>
-              </a:solidFill>
-              <a:latin typeface="Calibri"/>
-            </a:endParaRPr>
+              <a:t>Rabatt-Kaskade automatisch im Verkauf</a:t>
+            </a:r>
           </a:p>
         </p:txBody>
       </p:sp>
@@ -13632,7 +13054,6 @@
           <a:lstStyle/>
           <a:p>
             <a:pPr algn="ctr"/>
-            <a:endParaRPr/>
           </a:p>
         </p:txBody>
       </p:sp>
@@ -13679,7 +13100,6 @@
           <a:lstStyle/>
           <a:p>
             <a:pPr algn="ctr"/>
-            <a:endParaRPr/>
           </a:p>
         </p:txBody>
       </p:sp>
@@ -13724,7 +13144,6 @@
           <a:lstStyle/>
           <a:p>
             <a:pPr algn="ctr"/>
-            <a:endParaRPr/>
           </a:p>
         </p:txBody>
       </p:sp>
@@ -13745,7 +13164,7 @@
           <a:noFill/>
         </p:spPr>
         <p:txBody>
-          <a:bodyPr wrap="square" lIns="0" tIns="0" rIns="0" bIns="0" anchor="ctr">
+          <a:bodyPr wrap="square" anchor="ctr" lIns="0" rIns="0" tIns="0" bIns="0">
             <a:spAutoFit/>
           </a:bodyPr>
           <a:lstStyle/>
@@ -13790,7 +13209,7 @@
           <a:noFill/>
         </p:spPr>
         <p:txBody>
-          <a:bodyPr wrap="square" lIns="0" tIns="0" rIns="0" bIns="0">
+          <a:bodyPr wrap="square" lIns="0" rIns="0" tIns="0" bIns="0">
             <a:spAutoFit/>
           </a:bodyPr>
           <a:lstStyle/>
@@ -13804,7 +13223,7 @@
               </a:spcAft>
             </a:pPr>
             <a:r>
-              <a:rPr sz="1400" b="1">
+              <a:rPr b="1" sz="1400">
                 <a:solidFill>
                   <a:srgbClr val="11823B"/>
                 </a:solidFill>
@@ -13832,7 +13251,7 @@
               </a:spcAft>
             </a:pPr>
             <a:r>
-              <a:rPr sz="1400" b="1">
+              <a:rPr b="1" sz="1400">
                 <a:solidFill>
                   <a:srgbClr val="11823B"/>
                 </a:solidFill>
@@ -13860,7 +13279,7 @@
               </a:spcAft>
             </a:pPr>
             <a:r>
-              <a:rPr sz="1400" b="1">
+              <a:rPr b="1" sz="1400">
                 <a:solidFill>
                   <a:srgbClr val="11823B"/>
                 </a:solidFill>
@@ -13897,7 +13316,7 @@
           <a:noFill/>
         </p:spPr>
         <p:txBody>
-          <a:bodyPr wrap="square" lIns="0" tIns="0" rIns="0" bIns="0" anchor="t">
+          <a:bodyPr wrap="square" anchor="t" lIns="0" rIns="0" tIns="0" bIns="0">
             <a:spAutoFit/>
           </a:bodyPr>
           <a:lstStyle/>
@@ -13934,7 +13353,7 @@
 </file>
 
 <file path=ppt/slides/slide7.xml><?xml version="1.0" encoding="utf-8"?>
-<p:sld xmlns:a="http://schemas.openxmlformats.org/drawingml/2006/main" xmlns:r="http://schemas.openxmlformats.org/officeDocument/2006/relationships" xmlns:p="http://schemas.openxmlformats.org/presentationml/2006/main">
+<p:sld xmlns:a="http://schemas.openxmlformats.org/drawingml/2006/main" xmlns:p="http://schemas.openxmlformats.org/presentationml/2006/main" xmlns:r="http://schemas.openxmlformats.org/officeDocument/2006/relationships">
   <p:cSld>
     <p:bg>
       <p:bgPr>
@@ -13950,14 +13369,7 @@
         <p:cNvGrpSpPr/>
         <p:nvPr/>
       </p:nvGrpSpPr>
-      <p:grpSpPr>
-        <a:xfrm>
-          <a:off x="0" y="0"/>
-          <a:ext cx="0" cy="0"/>
-          <a:chOff x="0" y="0"/>
-          <a:chExt cx="0" cy="0"/>
-        </a:xfrm>
-      </p:grpSpPr>
+      <p:grpSpPr/>
       <p:sp>
         <p:nvSpPr>
           <p:cNvPr id="2" name="Rectangle 1"/>
@@ -13999,7 +13411,6 @@
           <a:lstStyle/>
           <a:p>
             <a:pPr algn="ctr"/>
-            <a:endParaRPr/>
           </a:p>
         </p:txBody>
       </p:sp>
@@ -14046,7 +13457,6 @@
           <a:lstStyle/>
           <a:p>
             <a:pPr algn="ctr"/>
-            <a:endParaRPr/>
           </a:p>
         </p:txBody>
       </p:sp>
@@ -14067,7 +13477,7 @@
           <a:noFill/>
         </p:spPr>
         <p:txBody>
-          <a:bodyPr wrap="square" lIns="0" tIns="0" rIns="0" bIns="0" anchor="ctr">
+          <a:bodyPr wrap="square" anchor="ctr" lIns="0" rIns="0" tIns="0" bIns="0">
             <a:spAutoFit/>
           </a:bodyPr>
           <a:lstStyle/>
@@ -14112,7 +13522,7 @@
           <a:noFill/>
         </p:spPr>
         <p:txBody>
-          <a:bodyPr wrap="square" lIns="0" tIns="0" rIns="0" bIns="0" anchor="t">
+          <a:bodyPr wrap="square" anchor="t" lIns="0" rIns="0" tIns="0" bIns="0">
             <a:spAutoFit/>
           </a:bodyPr>
           <a:lstStyle/>
@@ -14183,7 +13593,6 @@
           <a:lstStyle/>
           <a:p>
             <a:pPr algn="ctr"/>
-            <a:endParaRPr/>
           </a:p>
         </p:txBody>
       </p:sp>
@@ -14204,7 +13613,7 @@
           <a:noFill/>
         </p:spPr>
         <p:txBody>
-          <a:bodyPr wrap="square" lIns="0" tIns="0" rIns="0" bIns="0" anchor="ctr">
+          <a:bodyPr wrap="square" anchor="ctr" lIns="0" rIns="0" tIns="0" bIns="0">
             <a:spAutoFit/>
           </a:bodyPr>
           <a:lstStyle/>
@@ -14249,7 +13658,7 @@
           <a:noFill/>
         </p:spPr>
         <p:txBody>
-          <a:bodyPr wrap="square" lIns="0" tIns="0" rIns="0" bIns="0" anchor="t">
+          <a:bodyPr wrap="square" anchor="t" lIns="0" rIns="0" tIns="0" bIns="0">
             <a:spAutoFit/>
           </a:bodyPr>
           <a:lstStyle/>
@@ -14342,7 +13751,6 @@
           <a:lstStyle/>
           <a:p>
             <a:pPr algn="ctr"/>
-            <a:endParaRPr/>
           </a:p>
         </p:txBody>
       </p:sp>
@@ -14363,7 +13771,7 @@
           <a:noFill/>
         </p:spPr>
         <p:txBody>
-          <a:bodyPr wrap="square" lIns="0" tIns="0" rIns="0" bIns="0" anchor="ctr">
+          <a:bodyPr wrap="square" anchor="ctr" lIns="0" rIns="0" tIns="0" bIns="0">
             <a:spAutoFit/>
           </a:bodyPr>
           <a:lstStyle/>
@@ -14408,7 +13816,7 @@
           <a:noFill/>
         </p:spPr>
         <p:txBody>
-          <a:bodyPr wrap="square" lIns="0" tIns="0" rIns="0" bIns="0" anchor="t">
+          <a:bodyPr wrap="square" anchor="t" lIns="0" rIns="0" tIns="0" bIns="0">
             <a:spAutoFit/>
           </a:bodyPr>
           <a:lstStyle/>
@@ -14501,7 +13909,6 @@
           <a:lstStyle/>
           <a:p>
             <a:pPr algn="ctr"/>
-            <a:endParaRPr/>
           </a:p>
         </p:txBody>
       </p:sp>
@@ -14522,7 +13929,7 @@
           <a:noFill/>
         </p:spPr>
         <p:txBody>
-          <a:bodyPr wrap="square" lIns="0" tIns="0" rIns="0" bIns="0" anchor="ctr">
+          <a:bodyPr wrap="square" anchor="ctr" lIns="0" rIns="0" tIns="0" bIns="0">
             <a:spAutoFit/>
           </a:bodyPr>
           <a:lstStyle/>
@@ -14567,7 +13974,7 @@
           <a:noFill/>
         </p:spPr>
         <p:txBody>
-          <a:bodyPr wrap="square" lIns="0" tIns="0" rIns="0" bIns="0" anchor="t">
+          <a:bodyPr wrap="square" anchor="t" lIns="0" rIns="0" tIns="0" bIns="0">
             <a:spAutoFit/>
           </a:bodyPr>
           <a:lstStyle/>
@@ -14634,7 +14041,7 @@
           <a:noFill/>
         </p:spPr>
         <p:txBody>
-          <a:bodyPr wrap="square" lIns="0" tIns="0" rIns="0" bIns="0" anchor="t">
+          <a:bodyPr wrap="square" anchor="t" lIns="0" rIns="0" tIns="0" bIns="0">
             <a:spAutoFit/>
           </a:bodyPr>
           <a:lstStyle/>
@@ -14722,7 +14129,6 @@
           <a:lstStyle/>
           <a:p>
             <a:pPr algn="ctr"/>
-            <a:endParaRPr/>
           </a:p>
         </p:txBody>
       </p:sp>
@@ -14767,7 +14173,7 @@
           <a:noFill/>
         </p:spPr>
         <p:txBody>
-          <a:bodyPr wrap="square" lIns="0" tIns="0" rIns="0" bIns="0" anchor="t">
+          <a:bodyPr wrap="square" anchor="t" lIns="0" rIns="0" tIns="0" bIns="0">
             <a:spAutoFit/>
           </a:bodyPr>
           <a:lstStyle/>
@@ -14812,7 +14218,7 @@
           <a:noFill/>
         </p:spPr>
         <p:txBody>
-          <a:bodyPr wrap="square" lIns="0" tIns="0" rIns="0" bIns="0" anchor="t">
+          <a:bodyPr wrap="square" anchor="t" lIns="0" rIns="0" tIns="0" bIns="0">
             <a:spAutoFit/>
           </a:bodyPr>
           <a:lstStyle/>
@@ -14849,7 +14255,7 @@
 </file>
 
 <file path=ppt/slides/slide8.xml><?xml version="1.0" encoding="utf-8"?>
-<p:sld xmlns:a="http://schemas.openxmlformats.org/drawingml/2006/main" xmlns:r="http://schemas.openxmlformats.org/officeDocument/2006/relationships" xmlns:p="http://schemas.openxmlformats.org/presentationml/2006/main">
+<p:sld xmlns:a="http://schemas.openxmlformats.org/drawingml/2006/main" xmlns:p="http://schemas.openxmlformats.org/presentationml/2006/main" xmlns:r="http://schemas.openxmlformats.org/officeDocument/2006/relationships">
   <p:cSld>
     <p:bg>
       <p:bgPr>
@@ -14865,14 +14271,7 @@
         <p:cNvGrpSpPr/>
         <p:nvPr/>
       </p:nvGrpSpPr>
-      <p:grpSpPr>
-        <a:xfrm>
-          <a:off x="0" y="0"/>
-          <a:ext cx="0" cy="0"/>
-          <a:chOff x="0" y="0"/>
-          <a:chExt cx="0" cy="0"/>
-        </a:xfrm>
-      </p:grpSpPr>
+      <p:grpSpPr/>
       <p:sp>
         <p:nvSpPr>
           <p:cNvPr id="2" name="TextBox 1"/>
@@ -14890,7 +14289,7 @@
           <a:noFill/>
         </p:spPr>
         <p:txBody>
-          <a:bodyPr wrap="square" lIns="0" tIns="0" rIns="0" bIns="0" anchor="t">
+          <a:bodyPr wrap="square" anchor="t" lIns="0" rIns="0" tIns="0" bIns="0">
             <a:spAutoFit/>
           </a:bodyPr>
           <a:lstStyle/>
@@ -14969,7 +14368,6 @@
           <a:lstStyle/>
           <a:p>
             <a:pPr algn="ctr"/>
-            <a:endParaRPr/>
           </a:p>
         </p:txBody>
       </p:sp>
@@ -15016,7 +14414,6 @@
           <a:lstStyle/>
           <a:p>
             <a:pPr algn="ctr"/>
-            <a:endParaRPr/>
           </a:p>
         </p:txBody>
       </p:sp>
@@ -15037,7 +14434,7 @@
           <a:noFill/>
         </p:spPr>
         <p:txBody>
-          <a:bodyPr wrap="square" lIns="0" tIns="0" rIns="0" bIns="0" anchor="ctr">
+          <a:bodyPr wrap="square" anchor="ctr" lIns="0" rIns="0" tIns="0" bIns="0">
             <a:spAutoFit/>
           </a:bodyPr>
           <a:lstStyle/>
@@ -15082,7 +14479,7 @@
           <a:noFill/>
         </p:spPr>
         <p:txBody>
-          <a:bodyPr wrap="square" lIns="0" tIns="0" rIns="0" bIns="0" anchor="t">
+          <a:bodyPr wrap="square" anchor="t" lIns="0" rIns="0" tIns="0" bIns="0">
             <a:spAutoFit/>
           </a:bodyPr>
           <a:lstStyle/>
@@ -15127,7 +14524,7 @@
           <a:noFill/>
         </p:spPr>
         <p:txBody>
-          <a:bodyPr wrap="square" lIns="0" tIns="0" rIns="0" bIns="0" anchor="t">
+          <a:bodyPr wrap="square" anchor="t" lIns="0" rIns="0" tIns="0" bIns="0">
             <a:spAutoFit/>
           </a:bodyPr>
           <a:lstStyle/>
@@ -15206,7 +14603,6 @@
           <a:lstStyle/>
           <a:p>
             <a:pPr algn="ctr"/>
-            <a:endParaRPr/>
           </a:p>
         </p:txBody>
       </p:sp>
@@ -15253,7 +14649,6 @@
           <a:lstStyle/>
           <a:p>
             <a:pPr algn="ctr"/>
-            <a:endParaRPr/>
           </a:p>
         </p:txBody>
       </p:sp>
@@ -15274,7 +14669,7 @@
           <a:noFill/>
         </p:spPr>
         <p:txBody>
-          <a:bodyPr wrap="square" lIns="0" tIns="0" rIns="0" bIns="0" anchor="ctr">
+          <a:bodyPr wrap="square" anchor="ctr" lIns="0" rIns="0" tIns="0" bIns="0">
             <a:spAutoFit/>
           </a:bodyPr>
           <a:lstStyle/>
@@ -15319,7 +14714,7 @@
           <a:noFill/>
         </p:spPr>
         <p:txBody>
-          <a:bodyPr wrap="square" lIns="0" tIns="0" rIns="0" bIns="0" anchor="t">
+          <a:bodyPr wrap="square" anchor="t" lIns="0" rIns="0" tIns="0" bIns="0">
             <a:spAutoFit/>
           </a:bodyPr>
           <a:lstStyle/>
@@ -15364,7 +14759,7 @@
           <a:noFill/>
         </p:spPr>
         <p:txBody>
-          <a:bodyPr wrap="square" lIns="0" tIns="0" rIns="0" bIns="0" anchor="t">
+          <a:bodyPr wrap="square" anchor="t" lIns="0" rIns="0" tIns="0" bIns="0">
             <a:spAutoFit/>
           </a:bodyPr>
           <a:lstStyle/>
@@ -15443,7 +14838,6 @@
           <a:lstStyle/>
           <a:p>
             <a:pPr algn="ctr"/>
-            <a:endParaRPr/>
           </a:p>
         </p:txBody>
       </p:sp>
@@ -15490,7 +14884,6 @@
           <a:lstStyle/>
           <a:p>
             <a:pPr algn="ctr"/>
-            <a:endParaRPr/>
           </a:p>
         </p:txBody>
       </p:sp>
@@ -15511,7 +14904,7 @@
           <a:noFill/>
         </p:spPr>
         <p:txBody>
-          <a:bodyPr wrap="square" lIns="0" tIns="0" rIns="0" bIns="0" anchor="ctr">
+          <a:bodyPr wrap="square" anchor="ctr" lIns="0" rIns="0" tIns="0" bIns="0">
             <a:spAutoFit/>
           </a:bodyPr>
           <a:lstStyle/>
@@ -15556,7 +14949,7 @@
           <a:noFill/>
         </p:spPr>
         <p:txBody>
-          <a:bodyPr wrap="square" lIns="0" tIns="0" rIns="0" bIns="0" anchor="t">
+          <a:bodyPr wrap="square" anchor="t" lIns="0" rIns="0" tIns="0" bIns="0">
             <a:spAutoFit/>
           </a:bodyPr>
           <a:lstStyle/>
@@ -15601,7 +14994,7 @@
           <a:noFill/>
         </p:spPr>
         <p:txBody>
-          <a:bodyPr wrap="square" lIns="0" tIns="0" rIns="0" bIns="0" anchor="t">
+          <a:bodyPr wrap="square" anchor="t" lIns="0" rIns="0" tIns="0" bIns="0">
             <a:spAutoFit/>
           </a:bodyPr>
           <a:lstStyle/>
@@ -15680,7 +15073,6 @@
           <a:lstStyle/>
           <a:p>
             <a:pPr algn="ctr"/>
-            <a:endParaRPr/>
           </a:p>
         </p:txBody>
       </p:sp>
@@ -15727,7 +15119,6 @@
           <a:lstStyle/>
           <a:p>
             <a:pPr algn="ctr"/>
-            <a:endParaRPr/>
           </a:p>
         </p:txBody>
       </p:sp>
@@ -15748,7 +15139,7 @@
           <a:noFill/>
         </p:spPr>
         <p:txBody>
-          <a:bodyPr wrap="square" lIns="0" tIns="0" rIns="0" bIns="0" anchor="ctr">
+          <a:bodyPr wrap="square" anchor="ctr" lIns="0" rIns="0" tIns="0" bIns="0">
             <a:spAutoFit/>
           </a:bodyPr>
           <a:lstStyle/>
@@ -15793,7 +15184,7 @@
           <a:noFill/>
         </p:spPr>
         <p:txBody>
-          <a:bodyPr wrap="square" lIns="0" tIns="0" rIns="0" bIns="0" anchor="t">
+          <a:bodyPr wrap="square" anchor="t" lIns="0" rIns="0" tIns="0" bIns="0">
             <a:spAutoFit/>
           </a:bodyPr>
           <a:lstStyle/>
@@ -15830,7 +15221,7 @@
         <p:spPr>
           <a:xfrm>
             <a:off x="1097280" y="4800599"/>
-            <a:ext cx="2743200" cy="649152"/>
+            <a:ext cx="2743200" cy="914400"/>
           </a:xfrm>
           <a:prstGeom prst="rect">
             <a:avLst/>
@@ -15838,7 +15229,7 @@
           <a:noFill/>
         </p:spPr>
         <p:txBody>
-          <a:bodyPr wrap="square" lIns="0" tIns="0" rIns="0" bIns="0" anchor="t">
+          <a:bodyPr wrap="square" anchor="t" lIns="0" rIns="0" tIns="0" bIns="0">
             <a:spAutoFit/>
           </a:bodyPr>
           <a:lstStyle/>
@@ -15855,157 +15246,13 @@
               </a:spcAft>
             </a:pPr>
             <a:r>
-              <a:rPr sz="1300" b="0" i="0" dirty="0" err="1">
+              <a:rPr sz="1300" b="0" i="0">
                 <a:solidFill>
                   <a:srgbClr val="5A6473"/>
                 </a:solidFill>
                 <a:latin typeface="Calibri"/>
               </a:rPr>
-              <a:t>Lokale</a:t>
-            </a:r>
-            <a:r>
-              <a:rPr sz="1300" b="0" i="0" dirty="0">
-                <a:solidFill>
-                  <a:srgbClr val="5A6473"/>
-                </a:solidFill>
-                <a:latin typeface="Calibri"/>
-              </a:rPr>
-              <a:t> </a:t>
-            </a:r>
-            <a:r>
-              <a:rPr sz="1300" b="0" i="0" dirty="0" err="1">
-                <a:solidFill>
-                  <a:srgbClr val="5A6473"/>
-                </a:solidFill>
-                <a:latin typeface="Calibri"/>
-              </a:rPr>
-              <a:t>Datenbank</a:t>
-            </a:r>
-            <a:r>
-              <a:rPr sz="1300" b="0" i="0" dirty="0">
-                <a:solidFill>
-                  <a:srgbClr val="5A6473"/>
-                </a:solidFill>
-                <a:latin typeface="Calibri"/>
-              </a:rPr>
-              <a:t> – </a:t>
-            </a:r>
-            <a:r>
-              <a:rPr lang="de-DE" sz="1300" b="0" i="0" dirty="0">
-                <a:solidFill>
-                  <a:srgbClr val="5A6473"/>
-                </a:solidFill>
-                <a:latin typeface="Calibri"/>
-              </a:rPr>
-              <a:t>noch </a:t>
-            </a:r>
-            <a:r>
-              <a:rPr sz="1300" b="0" i="0" dirty="0" err="1">
-                <a:solidFill>
-                  <a:srgbClr val="5A6473"/>
-                </a:solidFill>
-                <a:latin typeface="Calibri"/>
-              </a:rPr>
-              <a:t>keine</a:t>
-            </a:r>
-            <a:r>
-              <a:rPr sz="1300" b="0" i="0" dirty="0">
-                <a:solidFill>
-                  <a:srgbClr val="5A6473"/>
-                </a:solidFill>
-                <a:latin typeface="Calibri"/>
-              </a:rPr>
-              <a:t> Cloud, </a:t>
-            </a:r>
-            <a:r>
-              <a:rPr sz="1300" b="0" i="0" dirty="0" err="1">
-                <a:solidFill>
-                  <a:srgbClr val="5A6473"/>
-                </a:solidFill>
-                <a:latin typeface="Calibri"/>
-              </a:rPr>
-              <a:t>keine</a:t>
-            </a:r>
-            <a:r>
-              <a:rPr sz="1300" b="0" i="0" dirty="0">
-                <a:solidFill>
-                  <a:srgbClr val="5A6473"/>
-                </a:solidFill>
-                <a:latin typeface="Calibri"/>
-              </a:rPr>
-              <a:t> </a:t>
-            </a:r>
-            <a:r>
-              <a:rPr sz="1300" b="0" i="0" dirty="0" err="1">
-                <a:solidFill>
-                  <a:srgbClr val="5A6473"/>
-                </a:solidFill>
-                <a:latin typeface="Calibri"/>
-              </a:rPr>
-              <a:t>sensiblen</a:t>
-            </a:r>
-            <a:r>
-              <a:rPr sz="1300" b="0" i="0" dirty="0">
-                <a:solidFill>
-                  <a:srgbClr val="5A6473"/>
-                </a:solidFill>
-                <a:latin typeface="Calibri"/>
-              </a:rPr>
-              <a:t> </a:t>
-            </a:r>
-            <a:r>
-              <a:rPr sz="1300" b="0" i="0" dirty="0" err="1">
-                <a:solidFill>
-                  <a:srgbClr val="5A6473"/>
-                </a:solidFill>
-                <a:latin typeface="Calibri"/>
-              </a:rPr>
-              <a:t>Apotheken-Daten</a:t>
-            </a:r>
-            <a:r>
-              <a:rPr sz="1300" b="0" i="0" dirty="0">
-                <a:solidFill>
-                  <a:srgbClr val="5A6473"/>
-                </a:solidFill>
-                <a:latin typeface="Calibri"/>
-              </a:rPr>
-              <a:t> </a:t>
-            </a:r>
-            <a:r>
-              <a:rPr sz="1300" b="0" i="0" dirty="0" err="1">
-                <a:solidFill>
-                  <a:srgbClr val="5A6473"/>
-                </a:solidFill>
-                <a:latin typeface="Calibri"/>
-              </a:rPr>
-              <a:t>bei</a:t>
-            </a:r>
-            <a:r>
-              <a:rPr sz="1300" b="0" i="0" dirty="0">
-                <a:solidFill>
-                  <a:srgbClr val="5A6473"/>
-                </a:solidFill>
-                <a:latin typeface="Calibri"/>
-              </a:rPr>
-              <a:t> </a:t>
-            </a:r>
-            <a:r>
-              <a:rPr sz="1300" b="0" i="0" dirty="0" err="1">
-                <a:solidFill>
-                  <a:srgbClr val="5A6473"/>
-                </a:solidFill>
-                <a:latin typeface="Calibri"/>
-              </a:rPr>
-              <a:t>Dritten</a:t>
-            </a:r>
-            <a:r>
-              <a:rPr sz="1300" b="0" i="0" dirty="0">
-                <a:solidFill>
-                  <a:srgbClr val="5A6473"/>
-                </a:solidFill>
-                <a:latin typeface="Calibri"/>
-              </a:rPr>
-              <a:t>.</a:t>
+              <a:t>Lokale Datenbank – keine Cloud, keine sensiblen Apotheken-Daten bei Dritten.</a:t>
             </a:r>
           </a:p>
         </p:txBody>
@@ -16061,7 +15308,6 @@
           <a:lstStyle/>
           <a:p>
             <a:pPr algn="ctr"/>
-            <a:endParaRPr/>
           </a:p>
         </p:txBody>
       </p:sp>
@@ -16108,7 +15354,6 @@
           <a:lstStyle/>
           <a:p>
             <a:pPr algn="ctr"/>
-            <a:endParaRPr/>
           </a:p>
         </p:txBody>
       </p:sp>
@@ -16129,7 +15374,7 @@
           <a:noFill/>
         </p:spPr>
         <p:txBody>
-          <a:bodyPr wrap="square" lIns="0" tIns="0" rIns="0" bIns="0" anchor="ctr">
+          <a:bodyPr wrap="square" anchor="ctr" lIns="0" rIns="0" tIns="0" bIns="0">
             <a:spAutoFit/>
           </a:bodyPr>
           <a:lstStyle/>
@@ -16174,7 +15419,7 @@
           <a:noFill/>
         </p:spPr>
         <p:txBody>
-          <a:bodyPr wrap="square" lIns="0" tIns="0" rIns="0" bIns="0" anchor="t">
+          <a:bodyPr wrap="square" anchor="t" lIns="0" rIns="0" tIns="0" bIns="0">
             <a:spAutoFit/>
           </a:bodyPr>
           <a:lstStyle/>
@@ -16219,7 +15464,7 @@
           <a:noFill/>
         </p:spPr>
         <p:txBody>
-          <a:bodyPr wrap="square" lIns="0" tIns="0" rIns="0" bIns="0" anchor="t">
+          <a:bodyPr wrap="square" anchor="t" lIns="0" rIns="0" tIns="0" bIns="0">
             <a:spAutoFit/>
           </a:bodyPr>
           <a:lstStyle/>
@@ -16298,7 +15543,6 @@
           <a:lstStyle/>
           <a:p>
             <a:pPr algn="ctr"/>
-            <a:endParaRPr/>
           </a:p>
         </p:txBody>
       </p:sp>
@@ -16345,7 +15589,6 @@
           <a:lstStyle/>
           <a:p>
             <a:pPr algn="ctr"/>
-            <a:endParaRPr/>
           </a:p>
         </p:txBody>
       </p:sp>
@@ -16366,7 +15609,7 @@
           <a:noFill/>
         </p:spPr>
         <p:txBody>
-          <a:bodyPr wrap="square" lIns="0" tIns="0" rIns="0" bIns="0" anchor="ctr">
+          <a:bodyPr wrap="square" anchor="ctr" lIns="0" rIns="0" tIns="0" bIns="0">
             <a:spAutoFit/>
           </a:bodyPr>
           <a:lstStyle/>
@@ -16411,7 +15654,7 @@
           <a:noFill/>
         </p:spPr>
         <p:txBody>
-          <a:bodyPr wrap="square" lIns="0" tIns="0" rIns="0" bIns="0" anchor="t">
+          <a:bodyPr wrap="square" anchor="t" lIns="0" rIns="0" tIns="0" bIns="0">
             <a:spAutoFit/>
           </a:bodyPr>
           <a:lstStyle/>
@@ -16448,7 +15691,7 @@
         <p:spPr>
           <a:xfrm>
             <a:off x="8351215" y="4800599"/>
-            <a:ext cx="2743200" cy="429092"/>
+            <a:ext cx="2743200" cy="914400"/>
           </a:xfrm>
           <a:prstGeom prst="rect">
             <a:avLst/>
@@ -16456,7 +15699,7 @@
           <a:noFill/>
         </p:spPr>
         <p:txBody>
-          <a:bodyPr wrap="square" lIns="0" tIns="0" rIns="0" bIns="0" anchor="t">
+          <a:bodyPr wrap="square" anchor="t" lIns="0" rIns="0" tIns="0" bIns="0">
             <a:spAutoFit/>
           </a:bodyPr>
           <a:lstStyle/>
@@ -16473,112 +15716,13 @@
               </a:spcAft>
             </a:pPr>
             <a:r>
-              <a:rPr sz="1300" b="0" i="0" dirty="0" err="1">
+              <a:rPr sz="1300" b="0" i="0">
                 <a:solidFill>
                   <a:srgbClr val="5A6473"/>
                 </a:solidFill>
                 <a:latin typeface="Calibri"/>
               </a:rPr>
-              <a:t>Exakt</a:t>
-            </a:r>
-            <a:r>
-              <a:rPr sz="1300" b="0" i="0" dirty="0">
-                <a:solidFill>
-                  <a:srgbClr val="5A6473"/>
-                </a:solidFill>
-                <a:latin typeface="Calibri"/>
-              </a:rPr>
-              <a:t> auf </a:t>
-            </a:r>
-            <a:r>
-              <a:rPr lang="de-DE" sz="1300" dirty="0">
-                <a:solidFill>
-                  <a:srgbClr val="5A6473"/>
-                </a:solidFill>
-                <a:latin typeface="Calibri"/>
-              </a:rPr>
-              <a:t>Ihre</a:t>
-            </a:r>
-            <a:r>
-              <a:rPr sz="1300" b="0" i="0" dirty="0">
-                <a:solidFill>
-                  <a:srgbClr val="5A6473"/>
-                </a:solidFill>
-                <a:latin typeface="Calibri"/>
-              </a:rPr>
-              <a:t> </a:t>
-            </a:r>
-            <a:r>
-              <a:rPr sz="1300" b="0" i="0" dirty="0" err="1">
-                <a:solidFill>
-                  <a:srgbClr val="5A6473"/>
-                </a:solidFill>
-                <a:latin typeface="Calibri"/>
-              </a:rPr>
-              <a:t>Prozesse</a:t>
-            </a:r>
-            <a:r>
-              <a:rPr sz="1300" b="0" i="0" dirty="0">
-                <a:solidFill>
-                  <a:srgbClr val="5A6473"/>
-                </a:solidFill>
-                <a:latin typeface="Calibri"/>
-              </a:rPr>
-              <a:t> </a:t>
-            </a:r>
-            <a:r>
-              <a:rPr sz="1300" b="0" i="0" dirty="0" err="1">
-                <a:solidFill>
-                  <a:srgbClr val="5A6473"/>
-                </a:solidFill>
-                <a:latin typeface="Calibri"/>
-              </a:rPr>
-              <a:t>zugeschnitten</a:t>
-            </a:r>
-            <a:r>
-              <a:rPr sz="1300" b="0" i="0" dirty="0">
-                <a:solidFill>
-                  <a:srgbClr val="5A6473"/>
-                </a:solidFill>
-                <a:latin typeface="Calibri"/>
-              </a:rPr>
-              <a:t> und </a:t>
-            </a:r>
-            <a:r>
-              <a:rPr sz="1300" b="0" i="0" dirty="0" err="1">
-                <a:solidFill>
-                  <a:srgbClr val="5A6473"/>
-                </a:solidFill>
-                <a:latin typeface="Calibri"/>
-              </a:rPr>
-              <a:t>jederzeit</a:t>
-            </a:r>
-            <a:r>
-              <a:rPr sz="1300" b="0" i="0" dirty="0">
-                <a:solidFill>
-                  <a:srgbClr val="5A6473"/>
-                </a:solidFill>
-                <a:latin typeface="Calibri"/>
-              </a:rPr>
-              <a:t> </a:t>
-            </a:r>
-            <a:r>
-              <a:rPr sz="1300" b="0" i="0" dirty="0" err="1">
-                <a:solidFill>
-                  <a:srgbClr val="5A6473"/>
-                </a:solidFill>
-                <a:latin typeface="Calibri"/>
-              </a:rPr>
-              <a:t>erweiterbar</a:t>
-            </a:r>
-            <a:r>
-              <a:rPr sz="1300" b="0" i="0" dirty="0">
-                <a:solidFill>
-                  <a:srgbClr val="5A6473"/>
-                </a:solidFill>
-                <a:latin typeface="Calibri"/>
-              </a:rPr>
-              <a:t>.</a:t>
+              <a:t>Exakt auf unsere Prozesse zugeschnitten und jederzeit erweiterbar.</a:t>
             </a:r>
           </a:p>
         </p:txBody>
@@ -16600,7 +15744,7 @@
           <a:noFill/>
         </p:spPr>
         <p:txBody>
-          <a:bodyPr wrap="square" lIns="0" tIns="0" rIns="0" bIns="0" anchor="t">
+          <a:bodyPr wrap="square" anchor="t" lIns="0" rIns="0" tIns="0" bIns="0">
             <a:spAutoFit/>
           </a:bodyPr>
           <a:lstStyle/>
@@ -16637,7 +15781,7 @@
 </file>
 
 <file path=ppt/slides/slide9.xml><?xml version="1.0" encoding="utf-8"?>
-<p:sld xmlns:a="http://schemas.openxmlformats.org/drawingml/2006/main" xmlns:r="http://schemas.openxmlformats.org/officeDocument/2006/relationships" xmlns:p="http://schemas.openxmlformats.org/presentationml/2006/main">
+<p:sld xmlns:a="http://schemas.openxmlformats.org/drawingml/2006/main" xmlns:p="http://schemas.openxmlformats.org/presentationml/2006/main" xmlns:r="http://schemas.openxmlformats.org/officeDocument/2006/relationships">
   <p:cSld>
     <p:bg>
       <p:bgPr>
@@ -16653,14 +15797,7 @@
         <p:cNvGrpSpPr/>
         <p:nvPr/>
       </p:nvGrpSpPr>
-      <p:grpSpPr>
-        <a:xfrm>
-          <a:off x="0" y="0"/>
-          <a:ext cx="0" cy="0"/>
-          <a:chOff x="0" y="0"/>
-          <a:chExt cx="0" cy="0"/>
-        </a:xfrm>
-      </p:grpSpPr>
+      <p:grpSpPr/>
       <p:sp>
         <p:nvSpPr>
           <p:cNvPr id="2" name="TextBox 1"/>
@@ -16678,7 +15815,7 @@
           <a:noFill/>
         </p:spPr>
         <p:txBody>
-          <a:bodyPr wrap="square" lIns="0" tIns="0" rIns="0" bIns="0" anchor="t">
+          <a:bodyPr wrap="square" anchor="t" lIns="0" rIns="0" tIns="0" bIns="0">
             <a:spAutoFit/>
           </a:bodyPr>
           <a:lstStyle/>
@@ -16757,7 +15894,6 @@
           <a:lstStyle/>
           <a:p>
             <a:pPr algn="ctr"/>
-            <a:endParaRPr/>
           </a:p>
         </p:txBody>
       </p:sp>
@@ -16802,7 +15938,6 @@
           <a:lstStyle/>
           <a:p>
             <a:pPr algn="ctr"/>
-            <a:endParaRPr/>
           </a:p>
         </p:txBody>
       </p:sp>
@@ -16823,7 +15958,7 @@
           <a:noFill/>
         </p:spPr>
         <p:txBody>
-          <a:bodyPr wrap="square" lIns="0" tIns="0" rIns="0" bIns="0" anchor="t">
+          <a:bodyPr wrap="square" anchor="t" lIns="0" rIns="0" tIns="0" bIns="0">
             <a:spAutoFit/>
           </a:bodyPr>
           <a:lstStyle/>
@@ -16860,7 +15995,7 @@
         <p:spPr>
           <a:xfrm>
             <a:off x="1234440" y="2313432"/>
-            <a:ext cx="4572000" cy="395814"/>
+            <a:ext cx="4572000" cy="548640"/>
           </a:xfrm>
           <a:prstGeom prst="rect">
             <a:avLst/>
@@ -16868,7 +16003,7 @@
           <a:noFill/>
         </p:spPr>
         <p:txBody>
-          <a:bodyPr wrap="square" lIns="0" tIns="0" rIns="0" bIns="0" anchor="t">
+          <a:bodyPr wrap="square" anchor="t" lIns="0" rIns="0" tIns="0" bIns="0">
             <a:spAutoFit/>
           </a:bodyPr>
           <a:lstStyle/>
@@ -16885,103 +16020,13 @@
               </a:spcAft>
             </a:pPr>
             <a:r>
-              <a:rPr sz="1250" b="0" i="0" dirty="0" err="1">
+              <a:rPr sz="1250" b="0" i="0">
                 <a:solidFill>
                   <a:srgbClr val="5A6473"/>
                 </a:solidFill>
                 <a:latin typeface="Calibri"/>
               </a:rPr>
-              <a:t>Läuft</a:t>
-            </a:r>
-            <a:r>
-              <a:rPr sz="1250" b="0" i="0" dirty="0">
-                <a:solidFill>
-                  <a:srgbClr val="5A6473"/>
-                </a:solidFill>
-                <a:latin typeface="Calibri"/>
-              </a:rPr>
-              <a:t> </a:t>
-            </a:r>
-            <a:r>
-              <a:rPr sz="1250" b="0" i="0" dirty="0" err="1">
-                <a:solidFill>
-                  <a:srgbClr val="5A6473"/>
-                </a:solidFill>
-                <a:latin typeface="Calibri"/>
-              </a:rPr>
-              <a:t>lokal</a:t>
-            </a:r>
-            <a:r>
-              <a:rPr sz="1250" b="0" i="0" dirty="0">
-                <a:solidFill>
-                  <a:srgbClr val="5A6473"/>
-                </a:solidFill>
-                <a:latin typeface="Calibri"/>
-              </a:rPr>
-              <a:t> auf den </a:t>
-            </a:r>
-            <a:r>
-              <a:rPr sz="1250" b="0" i="0" dirty="0" err="1">
-                <a:solidFill>
-                  <a:srgbClr val="5A6473"/>
-                </a:solidFill>
-                <a:latin typeface="Calibri"/>
-              </a:rPr>
-              <a:t>Arbeitsplätzen</a:t>
-            </a:r>
-            <a:r>
-              <a:rPr sz="1250" b="0" i="0" dirty="0">
-                <a:solidFill>
-                  <a:srgbClr val="5A6473"/>
-                </a:solidFill>
-                <a:latin typeface="Calibri"/>
-              </a:rPr>
-              <a:t>, Installation per Setup – </a:t>
-            </a:r>
-            <a:r>
-              <a:rPr lang="de-DE" sz="1250" b="0" i="0" dirty="0">
-                <a:solidFill>
-                  <a:srgbClr val="5A6473"/>
-                </a:solidFill>
-                <a:latin typeface="Calibri"/>
-              </a:rPr>
-              <a:t>noch </a:t>
-            </a:r>
-            <a:r>
-              <a:rPr sz="1250" b="0" i="0" dirty="0" err="1">
-                <a:solidFill>
-                  <a:srgbClr val="5A6473"/>
-                </a:solidFill>
-                <a:latin typeface="Calibri"/>
-              </a:rPr>
-              <a:t>kein</a:t>
-            </a:r>
-            <a:r>
-              <a:rPr sz="1250" b="0" i="0" dirty="0">
-                <a:solidFill>
-                  <a:srgbClr val="5A6473"/>
-                </a:solidFill>
-                <a:latin typeface="Calibri"/>
-              </a:rPr>
-              <a:t> Server </a:t>
-            </a:r>
-            <a:r>
-              <a:rPr sz="1250" b="0" i="0" dirty="0" err="1">
-                <a:solidFill>
-                  <a:srgbClr val="5A6473"/>
-                </a:solidFill>
-                <a:latin typeface="Calibri"/>
-              </a:rPr>
-              <a:t>nötig</a:t>
-            </a:r>
-            <a:r>
-              <a:rPr sz="1250" b="0" i="0" dirty="0">
-                <a:solidFill>
-                  <a:srgbClr val="5A6473"/>
-                </a:solidFill>
-                <a:latin typeface="Calibri"/>
-              </a:rPr>
-              <a:t>.</a:t>
+              <a:t>Läuft lokal auf den Arbeitsplätzen, Installation per Setup – kein Server nötig.</a:t>
             </a:r>
           </a:p>
         </p:txBody>
@@ -17037,7 +16082,6 @@
           <a:lstStyle/>
           <a:p>
             <a:pPr algn="ctr"/>
-            <a:endParaRPr/>
           </a:p>
         </p:txBody>
       </p:sp>
@@ -17082,7 +16126,6 @@
           <a:lstStyle/>
           <a:p>
             <a:pPr algn="ctr"/>
-            <a:endParaRPr/>
           </a:p>
         </p:txBody>
       </p:sp>
@@ -17103,7 +16146,7 @@
           <a:noFill/>
         </p:spPr>
         <p:txBody>
-          <a:bodyPr wrap="square" lIns="0" tIns="0" rIns="0" bIns="0" anchor="t">
+          <a:bodyPr wrap="square" anchor="t" lIns="0" rIns="0" tIns="0" bIns="0">
             <a:spAutoFit/>
           </a:bodyPr>
           <a:lstStyle/>
@@ -17148,7 +16191,7 @@
           <a:noFill/>
         </p:spPr>
         <p:txBody>
-          <a:bodyPr wrap="square" lIns="0" tIns="0" rIns="0" bIns="0" anchor="t">
+          <a:bodyPr wrap="square" anchor="t" lIns="0" rIns="0" tIns="0" bIns="0">
             <a:spAutoFit/>
           </a:bodyPr>
           <a:lstStyle/>
@@ -17227,7 +16270,6 @@
           <a:lstStyle/>
           <a:p>
             <a:pPr algn="ctr"/>
-            <a:endParaRPr/>
           </a:p>
         </p:txBody>
       </p:sp>
@@ -17272,7 +16314,6 @@
           <a:lstStyle/>
           <a:p>
             <a:pPr algn="ctr"/>
-            <a:endParaRPr/>
           </a:p>
         </p:txBody>
       </p:sp>
@@ -17293,7 +16334,7 @@
           <a:noFill/>
         </p:spPr>
         <p:txBody>
-          <a:bodyPr wrap="square" lIns="0" tIns="0" rIns="0" bIns="0" anchor="t">
+          <a:bodyPr wrap="square" anchor="t" lIns="0" rIns="0" tIns="0" bIns="0">
             <a:spAutoFit/>
           </a:bodyPr>
           <a:lstStyle/>
@@ -17338,7 +16379,7 @@
           <a:noFill/>
         </p:spPr>
         <p:txBody>
-          <a:bodyPr wrap="square" lIns="0" tIns="0" rIns="0" bIns="0" anchor="t">
+          <a:bodyPr wrap="square" anchor="t" lIns="0" rIns="0" tIns="0" bIns="0">
             <a:spAutoFit/>
           </a:bodyPr>
           <a:lstStyle/>
@@ -17417,7 +16458,6 @@
           <a:lstStyle/>
           <a:p>
             <a:pPr algn="ctr"/>
-            <a:endParaRPr/>
           </a:p>
         </p:txBody>
       </p:sp>
@@ -17462,7 +16502,6 @@
           <a:lstStyle/>
           <a:p>
             <a:pPr algn="ctr"/>
-            <a:endParaRPr/>
           </a:p>
         </p:txBody>
       </p:sp>
@@ -17483,7 +16522,7 @@
           <a:noFill/>
         </p:spPr>
         <p:txBody>
-          <a:bodyPr wrap="square" lIns="0" tIns="0" rIns="0" bIns="0" anchor="t">
+          <a:bodyPr wrap="square" anchor="t" lIns="0" rIns="0" tIns="0" bIns="0">
             <a:spAutoFit/>
           </a:bodyPr>
           <a:lstStyle/>
@@ -17528,7 +16567,7 @@
           <a:noFill/>
         </p:spPr>
         <p:txBody>
-          <a:bodyPr wrap="square" lIns="0" tIns="0" rIns="0" bIns="0" anchor="t">
+          <a:bodyPr wrap="square" anchor="t" lIns="0" rIns="0" tIns="0" bIns="0">
             <a:spAutoFit/>
           </a:bodyPr>
           <a:lstStyle/>
@@ -17607,7 +16646,6 @@
           <a:lstStyle/>
           <a:p>
             <a:pPr algn="ctr"/>
-            <a:endParaRPr/>
           </a:p>
         </p:txBody>
       </p:sp>
@@ -17652,7 +16690,6 @@
           <a:lstStyle/>
           <a:p>
             <a:pPr algn="ctr"/>
-            <a:endParaRPr/>
           </a:p>
         </p:txBody>
       </p:sp>
@@ -17673,7 +16710,7 @@
           <a:noFill/>
         </p:spPr>
         <p:txBody>
-          <a:bodyPr wrap="square" lIns="0" tIns="0" rIns="0" bIns="0" anchor="t">
+          <a:bodyPr wrap="square" anchor="t" lIns="0" rIns="0" tIns="0" bIns="0">
             <a:spAutoFit/>
           </a:bodyPr>
           <a:lstStyle/>
@@ -17718,7 +16755,7 @@
           <a:noFill/>
         </p:spPr>
         <p:txBody>
-          <a:bodyPr wrap="square" lIns="0" tIns="0" rIns="0" bIns="0" anchor="t">
+          <a:bodyPr wrap="square" anchor="t" lIns="0" rIns="0" tIns="0" bIns="0">
             <a:spAutoFit/>
           </a:bodyPr>
           <a:lstStyle/>
@@ -17797,7 +16834,6 @@
           <a:lstStyle/>
           <a:p>
             <a:pPr algn="ctr"/>
-            <a:endParaRPr/>
           </a:p>
         </p:txBody>
       </p:sp>
@@ -17842,7 +16878,6 @@
           <a:lstStyle/>
           <a:p>
             <a:pPr algn="ctr"/>
-            <a:endParaRPr/>
           </a:p>
         </p:txBody>
       </p:sp>
@@ -17863,7 +16898,7 @@
           <a:noFill/>
         </p:spPr>
         <p:txBody>
-          <a:bodyPr wrap="square" lIns="0" tIns="0" rIns="0" bIns="0" anchor="t">
+          <a:bodyPr wrap="square" anchor="t" lIns="0" rIns="0" tIns="0" bIns="0">
             <a:spAutoFit/>
           </a:bodyPr>
           <a:lstStyle/>
@@ -17908,7 +16943,7 @@
           <a:noFill/>
         </p:spPr>
         <p:txBody>
-          <a:bodyPr wrap="square" lIns="0" tIns="0" rIns="0" bIns="0" anchor="t">
+          <a:bodyPr wrap="square" anchor="t" lIns="0" rIns="0" tIns="0" bIns="0">
             <a:spAutoFit/>
           </a:bodyPr>
           <a:lstStyle/>
@@ -17953,7 +16988,7 @@
           <a:noFill/>
         </p:spPr>
         <p:txBody>
-          <a:bodyPr wrap="square" lIns="0" tIns="0" rIns="0" bIns="0" anchor="t">
+          <a:bodyPr wrap="square" anchor="t" lIns="0" rIns="0" tIns="0" bIns="0">
             <a:spAutoFit/>
           </a:bodyPr>
           <a:lstStyle/>

--- a/NMGone_Praesentation_Geschaeftsfuehrung.pptx
+++ b/NMGone_Praesentation_Geschaeftsfuehrung.pptx
@@ -5,20 +5,21 @@
     <p:sldMasterId id="2147483648" r:id="rId1"/>
   </p:sldMasterIdLst>
   <p:sldIdLst>
-    <p:sldId id="256" r:id="rId7"/>
-    <p:sldId id="257" r:id="rId8"/>
-    <p:sldId id="258" r:id="rId9"/>
-    <p:sldId id="259" r:id="rId10"/>
-    <p:sldId id="260" r:id="rId11"/>
-    <p:sldId id="261" r:id="rId12"/>
-    <p:sldId id="262" r:id="rId13"/>
-    <p:sldId id="263" r:id="rId14"/>
-    <p:sldId id="264" r:id="rId15"/>
-    <p:sldId id="265" r:id="rId16"/>
-    <p:sldId id="266" r:id="rId17"/>
-    <p:sldId id="267" r:id="rId18"/>
+    <p:sldId id="256" r:id="rId2"/>
+    <p:sldId id="257" r:id="rId3"/>
+    <p:sldId id="258" r:id="rId4"/>
+    <p:sldId id="259" r:id="rId5"/>
+    <p:sldId id="260" r:id="rId6"/>
+    <p:sldId id="261" r:id="rId7"/>
+    <p:sldId id="262" r:id="rId8"/>
+    <p:sldId id="263" r:id="rId9"/>
+    <p:sldId id="264" r:id="rId10"/>
+    <p:sldId id="265" r:id="rId11"/>
+    <p:sldId id="266" r:id="rId12"/>
+    <p:sldId id="267" r:id="rId13"/>
+    <p:sldId id="268" r:id="rId14"/>
   </p:sldIdLst>
-  <p:sldSz cx="12191695" cy="6858000" type="screen4x3"/>
+  <p:sldSz cx="12192000" cy="6858000"/>
   <p:notesSz cx="6858000" cy="9144000"/>
   <p:defaultTextStyle>
     <a:defPPr>
@@ -115,6 +116,22 @@
       </a:defRPr>
     </a:lvl9pPr>
   </p:defaultTextStyle>
+  <p:extLst>
+    <p:ext uri="{EFAFB233-063F-42B5-8137-9DF3F51BA10A}">
+      <p15:sldGuideLst xmlns:p15="http://schemas.microsoft.com/office/powerpoint/2012/main">
+        <p15:guide id="1" orient="horz" pos="2160">
+          <p15:clr>
+            <a:srgbClr val="A4A3A4"/>
+          </p15:clr>
+        </p15:guide>
+        <p15:guide id="2" pos="2880">
+          <p15:clr>
+            <a:srgbClr val="A4A3A4"/>
+          </p15:clr>
+        </p15:guide>
+      </p15:sldGuideLst>
+    </p:ext>
+  </p:extLst>
 </p:presentation>
 </file>
 
@@ -156,10 +173,9 @@
           <a:lstStyle/>
           <a:p>
             <a:r>
-              <a:rPr lang="en-US" smtClean="0"/>
+              <a:rPr lang="en-US"/>
               <a:t>Click to edit Master title style</a:t>
             </a:r>
-            <a:endParaRPr lang="en-US"/>
           </a:p>
         </p:txBody>
       </p:sp>
@@ -275,10 +291,9 @@
           </a:lstStyle>
           <a:p>
             <a:r>
-              <a:rPr lang="en-US" smtClean="0"/>
+              <a:rPr lang="en-US"/>
               <a:t>Click to edit Master subtitle style</a:t>
             </a:r>
-            <a:endParaRPr lang="en-US"/>
           </a:p>
         </p:txBody>
       </p:sp>
@@ -299,7 +314,7 @@
           <a:p>
             <a:fld id="{5BCAD085-E8A6-8845-BD4E-CB4CCA059FC4}" type="datetimeFigureOut">
               <a:rPr lang="en-US" smtClean="0"/>
-              <a:t>1/27/13</a:t>
+              <a:t>6/23/2026</a:t>
             </a:fld>
             <a:endParaRPr lang="en-US"/>
           </a:p>
@@ -341,7 +356,7 @@
           <a:p>
             <a:fld id="{C1FF6DA9-008F-8B48-92A6-B652298478BF}" type="slidenum">
               <a:rPr lang="en-US" smtClean="0"/>
-              <a:t>‹#›</a:t>
+              <a:t>‹Nr.›</a:t>
             </a:fld>
             <a:endParaRPr lang="en-US"/>
           </a:p>
@@ -393,10 +408,9 @@
           <a:lstStyle/>
           <a:p>
             <a:r>
-              <a:rPr lang="en-US" smtClean="0"/>
+              <a:rPr lang="en-US"/>
               <a:t>Click to edit Master title style</a:t>
             </a:r>
-            <a:endParaRPr lang="en-US"/>
           </a:p>
         </p:txBody>
       </p:sp>
@@ -417,38 +431,37 @@
           <a:p>
             <a:pPr lvl="0"/>
             <a:r>
-              <a:rPr lang="en-US" smtClean="0"/>
+              <a:rPr lang="en-US"/>
               <a:t>Click to edit Master text styles</a:t>
             </a:r>
           </a:p>
           <a:p>
             <a:pPr lvl="1"/>
             <a:r>
-              <a:rPr lang="en-US" smtClean="0"/>
+              <a:rPr lang="en-US"/>
               <a:t>Second level</a:t>
             </a:r>
           </a:p>
           <a:p>
             <a:pPr lvl="2"/>
             <a:r>
-              <a:rPr lang="en-US" smtClean="0"/>
+              <a:rPr lang="en-US"/>
               <a:t>Third level</a:t>
             </a:r>
           </a:p>
           <a:p>
             <a:pPr lvl="3"/>
             <a:r>
-              <a:rPr lang="en-US" smtClean="0"/>
+              <a:rPr lang="en-US"/>
               <a:t>Fourth level</a:t>
             </a:r>
           </a:p>
           <a:p>
             <a:pPr lvl="4"/>
             <a:r>
-              <a:rPr lang="en-US" smtClean="0"/>
+              <a:rPr lang="en-US"/>
               <a:t>Fifth level</a:t>
             </a:r>
-            <a:endParaRPr lang="en-US"/>
           </a:p>
         </p:txBody>
       </p:sp>
@@ -469,7 +482,7 @@
           <a:p>
             <a:fld id="{5BCAD085-E8A6-8845-BD4E-CB4CCA059FC4}" type="datetimeFigureOut">
               <a:rPr lang="en-US" smtClean="0"/>
-              <a:t>1/27/13</a:t>
+              <a:t>6/23/2026</a:t>
             </a:fld>
             <a:endParaRPr lang="en-US"/>
           </a:p>
@@ -511,7 +524,7 @@
           <a:p>
             <a:fld id="{C1FF6DA9-008F-8B48-92A6-B652298478BF}" type="slidenum">
               <a:rPr lang="en-US" smtClean="0"/>
-              <a:t>‹#›</a:t>
+              <a:t>‹Nr.›</a:t>
             </a:fld>
             <a:endParaRPr lang="en-US"/>
           </a:p>
@@ -568,10 +581,9 @@
           <a:lstStyle/>
           <a:p>
             <a:r>
-              <a:rPr lang="en-US" smtClean="0"/>
+              <a:rPr lang="en-US"/>
               <a:t>Click to edit Master title style</a:t>
             </a:r>
-            <a:endParaRPr lang="en-US"/>
           </a:p>
         </p:txBody>
       </p:sp>
@@ -597,38 +609,37 @@
           <a:p>
             <a:pPr lvl="0"/>
             <a:r>
-              <a:rPr lang="en-US" smtClean="0"/>
+              <a:rPr lang="en-US"/>
               <a:t>Click to edit Master text styles</a:t>
             </a:r>
           </a:p>
           <a:p>
             <a:pPr lvl="1"/>
             <a:r>
-              <a:rPr lang="en-US" smtClean="0"/>
+              <a:rPr lang="en-US"/>
               <a:t>Second level</a:t>
             </a:r>
           </a:p>
           <a:p>
             <a:pPr lvl="2"/>
             <a:r>
-              <a:rPr lang="en-US" smtClean="0"/>
+              <a:rPr lang="en-US"/>
               <a:t>Third level</a:t>
             </a:r>
           </a:p>
           <a:p>
             <a:pPr lvl="3"/>
             <a:r>
-              <a:rPr lang="en-US" smtClean="0"/>
+              <a:rPr lang="en-US"/>
               <a:t>Fourth level</a:t>
             </a:r>
           </a:p>
           <a:p>
             <a:pPr lvl="4"/>
             <a:r>
-              <a:rPr lang="en-US" smtClean="0"/>
+              <a:rPr lang="en-US"/>
               <a:t>Fifth level</a:t>
             </a:r>
-            <a:endParaRPr lang="en-US"/>
           </a:p>
         </p:txBody>
       </p:sp>
@@ -649,7 +660,7 @@
           <a:p>
             <a:fld id="{5BCAD085-E8A6-8845-BD4E-CB4CCA059FC4}" type="datetimeFigureOut">
               <a:rPr lang="en-US" smtClean="0"/>
-              <a:t>1/27/13</a:t>
+              <a:t>6/23/2026</a:t>
             </a:fld>
             <a:endParaRPr lang="en-US"/>
           </a:p>
@@ -691,7 +702,7 @@
           <a:p>
             <a:fld id="{C1FF6DA9-008F-8B48-92A6-B652298478BF}" type="slidenum">
               <a:rPr lang="en-US" smtClean="0"/>
-              <a:t>‹#›</a:t>
+              <a:t>‹Nr.›</a:t>
             </a:fld>
             <a:endParaRPr lang="en-US"/>
           </a:p>
@@ -743,10 +754,9 @@
           <a:lstStyle/>
           <a:p>
             <a:r>
-              <a:rPr lang="en-US" smtClean="0"/>
+              <a:rPr lang="en-US"/>
               <a:t>Click to edit Master title style</a:t>
             </a:r>
-            <a:endParaRPr lang="en-US"/>
           </a:p>
         </p:txBody>
       </p:sp>
@@ -767,38 +777,37 @@
           <a:p>
             <a:pPr lvl="0"/>
             <a:r>
-              <a:rPr lang="en-US" smtClean="0"/>
+              <a:rPr lang="en-US"/>
               <a:t>Click to edit Master text styles</a:t>
             </a:r>
           </a:p>
           <a:p>
             <a:pPr lvl="1"/>
             <a:r>
-              <a:rPr lang="en-US" smtClean="0"/>
+              <a:rPr lang="en-US"/>
               <a:t>Second level</a:t>
             </a:r>
           </a:p>
           <a:p>
             <a:pPr lvl="2"/>
             <a:r>
-              <a:rPr lang="en-US" smtClean="0"/>
+              <a:rPr lang="en-US"/>
               <a:t>Third level</a:t>
             </a:r>
           </a:p>
           <a:p>
             <a:pPr lvl="3"/>
             <a:r>
-              <a:rPr lang="en-US" smtClean="0"/>
+              <a:rPr lang="en-US"/>
               <a:t>Fourth level</a:t>
             </a:r>
           </a:p>
           <a:p>
             <a:pPr lvl="4"/>
             <a:r>
-              <a:rPr lang="en-US" smtClean="0"/>
+              <a:rPr lang="en-US"/>
               <a:t>Fifth level</a:t>
             </a:r>
-            <a:endParaRPr lang="en-US"/>
           </a:p>
         </p:txBody>
       </p:sp>
@@ -819,7 +828,7 @@
           <a:p>
             <a:fld id="{5BCAD085-E8A6-8845-BD4E-CB4CCA059FC4}" type="datetimeFigureOut">
               <a:rPr lang="en-US" smtClean="0"/>
-              <a:t>1/27/13</a:t>
+              <a:t>6/23/2026</a:t>
             </a:fld>
             <a:endParaRPr lang="en-US"/>
           </a:p>
@@ -861,7 +870,7 @@
           <a:p>
             <a:fld id="{C1FF6DA9-008F-8B48-92A6-B652298478BF}" type="slidenum">
               <a:rPr lang="en-US" smtClean="0"/>
-              <a:t>‹#›</a:t>
+              <a:t>‹Nr.›</a:t>
             </a:fld>
             <a:endParaRPr lang="en-US"/>
           </a:p>
@@ -922,10 +931,9 @@
           </a:lstStyle>
           <a:p>
             <a:r>
-              <a:rPr lang="en-US" smtClean="0"/>
+              <a:rPr lang="en-US"/>
               <a:t>Click to edit Master title style</a:t>
             </a:r>
-            <a:endParaRPr lang="en-US"/>
           </a:p>
         </p:txBody>
       </p:sp>
@@ -1042,7 +1050,7 @@
           <a:p>
             <a:pPr lvl="0"/>
             <a:r>
-              <a:rPr lang="en-US" smtClean="0"/>
+              <a:rPr lang="en-US"/>
               <a:t>Click to edit Master text styles</a:t>
             </a:r>
           </a:p>
@@ -1065,7 +1073,7 @@
           <a:p>
             <a:fld id="{5BCAD085-E8A6-8845-BD4E-CB4CCA059FC4}" type="datetimeFigureOut">
               <a:rPr lang="en-US" smtClean="0"/>
-              <a:t>1/27/13</a:t>
+              <a:t>6/23/2026</a:t>
             </a:fld>
             <a:endParaRPr lang="en-US"/>
           </a:p>
@@ -1107,7 +1115,7 @@
           <a:p>
             <a:fld id="{C1FF6DA9-008F-8B48-92A6-B652298478BF}" type="slidenum">
               <a:rPr lang="en-US" smtClean="0"/>
-              <a:t>‹#›</a:t>
+              <a:t>‹Nr.›</a:t>
             </a:fld>
             <a:endParaRPr lang="en-US"/>
           </a:p>
@@ -1159,10 +1167,9 @@
           <a:lstStyle/>
           <a:p>
             <a:r>
-              <a:rPr lang="en-US" smtClean="0"/>
+              <a:rPr lang="en-US"/>
               <a:t>Click to edit Master title style</a:t>
             </a:r>
-            <a:endParaRPr lang="en-US"/>
           </a:p>
         </p:txBody>
       </p:sp>
@@ -1216,38 +1223,37 @@
           <a:p>
             <a:pPr lvl="0"/>
             <a:r>
-              <a:rPr lang="en-US" smtClean="0"/>
+              <a:rPr lang="en-US"/>
               <a:t>Click to edit Master text styles</a:t>
             </a:r>
           </a:p>
           <a:p>
             <a:pPr lvl="1"/>
             <a:r>
-              <a:rPr lang="en-US" smtClean="0"/>
+              <a:rPr lang="en-US"/>
               <a:t>Second level</a:t>
             </a:r>
           </a:p>
           <a:p>
             <a:pPr lvl="2"/>
             <a:r>
-              <a:rPr lang="en-US" smtClean="0"/>
+              <a:rPr lang="en-US"/>
               <a:t>Third level</a:t>
             </a:r>
           </a:p>
           <a:p>
             <a:pPr lvl="3"/>
             <a:r>
-              <a:rPr lang="en-US" smtClean="0"/>
+              <a:rPr lang="en-US"/>
               <a:t>Fourth level</a:t>
             </a:r>
           </a:p>
           <a:p>
             <a:pPr lvl="4"/>
             <a:r>
-              <a:rPr lang="en-US" smtClean="0"/>
+              <a:rPr lang="en-US"/>
               <a:t>Fifth level</a:t>
             </a:r>
-            <a:endParaRPr lang="en-US"/>
           </a:p>
         </p:txBody>
       </p:sp>
@@ -1301,38 +1307,37 @@
           <a:p>
             <a:pPr lvl="0"/>
             <a:r>
-              <a:rPr lang="en-US" smtClean="0"/>
+              <a:rPr lang="en-US"/>
               <a:t>Click to edit Master text styles</a:t>
             </a:r>
           </a:p>
           <a:p>
             <a:pPr lvl="1"/>
             <a:r>
-              <a:rPr lang="en-US" smtClean="0"/>
+              <a:rPr lang="en-US"/>
               <a:t>Second level</a:t>
             </a:r>
           </a:p>
           <a:p>
             <a:pPr lvl="2"/>
             <a:r>
-              <a:rPr lang="en-US" smtClean="0"/>
+              <a:rPr lang="en-US"/>
               <a:t>Third level</a:t>
             </a:r>
           </a:p>
           <a:p>
             <a:pPr lvl="3"/>
             <a:r>
-              <a:rPr lang="en-US" smtClean="0"/>
+              <a:rPr lang="en-US"/>
               <a:t>Fourth level</a:t>
             </a:r>
           </a:p>
           <a:p>
             <a:pPr lvl="4"/>
             <a:r>
-              <a:rPr lang="en-US" smtClean="0"/>
+              <a:rPr lang="en-US"/>
               <a:t>Fifth level</a:t>
             </a:r>
-            <a:endParaRPr lang="en-US"/>
           </a:p>
         </p:txBody>
       </p:sp>
@@ -1353,7 +1358,7 @@
           <a:p>
             <a:fld id="{5BCAD085-E8A6-8845-BD4E-CB4CCA059FC4}" type="datetimeFigureOut">
               <a:rPr lang="en-US" smtClean="0"/>
-              <a:t>1/27/13</a:t>
+              <a:t>6/23/2026</a:t>
             </a:fld>
             <a:endParaRPr lang="en-US"/>
           </a:p>
@@ -1395,7 +1400,7 @@
           <a:p>
             <a:fld id="{C1FF6DA9-008F-8B48-92A6-B652298478BF}" type="slidenum">
               <a:rPr lang="en-US" smtClean="0"/>
-              <a:t>‹#›</a:t>
+              <a:t>‹Nr.›</a:t>
             </a:fld>
             <a:endParaRPr lang="en-US"/>
           </a:p>
@@ -1451,10 +1456,9 @@
           </a:lstStyle>
           <a:p>
             <a:r>
-              <a:rPr lang="en-US" smtClean="0"/>
+              <a:rPr lang="en-US"/>
               <a:t>Click to edit Master title style</a:t>
             </a:r>
-            <a:endParaRPr lang="en-US"/>
           </a:p>
         </p:txBody>
       </p:sp>
@@ -1517,7 +1521,7 @@
           <a:p>
             <a:pPr lvl="0"/>
             <a:r>
-              <a:rPr lang="en-US" smtClean="0"/>
+              <a:rPr lang="en-US"/>
               <a:t>Click to edit Master text styles</a:t>
             </a:r>
           </a:p>
@@ -1573,38 +1577,37 @@
           <a:p>
             <a:pPr lvl="0"/>
             <a:r>
-              <a:rPr lang="en-US" smtClean="0"/>
+              <a:rPr lang="en-US"/>
               <a:t>Click to edit Master text styles</a:t>
             </a:r>
           </a:p>
           <a:p>
             <a:pPr lvl="1"/>
             <a:r>
-              <a:rPr lang="en-US" smtClean="0"/>
+              <a:rPr lang="en-US"/>
               <a:t>Second level</a:t>
             </a:r>
           </a:p>
           <a:p>
             <a:pPr lvl="2"/>
             <a:r>
-              <a:rPr lang="en-US" smtClean="0"/>
+              <a:rPr lang="en-US"/>
               <a:t>Third level</a:t>
             </a:r>
           </a:p>
           <a:p>
             <a:pPr lvl="3"/>
             <a:r>
-              <a:rPr lang="en-US" smtClean="0"/>
+              <a:rPr lang="en-US"/>
               <a:t>Fourth level</a:t>
             </a:r>
           </a:p>
           <a:p>
             <a:pPr lvl="4"/>
             <a:r>
-              <a:rPr lang="en-US" smtClean="0"/>
+              <a:rPr lang="en-US"/>
               <a:t>Fifth level</a:t>
             </a:r>
-            <a:endParaRPr lang="en-US"/>
           </a:p>
         </p:txBody>
       </p:sp>
@@ -1667,7 +1670,7 @@
           <a:p>
             <a:pPr lvl="0"/>
             <a:r>
-              <a:rPr lang="en-US" smtClean="0"/>
+              <a:rPr lang="en-US"/>
               <a:t>Click to edit Master text styles</a:t>
             </a:r>
           </a:p>
@@ -1723,38 +1726,37 @@
           <a:p>
             <a:pPr lvl="0"/>
             <a:r>
-              <a:rPr lang="en-US" smtClean="0"/>
+              <a:rPr lang="en-US"/>
               <a:t>Click to edit Master text styles</a:t>
             </a:r>
           </a:p>
           <a:p>
             <a:pPr lvl="1"/>
             <a:r>
-              <a:rPr lang="en-US" smtClean="0"/>
+              <a:rPr lang="en-US"/>
               <a:t>Second level</a:t>
             </a:r>
           </a:p>
           <a:p>
             <a:pPr lvl="2"/>
             <a:r>
-              <a:rPr lang="en-US" smtClean="0"/>
+              <a:rPr lang="en-US"/>
               <a:t>Third level</a:t>
             </a:r>
           </a:p>
           <a:p>
             <a:pPr lvl="3"/>
             <a:r>
-              <a:rPr lang="en-US" smtClean="0"/>
+              <a:rPr lang="en-US"/>
               <a:t>Fourth level</a:t>
             </a:r>
           </a:p>
           <a:p>
             <a:pPr lvl="4"/>
             <a:r>
-              <a:rPr lang="en-US" smtClean="0"/>
+              <a:rPr lang="en-US"/>
               <a:t>Fifth level</a:t>
             </a:r>
-            <a:endParaRPr lang="en-US"/>
           </a:p>
         </p:txBody>
       </p:sp>
@@ -1775,7 +1777,7 @@
           <a:p>
             <a:fld id="{5BCAD085-E8A6-8845-BD4E-CB4CCA059FC4}" type="datetimeFigureOut">
               <a:rPr lang="en-US" smtClean="0"/>
-              <a:t>1/27/13</a:t>
+              <a:t>6/23/2026</a:t>
             </a:fld>
             <a:endParaRPr lang="en-US"/>
           </a:p>
@@ -1817,7 +1819,7 @@
           <a:p>
             <a:fld id="{C1FF6DA9-008F-8B48-92A6-B652298478BF}" type="slidenum">
               <a:rPr lang="en-US" smtClean="0"/>
-              <a:t>‹#›</a:t>
+              <a:t>‹Nr.›</a:t>
             </a:fld>
             <a:endParaRPr lang="en-US"/>
           </a:p>
@@ -1869,10 +1871,9 @@
           <a:lstStyle/>
           <a:p>
             <a:r>
-              <a:rPr lang="en-US" smtClean="0"/>
+              <a:rPr lang="en-US"/>
               <a:t>Click to edit Master title style</a:t>
             </a:r>
-            <a:endParaRPr lang="en-US"/>
           </a:p>
         </p:txBody>
       </p:sp>
@@ -1893,7 +1894,7 @@
           <a:p>
             <a:fld id="{5BCAD085-E8A6-8845-BD4E-CB4CCA059FC4}" type="datetimeFigureOut">
               <a:rPr lang="en-US" smtClean="0"/>
-              <a:t>1/27/13</a:t>
+              <a:t>6/23/2026</a:t>
             </a:fld>
             <a:endParaRPr lang="en-US"/>
           </a:p>
@@ -1935,7 +1936,7 @@
           <a:p>
             <a:fld id="{C1FF6DA9-008F-8B48-92A6-B652298478BF}" type="slidenum">
               <a:rPr lang="en-US" smtClean="0"/>
-              <a:t>‹#›</a:t>
+              <a:t>‹Nr.›</a:t>
             </a:fld>
             <a:endParaRPr lang="en-US"/>
           </a:p>
@@ -1988,7 +1989,7 @@
           <a:p>
             <a:fld id="{5BCAD085-E8A6-8845-BD4E-CB4CCA059FC4}" type="datetimeFigureOut">
               <a:rPr lang="en-US" smtClean="0"/>
-              <a:t>1/27/13</a:t>
+              <a:t>6/23/2026</a:t>
             </a:fld>
             <a:endParaRPr lang="en-US"/>
           </a:p>
@@ -2030,7 +2031,7 @@
           <a:p>
             <a:fld id="{C1FF6DA9-008F-8B48-92A6-B652298478BF}" type="slidenum">
               <a:rPr lang="en-US" smtClean="0"/>
-              <a:t>‹#›</a:t>
+              <a:t>‹Nr.›</a:t>
             </a:fld>
             <a:endParaRPr lang="en-US"/>
           </a:p>
@@ -2091,10 +2092,9 @@
           </a:lstStyle>
           <a:p>
             <a:r>
-              <a:rPr lang="en-US" smtClean="0"/>
+              <a:rPr lang="en-US"/>
               <a:t>Click to edit Master title style</a:t>
             </a:r>
-            <a:endParaRPr lang="en-US"/>
           </a:p>
         </p:txBody>
       </p:sp>
@@ -2148,38 +2148,37 @@
           <a:p>
             <a:pPr lvl="0"/>
             <a:r>
-              <a:rPr lang="en-US" smtClean="0"/>
+              <a:rPr lang="en-US"/>
               <a:t>Click to edit Master text styles</a:t>
             </a:r>
           </a:p>
           <a:p>
             <a:pPr lvl="1"/>
             <a:r>
-              <a:rPr lang="en-US" smtClean="0"/>
+              <a:rPr lang="en-US"/>
               <a:t>Second level</a:t>
             </a:r>
           </a:p>
           <a:p>
             <a:pPr lvl="2"/>
             <a:r>
-              <a:rPr lang="en-US" smtClean="0"/>
+              <a:rPr lang="en-US"/>
               <a:t>Third level</a:t>
             </a:r>
           </a:p>
           <a:p>
             <a:pPr lvl="3"/>
             <a:r>
-              <a:rPr lang="en-US" smtClean="0"/>
+              <a:rPr lang="en-US"/>
               <a:t>Fourth level</a:t>
             </a:r>
           </a:p>
           <a:p>
             <a:pPr lvl="4"/>
             <a:r>
-              <a:rPr lang="en-US" smtClean="0"/>
+              <a:rPr lang="en-US"/>
               <a:t>Fifth level</a:t>
             </a:r>
-            <a:endParaRPr lang="en-US"/>
           </a:p>
         </p:txBody>
       </p:sp>
@@ -2242,7 +2241,7 @@
           <a:p>
             <a:pPr lvl="0"/>
             <a:r>
-              <a:rPr lang="en-US" smtClean="0"/>
+              <a:rPr lang="en-US"/>
               <a:t>Click to edit Master text styles</a:t>
             </a:r>
           </a:p>
@@ -2265,7 +2264,7 @@
           <a:p>
             <a:fld id="{5BCAD085-E8A6-8845-BD4E-CB4CCA059FC4}" type="datetimeFigureOut">
               <a:rPr lang="en-US" smtClean="0"/>
-              <a:t>1/27/13</a:t>
+              <a:t>6/23/2026</a:t>
             </a:fld>
             <a:endParaRPr lang="en-US"/>
           </a:p>
@@ -2307,7 +2306,7 @@
           <a:p>
             <a:fld id="{C1FF6DA9-008F-8B48-92A6-B652298478BF}" type="slidenum">
               <a:rPr lang="en-US" smtClean="0"/>
-              <a:t>‹#›</a:t>
+              <a:t>‹Nr.›</a:t>
             </a:fld>
             <a:endParaRPr lang="en-US"/>
           </a:p>
@@ -2368,10 +2367,9 @@
           </a:lstStyle>
           <a:p>
             <a:r>
-              <a:rPr lang="en-US" smtClean="0"/>
+              <a:rPr lang="en-US"/>
               <a:t>Click to edit Master title style</a:t>
             </a:r>
-            <a:endParaRPr lang="en-US"/>
           </a:p>
         </p:txBody>
       </p:sp>
@@ -2495,7 +2493,7 @@
           <a:p>
             <a:pPr lvl="0"/>
             <a:r>
-              <a:rPr lang="en-US" smtClean="0"/>
+              <a:rPr lang="en-US"/>
               <a:t>Click to edit Master text styles</a:t>
             </a:r>
           </a:p>
@@ -2518,7 +2516,7 @@
           <a:p>
             <a:fld id="{5BCAD085-E8A6-8845-BD4E-CB4CCA059FC4}" type="datetimeFigureOut">
               <a:rPr lang="en-US" smtClean="0"/>
-              <a:t>1/27/13</a:t>
+              <a:t>6/23/2026</a:t>
             </a:fld>
             <a:endParaRPr lang="en-US"/>
           </a:p>
@@ -2560,7 +2558,7 @@
           <a:p>
             <a:fld id="{C1FF6DA9-008F-8B48-92A6-B652298478BF}" type="slidenum">
               <a:rPr lang="en-US" smtClean="0"/>
-              <a:t>‹#›</a:t>
+              <a:t>‹Nr.›</a:t>
             </a:fld>
             <a:endParaRPr lang="en-US"/>
           </a:p>
@@ -2627,10 +2625,9 @@
           <a:lstStyle/>
           <a:p>
             <a:r>
-              <a:rPr lang="en-US" smtClean="0"/>
+              <a:rPr lang="en-US"/>
               <a:t>Click to edit Master title style</a:t>
             </a:r>
-            <a:endParaRPr lang="en-US"/>
           </a:p>
         </p:txBody>
       </p:sp>
@@ -2661,38 +2658,37 @@
           <a:p>
             <a:pPr lvl="0"/>
             <a:r>
-              <a:rPr lang="en-US" smtClean="0"/>
+              <a:rPr lang="en-US"/>
               <a:t>Click to edit Master text styles</a:t>
             </a:r>
           </a:p>
           <a:p>
             <a:pPr lvl="1"/>
             <a:r>
-              <a:rPr lang="en-US" smtClean="0"/>
+              <a:rPr lang="en-US"/>
               <a:t>Second level</a:t>
             </a:r>
           </a:p>
           <a:p>
             <a:pPr lvl="2"/>
             <a:r>
-              <a:rPr lang="en-US" smtClean="0"/>
+              <a:rPr lang="en-US"/>
               <a:t>Third level</a:t>
             </a:r>
           </a:p>
           <a:p>
             <a:pPr lvl="3"/>
             <a:r>
-              <a:rPr lang="en-US" smtClean="0"/>
+              <a:rPr lang="en-US"/>
               <a:t>Fourth level</a:t>
             </a:r>
           </a:p>
           <a:p>
             <a:pPr lvl="4"/>
             <a:r>
-              <a:rPr lang="en-US" smtClean="0"/>
+              <a:rPr lang="en-US"/>
               <a:t>Fifth level</a:t>
             </a:r>
-            <a:endParaRPr lang="en-US"/>
           </a:p>
         </p:txBody>
       </p:sp>
@@ -2731,7 +2727,7 @@
           <a:p>
             <a:fld id="{5BCAD085-E8A6-8845-BD4E-CB4CCA059FC4}" type="datetimeFigureOut">
               <a:rPr lang="en-US" smtClean="0"/>
-              <a:t>1/27/13</a:t>
+              <a:t>6/23/2026</a:t>
             </a:fld>
             <a:endParaRPr lang="en-US"/>
           </a:p>
@@ -2809,7 +2805,7 @@
           <a:p>
             <a:fld id="{C1FF6DA9-008F-8B48-92A6-B652298478BF}" type="slidenum">
               <a:rPr lang="en-US" smtClean="0"/>
-              <a:t>‹#›</a:t>
+              <a:t>‹Nr.›</a:t>
             </a:fld>
             <a:endParaRPr lang="en-US"/>
           </a:p>
@@ -3090,7 +3086,7 @@
 </file>
 
 <file path=ppt/slides/slide1.xml><?xml version="1.0" encoding="utf-8"?>
-<p:sld xmlns:a="http://schemas.openxmlformats.org/drawingml/2006/main" xmlns:p="http://schemas.openxmlformats.org/presentationml/2006/main" xmlns:r="http://schemas.openxmlformats.org/officeDocument/2006/relationships">
+<p:sld xmlns:a="http://schemas.openxmlformats.org/drawingml/2006/main" xmlns:r="http://schemas.openxmlformats.org/officeDocument/2006/relationships" xmlns:p="http://schemas.openxmlformats.org/presentationml/2006/main">
   <p:cSld>
     <p:bg>
       <p:bgPr>
@@ -3106,7 +3102,14 @@
         <p:cNvGrpSpPr/>
         <p:nvPr/>
       </p:nvGrpSpPr>
-      <p:grpSpPr/>
+      <p:grpSpPr>
+        <a:xfrm>
+          <a:off x="0" y="0"/>
+          <a:ext cx="0" cy="0"/>
+          <a:chOff x="0" y="0"/>
+          <a:chExt cx="0" cy="0"/>
+        </a:xfrm>
+      </p:grpSpPr>
       <p:sp>
         <p:nvSpPr>
           <p:cNvPr id="2" name="Rectangle 1"/>
@@ -3148,6 +3151,7 @@
           <a:lstStyle/>
           <a:p>
             <a:pPr algn="ctr"/>
+            <a:endParaRPr/>
           </a:p>
         </p:txBody>
       </p:sp>
@@ -3200,6 +3204,7 @@
           <a:lstStyle/>
           <a:p>
             <a:pPr algn="ctr"/>
+            <a:endParaRPr/>
           </a:p>
         </p:txBody>
       </p:sp>
@@ -3270,6 +3275,7 @@
           <a:lstStyle/>
           <a:p>
             <a:pPr algn="ctr"/>
+            <a:endParaRPr/>
           </a:p>
         </p:txBody>
       </p:sp>
@@ -3316,6 +3322,7 @@
           <a:lstStyle/>
           <a:p>
             <a:pPr algn="ctr"/>
+            <a:endParaRPr/>
           </a:p>
         </p:txBody>
       </p:sp>
@@ -3362,6 +3369,7 @@
           <a:lstStyle/>
           <a:p>
             <a:pPr algn="ctr"/>
+            <a:endParaRPr/>
           </a:p>
         </p:txBody>
       </p:sp>
@@ -3408,6 +3416,7 @@
           <a:lstStyle/>
           <a:p>
             <a:pPr algn="ctr"/>
+            <a:endParaRPr/>
           </a:p>
         </p:txBody>
       </p:sp>
@@ -3454,6 +3463,7 @@
           <a:lstStyle/>
           <a:p>
             <a:pPr algn="ctr"/>
+            <a:endParaRPr/>
           </a:p>
         </p:txBody>
       </p:sp>
@@ -3474,7 +3484,7 @@
           <a:noFill/>
         </p:spPr>
         <p:txBody>
-          <a:bodyPr wrap="square" anchor="t" lIns="0" rIns="0" tIns="0" bIns="0">
+          <a:bodyPr wrap="square" lIns="0" tIns="0" rIns="0" bIns="0" anchor="t">
             <a:spAutoFit/>
           </a:bodyPr>
           <a:lstStyle/>
@@ -3565,6 +3575,7 @@
           <a:lstStyle/>
           <a:p>
             <a:pPr algn="ctr"/>
+            <a:endParaRPr/>
           </a:p>
         </p:txBody>
       </p:sp>
@@ -3585,7 +3596,7 @@
           <a:noFill/>
         </p:spPr>
         <p:txBody>
-          <a:bodyPr wrap="square" anchor="t" lIns="0" rIns="0" tIns="0" bIns="0">
+          <a:bodyPr wrap="square" lIns="0" tIns="0" rIns="0" bIns="0" anchor="t">
             <a:spAutoFit/>
           </a:bodyPr>
           <a:lstStyle/>
@@ -3644,7 +3655,7 @@
 </file>
 
 <file path=ppt/slides/slide10.xml><?xml version="1.0" encoding="utf-8"?>
-<p:sld xmlns:a="http://schemas.openxmlformats.org/drawingml/2006/main" xmlns:p="http://schemas.openxmlformats.org/presentationml/2006/main" xmlns:r="http://schemas.openxmlformats.org/officeDocument/2006/relationships">
+<p:sld xmlns:a="http://schemas.openxmlformats.org/drawingml/2006/main" xmlns:r="http://schemas.openxmlformats.org/officeDocument/2006/relationships" xmlns:p="http://schemas.openxmlformats.org/presentationml/2006/main">
   <p:cSld>
     <p:bg>
       <p:bgPr>
@@ -3660,7 +3671,14 @@
         <p:cNvGrpSpPr/>
         <p:nvPr/>
       </p:nvGrpSpPr>
-      <p:grpSpPr/>
+      <p:grpSpPr>
+        <a:xfrm>
+          <a:off x="0" y="0"/>
+          <a:ext cx="0" cy="0"/>
+          <a:chOff x="0" y="0"/>
+          <a:chExt cx="0" cy="0"/>
+        </a:xfrm>
+      </p:grpSpPr>
       <p:sp>
         <p:nvSpPr>
           <p:cNvPr id="2" name="TextBox 1"/>
@@ -3678,7 +3696,7 @@
           <a:noFill/>
         </p:spPr>
         <p:txBody>
-          <a:bodyPr wrap="square" anchor="t" lIns="0" rIns="0" tIns="0" bIns="0">
+          <a:bodyPr wrap="square" lIns="0" tIns="0" rIns="0" bIns="0" anchor="t">
             <a:spAutoFit/>
           </a:bodyPr>
           <a:lstStyle/>
@@ -3723,7 +3741,7 @@
           <a:noFill/>
         </p:spPr>
         <p:txBody>
-          <a:bodyPr wrap="square" anchor="t" lIns="0" rIns="0" tIns="0" bIns="0">
+          <a:bodyPr wrap="square" lIns="0" tIns="0" rIns="0" bIns="0" anchor="t">
             <a:spAutoFit/>
           </a:bodyPr>
           <a:lstStyle/>
@@ -3792,6 +3810,7 @@
           <a:lstStyle/>
           <a:p>
             <a:pPr algn="ctr"/>
+            <a:endParaRPr/>
           </a:p>
         </p:txBody>
       </p:sp>
@@ -3812,7 +3831,7 @@
           <a:noFill/>
         </p:spPr>
         <p:txBody>
-          <a:bodyPr wrap="square" anchor="t" lIns="0" rIns="0" tIns="0" bIns="0">
+          <a:bodyPr wrap="square" lIns="0" tIns="0" rIns="0" bIns="0" anchor="t">
             <a:spAutoFit/>
           </a:bodyPr>
           <a:lstStyle/>
@@ -3881,6 +3900,7 @@
           <a:lstStyle/>
           <a:p>
             <a:pPr algn="ctr"/>
+            <a:endParaRPr/>
           </a:p>
         </p:txBody>
       </p:sp>
@@ -3935,6 +3955,7 @@
           <a:lstStyle/>
           <a:p>
             <a:pPr algn="ctr"/>
+            <a:endParaRPr/>
           </a:p>
         </p:txBody>
       </p:sp>
@@ -3981,6 +4002,7 @@
           <a:lstStyle/>
           <a:p>
             <a:pPr algn="ctr"/>
+            <a:endParaRPr/>
           </a:p>
         </p:txBody>
       </p:sp>
@@ -4001,7 +4023,7 @@
           <a:noFill/>
         </p:spPr>
         <p:txBody>
-          <a:bodyPr wrap="square" anchor="ctr" lIns="0" rIns="0" tIns="0" bIns="0">
+          <a:bodyPr wrap="square" lIns="0" tIns="0" rIns="0" bIns="0" anchor="ctr">
             <a:spAutoFit/>
           </a:bodyPr>
           <a:lstStyle/>
@@ -4046,7 +4068,7 @@
           <a:noFill/>
         </p:spPr>
         <p:txBody>
-          <a:bodyPr wrap="square" anchor="t" lIns="0" rIns="0" tIns="0" bIns="0">
+          <a:bodyPr wrap="square" lIns="0" tIns="0" rIns="0" bIns="0" anchor="t">
             <a:spAutoFit/>
           </a:bodyPr>
           <a:lstStyle/>
@@ -4113,7 +4135,7 @@
           <a:noFill/>
         </p:spPr>
         <p:txBody>
-          <a:bodyPr wrap="square" anchor="t" lIns="0" rIns="0" tIns="0" bIns="0">
+          <a:bodyPr wrap="square" lIns="0" tIns="0" rIns="0" bIns="0" anchor="t">
             <a:spAutoFit/>
           </a:bodyPr>
           <a:lstStyle/>
@@ -4182,6 +4204,7 @@
           <a:lstStyle/>
           <a:p>
             <a:pPr algn="ctr"/>
+            <a:endParaRPr/>
           </a:p>
         </p:txBody>
       </p:sp>
@@ -4236,6 +4259,7 @@
           <a:lstStyle/>
           <a:p>
             <a:pPr algn="ctr"/>
+            <a:endParaRPr/>
           </a:p>
         </p:txBody>
       </p:sp>
@@ -4282,6 +4306,7 @@
           <a:lstStyle/>
           <a:p>
             <a:pPr algn="ctr"/>
+            <a:endParaRPr/>
           </a:p>
         </p:txBody>
       </p:sp>
@@ -4302,7 +4327,7 @@
           <a:noFill/>
         </p:spPr>
         <p:txBody>
-          <a:bodyPr wrap="square" anchor="ctr" lIns="0" rIns="0" tIns="0" bIns="0">
+          <a:bodyPr wrap="square" lIns="0" tIns="0" rIns="0" bIns="0" anchor="ctr">
             <a:spAutoFit/>
           </a:bodyPr>
           <a:lstStyle/>
@@ -4347,7 +4372,7 @@
           <a:noFill/>
         </p:spPr>
         <p:txBody>
-          <a:bodyPr wrap="square" anchor="t" lIns="0" rIns="0" tIns="0" bIns="0">
+          <a:bodyPr wrap="square" lIns="0" tIns="0" rIns="0" bIns="0" anchor="t">
             <a:spAutoFit/>
           </a:bodyPr>
           <a:lstStyle/>
@@ -4414,7 +4439,7 @@
           <a:noFill/>
         </p:spPr>
         <p:txBody>
-          <a:bodyPr wrap="square" anchor="t" lIns="0" rIns="0" tIns="0" bIns="0">
+          <a:bodyPr wrap="square" lIns="0" tIns="0" rIns="0" bIns="0" anchor="t">
             <a:spAutoFit/>
           </a:bodyPr>
           <a:lstStyle/>
@@ -4483,6 +4508,7 @@
           <a:lstStyle/>
           <a:p>
             <a:pPr algn="ctr"/>
+            <a:endParaRPr/>
           </a:p>
         </p:txBody>
       </p:sp>
@@ -4537,6 +4563,7 @@
           <a:lstStyle/>
           <a:p>
             <a:pPr algn="ctr"/>
+            <a:endParaRPr/>
           </a:p>
         </p:txBody>
       </p:sp>
@@ -4583,6 +4610,7 @@
           <a:lstStyle/>
           <a:p>
             <a:pPr algn="ctr"/>
+            <a:endParaRPr/>
           </a:p>
         </p:txBody>
       </p:sp>
@@ -4603,7 +4631,7 @@
           <a:noFill/>
         </p:spPr>
         <p:txBody>
-          <a:bodyPr wrap="square" anchor="ctr" lIns="0" rIns="0" tIns="0" bIns="0">
+          <a:bodyPr wrap="square" lIns="0" tIns="0" rIns="0" bIns="0" anchor="ctr">
             <a:spAutoFit/>
           </a:bodyPr>
           <a:lstStyle/>
@@ -4648,7 +4676,7 @@
           <a:noFill/>
         </p:spPr>
         <p:txBody>
-          <a:bodyPr wrap="square" anchor="t" lIns="0" rIns="0" tIns="0" bIns="0">
+          <a:bodyPr wrap="square" lIns="0" tIns="0" rIns="0" bIns="0" anchor="t">
             <a:spAutoFit/>
           </a:bodyPr>
           <a:lstStyle/>
@@ -4715,7 +4743,7 @@
           <a:noFill/>
         </p:spPr>
         <p:txBody>
-          <a:bodyPr wrap="square" anchor="t" lIns="0" rIns="0" tIns="0" bIns="0">
+          <a:bodyPr wrap="square" lIns="0" tIns="0" rIns="0" bIns="0" anchor="t">
             <a:spAutoFit/>
           </a:bodyPr>
           <a:lstStyle/>
@@ -4784,6 +4812,7 @@
           <a:lstStyle/>
           <a:p>
             <a:pPr algn="ctr"/>
+            <a:endParaRPr/>
           </a:p>
         </p:txBody>
       </p:sp>
@@ -4838,6 +4867,7 @@
           <a:lstStyle/>
           <a:p>
             <a:pPr algn="ctr"/>
+            <a:endParaRPr/>
           </a:p>
         </p:txBody>
       </p:sp>
@@ -4884,6 +4914,7 @@
           <a:lstStyle/>
           <a:p>
             <a:pPr algn="ctr"/>
+            <a:endParaRPr/>
           </a:p>
         </p:txBody>
       </p:sp>
@@ -4904,7 +4935,7 @@
           <a:noFill/>
         </p:spPr>
         <p:txBody>
-          <a:bodyPr wrap="square" anchor="ctr" lIns="0" rIns="0" tIns="0" bIns="0">
+          <a:bodyPr wrap="square" lIns="0" tIns="0" rIns="0" bIns="0" anchor="ctr">
             <a:spAutoFit/>
           </a:bodyPr>
           <a:lstStyle/>
@@ -4949,7 +4980,7 @@
           <a:noFill/>
         </p:spPr>
         <p:txBody>
-          <a:bodyPr wrap="square" anchor="t" lIns="0" rIns="0" tIns="0" bIns="0">
+          <a:bodyPr wrap="square" lIns="0" tIns="0" rIns="0" bIns="0" anchor="t">
             <a:spAutoFit/>
           </a:bodyPr>
           <a:lstStyle/>
@@ -4994,7 +5025,7 @@
                 </a:solidFill>
                 <a:latin typeface="Calibri"/>
               </a:rPr>
-              <a:t>fähig &amp; weltweit  →  Folie 11</a:t>
+              <a:t>fähig &amp; weltweit  →  Folie 12</a:t>
             </a:r>
           </a:p>
         </p:txBody>
@@ -5016,7 +5047,7 @@
           <a:noFill/>
         </p:spPr>
         <p:txBody>
-          <a:bodyPr wrap="square" anchor="t" lIns="0" rIns="0" tIns="0" bIns="0">
+          <a:bodyPr wrap="square" lIns="0" tIns="0" rIns="0" bIns="0" anchor="t">
             <a:spAutoFit/>
           </a:bodyPr>
           <a:lstStyle/>
@@ -5053,7 +5084,486 @@
 </file>
 
 <file path=ppt/slides/slide11.xml><?xml version="1.0" encoding="utf-8"?>
-<p:sld xmlns:a="http://schemas.openxmlformats.org/drawingml/2006/main" xmlns:p="http://schemas.openxmlformats.org/presentationml/2006/main" xmlns:r="http://schemas.openxmlformats.org/officeDocument/2006/relationships">
+<p:sld xmlns:a="http://schemas.openxmlformats.org/drawingml/2006/main" xmlns:r="http://schemas.openxmlformats.org/officeDocument/2006/relationships" xmlns:p="http://schemas.openxmlformats.org/presentationml/2006/main">
+  <p:cSld>
+    <p:bg>
+      <p:bgPr>
+        <a:solidFill>
+          <a:srgbClr val="FFFFFF"/>
+        </a:solidFill>
+        <a:effectLst/>
+      </p:bgPr>
+    </p:bg>
+    <p:spTree>
+      <p:nvGrpSpPr>
+        <p:cNvPr id="1" name=""/>
+        <p:cNvGrpSpPr/>
+        <p:nvPr/>
+      </p:nvGrpSpPr>
+      <p:grpSpPr>
+        <a:xfrm>
+          <a:off x="0" y="0"/>
+          <a:ext cx="0" cy="0"/>
+          <a:chOff x="0" y="0"/>
+          <a:chExt cx="0" cy="0"/>
+        </a:xfrm>
+      </p:grpSpPr>
+      <p:sp>
+        <p:nvSpPr>
+          <p:cNvPr id="2" name="TextBox 1"/>
+          <p:cNvSpPr txBox="1"/>
+          <p:nvPr/>
+        </p:nvSpPr>
+        <p:spPr>
+          <a:xfrm>
+            <a:off x="822960" y="457200"/>
+            <a:ext cx="10515600" cy="777240"/>
+          </a:xfrm>
+          <a:prstGeom prst="rect">
+            <a:avLst/>
+          </a:prstGeom>
+          <a:noFill/>
+        </p:spPr>
+        <p:txBody>
+          <a:bodyPr wrap="square" lIns="0" tIns="0" rIns="0" bIns="0" anchor="t">
+            <a:spAutoFit/>
+          </a:bodyPr>
+          <a:lstStyle/>
+          <a:p>
+            <a:pPr algn="l">
+              <a:lnSpc>
+                <a:spcPct val="100000"/>
+              </a:lnSpc>
+              <a:spcBef>
+                <a:spcPts val="0"/>
+              </a:spcBef>
+              <a:spcAft>
+                <a:spcPts val="400"/>
+              </a:spcAft>
+            </a:pPr>
+            <a:r>
+              <a:rPr sz="3400" b="1" i="0">
+                <a:solidFill>
+                  <a:srgbClr val="0B4A86"/>
+                </a:solidFill>
+                <a:latin typeface="Trebuchet MS"/>
+              </a:rPr>
+              <a:t>Gerade in Planung</a:t>
+            </a:r>
+          </a:p>
+        </p:txBody>
+      </p:sp>
+      <p:sp>
+        <p:nvSpPr>
+          <p:cNvPr id="3" name="TextBox 2"/>
+          <p:cNvSpPr txBox="1"/>
+          <p:nvPr/>
+        </p:nvSpPr>
+        <p:spPr>
+          <a:xfrm>
+            <a:off x="822960" y="1207008"/>
+            <a:ext cx="10515600" cy="457200"/>
+          </a:xfrm>
+          <a:prstGeom prst="rect">
+            <a:avLst/>
+          </a:prstGeom>
+          <a:noFill/>
+        </p:spPr>
+        <p:txBody>
+          <a:bodyPr wrap="square" lIns="0" tIns="0" rIns="0" bIns="0" anchor="t">
+            <a:spAutoFit/>
+          </a:bodyPr>
+          <a:lstStyle/>
+          <a:p>
+            <a:pPr algn="l">
+              <a:lnSpc>
+                <a:spcPct val="100000"/>
+              </a:lnSpc>
+              <a:spcBef>
+                <a:spcPts val="0"/>
+              </a:spcBef>
+              <a:spcAft>
+                <a:spcPts val="400"/>
+              </a:spcAft>
+            </a:pPr>
+            <a:r>
+              <a:rPr sz="1600" b="0" i="1">
+                <a:solidFill>
+                  <a:srgbClr val="5A6473"/>
+                </a:solidFill>
+                <a:latin typeface="Calibri"/>
+              </a:rPr>
+              <a:t>Woran als Nächstes gearbeitet wird – ein Vorgeschmack aus dem Programm</a:t>
+            </a:r>
+          </a:p>
+        </p:txBody>
+      </p:sp>
+      <p:sp>
+        <p:nvSpPr>
+          <p:cNvPr id="4" name="Rounded Rectangle 3"/>
+          <p:cNvSpPr/>
+          <p:nvPr/>
+        </p:nvSpPr>
+        <p:spPr>
+          <a:xfrm>
+            <a:off x="178681" y="1883664"/>
+            <a:ext cx="5738941" cy="3182112"/>
+          </a:xfrm>
+          <a:prstGeom prst="roundRect">
+            <a:avLst>
+              <a:gd name="adj" fmla="val 3000"/>
+            </a:avLst>
+          </a:prstGeom>
+          <a:solidFill>
+            <a:srgbClr val="FFFFFF"/>
+          </a:solidFill>
+          <a:ln w="12700">
+            <a:solidFill>
+              <a:srgbClr val="D8DFEA"/>
+            </a:solidFill>
+          </a:ln>
+          <a:effectLst>
+            <a:outerShdw blurRad="90000" dist="38100" dir="5400000" rotWithShape="0">
+              <a:srgbClr val="1B2633">
+                <a:alpha val="18000"/>
+              </a:srgbClr>
+            </a:outerShdw>
+          </a:effectLst>
+        </p:spPr>
+        <p:style>
+          <a:lnRef idx="1">
+            <a:schemeClr val="accent1"/>
+          </a:lnRef>
+          <a:fillRef idx="3">
+            <a:schemeClr val="accent1"/>
+          </a:fillRef>
+          <a:effectRef idx="2">
+            <a:schemeClr val="accent1"/>
+          </a:effectRef>
+          <a:fontRef idx="minor">
+            <a:schemeClr val="lt1"/>
+          </a:fontRef>
+        </p:style>
+        <p:txBody>
+          <a:bodyPr rtlCol="0" anchor="ctr"/>
+          <a:lstStyle/>
+          <a:p>
+            <a:pPr algn="ctr"/>
+            <a:endParaRPr/>
+          </a:p>
+        </p:txBody>
+      </p:sp>
+      <p:pic>
+        <p:nvPicPr>
+          <p:cNvPr id="5" name="Picture 4" descr="shot_v2_mitarbeiter.png"/>
+          <p:cNvPicPr>
+            <a:picLocks noChangeAspect="1"/>
+          </p:cNvPicPr>
+          <p:nvPr/>
+        </p:nvPicPr>
+        <p:blipFill>
+          <a:blip r:embed="rId2"/>
+          <a:stretch>
+            <a:fillRect/>
+          </a:stretch>
+        </p:blipFill>
+        <p:spPr>
+          <a:xfrm>
+            <a:off x="260977" y="1965960"/>
+            <a:ext cx="5574349" cy="3017519"/>
+          </a:xfrm>
+          <a:prstGeom prst="rect">
+            <a:avLst/>
+          </a:prstGeom>
+        </p:spPr>
+      </p:pic>
+      <p:sp>
+        <p:nvSpPr>
+          <p:cNvPr id="6" name="TextBox 5"/>
+          <p:cNvSpPr txBox="1"/>
+          <p:nvPr/>
+        </p:nvSpPr>
+        <p:spPr>
+          <a:xfrm>
+            <a:off x="178681" y="5212080"/>
+            <a:ext cx="5738941" cy="640080"/>
+          </a:xfrm>
+          <a:prstGeom prst="rect">
+            <a:avLst/>
+          </a:prstGeom>
+          <a:noFill/>
+        </p:spPr>
+        <p:txBody>
+          <a:bodyPr wrap="square" lIns="0" tIns="0" rIns="0" bIns="0" anchor="t">
+            <a:spAutoFit/>
+          </a:bodyPr>
+          <a:lstStyle/>
+          <a:p>
+            <a:pPr algn="ctr">
+              <a:lnSpc>
+                <a:spcPct val="105000"/>
+              </a:lnSpc>
+              <a:spcBef>
+                <a:spcPts val="0"/>
+              </a:spcBef>
+              <a:spcAft>
+                <a:spcPts val="400"/>
+              </a:spcAft>
+            </a:pPr>
+            <a:r>
+              <a:rPr sz="1250" b="0" i="0">
+                <a:solidFill>
+                  <a:srgbClr val="5A6473"/>
+                </a:solidFill>
+                <a:latin typeface="Calibri"/>
+              </a:rPr>
+              <a:t>Mitarbeiter-Modul – aus den Profilen entsteht das Organigramm</a:t>
+            </a:r>
+          </a:p>
+        </p:txBody>
+      </p:sp>
+      <p:sp>
+        <p:nvSpPr>
+          <p:cNvPr id="7" name="Rounded Rectangle 6"/>
+          <p:cNvSpPr/>
+          <p:nvPr/>
+        </p:nvSpPr>
+        <p:spPr>
+          <a:xfrm>
+            <a:off x="6715694" y="1883664"/>
+            <a:ext cx="4857524" cy="3182112"/>
+          </a:xfrm>
+          <a:prstGeom prst="roundRect">
+            <a:avLst>
+              <a:gd name="adj" fmla="val 3000"/>
+            </a:avLst>
+          </a:prstGeom>
+          <a:solidFill>
+            <a:srgbClr val="FFFFFF"/>
+          </a:solidFill>
+          <a:ln w="12700">
+            <a:solidFill>
+              <a:srgbClr val="D8DFEA"/>
+            </a:solidFill>
+          </a:ln>
+          <a:effectLst>
+            <a:outerShdw blurRad="90000" dist="38100" dir="5400000" rotWithShape="0">
+              <a:srgbClr val="1B2633">
+                <a:alpha val="18000"/>
+              </a:srgbClr>
+            </a:outerShdw>
+          </a:effectLst>
+        </p:spPr>
+        <p:style>
+          <a:lnRef idx="1">
+            <a:schemeClr val="accent1"/>
+          </a:lnRef>
+          <a:fillRef idx="3">
+            <a:schemeClr val="accent1"/>
+          </a:fillRef>
+          <a:effectRef idx="2">
+            <a:schemeClr val="accent1"/>
+          </a:effectRef>
+          <a:fontRef idx="minor">
+            <a:schemeClr val="lt1"/>
+          </a:fontRef>
+        </p:style>
+        <p:txBody>
+          <a:bodyPr rtlCol="0" anchor="ctr"/>
+          <a:lstStyle/>
+          <a:p>
+            <a:pPr algn="ctr"/>
+            <a:endParaRPr/>
+          </a:p>
+        </p:txBody>
+      </p:sp>
+      <p:pic>
+        <p:nvPicPr>
+          <p:cNvPr id="8" name="Picture 7" descr="shot_v2_bedarf.png"/>
+          <p:cNvPicPr>
+            <a:picLocks noChangeAspect="1"/>
+          </p:cNvPicPr>
+          <p:nvPr/>
+        </p:nvPicPr>
+        <p:blipFill>
+          <a:blip r:embed="rId3"/>
+          <a:stretch>
+            <a:fillRect/>
+          </a:stretch>
+        </p:blipFill>
+        <p:spPr>
+          <a:xfrm>
+            <a:off x="6797990" y="1965960"/>
+            <a:ext cx="4692932" cy="3017520"/>
+          </a:xfrm>
+          <a:prstGeom prst="rect">
+            <a:avLst/>
+          </a:prstGeom>
+        </p:spPr>
+      </p:pic>
+      <p:sp>
+        <p:nvSpPr>
+          <p:cNvPr id="9" name="TextBox 8"/>
+          <p:cNvSpPr txBox="1"/>
+          <p:nvPr/>
+        </p:nvSpPr>
+        <p:spPr>
+          <a:xfrm>
+            <a:off x="6715694" y="5212080"/>
+            <a:ext cx="4857524" cy="640080"/>
+          </a:xfrm>
+          <a:prstGeom prst="rect">
+            <a:avLst/>
+          </a:prstGeom>
+          <a:noFill/>
+        </p:spPr>
+        <p:txBody>
+          <a:bodyPr wrap="square" lIns="0" tIns="0" rIns="0" bIns="0" anchor="t">
+            <a:spAutoFit/>
+          </a:bodyPr>
+          <a:lstStyle/>
+          <a:p>
+            <a:pPr algn="ctr">
+              <a:lnSpc>
+                <a:spcPct val="105000"/>
+              </a:lnSpc>
+              <a:spcBef>
+                <a:spcPts val="0"/>
+              </a:spcBef>
+              <a:spcAft>
+                <a:spcPts val="400"/>
+              </a:spcAft>
+            </a:pPr>
+            <a:r>
+              <a:rPr sz="1250" b="0" i="0">
+                <a:solidFill>
+                  <a:srgbClr val="5A6473"/>
+                </a:solidFill>
+                <a:latin typeface="Calibri"/>
+              </a:rPr>
+              <a:t>Bedarfsanalyse – künftig mit Biosimilar-/Wirkstoff-Zuordnung</a:t>
+            </a:r>
+          </a:p>
+        </p:txBody>
+      </p:sp>
+      <p:sp>
+        <p:nvSpPr>
+          <p:cNvPr id="10" name="TextBox 9"/>
+          <p:cNvSpPr txBox="1"/>
+          <p:nvPr/>
+        </p:nvSpPr>
+        <p:spPr>
+          <a:xfrm>
+            <a:off x="822960" y="5806440"/>
+            <a:ext cx="10515600" cy="548640"/>
+          </a:xfrm>
+          <a:prstGeom prst="rect">
+            <a:avLst/>
+          </a:prstGeom>
+          <a:noFill/>
+        </p:spPr>
+        <p:txBody>
+          <a:bodyPr wrap="square" lIns="0" tIns="0" rIns="0" bIns="0" anchor="t">
+            <a:spAutoFit/>
+          </a:bodyPr>
+          <a:lstStyle/>
+          <a:p>
+            <a:pPr algn="ctr">
+              <a:lnSpc>
+                <a:spcPct val="100000"/>
+              </a:lnSpc>
+              <a:spcBef>
+                <a:spcPts val="0"/>
+              </a:spcBef>
+              <a:spcAft>
+                <a:spcPts val="400"/>
+              </a:spcAft>
+            </a:pPr>
+            <a:r>
+              <a:rPr sz="1400" b="0" i="0">
+                <a:solidFill>
+                  <a:srgbClr val="1B2633"/>
+                </a:solidFill>
+                <a:latin typeface="Calibri"/>
+              </a:rPr>
+              <a:t>Das große Ziel bleibt das </a:t>
+            </a:r>
+            <a:r>
+              <a:rPr sz="1400" b="1" i="0">
+                <a:solidFill>
+                  <a:srgbClr val="0B6E6E"/>
+                </a:solidFill>
+                <a:latin typeface="Calibri"/>
+              </a:rPr>
+              <a:t>cloud-basierte Arbeiten</a:t>
+            </a:r>
+            <a:r>
+              <a:rPr sz="1400" b="0" i="0">
+                <a:solidFill>
+                  <a:srgbClr val="1B2633"/>
+                </a:solidFill>
+                <a:latin typeface="Calibri"/>
+              </a:rPr>
+              <a:t>  →  nächste Folie.</a:t>
+            </a:r>
+          </a:p>
+        </p:txBody>
+      </p:sp>
+      <p:sp>
+        <p:nvSpPr>
+          <p:cNvPr id="11" name="TextBox 10"/>
+          <p:cNvSpPr txBox="1"/>
+          <p:nvPr/>
+        </p:nvSpPr>
+        <p:spPr>
+          <a:xfrm>
+            <a:off x="11368735" y="6446520"/>
+            <a:ext cx="548640" cy="274320"/>
+          </a:xfrm>
+          <a:prstGeom prst="rect">
+            <a:avLst/>
+          </a:prstGeom>
+          <a:noFill/>
+        </p:spPr>
+        <p:txBody>
+          <a:bodyPr wrap="square" lIns="0" tIns="0" rIns="0" bIns="0" anchor="t">
+            <a:spAutoFit/>
+          </a:bodyPr>
+          <a:lstStyle/>
+          <a:p>
+            <a:pPr algn="r">
+              <a:lnSpc>
+                <a:spcPct val="100000"/>
+              </a:lnSpc>
+              <a:spcBef>
+                <a:spcPts val="0"/>
+              </a:spcBef>
+              <a:spcAft>
+                <a:spcPts val="400"/>
+              </a:spcAft>
+            </a:pPr>
+            <a:r>
+              <a:rPr sz="1000" b="0" i="0">
+                <a:solidFill>
+                  <a:srgbClr val="5A6473"/>
+                </a:solidFill>
+                <a:latin typeface="Calibri"/>
+              </a:rPr>
+              <a:t>11</a:t>
+            </a:r>
+          </a:p>
+        </p:txBody>
+      </p:sp>
+    </p:spTree>
+  </p:cSld>
+  <p:clrMapOvr>
+    <a:masterClrMapping/>
+  </p:clrMapOvr>
+</p:sld>
+</file>
+
+<file path=ppt/slides/slide12.xml><?xml version="1.0" encoding="utf-8"?>
+<p:sld xmlns:a="http://schemas.openxmlformats.org/drawingml/2006/main" xmlns:r="http://schemas.openxmlformats.org/officeDocument/2006/relationships" xmlns:p="http://schemas.openxmlformats.org/presentationml/2006/main">
   <p:cSld>
     <p:bg>
       <p:bgPr>
@@ -5069,7 +5579,14 @@
         <p:cNvGrpSpPr/>
         <p:nvPr/>
       </p:nvGrpSpPr>
-      <p:grpSpPr/>
+      <p:grpSpPr>
+        <a:xfrm>
+          <a:off x="0" y="0"/>
+          <a:ext cx="0" cy="0"/>
+          <a:chOff x="0" y="0"/>
+          <a:chExt cx="0" cy="0"/>
+        </a:xfrm>
+      </p:grpSpPr>
       <p:sp>
         <p:nvSpPr>
           <p:cNvPr id="2" name="TextBox 1"/>
@@ -5087,7 +5604,7 @@
           <a:noFill/>
         </p:spPr>
         <p:txBody>
-          <a:bodyPr wrap="square" anchor="t" lIns="0" rIns="0" tIns="0" bIns="0">
+          <a:bodyPr wrap="square" lIns="0" tIns="0" rIns="0" bIns="0" anchor="t">
             <a:spAutoFit/>
           </a:bodyPr>
           <a:lstStyle/>
@@ -5132,7 +5649,7 @@
           <a:noFill/>
         </p:spPr>
         <p:txBody>
-          <a:bodyPr wrap="square" anchor="t" lIns="0" rIns="0" tIns="0" bIns="0">
+          <a:bodyPr wrap="square" lIns="0" tIns="0" rIns="0" bIns="0" anchor="t">
             <a:spAutoFit/>
           </a:bodyPr>
           <a:lstStyle/>
@@ -5203,6 +5720,7 @@
           <a:lstStyle/>
           <a:p>
             <a:pPr algn="ctr"/>
+            <a:endParaRPr/>
           </a:p>
         </p:txBody>
       </p:sp>
@@ -5223,7 +5741,7 @@
           <a:noFill/>
         </p:spPr>
         <p:txBody>
-          <a:bodyPr wrap="square" anchor="ctr" lIns="0" rIns="0" tIns="0" bIns="0">
+          <a:bodyPr wrap="square" lIns="0" tIns="0" rIns="0" bIns="0" anchor="ctr">
             <a:spAutoFit/>
           </a:bodyPr>
           <a:lstStyle/>
@@ -5268,7 +5786,7 @@
           <a:noFill/>
         </p:spPr>
         <p:txBody>
-          <a:bodyPr wrap="square" anchor="t" lIns="0" rIns="0" tIns="0" bIns="0">
+          <a:bodyPr wrap="square" lIns="0" tIns="0" rIns="0" bIns="0" anchor="t">
             <a:spAutoFit/>
           </a:bodyPr>
           <a:lstStyle/>
@@ -5361,6 +5879,7 @@
           <a:lstStyle/>
           <a:p>
             <a:pPr algn="ctr"/>
+            <a:endParaRPr/>
           </a:p>
         </p:txBody>
       </p:sp>
@@ -5381,7 +5900,7 @@
           <a:noFill/>
         </p:spPr>
         <p:txBody>
-          <a:bodyPr wrap="square" anchor="ctr" lIns="0" rIns="0" tIns="0" bIns="0">
+          <a:bodyPr wrap="square" lIns="0" tIns="0" rIns="0" bIns="0" anchor="ctr">
             <a:spAutoFit/>
           </a:bodyPr>
           <a:lstStyle/>
@@ -5426,7 +5945,7 @@
           <a:noFill/>
         </p:spPr>
         <p:txBody>
-          <a:bodyPr wrap="square" anchor="t" lIns="0" rIns="0" tIns="0" bIns="0">
+          <a:bodyPr wrap="square" lIns="0" tIns="0" rIns="0" bIns="0" anchor="t">
             <a:spAutoFit/>
           </a:bodyPr>
           <a:lstStyle/>
@@ -5519,6 +6038,7 @@
           <a:lstStyle/>
           <a:p>
             <a:pPr algn="ctr"/>
+            <a:endParaRPr/>
           </a:p>
         </p:txBody>
       </p:sp>
@@ -5539,7 +6059,7 @@
           <a:noFill/>
         </p:spPr>
         <p:txBody>
-          <a:bodyPr wrap="square" anchor="ctr" lIns="0" rIns="0" tIns="0" bIns="0">
+          <a:bodyPr wrap="square" lIns="0" tIns="0" rIns="0" bIns="0" anchor="ctr">
             <a:spAutoFit/>
           </a:bodyPr>
           <a:lstStyle/>
@@ -5584,7 +6104,7 @@
           <a:noFill/>
         </p:spPr>
         <p:txBody>
-          <a:bodyPr wrap="square" anchor="t" lIns="0" rIns="0" tIns="0" bIns="0">
+          <a:bodyPr wrap="square" lIns="0" tIns="0" rIns="0" bIns="0" anchor="t">
             <a:spAutoFit/>
           </a:bodyPr>
           <a:lstStyle/>
@@ -5677,6 +6197,7 @@
           <a:lstStyle/>
           <a:p>
             <a:pPr algn="ctr"/>
+            <a:endParaRPr/>
           </a:p>
         </p:txBody>
       </p:sp>
@@ -5697,7 +6218,7 @@
           <a:noFill/>
         </p:spPr>
         <p:txBody>
-          <a:bodyPr wrap="square" anchor="ctr" lIns="0" rIns="0" tIns="0" bIns="0">
+          <a:bodyPr wrap="square" lIns="0" tIns="0" rIns="0" bIns="0" anchor="ctr">
             <a:spAutoFit/>
           </a:bodyPr>
           <a:lstStyle/>
@@ -5742,7 +6263,7 @@
           <a:noFill/>
         </p:spPr>
         <p:txBody>
-          <a:bodyPr wrap="square" anchor="t" lIns="0" rIns="0" tIns="0" bIns="0">
+          <a:bodyPr wrap="square" lIns="0" tIns="0" rIns="0" bIns="0" anchor="t">
             <a:spAutoFit/>
           </a:bodyPr>
           <a:lstStyle/>
@@ -5843,6 +6364,7 @@
           <a:lstStyle/>
           <a:p>
             <a:pPr algn="ctr"/>
+            <a:endParaRPr/>
           </a:p>
         </p:txBody>
       </p:sp>
@@ -5887,6 +6409,7 @@
           <a:lstStyle/>
           <a:p>
             <a:pPr algn="ctr"/>
+            <a:endParaRPr/>
           </a:p>
         </p:txBody>
       </p:sp>
@@ -5907,7 +6430,7 @@
           <a:noFill/>
         </p:spPr>
         <p:txBody>
-          <a:bodyPr wrap="square" anchor="ctr" lIns="0" rIns="0" tIns="0" bIns="0">
+          <a:bodyPr wrap="square" lIns="0" tIns="0" rIns="0" bIns="0" anchor="ctr">
             <a:spAutoFit/>
           </a:bodyPr>
           <a:lstStyle/>
@@ -6008,6 +6531,7 @@
           <a:lstStyle/>
           <a:p>
             <a:pPr algn="ctr"/>
+            <a:endParaRPr/>
           </a:p>
         </p:txBody>
       </p:sp>
@@ -6052,6 +6576,7 @@
           <a:lstStyle/>
           <a:p>
             <a:pPr algn="ctr"/>
+            <a:endParaRPr/>
           </a:p>
         </p:txBody>
       </p:sp>
@@ -6072,7 +6597,7 @@
           <a:noFill/>
         </p:spPr>
         <p:txBody>
-          <a:bodyPr wrap="square" anchor="ctr" lIns="0" rIns="0" tIns="0" bIns="0">
+          <a:bodyPr wrap="square" lIns="0" tIns="0" rIns="0" bIns="0" anchor="ctr">
             <a:spAutoFit/>
           </a:bodyPr>
           <a:lstStyle/>
@@ -6163,6 +6688,7 @@
           <a:lstStyle/>
           <a:p>
             <a:pPr algn="ctr"/>
+            <a:endParaRPr/>
           </a:p>
         </p:txBody>
       </p:sp>
@@ -6207,6 +6733,7 @@
           <a:lstStyle/>
           <a:p>
             <a:pPr algn="ctr"/>
+            <a:endParaRPr/>
           </a:p>
         </p:txBody>
       </p:sp>
@@ -6259,6 +6786,7 @@
           <a:lstStyle/>
           <a:p>
             <a:pPr algn="ctr"/>
+            <a:endParaRPr/>
           </a:p>
         </p:txBody>
       </p:sp>
@@ -6279,7 +6807,7 @@
           <a:noFill/>
         </p:spPr>
         <p:txBody>
-          <a:bodyPr wrap="square" anchor="ctr" lIns="0" rIns="0" tIns="0" bIns="0">
+          <a:bodyPr wrap="square" lIns="0" tIns="0" rIns="0" bIns="0" anchor="ctr">
             <a:spAutoFit/>
           </a:bodyPr>
           <a:lstStyle/>
@@ -6370,6 +6898,7 @@
           <a:lstStyle/>
           <a:p>
             <a:pPr algn="ctr"/>
+            <a:endParaRPr/>
           </a:p>
         </p:txBody>
       </p:sp>
@@ -6422,6 +6951,7 @@
           <a:lstStyle/>
           <a:p>
             <a:pPr algn="ctr"/>
+            <a:endParaRPr/>
           </a:p>
         </p:txBody>
       </p:sp>
@@ -6442,7 +6972,7 @@
           <a:noFill/>
         </p:spPr>
         <p:txBody>
-          <a:bodyPr wrap="square" anchor="ctr" lIns="0" rIns="0" tIns="0" bIns="0">
+          <a:bodyPr wrap="square" lIns="0" tIns="0" rIns="0" bIns="0" anchor="ctr">
             <a:spAutoFit/>
           </a:bodyPr>
           <a:lstStyle/>
@@ -6509,7 +7039,7 @@
           <a:noFill/>
         </p:spPr>
         <p:txBody>
-          <a:bodyPr wrap="square" anchor="t" lIns="0" rIns="0" tIns="0" bIns="0">
+          <a:bodyPr wrap="square" lIns="0" tIns="0" rIns="0" bIns="0" anchor="t">
             <a:spAutoFit/>
           </a:bodyPr>
           <a:lstStyle/>
@@ -6563,7 +7093,7 @@
                 </a:solidFill>
                 <a:latin typeface="Calibri"/>
               </a:rPr>
-              <a:t>Betriebskosten moderat:  </a:t>
+              <a:t>Sicher &amp; schlank:  </a:t>
             </a:r>
             <a:r>
               <a:rPr sz="1250" b="0" i="0">
@@ -6572,7 +7102,7 @@
                 </a:solidFill>
                 <a:latin typeface="Calibri"/>
               </a:rPr>
-              <a:t>ca. 30–80 €/Monat (EU-Hosting + Datenbank) · kein App-Store nötig</a:t>
+              <a:t>EU-Hosting, DSGVO-konform · kein App-Store nötig · schrittweise mit geringem Risiko</a:t>
             </a:r>
           </a:p>
         </p:txBody>
@@ -6594,7 +7124,7 @@
           <a:noFill/>
         </p:spPr>
         <p:txBody>
-          <a:bodyPr wrap="square" anchor="t" lIns="0" rIns="0" tIns="0" bIns="0">
+          <a:bodyPr wrap="square" lIns="0" tIns="0" rIns="0" bIns="0" anchor="t">
             <a:spAutoFit/>
           </a:bodyPr>
           <a:lstStyle/>
@@ -6617,7 +7147,7 @@
                 </a:solidFill>
                 <a:latin typeface="Calibri"/>
               </a:rPr>
-              <a:t>11</a:t>
+              <a:t>12</a:t>
             </a:r>
           </a:p>
         </p:txBody>
@@ -6630,8 +7160,8 @@
 </p:sld>
 </file>
 
-<file path=ppt/slides/slide12.xml><?xml version="1.0" encoding="utf-8"?>
-<p:sld xmlns:a="http://schemas.openxmlformats.org/drawingml/2006/main" xmlns:p="http://schemas.openxmlformats.org/presentationml/2006/main" xmlns:r="http://schemas.openxmlformats.org/officeDocument/2006/relationships">
+<file path=ppt/slides/slide13.xml><?xml version="1.0" encoding="utf-8"?>
+<p:sld xmlns:a="http://schemas.openxmlformats.org/drawingml/2006/main" xmlns:r="http://schemas.openxmlformats.org/officeDocument/2006/relationships" xmlns:p="http://schemas.openxmlformats.org/presentationml/2006/main">
   <p:cSld>
     <p:bg>
       <p:bgPr>
@@ -6647,7 +7177,14 @@
         <p:cNvGrpSpPr/>
         <p:nvPr/>
       </p:nvGrpSpPr>
-      <p:grpSpPr/>
+      <p:grpSpPr>
+        <a:xfrm>
+          <a:off x="0" y="0"/>
+          <a:ext cx="0" cy="0"/>
+          <a:chOff x="0" y="0"/>
+          <a:chExt cx="0" cy="0"/>
+        </a:xfrm>
+      </p:grpSpPr>
       <p:sp>
         <p:nvSpPr>
           <p:cNvPr id="2" name="Rectangle 1"/>
@@ -6689,6 +7226,7 @@
           <a:lstStyle/>
           <a:p>
             <a:pPr algn="ctr"/>
+            <a:endParaRPr/>
           </a:p>
         </p:txBody>
       </p:sp>
@@ -6735,6 +7273,7 @@
           <a:lstStyle/>
           <a:p>
             <a:pPr algn="ctr"/>
+            <a:endParaRPr/>
           </a:p>
         </p:txBody>
       </p:sp>
@@ -6781,6 +7320,7 @@
           <a:lstStyle/>
           <a:p>
             <a:pPr algn="ctr"/>
+            <a:endParaRPr/>
           </a:p>
         </p:txBody>
       </p:sp>
@@ -6827,6 +7367,7 @@
           <a:lstStyle/>
           <a:p>
             <a:pPr algn="ctr"/>
+            <a:endParaRPr/>
           </a:p>
         </p:txBody>
       </p:sp>
@@ -6873,6 +7414,7 @@
           <a:lstStyle/>
           <a:p>
             <a:pPr algn="ctr"/>
+            <a:endParaRPr/>
           </a:p>
         </p:txBody>
       </p:sp>
@@ -6919,6 +7461,7 @@
           <a:lstStyle/>
           <a:p>
             <a:pPr algn="ctr"/>
+            <a:endParaRPr/>
           </a:p>
         </p:txBody>
       </p:sp>
@@ -6965,6 +7508,7 @@
           <a:lstStyle/>
           <a:p>
             <a:pPr algn="ctr"/>
+            <a:endParaRPr/>
           </a:p>
         </p:txBody>
       </p:sp>
@@ -6985,7 +7529,7 @@
           <a:noFill/>
         </p:spPr>
         <p:txBody>
-          <a:bodyPr wrap="square" anchor="t" lIns="0" rIns="0" tIns="0" bIns="0">
+          <a:bodyPr wrap="square" lIns="0" tIns="0" rIns="0" bIns="0" anchor="t">
             <a:spAutoFit/>
           </a:bodyPr>
           <a:lstStyle/>
@@ -7030,7 +7574,7 @@
                 </a:solidFill>
                 <a:latin typeface="Trebuchet MS"/>
               </a:rPr>
-              <a:t>Im Haus gebaut.</a:t>
+              <a:t>Für NMG gebaut.</a:t>
             </a:r>
           </a:p>
         </p:txBody>
@@ -7044,7 +7588,7 @@
         <p:spPr>
           <a:xfrm>
             <a:off x="914400" y="4160520"/>
-            <a:ext cx="10058400" cy="1097280"/>
+            <a:ext cx="10058400" cy="629852"/>
           </a:xfrm>
           <a:prstGeom prst="rect">
             <a:avLst/>
@@ -7052,7 +7596,7 @@
           <a:noFill/>
         </p:spPr>
         <p:txBody>
-          <a:bodyPr wrap="square" anchor="t" lIns="0" rIns="0" tIns="0" bIns="0">
+          <a:bodyPr wrap="square" lIns="0" tIns="0" rIns="0" bIns="0" anchor="t">
             <a:spAutoFit/>
           </a:bodyPr>
           <a:lstStyle/>
@@ -7069,13 +7613,238 @@
               </a:spcAft>
             </a:pPr>
             <a:r>
-              <a:rPr sz="1700" b="0" i="0">
+              <a:rPr sz="1700" b="0" i="0" dirty="0" err="1">
                 <a:solidFill>
                   <a:srgbClr val="E8F1FB"/>
                 </a:solidFill>
                 <a:latin typeface="Calibri"/>
               </a:rPr>
-              <a:t>NMGone fasst Marktanalyse, Rabatte, Kunden und Verkauf zusammen – nachvollziehbar, kostenneutral und exakt auf unsere Apotheken-Prozesse zugeschnitten.</a:t>
+              <a:t>NMGone</a:t>
+            </a:r>
+            <a:r>
+              <a:rPr sz="1700" b="0" i="0" dirty="0">
+                <a:solidFill>
+                  <a:srgbClr val="E8F1FB"/>
+                </a:solidFill>
+                <a:latin typeface="Calibri"/>
+              </a:rPr>
+              <a:t> </a:t>
+            </a:r>
+            <a:r>
+              <a:rPr sz="1700" b="0" i="0" dirty="0" err="1">
+                <a:solidFill>
+                  <a:srgbClr val="E8F1FB"/>
+                </a:solidFill>
+                <a:latin typeface="Calibri"/>
+              </a:rPr>
+              <a:t>fasst</a:t>
+            </a:r>
+            <a:r>
+              <a:rPr sz="1700" b="0" i="0" dirty="0">
+                <a:solidFill>
+                  <a:srgbClr val="E8F1FB"/>
+                </a:solidFill>
+                <a:latin typeface="Calibri"/>
+              </a:rPr>
+              <a:t> </a:t>
+            </a:r>
+            <a:r>
+              <a:rPr sz="1700" b="0" i="0" dirty="0" err="1">
+                <a:solidFill>
+                  <a:srgbClr val="E8F1FB"/>
+                </a:solidFill>
+                <a:latin typeface="Calibri"/>
+              </a:rPr>
+              <a:t>Marktanalyse</a:t>
+            </a:r>
+            <a:r>
+              <a:rPr sz="1700" b="0" i="0" dirty="0">
+                <a:solidFill>
+                  <a:srgbClr val="E8F1FB"/>
+                </a:solidFill>
+                <a:latin typeface="Calibri"/>
+              </a:rPr>
+              <a:t>, </a:t>
+            </a:r>
+            <a:r>
+              <a:rPr sz="1700" b="0" i="0" dirty="0" err="1">
+                <a:solidFill>
+                  <a:srgbClr val="E8F1FB"/>
+                </a:solidFill>
+                <a:latin typeface="Calibri"/>
+              </a:rPr>
+              <a:t>Rabatte</a:t>
+            </a:r>
+            <a:r>
+              <a:rPr sz="1700" b="0" i="0" dirty="0">
+                <a:solidFill>
+                  <a:srgbClr val="E8F1FB"/>
+                </a:solidFill>
+                <a:latin typeface="Calibri"/>
+              </a:rPr>
+              <a:t>, Kunden und </a:t>
+            </a:r>
+            <a:r>
+              <a:rPr sz="1700" b="0" i="0" dirty="0" err="1">
+                <a:solidFill>
+                  <a:srgbClr val="E8F1FB"/>
+                </a:solidFill>
+                <a:latin typeface="Calibri"/>
+              </a:rPr>
+              <a:t>Verkauf</a:t>
+            </a:r>
+            <a:r>
+              <a:rPr sz="1700" b="0" i="0" dirty="0">
+                <a:solidFill>
+                  <a:srgbClr val="E8F1FB"/>
+                </a:solidFill>
+                <a:latin typeface="Calibri"/>
+              </a:rPr>
+              <a:t> </a:t>
+            </a:r>
+            <a:r>
+              <a:rPr sz="1700" b="0" i="0" dirty="0" err="1">
+                <a:solidFill>
+                  <a:srgbClr val="E8F1FB"/>
+                </a:solidFill>
+                <a:latin typeface="Calibri"/>
+              </a:rPr>
+              <a:t>zusammen</a:t>
+            </a:r>
+            <a:r>
+              <a:rPr sz="1700" b="0" i="0" dirty="0">
+                <a:solidFill>
+                  <a:srgbClr val="E8F1FB"/>
+                </a:solidFill>
+                <a:latin typeface="Calibri"/>
+              </a:rPr>
+              <a:t> – </a:t>
+            </a:r>
+            <a:r>
+              <a:rPr sz="1700" b="0" i="0" dirty="0" err="1">
+                <a:solidFill>
+                  <a:srgbClr val="E8F1FB"/>
+                </a:solidFill>
+                <a:latin typeface="Calibri"/>
+              </a:rPr>
+              <a:t>nachvollziehbar</a:t>
+            </a:r>
+            <a:r>
+              <a:rPr sz="1700" b="0" i="0" dirty="0">
+                <a:solidFill>
+                  <a:srgbClr val="E8F1FB"/>
+                </a:solidFill>
+                <a:latin typeface="Calibri"/>
+              </a:rPr>
+              <a:t>, </a:t>
+            </a:r>
+            <a:r>
+              <a:rPr sz="1700" b="0" i="0" dirty="0" err="1">
+                <a:solidFill>
+                  <a:srgbClr val="E8F1FB"/>
+                </a:solidFill>
+                <a:latin typeface="Calibri"/>
+              </a:rPr>
+              <a:t>zukunftssicher</a:t>
+            </a:r>
+            <a:r>
+              <a:rPr sz="1700" b="0" i="0" dirty="0">
+                <a:solidFill>
+                  <a:srgbClr val="E8F1FB"/>
+                </a:solidFill>
+                <a:latin typeface="Calibri"/>
+              </a:rPr>
+              <a:t> und </a:t>
+            </a:r>
+            <a:r>
+              <a:rPr sz="1700" b="0" i="0" dirty="0" err="1">
+                <a:solidFill>
+                  <a:srgbClr val="E8F1FB"/>
+                </a:solidFill>
+                <a:latin typeface="Calibri"/>
+              </a:rPr>
+              <a:t>exakt</a:t>
+            </a:r>
+            <a:r>
+              <a:rPr sz="1700" b="0" i="0" dirty="0">
+                <a:solidFill>
+                  <a:srgbClr val="E8F1FB"/>
+                </a:solidFill>
+                <a:latin typeface="Calibri"/>
+              </a:rPr>
+              <a:t> auf </a:t>
+            </a:r>
+            <a:r>
+              <a:rPr sz="1700" b="0" i="0" dirty="0" err="1">
+                <a:solidFill>
+                  <a:srgbClr val="E8F1FB"/>
+                </a:solidFill>
+                <a:latin typeface="Calibri"/>
+              </a:rPr>
+              <a:t>unsere</a:t>
+            </a:r>
+            <a:r>
+              <a:rPr sz="1700" b="0" i="0" dirty="0">
+                <a:solidFill>
+                  <a:srgbClr val="E8F1FB"/>
+                </a:solidFill>
+                <a:latin typeface="Calibri"/>
+              </a:rPr>
+              <a:t> </a:t>
+            </a:r>
+            <a:r>
+              <a:rPr lang="de-DE" sz="1700" b="0" i="0" dirty="0" err="1">
+                <a:solidFill>
+                  <a:srgbClr val="E8F1FB"/>
+                </a:solidFill>
+                <a:latin typeface="Calibri"/>
+              </a:rPr>
+              <a:t>Arbeits</a:t>
+            </a:r>
+            <a:r>
+              <a:rPr lang="de-DE" sz="1700" dirty="0" err="1">
+                <a:solidFill>
+                  <a:srgbClr val="E8F1FB"/>
+                </a:solidFill>
+                <a:latin typeface="Calibri"/>
+              </a:rPr>
+              <a:t>p</a:t>
+            </a:r>
+            <a:r>
+              <a:rPr sz="1700" b="0" i="0" dirty="0" err="1">
+                <a:solidFill>
+                  <a:srgbClr val="E8F1FB"/>
+                </a:solidFill>
+                <a:latin typeface="Calibri"/>
+              </a:rPr>
+              <a:t>rozesse</a:t>
+            </a:r>
+            <a:r>
+              <a:rPr sz="1700" b="0" i="0" dirty="0">
+                <a:solidFill>
+                  <a:srgbClr val="E8F1FB"/>
+                </a:solidFill>
+                <a:latin typeface="Calibri"/>
+              </a:rPr>
+              <a:t> </a:t>
+            </a:r>
+            <a:r>
+              <a:rPr sz="1700" b="0" i="0" dirty="0" err="1">
+                <a:solidFill>
+                  <a:srgbClr val="E8F1FB"/>
+                </a:solidFill>
+                <a:latin typeface="Calibri"/>
+              </a:rPr>
+              <a:t>zugeschnitten</a:t>
+            </a:r>
+            <a:r>
+              <a:rPr sz="1700" b="0" i="0" dirty="0">
+                <a:solidFill>
+                  <a:srgbClr val="E8F1FB"/>
+                </a:solidFill>
+                <a:latin typeface="Calibri"/>
+              </a:rPr>
+              <a:t>.</a:t>
             </a:r>
           </a:p>
         </p:txBody>
@@ -7121,6 +7890,7 @@
           <a:lstStyle/>
           <a:p>
             <a:pPr algn="ctr"/>
+            <a:endParaRPr/>
           </a:p>
         </p:txBody>
       </p:sp>
@@ -7141,7 +7911,7 @@
           <a:noFill/>
         </p:spPr>
         <p:txBody>
-          <a:bodyPr wrap="square" anchor="t" lIns="0" rIns="0" tIns="0" bIns="0">
+          <a:bodyPr wrap="square" lIns="0" tIns="0" rIns="0" bIns="0" anchor="t">
             <a:spAutoFit/>
           </a:bodyPr>
           <a:lstStyle/>
@@ -7218,6 +7988,7 @@
           <a:lstStyle/>
           <a:p>
             <a:pPr algn="ctr"/>
+            <a:endParaRPr/>
           </a:p>
         </p:txBody>
       </p:sp>
@@ -7254,7 +8025,7 @@
 </file>
 
 <file path=ppt/slides/slide2.xml><?xml version="1.0" encoding="utf-8"?>
-<p:sld xmlns:a="http://schemas.openxmlformats.org/drawingml/2006/main" xmlns:p="http://schemas.openxmlformats.org/presentationml/2006/main" xmlns:r="http://schemas.openxmlformats.org/officeDocument/2006/relationships">
+<p:sld xmlns:a="http://schemas.openxmlformats.org/drawingml/2006/main" xmlns:r="http://schemas.openxmlformats.org/officeDocument/2006/relationships" xmlns:p="http://schemas.openxmlformats.org/presentationml/2006/main">
   <p:cSld>
     <p:bg>
       <p:bgPr>
@@ -7270,7 +8041,14 @@
         <p:cNvGrpSpPr/>
         <p:nvPr/>
       </p:nvGrpSpPr>
-      <p:grpSpPr/>
+      <p:grpSpPr>
+        <a:xfrm>
+          <a:off x="0" y="0"/>
+          <a:ext cx="0" cy="0"/>
+          <a:chOff x="0" y="0"/>
+          <a:chExt cx="0" cy="0"/>
+        </a:xfrm>
+      </p:grpSpPr>
       <p:sp>
         <p:nvSpPr>
           <p:cNvPr id="2" name="TextBox 1"/>
@@ -7288,7 +8066,7 @@
           <a:noFill/>
         </p:spPr>
         <p:txBody>
-          <a:bodyPr wrap="square" anchor="t" lIns="0" rIns="0" tIns="0" bIns="0">
+          <a:bodyPr wrap="square" lIns="0" tIns="0" rIns="0" bIns="0" anchor="t">
             <a:spAutoFit/>
           </a:bodyPr>
           <a:lstStyle/>
@@ -7333,7 +8111,7 @@
           <a:noFill/>
         </p:spPr>
         <p:txBody>
-          <a:bodyPr wrap="square" anchor="t" lIns="0" rIns="0" tIns="0" bIns="0">
+          <a:bodyPr wrap="square" lIns="0" tIns="0" rIns="0" bIns="0" anchor="t">
             <a:spAutoFit/>
           </a:bodyPr>
           <a:lstStyle/>
@@ -7430,6 +8208,7 @@
           <a:lstStyle/>
           <a:p>
             <a:pPr algn="ctr"/>
+            <a:endParaRPr/>
           </a:p>
         </p:txBody>
       </p:sp>
@@ -7476,6 +8255,7 @@
           <a:lstStyle/>
           <a:p>
             <a:pPr algn="ctr"/>
+            <a:endParaRPr/>
           </a:p>
         </p:txBody>
       </p:sp>
@@ -7496,7 +8276,7 @@
           <a:noFill/>
         </p:spPr>
         <p:txBody>
-          <a:bodyPr wrap="square" anchor="ctr" lIns="0" rIns="0" tIns="0" bIns="0">
+          <a:bodyPr wrap="square" lIns="0" tIns="0" rIns="0" bIns="0" anchor="ctr">
             <a:spAutoFit/>
           </a:bodyPr>
           <a:lstStyle/>
@@ -7519,7 +8299,7 @@
                 </a:solidFill>
                 <a:latin typeface="Trebuchet MS"/>
               </a:rPr>
-              <a:t>14</a:t>
+              <a:t>14+</a:t>
             </a:r>
           </a:p>
         </p:txBody>
@@ -7541,7 +8321,7 @@
           <a:noFill/>
         </p:spPr>
         <p:txBody>
-          <a:bodyPr wrap="square" anchor="t" lIns="0" rIns="0" tIns="0" bIns="0">
+          <a:bodyPr wrap="square" lIns="0" tIns="0" rIns="0" bIns="0" anchor="t">
             <a:spAutoFit/>
           </a:bodyPr>
           <a:lstStyle/>
@@ -7642,6 +8422,7 @@
           <a:lstStyle/>
           <a:p>
             <a:pPr algn="ctr"/>
+            <a:endParaRPr/>
           </a:p>
         </p:txBody>
       </p:sp>
@@ -7688,6 +8469,7 @@
           <a:lstStyle/>
           <a:p>
             <a:pPr algn="ctr"/>
+            <a:endParaRPr/>
           </a:p>
         </p:txBody>
       </p:sp>
@@ -7708,7 +8490,7 @@
           <a:noFill/>
         </p:spPr>
         <p:txBody>
-          <a:bodyPr wrap="square" anchor="ctr" lIns="0" rIns="0" tIns="0" bIns="0">
+          <a:bodyPr wrap="square" lIns="0" tIns="0" rIns="0" bIns="0" anchor="ctr">
             <a:spAutoFit/>
           </a:bodyPr>
           <a:lstStyle/>
@@ -7753,7 +8535,7 @@
           <a:noFill/>
         </p:spPr>
         <p:txBody>
-          <a:bodyPr wrap="square" anchor="t" lIns="0" rIns="0" tIns="0" bIns="0">
+          <a:bodyPr wrap="square" lIns="0" tIns="0" rIns="0" bIns="0" anchor="t">
             <a:spAutoFit/>
           </a:bodyPr>
           <a:lstStyle/>
@@ -7854,6 +8636,7 @@
           <a:lstStyle/>
           <a:p>
             <a:pPr algn="ctr"/>
+            <a:endParaRPr/>
           </a:p>
         </p:txBody>
       </p:sp>
@@ -7900,6 +8683,7 @@
           <a:lstStyle/>
           <a:p>
             <a:pPr algn="ctr"/>
+            <a:endParaRPr/>
           </a:p>
         </p:txBody>
       </p:sp>
@@ -7920,7 +8704,7 @@
           <a:noFill/>
         </p:spPr>
         <p:txBody>
-          <a:bodyPr wrap="square" anchor="ctr" lIns="0" rIns="0" tIns="0" bIns="0">
+          <a:bodyPr wrap="square" lIns="0" tIns="0" rIns="0" bIns="0" anchor="ctr">
             <a:spAutoFit/>
           </a:bodyPr>
           <a:lstStyle/>
@@ -7965,7 +8749,7 @@
           <a:noFill/>
         </p:spPr>
         <p:txBody>
-          <a:bodyPr wrap="square" anchor="t" lIns="0" rIns="0" tIns="0" bIns="0">
+          <a:bodyPr wrap="square" lIns="0" tIns="0" rIns="0" bIns="0" anchor="t">
             <a:spAutoFit/>
           </a:bodyPr>
           <a:lstStyle/>
@@ -8066,6 +8850,7 @@
           <a:lstStyle/>
           <a:p>
             <a:pPr algn="ctr"/>
+            <a:endParaRPr/>
           </a:p>
         </p:txBody>
       </p:sp>
@@ -8112,6 +8897,7 @@
           <a:lstStyle/>
           <a:p>
             <a:pPr algn="ctr"/>
+            <a:endParaRPr/>
           </a:p>
         </p:txBody>
       </p:sp>
@@ -8132,7 +8918,7 @@
           <a:noFill/>
         </p:spPr>
         <p:txBody>
-          <a:bodyPr wrap="square" anchor="ctr" lIns="0" rIns="0" tIns="0" bIns="0">
+          <a:bodyPr wrap="square" lIns="0" tIns="0" rIns="0" bIns="0" anchor="ctr">
             <a:spAutoFit/>
           </a:bodyPr>
           <a:lstStyle/>
@@ -8149,13 +8935,13 @@
               </a:spcAft>
             </a:pPr>
             <a:r>
-              <a:rPr sz="4400" b="1" i="0">
+              <a:rPr sz="3200" b="1" i="0">
                 <a:solidFill>
                   <a:srgbClr val="6B4FB3"/>
                 </a:solidFill>
                 <a:latin typeface="Trebuchet MS"/>
               </a:rPr>
-              <a:t>0 €</a:t>
+              <a:t>100 %</a:t>
             </a:r>
           </a:p>
         </p:txBody>
@@ -8177,7 +8963,7 @@
           <a:noFill/>
         </p:spPr>
         <p:txBody>
-          <a:bodyPr wrap="square" anchor="t" lIns="0" rIns="0" tIns="0" bIns="0">
+          <a:bodyPr wrap="square" lIns="0" tIns="0" rIns="0" bIns="0" anchor="t">
             <a:spAutoFit/>
           </a:bodyPr>
           <a:lstStyle/>
@@ -8200,7 +8986,7 @@
                 </a:solidFill>
                 <a:latin typeface="Calibri"/>
               </a:rPr>
-              <a:t>laufende Lizenz-</a:t>
+              <a:t>Eigenentwicklung –</a:t>
             </a:r>
           </a:p>
           <a:p>
@@ -8222,7 +9008,7 @@
                 </a:solidFill>
                 <a:latin typeface="Calibri"/>
               </a:rPr>
-              <a:t>kosten Dritter</a:t>
+              <a:t>auf uns zugeschnitten</a:t>
             </a:r>
           </a:p>
         </p:txBody>
@@ -8244,7 +9030,7 @@
           <a:noFill/>
         </p:spPr>
         <p:txBody>
-          <a:bodyPr wrap="square" anchor="t" lIns="0" rIns="0" tIns="0" bIns="0">
+          <a:bodyPr wrap="square" lIns="0" tIns="0" rIns="0" bIns="0" anchor="t">
             <a:spAutoFit/>
           </a:bodyPr>
           <a:lstStyle/>
@@ -8298,7 +9084,7 @@
           <a:noFill/>
         </p:spPr>
         <p:txBody>
-          <a:bodyPr wrap="square" anchor="t" lIns="0" rIns="0" tIns="0" bIns="0">
+          <a:bodyPr wrap="square" lIns="0" tIns="0" rIns="0" bIns="0" anchor="t">
             <a:spAutoFit/>
           </a:bodyPr>
           <a:lstStyle/>
@@ -8335,7 +9121,7 @@
 </file>
 
 <file path=ppt/slides/slide3.xml><?xml version="1.0" encoding="utf-8"?>
-<p:sld xmlns:a="http://schemas.openxmlformats.org/drawingml/2006/main" xmlns:p="http://schemas.openxmlformats.org/presentationml/2006/main" xmlns:r="http://schemas.openxmlformats.org/officeDocument/2006/relationships">
+<p:sld xmlns:a="http://schemas.openxmlformats.org/drawingml/2006/main" xmlns:r="http://schemas.openxmlformats.org/officeDocument/2006/relationships" xmlns:p="http://schemas.openxmlformats.org/presentationml/2006/main">
   <p:cSld>
     <p:bg>
       <p:bgPr>
@@ -8351,7 +9137,14 @@
         <p:cNvGrpSpPr/>
         <p:nvPr/>
       </p:nvGrpSpPr>
-      <p:grpSpPr/>
+      <p:grpSpPr>
+        <a:xfrm>
+          <a:off x="0" y="0"/>
+          <a:ext cx="0" cy="0"/>
+          <a:chOff x="0" y="0"/>
+          <a:chExt cx="0" cy="0"/>
+        </a:xfrm>
+      </p:grpSpPr>
       <p:sp>
         <p:nvSpPr>
           <p:cNvPr id="2" name="TextBox 1"/>
@@ -8369,7 +9162,7 @@
           <a:noFill/>
         </p:spPr>
         <p:txBody>
-          <a:bodyPr wrap="square" anchor="t" lIns="0" rIns="0" tIns="0" bIns="0">
+          <a:bodyPr wrap="square" lIns="0" tIns="0" rIns="0" bIns="0" anchor="t">
             <a:spAutoFit/>
           </a:bodyPr>
           <a:lstStyle/>
@@ -8414,7 +9207,7 @@
           <a:noFill/>
         </p:spPr>
         <p:txBody>
-          <a:bodyPr wrap="square" anchor="t" lIns="0" rIns="0" tIns="0" bIns="0">
+          <a:bodyPr wrap="square" lIns="0" tIns="0" rIns="0" bIns="0" anchor="t">
             <a:spAutoFit/>
           </a:bodyPr>
           <a:lstStyle/>
@@ -8485,6 +9278,7 @@
           <a:lstStyle/>
           <a:p>
             <a:pPr algn="ctr"/>
+            <a:endParaRPr/>
           </a:p>
         </p:txBody>
       </p:sp>
@@ -8505,7 +9299,7 @@
           <a:noFill/>
         </p:spPr>
         <p:txBody>
-          <a:bodyPr wrap="square" anchor="ctr" lIns="0" rIns="0" tIns="0" bIns="0">
+          <a:bodyPr wrap="square" lIns="0" tIns="0" rIns="0" bIns="0" anchor="ctr">
             <a:spAutoFit/>
           </a:bodyPr>
           <a:lstStyle/>
@@ -8550,7 +9344,7 @@
           <a:noFill/>
         </p:spPr>
         <p:txBody>
-          <a:bodyPr wrap="square" anchor="t" lIns="0" rIns="0" tIns="0" bIns="0">
+          <a:bodyPr wrap="square" lIns="0" tIns="0" rIns="0" bIns="0" anchor="t">
             <a:spAutoFit/>
           </a:bodyPr>
           <a:lstStyle/>
@@ -8643,6 +9437,7 @@
           <a:lstStyle/>
           <a:p>
             <a:pPr algn="ctr"/>
+            <a:endParaRPr/>
           </a:p>
         </p:txBody>
       </p:sp>
@@ -8663,7 +9458,7 @@
           <a:noFill/>
         </p:spPr>
         <p:txBody>
-          <a:bodyPr wrap="square" anchor="ctr" lIns="0" rIns="0" tIns="0" bIns="0">
+          <a:bodyPr wrap="square" lIns="0" tIns="0" rIns="0" bIns="0" anchor="ctr">
             <a:spAutoFit/>
           </a:bodyPr>
           <a:lstStyle/>
@@ -8708,7 +9503,7 @@
           <a:noFill/>
         </p:spPr>
         <p:txBody>
-          <a:bodyPr wrap="square" anchor="t" lIns="0" rIns="0" tIns="0" bIns="0">
+          <a:bodyPr wrap="square" lIns="0" tIns="0" rIns="0" bIns="0" anchor="t">
             <a:spAutoFit/>
           </a:bodyPr>
           <a:lstStyle/>
@@ -8801,6 +9596,7 @@
           <a:lstStyle/>
           <a:p>
             <a:pPr algn="ctr"/>
+            <a:endParaRPr/>
           </a:p>
         </p:txBody>
       </p:sp>
@@ -8821,7 +9617,7 @@
           <a:noFill/>
         </p:spPr>
         <p:txBody>
-          <a:bodyPr wrap="square" anchor="ctr" lIns="0" rIns="0" tIns="0" bIns="0">
+          <a:bodyPr wrap="square" lIns="0" tIns="0" rIns="0" bIns="0" anchor="ctr">
             <a:spAutoFit/>
           </a:bodyPr>
           <a:lstStyle/>
@@ -8866,7 +9662,7 @@
           <a:noFill/>
         </p:spPr>
         <p:txBody>
-          <a:bodyPr wrap="square" anchor="t" lIns="0" rIns="0" tIns="0" bIns="0">
+          <a:bodyPr wrap="square" lIns="0" tIns="0" rIns="0" bIns="0" anchor="t">
             <a:spAutoFit/>
           </a:bodyPr>
           <a:lstStyle/>
@@ -8959,6 +9755,7 @@
           <a:lstStyle/>
           <a:p>
             <a:pPr algn="ctr"/>
+            <a:endParaRPr/>
           </a:p>
         </p:txBody>
       </p:sp>
@@ -8979,7 +9776,7 @@
           <a:noFill/>
         </p:spPr>
         <p:txBody>
-          <a:bodyPr wrap="square" anchor="ctr" lIns="0" rIns="0" tIns="0" bIns="0">
+          <a:bodyPr wrap="square" lIns="0" tIns="0" rIns="0" bIns="0" anchor="ctr">
             <a:spAutoFit/>
           </a:bodyPr>
           <a:lstStyle/>
@@ -9024,7 +9821,7 @@
           <a:noFill/>
         </p:spPr>
         <p:txBody>
-          <a:bodyPr wrap="square" anchor="t" lIns="0" rIns="0" tIns="0" bIns="0">
+          <a:bodyPr wrap="square" lIns="0" tIns="0" rIns="0" bIns="0" anchor="t">
             <a:spAutoFit/>
           </a:bodyPr>
           <a:lstStyle/>
@@ -9123,6 +9920,7 @@
           <a:lstStyle/>
           <a:p>
             <a:pPr algn="ctr"/>
+            <a:endParaRPr/>
           </a:p>
         </p:txBody>
       </p:sp>
@@ -9143,7 +9941,7 @@
           <a:noFill/>
         </p:spPr>
         <p:txBody>
-          <a:bodyPr wrap="square" anchor="t" lIns="0" rIns="0" tIns="0" bIns="0">
+          <a:bodyPr wrap="square" lIns="0" tIns="0" rIns="0" bIns="0" anchor="t">
             <a:spAutoFit/>
           </a:bodyPr>
           <a:lstStyle/>
@@ -9188,7 +9986,7 @@
           <a:noFill/>
         </p:spPr>
         <p:txBody>
-          <a:bodyPr wrap="square" anchor="t" lIns="0" rIns="0" tIns="0" bIns="0">
+          <a:bodyPr wrap="square" lIns="0" tIns="0" rIns="0" bIns="0" anchor="t">
             <a:spAutoFit/>
           </a:bodyPr>
           <a:lstStyle/>
@@ -9226,15 +10024,12 @@
                 <a:spcPts val="300"/>
               </a:spcAft>
             </a:pPr>
-            <a:r>
-              <a:rPr sz="600" b="0" i="0">
-                <a:solidFill>
-                  <a:srgbClr val="E8F1FB"/>
-                </a:solidFill>
-                <a:latin typeface="Calibri"/>
-              </a:rPr>
-              <a:t/>
-            </a:r>
+            <a:endParaRPr sz="1500" b="1" i="0">
+              <a:solidFill>
+                <a:srgbClr val="E8F1FB"/>
+              </a:solidFill>
+              <a:latin typeface="Calibri"/>
+            </a:endParaRPr>
           </a:p>
           <a:p>
             <a:pPr algn="l">
@@ -9270,15 +10065,12 @@
                 <a:spcPts val="300"/>
               </a:spcAft>
             </a:pPr>
-            <a:r>
-              <a:rPr sz="600" b="0" i="0">
-                <a:solidFill>
-                  <a:srgbClr val="E8F1FB"/>
-                </a:solidFill>
-                <a:latin typeface="Calibri"/>
-              </a:rPr>
-              <a:t/>
-            </a:r>
+            <a:endParaRPr sz="1450" b="0" i="0">
+              <a:solidFill>
+                <a:srgbClr val="FFFFFF"/>
+              </a:solidFill>
+              <a:latin typeface="Calibri"/>
+            </a:endParaRPr>
           </a:p>
           <a:p>
             <a:pPr algn="l">
@@ -9314,15 +10106,12 @@
                 <a:spcPts val="300"/>
               </a:spcAft>
             </a:pPr>
-            <a:r>
-              <a:rPr sz="600" b="0" i="0">
-                <a:solidFill>
-                  <a:srgbClr val="E8F1FB"/>
-                </a:solidFill>
-                <a:latin typeface="Calibri"/>
-              </a:rPr>
-              <a:t/>
-            </a:r>
+            <a:endParaRPr sz="1450" b="0" i="0">
+              <a:solidFill>
+                <a:srgbClr val="FFFFFF"/>
+              </a:solidFill>
+              <a:latin typeface="Calibri"/>
+            </a:endParaRPr>
           </a:p>
           <a:p>
             <a:pPr algn="l">
@@ -9365,7 +10154,7 @@
           <a:noFill/>
         </p:spPr>
         <p:txBody>
-          <a:bodyPr wrap="square" anchor="t" lIns="0" rIns="0" tIns="0" bIns="0">
+          <a:bodyPr wrap="square" lIns="0" tIns="0" rIns="0" bIns="0" anchor="t">
             <a:spAutoFit/>
           </a:bodyPr>
           <a:lstStyle/>
@@ -9402,7 +10191,7 @@
 </file>
 
 <file path=ppt/slides/slide4.xml><?xml version="1.0" encoding="utf-8"?>
-<p:sld xmlns:a="http://schemas.openxmlformats.org/drawingml/2006/main" xmlns:p="http://schemas.openxmlformats.org/presentationml/2006/main" xmlns:r="http://schemas.openxmlformats.org/officeDocument/2006/relationships">
+<p:sld xmlns:a="http://schemas.openxmlformats.org/drawingml/2006/main" xmlns:r="http://schemas.openxmlformats.org/officeDocument/2006/relationships" xmlns:p="http://schemas.openxmlformats.org/presentationml/2006/main">
   <p:cSld>
     <p:bg>
       <p:bgPr>
@@ -9418,7 +10207,14 @@
         <p:cNvGrpSpPr/>
         <p:nvPr/>
       </p:nvGrpSpPr>
-      <p:grpSpPr/>
+      <p:grpSpPr>
+        <a:xfrm>
+          <a:off x="0" y="0"/>
+          <a:ext cx="0" cy="0"/>
+          <a:chOff x="0" y="0"/>
+          <a:chExt cx="0" cy="0"/>
+        </a:xfrm>
+      </p:grpSpPr>
       <p:sp>
         <p:nvSpPr>
           <p:cNvPr id="2" name="TextBox 1"/>
@@ -9436,7 +10232,7 @@
           <a:noFill/>
         </p:spPr>
         <p:txBody>
-          <a:bodyPr wrap="square" anchor="t" lIns="0" rIns="0" tIns="0" bIns="0">
+          <a:bodyPr wrap="square" lIns="0" tIns="0" rIns="0" bIns="0" anchor="t">
             <a:spAutoFit/>
           </a:bodyPr>
           <a:lstStyle/>
@@ -9481,7 +10277,7 @@
           <a:noFill/>
         </p:spPr>
         <p:txBody>
-          <a:bodyPr wrap="square" anchor="t" lIns="0" rIns="0" tIns="0" bIns="0">
+          <a:bodyPr wrap="square" lIns="0" tIns="0" rIns="0" bIns="0" anchor="t">
             <a:spAutoFit/>
           </a:bodyPr>
           <a:lstStyle/>
@@ -9517,8 +10313,8 @@
         </p:nvSpPr>
         <p:spPr>
           <a:xfrm>
-            <a:off x="822960" y="1874519"/>
-            <a:ext cx="2377440" cy="1298448"/>
+            <a:off x="822960" y="1783080"/>
+            <a:ext cx="2377440" cy="1024128"/>
           </a:xfrm>
           <a:prstGeom prst="roundRect">
             <a:avLst>
@@ -9560,6 +10356,7 @@
           <a:lstStyle/>
           <a:p>
             <a:pPr algn="ctr"/>
+            <a:endParaRPr/>
           </a:p>
         </p:txBody>
       </p:sp>
@@ -9571,8 +10368,8 @@
         </p:nvSpPr>
         <p:spPr>
           <a:xfrm>
-            <a:off x="987552" y="2057400"/>
-            <a:ext cx="146304" cy="932688"/>
+            <a:off x="969264" y="1929384"/>
+            <a:ext cx="128016" cy="731520"/>
           </a:xfrm>
           <a:prstGeom prst="rect">
             <a:avLst/>
@@ -9604,6 +10401,7 @@
           <a:lstStyle/>
           <a:p>
             <a:pPr algn="ctr"/>
+            <a:endParaRPr/>
           </a:p>
         </p:txBody>
       </p:sp>
@@ -9615,8 +10413,8 @@
         </p:nvSpPr>
         <p:spPr>
           <a:xfrm>
-            <a:off x="1243584" y="2039112"/>
-            <a:ext cx="1828800" cy="457200"/>
+            <a:off x="1207008" y="1911095"/>
+            <a:ext cx="1874519" cy="411480"/>
           </a:xfrm>
           <a:prstGeom prst="rect">
             <a:avLst/>
@@ -9624,7 +10422,7 @@
           <a:noFill/>
         </p:spPr>
         <p:txBody>
-          <a:bodyPr wrap="square" anchor="t" lIns="0" rIns="0" tIns="0" bIns="0">
+          <a:bodyPr wrap="square" lIns="0" tIns="0" rIns="0" bIns="0" anchor="t">
             <a:spAutoFit/>
           </a:bodyPr>
           <a:lstStyle/>
@@ -9641,7 +10439,7 @@
               </a:spcAft>
             </a:pPr>
             <a:r>
-              <a:rPr sz="1450" b="1" i="0">
+              <a:rPr sz="1300" b="1" i="0">
                 <a:solidFill>
                   <a:srgbClr val="1B2633"/>
                 </a:solidFill>
@@ -9660,8 +10458,8 @@
         </p:nvSpPr>
         <p:spPr>
           <a:xfrm>
-            <a:off x="1243584" y="2514600"/>
-            <a:ext cx="1828800" cy="548640"/>
+            <a:off x="1207008" y="2313432"/>
+            <a:ext cx="1874519" cy="411480"/>
           </a:xfrm>
           <a:prstGeom prst="rect">
             <a:avLst/>
@@ -9669,7 +10467,7 @@
           <a:noFill/>
         </p:spPr>
         <p:txBody>
-          <a:bodyPr wrap="square" anchor="t" lIns="0" rIns="0" tIns="0" bIns="0">
+          <a:bodyPr wrap="square" lIns="0" tIns="0" rIns="0" bIns="0" anchor="t">
             <a:spAutoFit/>
           </a:bodyPr>
           <a:lstStyle/>
@@ -9686,7 +10484,7 @@
               </a:spcAft>
             </a:pPr>
             <a:r>
-              <a:rPr sz="1200" b="0" i="0">
+              <a:rPr sz="1050" b="0" i="0">
                 <a:solidFill>
                   <a:srgbClr val="5A6473"/>
                 </a:solidFill>
@@ -9705,8 +10503,8 @@
         </p:nvSpPr>
         <p:spPr>
           <a:xfrm>
-            <a:off x="3545738" y="1874519"/>
-            <a:ext cx="2377440" cy="1298448"/>
+            <a:off x="3545738" y="1783080"/>
+            <a:ext cx="2377440" cy="1024128"/>
           </a:xfrm>
           <a:prstGeom prst="roundRect">
             <a:avLst>
@@ -9748,6 +10546,7 @@
           <a:lstStyle/>
           <a:p>
             <a:pPr algn="ctr"/>
+            <a:endParaRPr/>
           </a:p>
         </p:txBody>
       </p:sp>
@@ -9759,8 +10558,8 @@
         </p:nvSpPr>
         <p:spPr>
           <a:xfrm>
-            <a:off x="3710330" y="2057400"/>
-            <a:ext cx="146304" cy="932688"/>
+            <a:off x="3692042" y="1929384"/>
+            <a:ext cx="128016" cy="731520"/>
           </a:xfrm>
           <a:prstGeom prst="rect">
             <a:avLst/>
@@ -9792,6 +10591,7 @@
           <a:lstStyle/>
           <a:p>
             <a:pPr algn="ctr"/>
+            <a:endParaRPr/>
           </a:p>
         </p:txBody>
       </p:sp>
@@ -9803,8 +10603,8 @@
         </p:nvSpPr>
         <p:spPr>
           <a:xfrm>
-            <a:off x="3966362" y="2039112"/>
-            <a:ext cx="1828800" cy="457200"/>
+            <a:off x="3929786" y="1911095"/>
+            <a:ext cx="1874519" cy="411480"/>
           </a:xfrm>
           <a:prstGeom prst="rect">
             <a:avLst/>
@@ -9812,7 +10612,7 @@
           <a:noFill/>
         </p:spPr>
         <p:txBody>
-          <a:bodyPr wrap="square" anchor="t" lIns="0" rIns="0" tIns="0" bIns="0">
+          <a:bodyPr wrap="square" lIns="0" tIns="0" rIns="0" bIns="0" anchor="t">
             <a:spAutoFit/>
           </a:bodyPr>
           <a:lstStyle/>
@@ -9829,7 +10629,7 @@
               </a:spcAft>
             </a:pPr>
             <a:r>
-              <a:rPr sz="1450" b="1" i="0">
+              <a:rPr sz="1300" b="1" i="0">
                 <a:solidFill>
                   <a:srgbClr val="1B2633"/>
                 </a:solidFill>
@@ -9848,8 +10648,8 @@
         </p:nvSpPr>
         <p:spPr>
           <a:xfrm>
-            <a:off x="3966362" y="2514600"/>
-            <a:ext cx="1828800" cy="548640"/>
+            <a:off x="3929786" y="2313432"/>
+            <a:ext cx="1874519" cy="411480"/>
           </a:xfrm>
           <a:prstGeom prst="rect">
             <a:avLst/>
@@ -9857,7 +10657,7 @@
           <a:noFill/>
         </p:spPr>
         <p:txBody>
-          <a:bodyPr wrap="square" anchor="t" lIns="0" rIns="0" tIns="0" bIns="0">
+          <a:bodyPr wrap="square" lIns="0" tIns="0" rIns="0" bIns="0" anchor="t">
             <a:spAutoFit/>
           </a:bodyPr>
           <a:lstStyle/>
@@ -9874,7 +10674,7 @@
               </a:spcAft>
             </a:pPr>
             <a:r>
-              <a:rPr sz="1200" b="0" i="0">
+              <a:rPr sz="1050" b="0" i="0">
                 <a:solidFill>
                   <a:srgbClr val="5A6473"/>
                 </a:solidFill>
@@ -9893,8 +10693,8 @@
         </p:nvSpPr>
         <p:spPr>
           <a:xfrm>
-            <a:off x="6268516" y="1874519"/>
-            <a:ext cx="2377440" cy="1298448"/>
+            <a:off x="6268516" y="1783080"/>
+            <a:ext cx="2377440" cy="1024128"/>
           </a:xfrm>
           <a:prstGeom prst="roundRect">
             <a:avLst>
@@ -9936,6 +10736,7 @@
           <a:lstStyle/>
           <a:p>
             <a:pPr algn="ctr"/>
+            <a:endParaRPr/>
           </a:p>
         </p:txBody>
       </p:sp>
@@ -9947,8 +10748,8 @@
         </p:nvSpPr>
         <p:spPr>
           <a:xfrm>
-            <a:off x="6433108" y="2057400"/>
-            <a:ext cx="146304" cy="932688"/>
+            <a:off x="6414820" y="1929384"/>
+            <a:ext cx="128016" cy="731520"/>
           </a:xfrm>
           <a:prstGeom prst="rect">
             <a:avLst/>
@@ -9980,6 +10781,7 @@
           <a:lstStyle/>
           <a:p>
             <a:pPr algn="ctr"/>
+            <a:endParaRPr/>
           </a:p>
         </p:txBody>
       </p:sp>
@@ -9991,8 +10793,8 @@
         </p:nvSpPr>
         <p:spPr>
           <a:xfrm>
-            <a:off x="6689140" y="2039112"/>
-            <a:ext cx="1828800" cy="457200"/>
+            <a:off x="6652564" y="1911095"/>
+            <a:ext cx="1874519" cy="411480"/>
           </a:xfrm>
           <a:prstGeom prst="rect">
             <a:avLst/>
@@ -10000,7 +10802,7 @@
           <a:noFill/>
         </p:spPr>
         <p:txBody>
-          <a:bodyPr wrap="square" anchor="t" lIns="0" rIns="0" tIns="0" bIns="0">
+          <a:bodyPr wrap="square" lIns="0" tIns="0" rIns="0" bIns="0" anchor="t">
             <a:spAutoFit/>
           </a:bodyPr>
           <a:lstStyle/>
@@ -10017,7 +10819,7 @@
               </a:spcAft>
             </a:pPr>
             <a:r>
-              <a:rPr sz="1450" b="1" i="0">
+              <a:rPr sz="1300" b="1" i="0">
                 <a:solidFill>
                   <a:srgbClr val="1B2633"/>
                 </a:solidFill>
@@ -10036,8 +10838,8 @@
         </p:nvSpPr>
         <p:spPr>
           <a:xfrm>
-            <a:off x="6689140" y="2514600"/>
-            <a:ext cx="1828800" cy="548640"/>
+            <a:off x="6652564" y="2313432"/>
+            <a:ext cx="1874519" cy="411480"/>
           </a:xfrm>
           <a:prstGeom prst="rect">
             <a:avLst/>
@@ -10045,7 +10847,7 @@
           <a:noFill/>
         </p:spPr>
         <p:txBody>
-          <a:bodyPr wrap="square" anchor="t" lIns="0" rIns="0" tIns="0" bIns="0">
+          <a:bodyPr wrap="square" lIns="0" tIns="0" rIns="0" bIns="0" anchor="t">
             <a:spAutoFit/>
           </a:bodyPr>
           <a:lstStyle/>
@@ -10062,7 +10864,7 @@
               </a:spcAft>
             </a:pPr>
             <a:r>
-              <a:rPr sz="1200" b="0" i="0">
+              <a:rPr sz="1050" b="0" i="0">
                 <a:solidFill>
                   <a:srgbClr val="5A6473"/>
                 </a:solidFill>
@@ -10081,8 +10883,8 @@
         </p:nvSpPr>
         <p:spPr>
           <a:xfrm>
-            <a:off x="8991295" y="1874519"/>
-            <a:ext cx="2377440" cy="1298448"/>
+            <a:off x="8991295" y="1783080"/>
+            <a:ext cx="2377440" cy="1024128"/>
           </a:xfrm>
           <a:prstGeom prst="roundRect">
             <a:avLst>
@@ -10124,6 +10926,7 @@
           <a:lstStyle/>
           <a:p>
             <a:pPr algn="ctr"/>
+            <a:endParaRPr/>
           </a:p>
         </p:txBody>
       </p:sp>
@@ -10135,8 +10938,8 @@
         </p:nvSpPr>
         <p:spPr>
           <a:xfrm>
-            <a:off x="9155887" y="2057400"/>
-            <a:ext cx="146304" cy="932688"/>
+            <a:off x="9137599" y="1929384"/>
+            <a:ext cx="128016" cy="731520"/>
           </a:xfrm>
           <a:prstGeom prst="rect">
             <a:avLst/>
@@ -10168,6 +10971,7 @@
           <a:lstStyle/>
           <a:p>
             <a:pPr algn="ctr"/>
+            <a:endParaRPr/>
           </a:p>
         </p:txBody>
       </p:sp>
@@ -10179,8 +10983,8 @@
         </p:nvSpPr>
         <p:spPr>
           <a:xfrm>
-            <a:off x="9411919" y="2039112"/>
-            <a:ext cx="1828800" cy="457200"/>
+            <a:off x="9375343" y="1911095"/>
+            <a:ext cx="1874519" cy="411480"/>
           </a:xfrm>
           <a:prstGeom prst="rect">
             <a:avLst/>
@@ -10188,7 +10992,7 @@
           <a:noFill/>
         </p:spPr>
         <p:txBody>
-          <a:bodyPr wrap="square" anchor="t" lIns="0" rIns="0" tIns="0" bIns="0">
+          <a:bodyPr wrap="square" lIns="0" tIns="0" rIns="0" bIns="0" anchor="t">
             <a:spAutoFit/>
           </a:bodyPr>
           <a:lstStyle/>
@@ -10205,7 +11009,7 @@
               </a:spcAft>
             </a:pPr>
             <a:r>
-              <a:rPr sz="1450" b="1" i="0">
+              <a:rPr sz="1300" b="1" i="0">
                 <a:solidFill>
                   <a:srgbClr val="1B2633"/>
                 </a:solidFill>
@@ -10224,8 +11028,8 @@
         </p:nvSpPr>
         <p:spPr>
           <a:xfrm>
-            <a:off x="9411919" y="2514600"/>
-            <a:ext cx="1828800" cy="548640"/>
+            <a:off x="9375343" y="2313432"/>
+            <a:ext cx="1874519" cy="411480"/>
           </a:xfrm>
           <a:prstGeom prst="rect">
             <a:avLst/>
@@ -10233,7 +11037,7 @@
           <a:noFill/>
         </p:spPr>
         <p:txBody>
-          <a:bodyPr wrap="square" anchor="t" lIns="0" rIns="0" tIns="0" bIns="0">
+          <a:bodyPr wrap="square" lIns="0" tIns="0" rIns="0" bIns="0" anchor="t">
             <a:spAutoFit/>
           </a:bodyPr>
           <a:lstStyle/>
@@ -10250,7 +11054,7 @@
               </a:spcAft>
             </a:pPr>
             <a:r>
-              <a:rPr sz="1200" b="0" i="0">
+              <a:rPr sz="1050" b="0" i="0">
                 <a:solidFill>
                   <a:srgbClr val="5A6473"/>
                 </a:solidFill>
@@ -10269,8 +11073,8 @@
         </p:nvSpPr>
         <p:spPr>
           <a:xfrm>
-            <a:off x="822960" y="3374135"/>
-            <a:ext cx="2377440" cy="1298448"/>
+            <a:off x="822960" y="2953512"/>
+            <a:ext cx="2377440" cy="1024128"/>
           </a:xfrm>
           <a:prstGeom prst="roundRect">
             <a:avLst>
@@ -10312,6 +11116,7 @@
           <a:lstStyle/>
           <a:p>
             <a:pPr algn="ctr"/>
+            <a:endParaRPr/>
           </a:p>
         </p:txBody>
       </p:sp>
@@ -10323,8 +11128,8 @@
         </p:nvSpPr>
         <p:spPr>
           <a:xfrm>
-            <a:off x="987552" y="3557015"/>
-            <a:ext cx="146304" cy="932688"/>
+            <a:off x="969264" y="3099816"/>
+            <a:ext cx="128016" cy="731520"/>
           </a:xfrm>
           <a:prstGeom prst="rect">
             <a:avLst/>
@@ -10356,6 +11161,7 @@
           <a:lstStyle/>
           <a:p>
             <a:pPr algn="ctr"/>
+            <a:endParaRPr/>
           </a:p>
         </p:txBody>
       </p:sp>
@@ -10367,8 +11173,8 @@
         </p:nvSpPr>
         <p:spPr>
           <a:xfrm>
-            <a:off x="1243584" y="3538727"/>
-            <a:ext cx="1828800" cy="457200"/>
+            <a:off x="1207008" y="3081528"/>
+            <a:ext cx="1874519" cy="411480"/>
           </a:xfrm>
           <a:prstGeom prst="rect">
             <a:avLst/>
@@ -10376,7 +11182,7 @@
           <a:noFill/>
         </p:spPr>
         <p:txBody>
-          <a:bodyPr wrap="square" anchor="t" lIns="0" rIns="0" tIns="0" bIns="0">
+          <a:bodyPr wrap="square" lIns="0" tIns="0" rIns="0" bIns="0" anchor="t">
             <a:spAutoFit/>
           </a:bodyPr>
           <a:lstStyle/>
@@ -10393,7 +11199,7 @@
               </a:spcAft>
             </a:pPr>
             <a:r>
-              <a:rPr sz="1450" b="1" i="0">
+              <a:rPr sz="1300" b="1" i="0">
                 <a:solidFill>
                   <a:srgbClr val="1B2633"/>
                 </a:solidFill>
@@ -10412,8 +11218,8 @@
         </p:nvSpPr>
         <p:spPr>
           <a:xfrm>
-            <a:off x="1243584" y="4014215"/>
-            <a:ext cx="1828800" cy="548640"/>
+            <a:off x="1207008" y="3483864"/>
+            <a:ext cx="1874519" cy="411480"/>
           </a:xfrm>
           <a:prstGeom prst="rect">
             <a:avLst/>
@@ -10421,7 +11227,7 @@
           <a:noFill/>
         </p:spPr>
         <p:txBody>
-          <a:bodyPr wrap="square" anchor="t" lIns="0" rIns="0" tIns="0" bIns="0">
+          <a:bodyPr wrap="square" lIns="0" tIns="0" rIns="0" bIns="0" anchor="t">
             <a:spAutoFit/>
           </a:bodyPr>
           <a:lstStyle/>
@@ -10438,7 +11244,7 @@
               </a:spcAft>
             </a:pPr>
             <a:r>
-              <a:rPr sz="1200" b="0" i="0">
+              <a:rPr sz="1050" b="0" i="0">
                 <a:solidFill>
                   <a:srgbClr val="5A6473"/>
                 </a:solidFill>
@@ -10457,8 +11263,8 @@
         </p:nvSpPr>
         <p:spPr>
           <a:xfrm>
-            <a:off x="3545738" y="3374135"/>
-            <a:ext cx="2377440" cy="1298448"/>
+            <a:off x="3545738" y="2953512"/>
+            <a:ext cx="2377440" cy="1024128"/>
           </a:xfrm>
           <a:prstGeom prst="roundRect">
             <a:avLst>
@@ -10500,6 +11306,7 @@
           <a:lstStyle/>
           <a:p>
             <a:pPr algn="ctr"/>
+            <a:endParaRPr/>
           </a:p>
         </p:txBody>
       </p:sp>
@@ -10511,8 +11318,8 @@
         </p:nvSpPr>
         <p:spPr>
           <a:xfrm>
-            <a:off x="3710330" y="3557015"/>
-            <a:ext cx="146304" cy="932688"/>
+            <a:off x="3692042" y="3099816"/>
+            <a:ext cx="128016" cy="731520"/>
           </a:xfrm>
           <a:prstGeom prst="rect">
             <a:avLst/>
@@ -10544,6 +11351,7 @@
           <a:lstStyle/>
           <a:p>
             <a:pPr algn="ctr"/>
+            <a:endParaRPr/>
           </a:p>
         </p:txBody>
       </p:sp>
@@ -10555,8 +11363,8 @@
         </p:nvSpPr>
         <p:spPr>
           <a:xfrm>
-            <a:off x="3966362" y="3538727"/>
-            <a:ext cx="1828800" cy="457200"/>
+            <a:off x="3929786" y="3081528"/>
+            <a:ext cx="1874519" cy="411480"/>
           </a:xfrm>
           <a:prstGeom prst="rect">
             <a:avLst/>
@@ -10564,7 +11372,7 @@
           <a:noFill/>
         </p:spPr>
         <p:txBody>
-          <a:bodyPr wrap="square" anchor="t" lIns="0" rIns="0" tIns="0" bIns="0">
+          <a:bodyPr wrap="square" lIns="0" tIns="0" rIns="0" bIns="0" anchor="t">
             <a:spAutoFit/>
           </a:bodyPr>
           <a:lstStyle/>
@@ -10581,7 +11389,7 @@
               </a:spcAft>
             </a:pPr>
             <a:r>
-              <a:rPr sz="1450" b="1" i="0">
+              <a:rPr sz="1300" b="1" i="0">
                 <a:solidFill>
                   <a:srgbClr val="1B2633"/>
                 </a:solidFill>
@@ -10600,8 +11408,8 @@
         </p:nvSpPr>
         <p:spPr>
           <a:xfrm>
-            <a:off x="3966362" y="4014215"/>
-            <a:ext cx="1828800" cy="548640"/>
+            <a:off x="3929786" y="3483864"/>
+            <a:ext cx="1874519" cy="411480"/>
           </a:xfrm>
           <a:prstGeom prst="rect">
             <a:avLst/>
@@ -10609,7 +11417,7 @@
           <a:noFill/>
         </p:spPr>
         <p:txBody>
-          <a:bodyPr wrap="square" anchor="t" lIns="0" rIns="0" tIns="0" bIns="0">
+          <a:bodyPr wrap="square" lIns="0" tIns="0" rIns="0" bIns="0" anchor="t">
             <a:spAutoFit/>
           </a:bodyPr>
           <a:lstStyle/>
@@ -10626,7 +11434,7 @@
               </a:spcAft>
             </a:pPr>
             <a:r>
-              <a:rPr sz="1200" b="0" i="0">
+              <a:rPr sz="1050" b="0" i="0">
                 <a:solidFill>
                   <a:srgbClr val="5A6473"/>
                 </a:solidFill>
@@ -10645,8 +11453,8 @@
         </p:nvSpPr>
         <p:spPr>
           <a:xfrm>
-            <a:off x="6268516" y="3374135"/>
-            <a:ext cx="2377440" cy="1298448"/>
+            <a:off x="6268516" y="2953512"/>
+            <a:ext cx="2377440" cy="1024128"/>
           </a:xfrm>
           <a:prstGeom prst="roundRect">
             <a:avLst>
@@ -10688,6 +11496,7 @@
           <a:lstStyle/>
           <a:p>
             <a:pPr algn="ctr"/>
+            <a:endParaRPr/>
           </a:p>
         </p:txBody>
       </p:sp>
@@ -10699,14 +11508,14 @@
         </p:nvSpPr>
         <p:spPr>
           <a:xfrm>
-            <a:off x="6433108" y="3557015"/>
-            <a:ext cx="146304" cy="932688"/>
+            <a:off x="6414820" y="3099816"/>
+            <a:ext cx="128016" cy="731520"/>
           </a:xfrm>
           <a:prstGeom prst="rect">
             <a:avLst/>
           </a:prstGeom>
           <a:solidFill>
-            <a:srgbClr val="11823B"/>
+            <a:srgbClr val="6B4FB3"/>
           </a:solidFill>
           <a:ln>
             <a:noFill/>
@@ -10732,6 +11541,7 @@
           <a:lstStyle/>
           <a:p>
             <a:pPr algn="ctr"/>
+            <a:endParaRPr/>
           </a:p>
         </p:txBody>
       </p:sp>
@@ -10743,8 +11553,8 @@
         </p:nvSpPr>
         <p:spPr>
           <a:xfrm>
-            <a:off x="6689140" y="3538727"/>
-            <a:ext cx="1828800" cy="457200"/>
+            <a:off x="6652564" y="3081528"/>
+            <a:ext cx="1874519" cy="411480"/>
           </a:xfrm>
           <a:prstGeom prst="rect">
             <a:avLst/>
@@ -10752,7 +11562,7 @@
           <a:noFill/>
         </p:spPr>
         <p:txBody>
-          <a:bodyPr wrap="square" anchor="t" lIns="0" rIns="0" tIns="0" bIns="0">
+          <a:bodyPr wrap="square" lIns="0" tIns="0" rIns="0" bIns="0" anchor="t">
             <a:spAutoFit/>
           </a:bodyPr>
           <a:lstStyle/>
@@ -10769,13 +11579,13 @@
               </a:spcAft>
             </a:pPr>
             <a:r>
-              <a:rPr sz="1450" b="1" i="0">
+              <a:rPr sz="1300" b="1" i="0">
                 <a:solidFill>
                   <a:srgbClr val="1B2633"/>
                 </a:solidFill>
                 <a:latin typeface="Calibri"/>
               </a:rPr>
-              <a:t>Schulbank</a:t>
+              <a:t>Mitarbeiter</a:t>
             </a:r>
           </a:p>
         </p:txBody>
@@ -10788,8 +11598,8 @@
         </p:nvSpPr>
         <p:spPr>
           <a:xfrm>
-            <a:off x="6689140" y="4014215"/>
-            <a:ext cx="1828800" cy="548640"/>
+            <a:off x="6652564" y="3483864"/>
+            <a:ext cx="1874519" cy="411480"/>
           </a:xfrm>
           <a:prstGeom prst="rect">
             <a:avLst/>
@@ -10797,7 +11607,7 @@
           <a:noFill/>
         </p:spPr>
         <p:txBody>
-          <a:bodyPr wrap="square" anchor="t" lIns="0" rIns="0" tIns="0" bIns="0">
+          <a:bodyPr wrap="square" lIns="0" tIns="0" rIns="0" bIns="0" anchor="t">
             <a:spAutoFit/>
           </a:bodyPr>
           <a:lstStyle/>
@@ -10814,13 +11624,13 @@
               </a:spcAft>
             </a:pPr>
             <a:r>
-              <a:rPr sz="1200" b="0" i="0">
+              <a:rPr sz="1050" b="0" i="0">
                 <a:solidFill>
                   <a:srgbClr val="5A6473"/>
                 </a:solidFill>
                 <a:latin typeface="Calibri"/>
               </a:rPr>
-              <a:t>Lernvorschläge pflegen</a:t>
+              <a:t>Zuständigkeiten &amp; Profile</a:t>
             </a:r>
           </a:p>
         </p:txBody>
@@ -10833,8 +11643,8 @@
         </p:nvSpPr>
         <p:spPr>
           <a:xfrm>
-            <a:off x="8991295" y="3374135"/>
-            <a:ext cx="2377440" cy="1298448"/>
+            <a:off x="8991295" y="2953512"/>
+            <a:ext cx="2377440" cy="1024128"/>
           </a:xfrm>
           <a:prstGeom prst="roundRect">
             <a:avLst>
@@ -10876,6 +11686,7 @@
           <a:lstStyle/>
           <a:p>
             <a:pPr algn="ctr"/>
+            <a:endParaRPr/>
           </a:p>
         </p:txBody>
       </p:sp>
@@ -10887,14 +11698,14 @@
         </p:nvSpPr>
         <p:spPr>
           <a:xfrm>
-            <a:off x="9155887" y="3557015"/>
-            <a:ext cx="146304" cy="932688"/>
+            <a:off x="9137599" y="3099816"/>
+            <a:ext cx="128016" cy="731520"/>
           </a:xfrm>
           <a:prstGeom prst="rect">
             <a:avLst/>
           </a:prstGeom>
           <a:solidFill>
-            <a:srgbClr val="0B6E6E"/>
+            <a:srgbClr val="11823B"/>
           </a:solidFill>
           <a:ln>
             <a:noFill/>
@@ -10920,6 +11731,7 @@
           <a:lstStyle/>
           <a:p>
             <a:pPr algn="ctr"/>
+            <a:endParaRPr/>
           </a:p>
         </p:txBody>
       </p:sp>
@@ -10931,8 +11743,8 @@
         </p:nvSpPr>
         <p:spPr>
           <a:xfrm>
-            <a:off x="9411919" y="3538727"/>
-            <a:ext cx="1828800" cy="457200"/>
+            <a:off x="9375343" y="3081528"/>
+            <a:ext cx="1874519" cy="411480"/>
           </a:xfrm>
           <a:prstGeom prst="rect">
             <a:avLst/>
@@ -10940,7 +11752,7 @@
           <a:noFill/>
         </p:spPr>
         <p:txBody>
-          <a:bodyPr wrap="square" anchor="t" lIns="0" rIns="0" tIns="0" bIns="0">
+          <a:bodyPr wrap="square" lIns="0" tIns="0" rIns="0" bIns="0" anchor="t">
             <a:spAutoFit/>
           </a:bodyPr>
           <a:lstStyle/>
@@ -10957,13 +11769,13 @@
               </a:spcAft>
             </a:pPr>
             <a:r>
-              <a:rPr sz="1450" b="1" i="0">
+              <a:rPr sz="1300" b="1" i="0">
                 <a:solidFill>
                   <a:srgbClr val="1B2633"/>
                 </a:solidFill>
                 <a:latin typeface="Calibri"/>
               </a:rPr>
-              <a:t>Vergleichs-Suche</a:t>
+              <a:t>Schulbank</a:t>
             </a:r>
           </a:p>
         </p:txBody>
@@ -10976,8 +11788,8 @@
         </p:nvSpPr>
         <p:spPr>
           <a:xfrm>
-            <a:off x="9411919" y="4014215"/>
-            <a:ext cx="1828800" cy="548640"/>
+            <a:off x="9375343" y="3483864"/>
+            <a:ext cx="1874519" cy="411480"/>
           </a:xfrm>
           <a:prstGeom prst="rect">
             <a:avLst/>
@@ -10985,7 +11797,7 @@
           <a:noFill/>
         </p:spPr>
         <p:txBody>
-          <a:bodyPr wrap="square" anchor="t" lIns="0" rIns="0" tIns="0" bIns="0">
+          <a:bodyPr wrap="square" lIns="0" tIns="0" rIns="0" bIns="0" anchor="t">
             <a:spAutoFit/>
           </a:bodyPr>
           <a:lstStyle/>
@@ -11002,13 +11814,13 @@
               </a:spcAft>
             </a:pPr>
             <a:r>
-              <a:rPr sz="1200" b="0" i="0">
+              <a:rPr sz="1050" b="0" i="0">
                 <a:solidFill>
                   <a:srgbClr val="5A6473"/>
                 </a:solidFill>
                 <a:latin typeface="Calibri"/>
               </a:rPr>
-              <a:t>PZN/Artikel schnell finden</a:t>
+              <a:t>Lernvorschläge pflegen</a:t>
             </a:r>
           </a:p>
         </p:txBody>
@@ -11021,8 +11833,8 @@
         </p:nvSpPr>
         <p:spPr>
           <a:xfrm>
-            <a:off x="822960" y="4873752"/>
-            <a:ext cx="2377440" cy="1298448"/>
+            <a:off x="822960" y="4123944"/>
+            <a:ext cx="2377440" cy="1024128"/>
           </a:xfrm>
           <a:prstGeom prst="roundRect">
             <a:avLst>
@@ -11064,6 +11876,7 @@
           <a:lstStyle/>
           <a:p>
             <a:pPr algn="ctr"/>
+            <a:endParaRPr/>
           </a:p>
         </p:txBody>
       </p:sp>
@@ -11075,14 +11888,14 @@
         </p:nvSpPr>
         <p:spPr>
           <a:xfrm>
-            <a:off x="987552" y="5056632"/>
-            <a:ext cx="146304" cy="932688"/>
+            <a:off x="969264" y="4270248"/>
+            <a:ext cx="128016" cy="731520"/>
           </a:xfrm>
           <a:prstGeom prst="rect">
             <a:avLst/>
           </a:prstGeom>
           <a:solidFill>
-            <a:srgbClr val="0B4A86"/>
+            <a:srgbClr val="0B6E6E"/>
           </a:solidFill>
           <a:ln>
             <a:noFill/>
@@ -11108,6 +11921,7 @@
           <a:lstStyle/>
           <a:p>
             <a:pPr algn="ctr"/>
+            <a:endParaRPr/>
           </a:p>
         </p:txBody>
       </p:sp>
@@ -11119,8 +11933,8 @@
         </p:nvSpPr>
         <p:spPr>
           <a:xfrm>
-            <a:off x="1243584" y="5038344"/>
-            <a:ext cx="1828800" cy="457200"/>
+            <a:off x="1207008" y="4251959"/>
+            <a:ext cx="1874519" cy="411480"/>
           </a:xfrm>
           <a:prstGeom prst="rect">
             <a:avLst/>
@@ -11128,7 +11942,7 @@
           <a:noFill/>
         </p:spPr>
         <p:txBody>
-          <a:bodyPr wrap="square" anchor="t" lIns="0" rIns="0" tIns="0" bIns="0">
+          <a:bodyPr wrap="square" lIns="0" tIns="0" rIns="0" bIns="0" anchor="t">
             <a:spAutoFit/>
           </a:bodyPr>
           <a:lstStyle/>
@@ -11145,13 +11959,13 @@
               </a:spcAft>
             </a:pPr>
             <a:r>
-              <a:rPr sz="1450" b="1" i="0">
+              <a:rPr sz="1300" b="1" i="0">
                 <a:solidFill>
                   <a:srgbClr val="1B2633"/>
                 </a:solidFill>
                 <a:latin typeface="Calibri"/>
               </a:rPr>
-              <a:t>Globale Suche</a:t>
+              <a:t>Report</a:t>
             </a:r>
           </a:p>
         </p:txBody>
@@ -11164,8 +11978,8 @@
         </p:nvSpPr>
         <p:spPr>
           <a:xfrm>
-            <a:off x="1243584" y="5513832"/>
-            <a:ext cx="1828800" cy="548640"/>
+            <a:off x="1207008" y="4654296"/>
+            <a:ext cx="1874519" cy="411480"/>
           </a:xfrm>
           <a:prstGeom prst="rect">
             <a:avLst/>
@@ -11173,7 +11987,7 @@
           <a:noFill/>
         </p:spPr>
         <p:txBody>
-          <a:bodyPr wrap="square" anchor="t" lIns="0" rIns="0" tIns="0" bIns="0">
+          <a:bodyPr wrap="square" lIns="0" tIns="0" rIns="0" bIns="0" anchor="t">
             <a:spAutoFit/>
           </a:bodyPr>
           <a:lstStyle/>
@@ -11190,13 +12004,13 @@
               </a:spcAft>
             </a:pPr>
             <a:r>
-              <a:rPr sz="1200" b="0" i="0">
+              <a:rPr sz="1050" b="0" i="0">
                 <a:solidFill>
                   <a:srgbClr val="5A6473"/>
                 </a:solidFill>
                 <a:latin typeface="Calibri"/>
               </a:rPr>
-              <a:t>Kunde, Analyse, Artikel</a:t>
+              <a:t>Kunden-Ampel &amp; Übersicht</a:t>
             </a:r>
           </a:p>
         </p:txBody>
@@ -11209,8 +12023,8 @@
         </p:nvSpPr>
         <p:spPr>
           <a:xfrm>
-            <a:off x="3545738" y="4873752"/>
-            <a:ext cx="2377440" cy="1298448"/>
+            <a:off x="3545738" y="4123944"/>
+            <a:ext cx="2377440" cy="1024128"/>
           </a:xfrm>
           <a:prstGeom prst="roundRect">
             <a:avLst>
@@ -11252,6 +12066,7 @@
           <a:lstStyle/>
           <a:p>
             <a:pPr algn="ctr"/>
+            <a:endParaRPr/>
           </a:p>
         </p:txBody>
       </p:sp>
@@ -11263,14 +12078,14 @@
         </p:nvSpPr>
         <p:spPr>
           <a:xfrm>
-            <a:off x="3710330" y="5056632"/>
-            <a:ext cx="146304" cy="932688"/>
+            <a:off x="3692042" y="4270248"/>
+            <a:ext cx="128016" cy="731520"/>
           </a:xfrm>
           <a:prstGeom prst="rect">
             <a:avLst/>
           </a:prstGeom>
           <a:solidFill>
-            <a:srgbClr val="8B5A00"/>
+            <a:srgbClr val="0B6E6E"/>
           </a:solidFill>
           <a:ln>
             <a:noFill/>
@@ -11296,6 +12111,7 @@
           <a:lstStyle/>
           <a:p>
             <a:pPr algn="ctr"/>
+            <a:endParaRPr/>
           </a:p>
         </p:txBody>
       </p:sp>
@@ -11307,8 +12123,8 @@
         </p:nvSpPr>
         <p:spPr>
           <a:xfrm>
-            <a:off x="3966362" y="5038344"/>
-            <a:ext cx="1828800" cy="457200"/>
+            <a:off x="3929786" y="4251959"/>
+            <a:ext cx="1874519" cy="411480"/>
           </a:xfrm>
           <a:prstGeom prst="rect">
             <a:avLst/>
@@ -11316,7 +12132,7 @@
           <a:noFill/>
         </p:spPr>
         <p:txBody>
-          <a:bodyPr wrap="square" anchor="t" lIns="0" rIns="0" tIns="0" bIns="0">
+          <a:bodyPr wrap="square" lIns="0" tIns="0" rIns="0" bIns="0" anchor="t">
             <a:spAutoFit/>
           </a:bodyPr>
           <a:lstStyle/>
@@ -11333,13 +12149,13 @@
               </a:spcAft>
             </a:pPr>
             <a:r>
-              <a:rPr sz="1450" b="1" i="0">
+              <a:rPr sz="1300" b="1" i="0">
                 <a:solidFill>
                   <a:srgbClr val="1B2633"/>
                 </a:solidFill>
                 <a:latin typeface="Calibri"/>
               </a:rPr>
-              <a:t>Abweichungsanalyse</a:t>
+              <a:t>Vergleichs-Suche</a:t>
             </a:r>
           </a:p>
         </p:txBody>
@@ -11352,8 +12168,8 @@
         </p:nvSpPr>
         <p:spPr>
           <a:xfrm>
-            <a:off x="3966362" y="5513832"/>
-            <a:ext cx="1828800" cy="548640"/>
+            <a:off x="3929786" y="4654296"/>
+            <a:ext cx="1874519" cy="411480"/>
           </a:xfrm>
           <a:prstGeom prst="rect">
             <a:avLst/>
@@ -11361,7 +12177,7 @@
           <a:noFill/>
         </p:spPr>
         <p:txBody>
-          <a:bodyPr wrap="square" anchor="t" lIns="0" rIns="0" tIns="0" bIns="0">
+          <a:bodyPr wrap="square" lIns="0" tIns="0" rIns="0" bIns="0" anchor="t">
             <a:spAutoFit/>
           </a:bodyPr>
           <a:lstStyle/>
@@ -11378,13 +12194,13 @@
               </a:spcAft>
             </a:pPr>
             <a:r>
-              <a:rPr sz="1200" b="0" i="0">
+              <a:rPr sz="1050" b="0" i="0">
                 <a:solidFill>
                   <a:srgbClr val="5A6473"/>
                 </a:solidFill>
                 <a:latin typeface="Calibri"/>
               </a:rPr>
-              <a:t>Manuell vs. Programm</a:t>
+              <a:t>PZN/Artikel schnell finden</a:t>
             </a:r>
           </a:p>
         </p:txBody>
@@ -11397,8 +12213,8 @@
         </p:nvSpPr>
         <p:spPr>
           <a:xfrm>
-            <a:off x="6268516" y="4873752"/>
-            <a:ext cx="2377440" cy="1298448"/>
+            <a:off x="6268516" y="4123944"/>
+            <a:ext cx="2377440" cy="1024128"/>
           </a:xfrm>
           <a:prstGeom prst="roundRect">
             <a:avLst>
@@ -11440,6 +12256,7 @@
           <a:lstStyle/>
           <a:p>
             <a:pPr algn="ctr"/>
+            <a:endParaRPr/>
           </a:p>
         </p:txBody>
       </p:sp>
@@ -11451,14 +12268,14 @@
         </p:nvSpPr>
         <p:spPr>
           <a:xfrm>
-            <a:off x="6433108" y="5056632"/>
-            <a:ext cx="146304" cy="932688"/>
+            <a:off x="6414820" y="4270248"/>
+            <a:ext cx="128016" cy="731520"/>
           </a:xfrm>
           <a:prstGeom prst="rect">
             <a:avLst/>
           </a:prstGeom>
           <a:solidFill>
-            <a:srgbClr val="5A6473"/>
+            <a:srgbClr val="0B4A86"/>
           </a:solidFill>
           <a:ln>
             <a:noFill/>
@@ -11484,6 +12301,7 @@
           <a:lstStyle/>
           <a:p>
             <a:pPr algn="ctr"/>
+            <a:endParaRPr/>
           </a:p>
         </p:txBody>
       </p:sp>
@@ -11495,8 +12313,8 @@
         </p:nvSpPr>
         <p:spPr>
           <a:xfrm>
-            <a:off x="6689140" y="5038344"/>
-            <a:ext cx="1828800" cy="457200"/>
+            <a:off x="6652564" y="4251959"/>
+            <a:ext cx="1874519" cy="411480"/>
           </a:xfrm>
           <a:prstGeom prst="rect">
             <a:avLst/>
@@ -11504,7 +12322,7 @@
           <a:noFill/>
         </p:spPr>
         <p:txBody>
-          <a:bodyPr wrap="square" anchor="t" lIns="0" rIns="0" tIns="0" bIns="0">
+          <a:bodyPr wrap="square" lIns="0" tIns="0" rIns="0" bIns="0" anchor="t">
             <a:spAutoFit/>
           </a:bodyPr>
           <a:lstStyle/>
@@ -11521,13 +12339,13 @@
               </a:spcAft>
             </a:pPr>
             <a:r>
-              <a:rPr sz="1450" b="1" i="0">
+              <a:rPr sz="1300" b="1" i="0">
                 <a:solidFill>
                   <a:srgbClr val="1B2633"/>
                 </a:solidFill>
                 <a:latin typeface="Calibri"/>
               </a:rPr>
-              <a:t>Daten aktualisieren</a:t>
+              <a:t>Globale Suche</a:t>
             </a:r>
           </a:p>
         </p:txBody>
@@ -11540,8 +12358,8 @@
         </p:nvSpPr>
         <p:spPr>
           <a:xfrm>
-            <a:off x="6689140" y="5513832"/>
-            <a:ext cx="1828800" cy="548640"/>
+            <a:off x="6652564" y="4654296"/>
+            <a:ext cx="1874519" cy="411480"/>
           </a:xfrm>
           <a:prstGeom prst="rect">
             <a:avLst/>
@@ -11549,7 +12367,7 @@
           <a:noFill/>
         </p:spPr>
         <p:txBody>
-          <a:bodyPr wrap="square" anchor="t" lIns="0" rIns="0" tIns="0" bIns="0">
+          <a:bodyPr wrap="square" lIns="0" tIns="0" rIns="0" bIns="0" anchor="t">
             <a:spAutoFit/>
           </a:bodyPr>
           <a:lstStyle/>
@@ -11566,13 +12384,13 @@
               </a:spcAft>
             </a:pPr>
             <a:r>
-              <a:rPr sz="1200" b="0" i="0">
+              <a:rPr sz="1050" b="0" i="0">
                 <a:solidFill>
                   <a:srgbClr val="5A6473"/>
                 </a:solidFill>
                 <a:latin typeface="Calibri"/>
               </a:rPr>
-              <a:t>Stammdaten &amp; Importe</a:t>
+              <a:t>Kunde, Analyse, Artikel</a:t>
             </a:r>
           </a:p>
         </p:txBody>
@@ -11585,8 +12403,8 @@
         </p:nvSpPr>
         <p:spPr>
           <a:xfrm>
-            <a:off x="8991295" y="4873752"/>
-            <a:ext cx="2377440" cy="1298448"/>
+            <a:off x="8991295" y="4123944"/>
+            <a:ext cx="2377440" cy="1024128"/>
           </a:xfrm>
           <a:prstGeom prst="roundRect">
             <a:avLst>
@@ -11628,6 +12446,7 @@
           <a:lstStyle/>
           <a:p>
             <a:pPr algn="ctr"/>
+            <a:endParaRPr/>
           </a:p>
         </p:txBody>
       </p:sp>
@@ -11639,8 +12458,578 @@
         </p:nvSpPr>
         <p:spPr>
           <a:xfrm>
-            <a:off x="9155887" y="5056632"/>
-            <a:ext cx="146304" cy="932688"/>
+            <a:off x="9137599" y="4270248"/>
+            <a:ext cx="128016" cy="731520"/>
+          </a:xfrm>
+          <a:prstGeom prst="rect">
+            <a:avLst/>
+          </a:prstGeom>
+          <a:solidFill>
+            <a:srgbClr val="8B5A00"/>
+          </a:solidFill>
+          <a:ln>
+            <a:noFill/>
+          </a:ln>
+          <a:effectLst/>
+        </p:spPr>
+        <p:style>
+          <a:lnRef idx="1">
+            <a:schemeClr val="accent1"/>
+          </a:lnRef>
+          <a:fillRef idx="3">
+            <a:schemeClr val="accent1"/>
+          </a:fillRef>
+          <a:effectRef idx="2">
+            <a:schemeClr val="accent1"/>
+          </a:effectRef>
+          <a:fontRef idx="minor">
+            <a:schemeClr val="lt1"/>
+          </a:fontRef>
+        </p:style>
+        <p:txBody>
+          <a:bodyPr rtlCol="0" anchor="ctr"/>
+          <a:lstStyle/>
+          <a:p>
+            <a:pPr algn="ctr"/>
+            <a:endParaRPr/>
+          </a:p>
+        </p:txBody>
+      </p:sp>
+      <p:sp>
+        <p:nvSpPr>
+          <p:cNvPr id="50" name="TextBox 49"/>
+          <p:cNvSpPr txBox="1"/>
+          <p:nvPr/>
+        </p:nvSpPr>
+        <p:spPr>
+          <a:xfrm>
+            <a:off x="9375343" y="4251959"/>
+            <a:ext cx="1874519" cy="411480"/>
+          </a:xfrm>
+          <a:prstGeom prst="rect">
+            <a:avLst/>
+          </a:prstGeom>
+          <a:noFill/>
+        </p:spPr>
+        <p:txBody>
+          <a:bodyPr wrap="square" lIns="0" tIns="0" rIns="0" bIns="0" anchor="t">
+            <a:spAutoFit/>
+          </a:bodyPr>
+          <a:lstStyle/>
+          <a:p>
+            <a:pPr algn="l">
+              <a:lnSpc>
+                <a:spcPct val="100000"/>
+              </a:lnSpc>
+              <a:spcBef>
+                <a:spcPts val="0"/>
+              </a:spcBef>
+              <a:spcAft>
+                <a:spcPts val="400"/>
+              </a:spcAft>
+            </a:pPr>
+            <a:r>
+              <a:rPr sz="1300" b="1" i="0">
+                <a:solidFill>
+                  <a:srgbClr val="1B2633"/>
+                </a:solidFill>
+                <a:latin typeface="Calibri"/>
+              </a:rPr>
+              <a:t>Abweichungsanalyse</a:t>
+            </a:r>
+          </a:p>
+        </p:txBody>
+      </p:sp>
+      <p:sp>
+        <p:nvSpPr>
+          <p:cNvPr id="51" name="TextBox 50"/>
+          <p:cNvSpPr txBox="1"/>
+          <p:nvPr/>
+        </p:nvSpPr>
+        <p:spPr>
+          <a:xfrm>
+            <a:off x="9375343" y="4654296"/>
+            <a:ext cx="1874519" cy="411480"/>
+          </a:xfrm>
+          <a:prstGeom prst="rect">
+            <a:avLst/>
+          </a:prstGeom>
+          <a:noFill/>
+        </p:spPr>
+        <p:txBody>
+          <a:bodyPr wrap="square" lIns="0" tIns="0" rIns="0" bIns="0" anchor="t">
+            <a:spAutoFit/>
+          </a:bodyPr>
+          <a:lstStyle/>
+          <a:p>
+            <a:pPr algn="l">
+              <a:lnSpc>
+                <a:spcPct val="100000"/>
+              </a:lnSpc>
+              <a:spcBef>
+                <a:spcPts val="0"/>
+              </a:spcBef>
+              <a:spcAft>
+                <a:spcPts val="400"/>
+              </a:spcAft>
+            </a:pPr>
+            <a:r>
+              <a:rPr sz="1050" b="0" i="0">
+                <a:solidFill>
+                  <a:srgbClr val="5A6473"/>
+                </a:solidFill>
+                <a:latin typeface="Calibri"/>
+              </a:rPr>
+              <a:t>Manuell vs. Programm</a:t>
+            </a:r>
+          </a:p>
+        </p:txBody>
+      </p:sp>
+      <p:sp>
+        <p:nvSpPr>
+          <p:cNvPr id="52" name="Rounded Rectangle 51"/>
+          <p:cNvSpPr/>
+          <p:nvPr/>
+        </p:nvSpPr>
+        <p:spPr>
+          <a:xfrm>
+            <a:off x="822960" y="5294376"/>
+            <a:ext cx="2377440" cy="1024128"/>
+          </a:xfrm>
+          <a:prstGeom prst="roundRect">
+            <a:avLst>
+              <a:gd name="adj" fmla="val 8000"/>
+            </a:avLst>
+          </a:prstGeom>
+          <a:solidFill>
+            <a:srgbClr val="FFFFFF"/>
+          </a:solidFill>
+          <a:ln w="12700">
+            <a:solidFill>
+              <a:srgbClr val="D8DFEA"/>
+            </a:solidFill>
+          </a:ln>
+          <a:effectLst>
+            <a:outerShdw blurRad="90000" dist="38100" dir="5400000" rotWithShape="0">
+              <a:srgbClr val="1B2633">
+                <a:alpha val="18000"/>
+              </a:srgbClr>
+            </a:outerShdw>
+          </a:effectLst>
+        </p:spPr>
+        <p:style>
+          <a:lnRef idx="1">
+            <a:schemeClr val="accent1"/>
+          </a:lnRef>
+          <a:fillRef idx="3">
+            <a:schemeClr val="accent1"/>
+          </a:fillRef>
+          <a:effectRef idx="2">
+            <a:schemeClr val="accent1"/>
+          </a:effectRef>
+          <a:fontRef idx="minor">
+            <a:schemeClr val="lt1"/>
+          </a:fontRef>
+        </p:style>
+        <p:txBody>
+          <a:bodyPr rtlCol="0" anchor="ctr"/>
+          <a:lstStyle/>
+          <a:p>
+            <a:pPr algn="ctr"/>
+            <a:endParaRPr/>
+          </a:p>
+        </p:txBody>
+      </p:sp>
+      <p:sp>
+        <p:nvSpPr>
+          <p:cNvPr id="53" name="Rectangle 52"/>
+          <p:cNvSpPr/>
+          <p:nvPr/>
+        </p:nvSpPr>
+        <p:spPr>
+          <a:xfrm>
+            <a:off x="969264" y="5440680"/>
+            <a:ext cx="128016" cy="731520"/>
+          </a:xfrm>
+          <a:prstGeom prst="rect">
+            <a:avLst/>
+          </a:prstGeom>
+          <a:solidFill>
+            <a:srgbClr val="0B4A86"/>
+          </a:solidFill>
+          <a:ln>
+            <a:noFill/>
+          </a:ln>
+          <a:effectLst/>
+        </p:spPr>
+        <p:style>
+          <a:lnRef idx="1">
+            <a:schemeClr val="accent1"/>
+          </a:lnRef>
+          <a:fillRef idx="3">
+            <a:schemeClr val="accent1"/>
+          </a:fillRef>
+          <a:effectRef idx="2">
+            <a:schemeClr val="accent1"/>
+          </a:effectRef>
+          <a:fontRef idx="minor">
+            <a:schemeClr val="lt1"/>
+          </a:fontRef>
+        </p:style>
+        <p:txBody>
+          <a:bodyPr rtlCol="0" anchor="ctr"/>
+          <a:lstStyle/>
+          <a:p>
+            <a:pPr algn="ctr"/>
+            <a:endParaRPr/>
+          </a:p>
+        </p:txBody>
+      </p:sp>
+      <p:sp>
+        <p:nvSpPr>
+          <p:cNvPr id="54" name="TextBox 53"/>
+          <p:cNvSpPr txBox="1"/>
+          <p:nvPr/>
+        </p:nvSpPr>
+        <p:spPr>
+          <a:xfrm>
+            <a:off x="1207008" y="5422392"/>
+            <a:ext cx="1874519" cy="411480"/>
+          </a:xfrm>
+          <a:prstGeom prst="rect">
+            <a:avLst/>
+          </a:prstGeom>
+          <a:noFill/>
+        </p:spPr>
+        <p:txBody>
+          <a:bodyPr wrap="square" lIns="0" tIns="0" rIns="0" bIns="0" anchor="t">
+            <a:spAutoFit/>
+          </a:bodyPr>
+          <a:lstStyle/>
+          <a:p>
+            <a:pPr algn="l">
+              <a:lnSpc>
+                <a:spcPct val="100000"/>
+              </a:lnSpc>
+              <a:spcBef>
+                <a:spcPts val="0"/>
+              </a:spcBef>
+              <a:spcAft>
+                <a:spcPts val="400"/>
+              </a:spcAft>
+            </a:pPr>
+            <a:r>
+              <a:rPr sz="1300" b="1" i="0">
+                <a:solidFill>
+                  <a:srgbClr val="1B2633"/>
+                </a:solidFill>
+                <a:latin typeface="Calibri"/>
+              </a:rPr>
+              <a:t>Ges. Analysen</a:t>
+            </a:r>
+          </a:p>
+        </p:txBody>
+      </p:sp>
+      <p:sp>
+        <p:nvSpPr>
+          <p:cNvPr id="55" name="TextBox 54"/>
+          <p:cNvSpPr txBox="1"/>
+          <p:nvPr/>
+        </p:nvSpPr>
+        <p:spPr>
+          <a:xfrm>
+            <a:off x="1207008" y="5824728"/>
+            <a:ext cx="1874519" cy="411480"/>
+          </a:xfrm>
+          <a:prstGeom prst="rect">
+            <a:avLst/>
+          </a:prstGeom>
+          <a:noFill/>
+        </p:spPr>
+        <p:txBody>
+          <a:bodyPr wrap="square" lIns="0" tIns="0" rIns="0" bIns="0" anchor="t">
+            <a:spAutoFit/>
+          </a:bodyPr>
+          <a:lstStyle/>
+          <a:p>
+            <a:pPr algn="l">
+              <a:lnSpc>
+                <a:spcPct val="100000"/>
+              </a:lnSpc>
+              <a:spcBef>
+                <a:spcPts val="0"/>
+              </a:spcBef>
+              <a:spcAft>
+                <a:spcPts val="400"/>
+              </a:spcAft>
+            </a:pPr>
+            <a:r>
+              <a:rPr sz="1050" b="0" i="0">
+                <a:solidFill>
+                  <a:srgbClr val="5A6473"/>
+                </a:solidFill>
+                <a:latin typeface="Calibri"/>
+              </a:rPr>
+              <a:t>Vorhandene Analysen öffnen</a:t>
+            </a:r>
+          </a:p>
+        </p:txBody>
+      </p:sp>
+      <p:sp>
+        <p:nvSpPr>
+          <p:cNvPr id="56" name="Rounded Rectangle 55"/>
+          <p:cNvSpPr/>
+          <p:nvPr/>
+        </p:nvSpPr>
+        <p:spPr>
+          <a:xfrm>
+            <a:off x="3545738" y="5294376"/>
+            <a:ext cx="2377440" cy="1024128"/>
+          </a:xfrm>
+          <a:prstGeom prst="roundRect">
+            <a:avLst>
+              <a:gd name="adj" fmla="val 8000"/>
+            </a:avLst>
+          </a:prstGeom>
+          <a:solidFill>
+            <a:srgbClr val="FFFFFF"/>
+          </a:solidFill>
+          <a:ln w="12700">
+            <a:solidFill>
+              <a:srgbClr val="D8DFEA"/>
+            </a:solidFill>
+          </a:ln>
+          <a:effectLst>
+            <a:outerShdw blurRad="90000" dist="38100" dir="5400000" rotWithShape="0">
+              <a:srgbClr val="1B2633">
+                <a:alpha val="18000"/>
+              </a:srgbClr>
+            </a:outerShdw>
+          </a:effectLst>
+        </p:spPr>
+        <p:style>
+          <a:lnRef idx="1">
+            <a:schemeClr val="accent1"/>
+          </a:lnRef>
+          <a:fillRef idx="3">
+            <a:schemeClr val="accent1"/>
+          </a:fillRef>
+          <a:effectRef idx="2">
+            <a:schemeClr val="accent1"/>
+          </a:effectRef>
+          <a:fontRef idx="minor">
+            <a:schemeClr val="lt1"/>
+          </a:fontRef>
+        </p:style>
+        <p:txBody>
+          <a:bodyPr rtlCol="0" anchor="ctr"/>
+          <a:lstStyle/>
+          <a:p>
+            <a:pPr algn="ctr"/>
+            <a:endParaRPr/>
+          </a:p>
+        </p:txBody>
+      </p:sp>
+      <p:sp>
+        <p:nvSpPr>
+          <p:cNvPr id="57" name="Rectangle 56"/>
+          <p:cNvSpPr/>
+          <p:nvPr/>
+        </p:nvSpPr>
+        <p:spPr>
+          <a:xfrm>
+            <a:off x="3692042" y="5440680"/>
+            <a:ext cx="128016" cy="731520"/>
+          </a:xfrm>
+          <a:prstGeom prst="rect">
+            <a:avLst/>
+          </a:prstGeom>
+          <a:solidFill>
+            <a:srgbClr val="5A6473"/>
+          </a:solidFill>
+          <a:ln>
+            <a:noFill/>
+          </a:ln>
+          <a:effectLst/>
+        </p:spPr>
+        <p:style>
+          <a:lnRef idx="1">
+            <a:schemeClr val="accent1"/>
+          </a:lnRef>
+          <a:fillRef idx="3">
+            <a:schemeClr val="accent1"/>
+          </a:fillRef>
+          <a:effectRef idx="2">
+            <a:schemeClr val="accent1"/>
+          </a:effectRef>
+          <a:fontRef idx="minor">
+            <a:schemeClr val="lt1"/>
+          </a:fontRef>
+        </p:style>
+        <p:txBody>
+          <a:bodyPr rtlCol="0" anchor="ctr"/>
+          <a:lstStyle/>
+          <a:p>
+            <a:pPr algn="ctr"/>
+            <a:endParaRPr/>
+          </a:p>
+        </p:txBody>
+      </p:sp>
+      <p:sp>
+        <p:nvSpPr>
+          <p:cNvPr id="58" name="TextBox 57"/>
+          <p:cNvSpPr txBox="1"/>
+          <p:nvPr/>
+        </p:nvSpPr>
+        <p:spPr>
+          <a:xfrm>
+            <a:off x="3929786" y="5422392"/>
+            <a:ext cx="1874519" cy="411480"/>
+          </a:xfrm>
+          <a:prstGeom prst="rect">
+            <a:avLst/>
+          </a:prstGeom>
+          <a:noFill/>
+        </p:spPr>
+        <p:txBody>
+          <a:bodyPr wrap="square" lIns="0" tIns="0" rIns="0" bIns="0" anchor="t">
+            <a:spAutoFit/>
+          </a:bodyPr>
+          <a:lstStyle/>
+          <a:p>
+            <a:pPr algn="l">
+              <a:lnSpc>
+                <a:spcPct val="100000"/>
+              </a:lnSpc>
+              <a:spcBef>
+                <a:spcPts val="0"/>
+              </a:spcBef>
+              <a:spcAft>
+                <a:spcPts val="400"/>
+              </a:spcAft>
+            </a:pPr>
+            <a:r>
+              <a:rPr sz="1300" b="1" i="0">
+                <a:solidFill>
+                  <a:srgbClr val="1B2633"/>
+                </a:solidFill>
+                <a:latin typeface="Calibri"/>
+              </a:rPr>
+              <a:t>Daten aktualisieren</a:t>
+            </a:r>
+          </a:p>
+        </p:txBody>
+      </p:sp>
+      <p:sp>
+        <p:nvSpPr>
+          <p:cNvPr id="59" name="TextBox 58"/>
+          <p:cNvSpPr txBox="1"/>
+          <p:nvPr/>
+        </p:nvSpPr>
+        <p:spPr>
+          <a:xfrm>
+            <a:off x="3929786" y="5824728"/>
+            <a:ext cx="1874519" cy="411480"/>
+          </a:xfrm>
+          <a:prstGeom prst="rect">
+            <a:avLst/>
+          </a:prstGeom>
+          <a:noFill/>
+        </p:spPr>
+        <p:txBody>
+          <a:bodyPr wrap="square" lIns="0" tIns="0" rIns="0" bIns="0" anchor="t">
+            <a:spAutoFit/>
+          </a:bodyPr>
+          <a:lstStyle/>
+          <a:p>
+            <a:pPr algn="l">
+              <a:lnSpc>
+                <a:spcPct val="100000"/>
+              </a:lnSpc>
+              <a:spcBef>
+                <a:spcPts val="0"/>
+              </a:spcBef>
+              <a:spcAft>
+                <a:spcPts val="400"/>
+              </a:spcAft>
+            </a:pPr>
+            <a:r>
+              <a:rPr sz="1050" b="0" i="0">
+                <a:solidFill>
+                  <a:srgbClr val="5A6473"/>
+                </a:solidFill>
+                <a:latin typeface="Calibri"/>
+              </a:rPr>
+              <a:t>Stammdaten &amp; Importe</a:t>
+            </a:r>
+          </a:p>
+        </p:txBody>
+      </p:sp>
+      <p:sp>
+        <p:nvSpPr>
+          <p:cNvPr id="60" name="Rounded Rectangle 59"/>
+          <p:cNvSpPr/>
+          <p:nvPr/>
+        </p:nvSpPr>
+        <p:spPr>
+          <a:xfrm>
+            <a:off x="6268516" y="5294376"/>
+            <a:ext cx="2377440" cy="1024128"/>
+          </a:xfrm>
+          <a:prstGeom prst="roundRect">
+            <a:avLst>
+              <a:gd name="adj" fmla="val 8000"/>
+            </a:avLst>
+          </a:prstGeom>
+          <a:solidFill>
+            <a:srgbClr val="FFFFFF"/>
+          </a:solidFill>
+          <a:ln w="12700">
+            <a:solidFill>
+              <a:srgbClr val="D8DFEA"/>
+            </a:solidFill>
+          </a:ln>
+          <a:effectLst>
+            <a:outerShdw blurRad="90000" dist="38100" dir="5400000" rotWithShape="0">
+              <a:srgbClr val="1B2633">
+                <a:alpha val="18000"/>
+              </a:srgbClr>
+            </a:outerShdw>
+          </a:effectLst>
+        </p:spPr>
+        <p:style>
+          <a:lnRef idx="1">
+            <a:schemeClr val="accent1"/>
+          </a:lnRef>
+          <a:fillRef idx="3">
+            <a:schemeClr val="accent1"/>
+          </a:fillRef>
+          <a:effectRef idx="2">
+            <a:schemeClr val="accent1"/>
+          </a:effectRef>
+          <a:fontRef idx="minor">
+            <a:schemeClr val="lt1"/>
+          </a:fontRef>
+        </p:style>
+        <p:txBody>
+          <a:bodyPr rtlCol="0" anchor="ctr"/>
+          <a:lstStyle/>
+          <a:p>
+            <a:pPr algn="ctr"/>
+            <a:endParaRPr/>
+          </a:p>
+        </p:txBody>
+      </p:sp>
+      <p:sp>
+        <p:nvSpPr>
+          <p:cNvPr id="61" name="Rectangle 60"/>
+          <p:cNvSpPr/>
+          <p:nvPr/>
+        </p:nvSpPr>
+        <p:spPr>
+          <a:xfrm>
+            <a:off x="6414820" y="5440680"/>
+            <a:ext cx="128016" cy="731520"/>
           </a:xfrm>
           <a:prstGeom prst="rect">
             <a:avLst/>
@@ -11672,19 +13061,20 @@
           <a:lstStyle/>
           <a:p>
             <a:pPr algn="ctr"/>
-          </a:p>
-        </p:txBody>
-      </p:sp>
-      <p:sp>
-        <p:nvSpPr>
-          <p:cNvPr id="50" name="TextBox 49"/>
+            <a:endParaRPr/>
+          </a:p>
+        </p:txBody>
+      </p:sp>
+      <p:sp>
+        <p:nvSpPr>
+          <p:cNvPr id="62" name="TextBox 61"/>
           <p:cNvSpPr txBox="1"/>
           <p:nvPr/>
         </p:nvSpPr>
         <p:spPr>
           <a:xfrm>
-            <a:off x="9411919" y="5038344"/>
-            <a:ext cx="1828800" cy="457200"/>
+            <a:off x="6652564" y="5422392"/>
+            <a:ext cx="1874519" cy="411480"/>
           </a:xfrm>
           <a:prstGeom prst="rect">
             <a:avLst/>
@@ -11692,7 +13082,7 @@
           <a:noFill/>
         </p:spPr>
         <p:txBody>
-          <a:bodyPr wrap="square" anchor="t" lIns="0" rIns="0" tIns="0" bIns="0">
+          <a:bodyPr wrap="square" lIns="0" tIns="0" rIns="0" bIns="0" anchor="t">
             <a:spAutoFit/>
           </a:bodyPr>
           <a:lstStyle/>
@@ -11709,7 +13099,7 @@
               </a:spcAft>
             </a:pPr>
             <a:r>
-              <a:rPr sz="1450" b="1" i="0">
+              <a:rPr sz="1300" b="1" i="0">
                 <a:solidFill>
                   <a:srgbClr val="1B2633"/>
                 </a:solidFill>
@@ -11722,14 +13112,14 @@
       </p:sp>
       <p:sp>
         <p:nvSpPr>
-          <p:cNvPr id="51" name="TextBox 50"/>
+          <p:cNvPr id="63" name="TextBox 62"/>
           <p:cNvSpPr txBox="1"/>
           <p:nvPr/>
         </p:nvSpPr>
         <p:spPr>
           <a:xfrm>
-            <a:off x="9411919" y="5513832"/>
-            <a:ext cx="1828800" cy="548640"/>
+            <a:off x="6652564" y="5824728"/>
+            <a:ext cx="1874519" cy="411480"/>
           </a:xfrm>
           <a:prstGeom prst="rect">
             <a:avLst/>
@@ -11737,7 +13127,7 @@
           <a:noFill/>
         </p:spPr>
         <p:txBody>
-          <a:bodyPr wrap="square" anchor="t" lIns="0" rIns="0" tIns="0" bIns="0">
+          <a:bodyPr wrap="square" lIns="0" tIns="0" rIns="0" bIns="0" anchor="t">
             <a:spAutoFit/>
           </a:bodyPr>
           <a:lstStyle/>
@@ -11754,7 +13144,7 @@
               </a:spcAft>
             </a:pPr>
             <a:r>
-              <a:rPr sz="1200" b="0" i="0">
+              <a:rPr sz="1050" b="0" i="0">
                 <a:solidFill>
                   <a:srgbClr val="5A6473"/>
                 </a:solidFill>
@@ -11767,7 +13157,197 @@
       </p:sp>
       <p:sp>
         <p:nvSpPr>
-          <p:cNvPr id="52" name="TextBox 51"/>
+          <p:cNvPr id="64" name="Rounded Rectangle 63"/>
+          <p:cNvSpPr/>
+          <p:nvPr/>
+        </p:nvSpPr>
+        <p:spPr>
+          <a:xfrm>
+            <a:off x="8991295" y="5294376"/>
+            <a:ext cx="2377440" cy="1024128"/>
+          </a:xfrm>
+          <a:prstGeom prst="roundRect">
+            <a:avLst>
+              <a:gd name="adj" fmla="val 8000"/>
+            </a:avLst>
+          </a:prstGeom>
+          <a:solidFill>
+            <a:srgbClr val="FFFFFF"/>
+          </a:solidFill>
+          <a:ln w="12700">
+            <a:solidFill>
+              <a:srgbClr val="D8DFEA"/>
+            </a:solidFill>
+          </a:ln>
+          <a:effectLst>
+            <a:outerShdw blurRad="90000" dist="38100" dir="5400000" rotWithShape="0">
+              <a:srgbClr val="1B2633">
+                <a:alpha val="18000"/>
+              </a:srgbClr>
+            </a:outerShdw>
+          </a:effectLst>
+        </p:spPr>
+        <p:style>
+          <a:lnRef idx="1">
+            <a:schemeClr val="accent1"/>
+          </a:lnRef>
+          <a:fillRef idx="3">
+            <a:schemeClr val="accent1"/>
+          </a:fillRef>
+          <a:effectRef idx="2">
+            <a:schemeClr val="accent1"/>
+          </a:effectRef>
+          <a:fontRef idx="minor">
+            <a:schemeClr val="lt1"/>
+          </a:fontRef>
+        </p:style>
+        <p:txBody>
+          <a:bodyPr rtlCol="0" anchor="ctr"/>
+          <a:lstStyle/>
+          <a:p>
+            <a:pPr algn="ctr"/>
+            <a:endParaRPr/>
+          </a:p>
+        </p:txBody>
+      </p:sp>
+      <p:sp>
+        <p:nvSpPr>
+          <p:cNvPr id="65" name="Rectangle 64"/>
+          <p:cNvSpPr/>
+          <p:nvPr/>
+        </p:nvSpPr>
+        <p:spPr>
+          <a:xfrm>
+            <a:off x="9137599" y="5440680"/>
+            <a:ext cx="128016" cy="731520"/>
+          </a:xfrm>
+          <a:prstGeom prst="rect">
+            <a:avLst/>
+          </a:prstGeom>
+          <a:solidFill>
+            <a:srgbClr val="11823B"/>
+          </a:solidFill>
+          <a:ln>
+            <a:noFill/>
+          </a:ln>
+          <a:effectLst/>
+        </p:spPr>
+        <p:style>
+          <a:lnRef idx="1">
+            <a:schemeClr val="accent1"/>
+          </a:lnRef>
+          <a:fillRef idx="3">
+            <a:schemeClr val="accent1"/>
+          </a:fillRef>
+          <a:effectRef idx="2">
+            <a:schemeClr val="accent1"/>
+          </a:effectRef>
+          <a:fontRef idx="minor">
+            <a:schemeClr val="lt1"/>
+          </a:fontRef>
+        </p:style>
+        <p:txBody>
+          <a:bodyPr rtlCol="0" anchor="ctr"/>
+          <a:lstStyle/>
+          <a:p>
+            <a:pPr algn="ctr"/>
+            <a:endParaRPr/>
+          </a:p>
+        </p:txBody>
+      </p:sp>
+      <p:sp>
+        <p:nvSpPr>
+          <p:cNvPr id="66" name="TextBox 65"/>
+          <p:cNvSpPr txBox="1"/>
+          <p:nvPr/>
+        </p:nvSpPr>
+        <p:spPr>
+          <a:xfrm>
+            <a:off x="9375343" y="5422392"/>
+            <a:ext cx="1874519" cy="411480"/>
+          </a:xfrm>
+          <a:prstGeom prst="rect">
+            <a:avLst/>
+          </a:prstGeom>
+          <a:noFill/>
+        </p:spPr>
+        <p:txBody>
+          <a:bodyPr wrap="square" lIns="0" tIns="0" rIns="0" bIns="0" anchor="t">
+            <a:spAutoFit/>
+          </a:bodyPr>
+          <a:lstStyle/>
+          <a:p>
+            <a:pPr algn="l">
+              <a:lnSpc>
+                <a:spcPct val="100000"/>
+              </a:lnSpc>
+              <a:spcBef>
+                <a:spcPts val="0"/>
+              </a:spcBef>
+              <a:spcAft>
+                <a:spcPts val="400"/>
+              </a:spcAft>
+            </a:pPr>
+            <a:r>
+              <a:rPr sz="1300" b="1" i="0">
+                <a:solidFill>
+                  <a:srgbClr val="1B2633"/>
+                </a:solidFill>
+                <a:latin typeface="Calibri"/>
+              </a:rPr>
+              <a:t>Hilfe</a:t>
+            </a:r>
+          </a:p>
+        </p:txBody>
+      </p:sp>
+      <p:sp>
+        <p:nvSpPr>
+          <p:cNvPr id="67" name="TextBox 66"/>
+          <p:cNvSpPr txBox="1"/>
+          <p:nvPr/>
+        </p:nvSpPr>
+        <p:spPr>
+          <a:xfrm>
+            <a:off x="9375343" y="5824728"/>
+            <a:ext cx="1874519" cy="411480"/>
+          </a:xfrm>
+          <a:prstGeom prst="rect">
+            <a:avLst/>
+          </a:prstGeom>
+          <a:noFill/>
+        </p:spPr>
+        <p:txBody>
+          <a:bodyPr wrap="square" lIns="0" tIns="0" rIns="0" bIns="0" anchor="t">
+            <a:spAutoFit/>
+          </a:bodyPr>
+          <a:lstStyle/>
+          <a:p>
+            <a:pPr algn="l">
+              <a:lnSpc>
+                <a:spcPct val="100000"/>
+              </a:lnSpc>
+              <a:spcBef>
+                <a:spcPts val="0"/>
+              </a:spcBef>
+              <a:spcAft>
+                <a:spcPts val="400"/>
+              </a:spcAft>
+            </a:pPr>
+            <a:r>
+              <a:rPr sz="1050" b="0" i="0">
+                <a:solidFill>
+                  <a:srgbClr val="5A6473"/>
+                </a:solidFill>
+                <a:latin typeface="Calibri"/>
+              </a:rPr>
+              <a:t>Bebildertes Handbuch</a:t>
+            </a:r>
+          </a:p>
+        </p:txBody>
+      </p:sp>
+      <p:sp>
+        <p:nvSpPr>
+          <p:cNvPr id="68" name="TextBox 67"/>
           <p:cNvSpPr txBox="1"/>
           <p:nvPr/>
         </p:nvSpPr>
@@ -11782,7 +13362,7 @@
           <a:noFill/>
         </p:spPr>
         <p:txBody>
-          <a:bodyPr wrap="square" anchor="t" lIns="0" rIns="0" tIns="0" bIns="0">
+          <a:bodyPr wrap="square" lIns="0" tIns="0" rIns="0" bIns="0" anchor="t">
             <a:spAutoFit/>
           </a:bodyPr>
           <a:lstStyle/>
@@ -11819,7 +13399,7 @@
 </file>
 
 <file path=ppt/slides/slide5.xml><?xml version="1.0" encoding="utf-8"?>
-<p:sld xmlns:a="http://schemas.openxmlformats.org/drawingml/2006/main" xmlns:p="http://schemas.openxmlformats.org/presentationml/2006/main" xmlns:r="http://schemas.openxmlformats.org/officeDocument/2006/relationships">
+<p:sld xmlns:a="http://schemas.openxmlformats.org/drawingml/2006/main" xmlns:r="http://schemas.openxmlformats.org/officeDocument/2006/relationships" xmlns:p="http://schemas.openxmlformats.org/presentationml/2006/main">
   <p:cSld>
     <p:bg>
       <p:bgPr>
@@ -11835,7 +13415,14 @@
         <p:cNvGrpSpPr/>
         <p:nvPr/>
       </p:nvGrpSpPr>
-      <p:grpSpPr/>
+      <p:grpSpPr>
+        <a:xfrm>
+          <a:off x="0" y="0"/>
+          <a:ext cx="0" cy="0"/>
+          <a:chOff x="0" y="0"/>
+          <a:chExt cx="0" cy="0"/>
+        </a:xfrm>
+      </p:grpSpPr>
       <p:sp>
         <p:nvSpPr>
           <p:cNvPr id="2" name="TextBox 1"/>
@@ -11853,7 +13440,7 @@
           <a:noFill/>
         </p:spPr>
         <p:txBody>
-          <a:bodyPr wrap="square" anchor="t" lIns="0" rIns="0" tIns="0" bIns="0">
+          <a:bodyPr wrap="square" lIns="0" tIns="0" rIns="0" bIns="0" anchor="t">
             <a:spAutoFit/>
           </a:bodyPr>
           <a:lstStyle/>
@@ -11898,7 +13485,7 @@
           <a:noFill/>
         </p:spPr>
         <p:txBody>
-          <a:bodyPr wrap="square" anchor="t" lIns="0" rIns="0" tIns="0" bIns="0">
+          <a:bodyPr wrap="square" lIns="0" tIns="0" rIns="0" bIns="0" anchor="t">
             <a:spAutoFit/>
           </a:bodyPr>
           <a:lstStyle/>
@@ -11921,7 +13508,7 @@
                 </a:solidFill>
                 <a:latin typeface="Calibri"/>
               </a:rPr>
-              <a:t>Klare, einheitliche Oberfläche – drei Ansichten aus dem laufenden Programm</a:t>
+              <a:t>Modernes Design (V2.0) – drei Ansichten aus dem laufenden Programm</a:t>
             </a:r>
           </a:p>
         </p:txBody>
@@ -11934,8 +13521,8 @@
         </p:nvSpPr>
         <p:spPr>
           <a:xfrm>
-            <a:off x="365760" y="2020824"/>
-            <a:ext cx="3639312" cy="2398810"/>
+            <a:off x="301751" y="2249424"/>
+            <a:ext cx="3749039" cy="2104933"/>
           </a:xfrm>
           <a:prstGeom prst="roundRect">
             <a:avLst>
@@ -11977,12 +13564,13 @@
           <a:lstStyle/>
           <a:p>
             <a:pPr algn="ctr"/>
+            <a:endParaRPr/>
           </a:p>
         </p:txBody>
       </p:sp>
       <p:pic>
         <p:nvPicPr>
-          <p:cNvPr id="5" name="Picture 4" descr="shot_dashboard.png"/>
+          <p:cNvPr id="5" name="Picture 4" descr="shot_v2_startseite.png"/>
           <p:cNvPicPr>
             <a:picLocks noChangeAspect="1"/>
           </p:cNvPicPr>
@@ -11996,8 +13584,8 @@
         </p:blipFill>
         <p:spPr>
           <a:xfrm>
-            <a:off x="448056" y="2103120"/>
-            <a:ext cx="3474720" cy="2234219"/>
+            <a:off x="384048" y="2331720"/>
+            <a:ext cx="3584448" cy="1940342"/>
           </a:xfrm>
           <a:prstGeom prst="rect">
             <a:avLst/>
@@ -12012,8 +13600,8 @@
         </p:nvSpPr>
         <p:spPr>
           <a:xfrm>
-            <a:off x="365760" y="4617720"/>
-            <a:ext cx="3639312" cy="640080"/>
+            <a:off x="301751" y="4617720"/>
+            <a:ext cx="3749039" cy="640080"/>
           </a:xfrm>
           <a:prstGeom prst="rect">
             <a:avLst/>
@@ -12021,7 +13609,7 @@
           <a:noFill/>
         </p:spPr>
         <p:txBody>
-          <a:bodyPr wrap="square" anchor="t" lIns="0" rIns="0" tIns="0" bIns="0">
+          <a:bodyPr wrap="square" lIns="0" tIns="0" rIns="0" bIns="0" anchor="t">
             <a:spAutoFit/>
           </a:bodyPr>
           <a:lstStyle/>
@@ -12057,8 +13645,8 @@
         </p:nvSpPr>
         <p:spPr>
           <a:xfrm>
-            <a:off x="4276648" y="2020824"/>
-            <a:ext cx="3639312" cy="2464619"/>
+            <a:off x="4221784" y="2249424"/>
+            <a:ext cx="3749039" cy="2104933"/>
           </a:xfrm>
           <a:prstGeom prst="roundRect">
             <a:avLst>
@@ -12100,12 +13688,13 @@
           <a:lstStyle/>
           <a:p>
             <a:pPr algn="ctr"/>
+            <a:endParaRPr/>
           </a:p>
         </p:txBody>
       </p:sp>
       <p:pic>
         <p:nvPicPr>
-          <p:cNvPr id="8" name="Picture 7" descr="shot_kasse.png"/>
+          <p:cNvPr id="8" name="Picture 7" descr="shot_v2_kasse.png"/>
           <p:cNvPicPr>
             <a:picLocks noChangeAspect="1"/>
           </p:cNvPicPr>
@@ -12119,8 +13708,8 @@
         </p:blipFill>
         <p:spPr>
           <a:xfrm>
-            <a:off x="4358944" y="2103120"/>
-            <a:ext cx="3474720" cy="2300028"/>
+            <a:off x="4304080" y="2331720"/>
+            <a:ext cx="3584448" cy="1940342"/>
           </a:xfrm>
           <a:prstGeom prst="rect">
             <a:avLst/>
@@ -12135,8 +13724,8 @@
         </p:nvSpPr>
         <p:spPr>
           <a:xfrm>
-            <a:off x="4276648" y="4617720"/>
-            <a:ext cx="3639312" cy="640080"/>
+            <a:off x="4221784" y="4617720"/>
+            <a:ext cx="3749039" cy="640080"/>
           </a:xfrm>
           <a:prstGeom prst="rect">
             <a:avLst/>
@@ -12144,7 +13733,7 @@
           <a:noFill/>
         </p:spPr>
         <p:txBody>
-          <a:bodyPr wrap="square" anchor="t" lIns="0" rIns="0" tIns="0" bIns="0">
+          <a:bodyPr wrap="square" lIns="0" tIns="0" rIns="0" bIns="0" anchor="t">
             <a:spAutoFit/>
           </a:bodyPr>
           <a:lstStyle/>
@@ -12167,7 +13756,7 @@
                 </a:solidFill>
                 <a:latin typeface="Calibri"/>
               </a:rPr>
-              <a:t>Kasse – Verkauf, Wareneingang &amp; Vorbestellungen</a:t>
+              <a:t>Kasse – Verkauf &amp; Wareneingang</a:t>
             </a:r>
           </a:p>
         </p:txBody>
@@ -12180,8 +13769,8 @@
         </p:nvSpPr>
         <p:spPr>
           <a:xfrm>
-            <a:off x="8187537" y="2020824"/>
-            <a:ext cx="3639312" cy="2398810"/>
+            <a:off x="8141817" y="2249424"/>
+            <a:ext cx="3749039" cy="2104933"/>
           </a:xfrm>
           <a:prstGeom prst="roundRect">
             <a:avLst>
@@ -12223,12 +13812,13 @@
           <a:lstStyle/>
           <a:p>
             <a:pPr algn="ctr"/>
+            <a:endParaRPr/>
           </a:p>
         </p:txBody>
       </p:sp>
       <p:pic>
         <p:nvPicPr>
-          <p:cNvPr id="11" name="Picture 10" descr="shot_apps.png"/>
+          <p:cNvPr id="11" name="Picture 10" descr="shot_v2_report.png"/>
           <p:cNvPicPr>
             <a:picLocks noChangeAspect="1"/>
           </p:cNvPicPr>
@@ -12242,8 +13832,8 @@
         </p:blipFill>
         <p:spPr>
           <a:xfrm>
-            <a:off x="8269833" y="2103120"/>
-            <a:ext cx="3474720" cy="2234219"/>
+            <a:off x="8224113" y="2331720"/>
+            <a:ext cx="3584448" cy="1940342"/>
           </a:xfrm>
           <a:prstGeom prst="rect">
             <a:avLst/>
@@ -12258,8 +13848,8 @@
         </p:nvSpPr>
         <p:spPr>
           <a:xfrm>
-            <a:off x="8187537" y="4617720"/>
-            <a:ext cx="3639312" cy="640080"/>
+            <a:off x="8141817" y="4617720"/>
+            <a:ext cx="3749039" cy="640080"/>
           </a:xfrm>
           <a:prstGeom prst="rect">
             <a:avLst/>
@@ -12267,7 +13857,7 @@
           <a:noFill/>
         </p:spPr>
         <p:txBody>
-          <a:bodyPr wrap="square" anchor="t" lIns="0" rIns="0" tIns="0" bIns="0">
+          <a:bodyPr wrap="square" lIns="0" tIns="0" rIns="0" bIns="0" anchor="t">
             <a:spAutoFit/>
           </a:bodyPr>
           <a:lstStyle/>
@@ -12290,7 +13880,7 @@
                 </a:solidFill>
                 <a:latin typeface="Calibri"/>
               </a:rPr>
-              <a:t>Apps – alle Module mit einem Klick</a:t>
+              <a:t>Report – Kunden-Ampel &amp; Übersicht</a:t>
             </a:r>
           </a:p>
         </p:txBody>
@@ -12312,7 +13902,7 @@
           <a:noFill/>
         </p:spPr>
         <p:txBody>
-          <a:bodyPr wrap="square" anchor="t" lIns="0" rIns="0" tIns="0" bIns="0">
+          <a:bodyPr wrap="square" lIns="0" tIns="0" rIns="0" bIns="0" anchor="t">
             <a:spAutoFit/>
           </a:bodyPr>
           <a:lstStyle/>
@@ -12349,7 +13939,7 @@
 </file>
 
 <file path=ppt/slides/slide6.xml><?xml version="1.0" encoding="utf-8"?>
-<p:sld xmlns:a="http://schemas.openxmlformats.org/drawingml/2006/main" xmlns:p="http://schemas.openxmlformats.org/presentationml/2006/main" xmlns:r="http://schemas.openxmlformats.org/officeDocument/2006/relationships">
+<p:sld xmlns:a="http://schemas.openxmlformats.org/drawingml/2006/main" xmlns:r="http://schemas.openxmlformats.org/officeDocument/2006/relationships" xmlns:p="http://schemas.openxmlformats.org/presentationml/2006/main">
   <p:cSld>
     <p:bg>
       <p:bgPr>
@@ -12365,7 +13955,14 @@
         <p:cNvGrpSpPr/>
         <p:nvPr/>
       </p:nvGrpSpPr>
-      <p:grpSpPr/>
+      <p:grpSpPr>
+        <a:xfrm>
+          <a:off x="0" y="0"/>
+          <a:ext cx="0" cy="0"/>
+          <a:chOff x="0" y="0"/>
+          <a:chExt cx="0" cy="0"/>
+        </a:xfrm>
+      </p:grpSpPr>
       <p:sp>
         <p:nvSpPr>
           <p:cNvPr id="2" name="TextBox 1"/>
@@ -12383,7 +13980,7 @@
           <a:noFill/>
         </p:spPr>
         <p:txBody>
-          <a:bodyPr wrap="square" anchor="t" lIns="0" rIns="0" tIns="0" bIns="0">
+          <a:bodyPr wrap="square" lIns="0" tIns="0" rIns="0" bIns="0" anchor="t">
             <a:spAutoFit/>
           </a:bodyPr>
           <a:lstStyle/>
@@ -12462,6 +14059,7 @@
           <a:lstStyle/>
           <a:p>
             <a:pPr algn="ctr"/>
+            <a:endParaRPr/>
           </a:p>
         </p:txBody>
       </p:sp>
@@ -12508,6 +14106,7 @@
           <a:lstStyle/>
           <a:p>
             <a:pPr algn="ctr"/>
+            <a:endParaRPr/>
           </a:p>
         </p:txBody>
       </p:sp>
@@ -12552,6 +14151,7 @@
           <a:lstStyle/>
           <a:p>
             <a:pPr algn="ctr"/>
+            <a:endParaRPr/>
           </a:p>
         </p:txBody>
       </p:sp>
@@ -12572,7 +14172,7 @@
           <a:noFill/>
         </p:spPr>
         <p:txBody>
-          <a:bodyPr wrap="square" anchor="ctr" lIns="0" rIns="0" tIns="0" bIns="0">
+          <a:bodyPr wrap="square" lIns="0" tIns="0" rIns="0" bIns="0" anchor="ctr">
             <a:spAutoFit/>
           </a:bodyPr>
           <a:lstStyle/>
@@ -12617,7 +14217,7 @@
           <a:noFill/>
         </p:spPr>
         <p:txBody>
-          <a:bodyPr wrap="square" lIns="0" rIns="0" tIns="0" bIns="0">
+          <a:bodyPr wrap="square" lIns="0" tIns="0" rIns="0" bIns="0">
             <a:spAutoFit/>
           </a:bodyPr>
           <a:lstStyle/>
@@ -12631,7 +14231,7 @@
               </a:spcAft>
             </a:pPr>
             <a:r>
-              <a:rPr b="1" sz="1400">
+              <a:rPr sz="1400" b="1">
                 <a:solidFill>
                   <a:srgbClr val="0B4A86"/>
                 </a:solidFill>
@@ -12659,7 +14259,7 @@
               </a:spcAft>
             </a:pPr>
             <a:r>
-              <a:rPr b="1" sz="1400">
+              <a:rPr sz="1400" b="1">
                 <a:solidFill>
                   <a:srgbClr val="0B4A86"/>
                 </a:solidFill>
@@ -12687,7 +14287,7 @@
               </a:spcAft>
             </a:pPr>
             <a:r>
-              <a:rPr b="1" sz="1400">
+              <a:rPr sz="1400" b="1">
                 <a:solidFill>
                   <a:srgbClr val="0B4A86"/>
                 </a:solidFill>
@@ -12758,6 +14358,7 @@
           <a:lstStyle/>
           <a:p>
             <a:pPr algn="ctr"/>
+            <a:endParaRPr/>
           </a:p>
         </p:txBody>
       </p:sp>
@@ -12804,6 +14405,7 @@
           <a:lstStyle/>
           <a:p>
             <a:pPr algn="ctr"/>
+            <a:endParaRPr/>
           </a:p>
         </p:txBody>
       </p:sp>
@@ -12848,6 +14450,7 @@
           <a:lstStyle/>
           <a:p>
             <a:pPr algn="ctr"/>
+            <a:endParaRPr/>
           </a:p>
         </p:txBody>
       </p:sp>
@@ -12868,7 +14471,7 @@
           <a:noFill/>
         </p:spPr>
         <p:txBody>
-          <a:bodyPr wrap="square" anchor="ctr" lIns="0" rIns="0" tIns="0" bIns="0">
+          <a:bodyPr wrap="square" lIns="0" tIns="0" rIns="0" bIns="0" anchor="ctr">
             <a:spAutoFit/>
           </a:bodyPr>
           <a:lstStyle/>
@@ -12913,7 +14516,7 @@
           <a:noFill/>
         </p:spPr>
         <p:txBody>
-          <a:bodyPr wrap="square" lIns="0" rIns="0" tIns="0" bIns="0">
+          <a:bodyPr wrap="square" lIns="0" tIns="0" rIns="0" bIns="0">
             <a:spAutoFit/>
           </a:bodyPr>
           <a:lstStyle/>
@@ -12927,7 +14530,7 @@
               </a:spcAft>
             </a:pPr>
             <a:r>
-              <a:rPr b="1" sz="1400">
+              <a:rPr sz="1400" b="1">
                 <a:solidFill>
                   <a:srgbClr val="6B4FB3"/>
                 </a:solidFill>
@@ -12955,7 +14558,7 @@
               </a:spcAft>
             </a:pPr>
             <a:r>
-              <a:rPr b="1" sz="1400">
+              <a:rPr sz="1400" b="1">
                 <a:solidFill>
                   <a:srgbClr val="6B4FB3"/>
                 </a:solidFill>
@@ -12983,7 +14586,7 @@
               </a:spcAft>
             </a:pPr>
             <a:r>
-              <a:rPr b="1" sz="1400">
+              <a:rPr sz="1400" b="1">
                 <a:solidFill>
                   <a:srgbClr val="6B4FB3"/>
                 </a:solidFill>
@@ -13054,6 +14657,7 @@
           <a:lstStyle/>
           <a:p>
             <a:pPr algn="ctr"/>
+            <a:endParaRPr/>
           </a:p>
         </p:txBody>
       </p:sp>
@@ -13100,6 +14704,7 @@
           <a:lstStyle/>
           <a:p>
             <a:pPr algn="ctr"/>
+            <a:endParaRPr/>
           </a:p>
         </p:txBody>
       </p:sp>
@@ -13144,6 +14749,7 @@
           <a:lstStyle/>
           <a:p>
             <a:pPr algn="ctr"/>
+            <a:endParaRPr/>
           </a:p>
         </p:txBody>
       </p:sp>
@@ -13164,7 +14770,7 @@
           <a:noFill/>
         </p:spPr>
         <p:txBody>
-          <a:bodyPr wrap="square" anchor="ctr" lIns="0" rIns="0" tIns="0" bIns="0">
+          <a:bodyPr wrap="square" lIns="0" tIns="0" rIns="0" bIns="0" anchor="ctr">
             <a:spAutoFit/>
           </a:bodyPr>
           <a:lstStyle/>
@@ -13209,7 +14815,7 @@
           <a:noFill/>
         </p:spPr>
         <p:txBody>
-          <a:bodyPr wrap="square" lIns="0" rIns="0" tIns="0" bIns="0">
+          <a:bodyPr wrap="square" lIns="0" tIns="0" rIns="0" bIns="0">
             <a:spAutoFit/>
           </a:bodyPr>
           <a:lstStyle/>
@@ -13223,7 +14829,7 @@
               </a:spcAft>
             </a:pPr>
             <a:r>
-              <a:rPr b="1" sz="1400">
+              <a:rPr sz="1400" b="1">
                 <a:solidFill>
                   <a:srgbClr val="11823B"/>
                 </a:solidFill>
@@ -13251,7 +14857,7 @@
               </a:spcAft>
             </a:pPr>
             <a:r>
-              <a:rPr b="1" sz="1400">
+              <a:rPr sz="1400" b="1">
                 <a:solidFill>
                   <a:srgbClr val="11823B"/>
                 </a:solidFill>
@@ -13279,7 +14885,7 @@
               </a:spcAft>
             </a:pPr>
             <a:r>
-              <a:rPr b="1" sz="1400">
+              <a:rPr sz="1400" b="1">
                 <a:solidFill>
                   <a:srgbClr val="11823B"/>
                 </a:solidFill>
@@ -13316,7 +14922,7 @@
           <a:noFill/>
         </p:spPr>
         <p:txBody>
-          <a:bodyPr wrap="square" anchor="t" lIns="0" rIns="0" tIns="0" bIns="0">
+          <a:bodyPr wrap="square" lIns="0" tIns="0" rIns="0" bIns="0" anchor="t">
             <a:spAutoFit/>
           </a:bodyPr>
           <a:lstStyle/>
@@ -13353,7 +14959,7 @@
 </file>
 
 <file path=ppt/slides/slide7.xml><?xml version="1.0" encoding="utf-8"?>
-<p:sld xmlns:a="http://schemas.openxmlformats.org/drawingml/2006/main" xmlns:p="http://schemas.openxmlformats.org/presentationml/2006/main" xmlns:r="http://schemas.openxmlformats.org/officeDocument/2006/relationships">
+<p:sld xmlns:a="http://schemas.openxmlformats.org/drawingml/2006/main" xmlns:r="http://schemas.openxmlformats.org/officeDocument/2006/relationships" xmlns:p="http://schemas.openxmlformats.org/presentationml/2006/main">
   <p:cSld>
     <p:bg>
       <p:bgPr>
@@ -13369,7 +14975,14 @@
         <p:cNvGrpSpPr/>
         <p:nvPr/>
       </p:nvGrpSpPr>
-      <p:grpSpPr/>
+      <p:grpSpPr>
+        <a:xfrm>
+          <a:off x="0" y="0"/>
+          <a:ext cx="0" cy="0"/>
+          <a:chOff x="0" y="0"/>
+          <a:chExt cx="0" cy="0"/>
+        </a:xfrm>
+      </p:grpSpPr>
       <p:sp>
         <p:nvSpPr>
           <p:cNvPr id="2" name="Rectangle 1"/>
@@ -13411,6 +15024,7 @@
           <a:lstStyle/>
           <a:p>
             <a:pPr algn="ctr"/>
+            <a:endParaRPr/>
           </a:p>
         </p:txBody>
       </p:sp>
@@ -13457,6 +15071,7 @@
           <a:lstStyle/>
           <a:p>
             <a:pPr algn="ctr"/>
+            <a:endParaRPr/>
           </a:p>
         </p:txBody>
       </p:sp>
@@ -13477,7 +15092,7 @@
           <a:noFill/>
         </p:spPr>
         <p:txBody>
-          <a:bodyPr wrap="square" anchor="ctr" lIns="0" rIns="0" tIns="0" bIns="0">
+          <a:bodyPr wrap="square" lIns="0" tIns="0" rIns="0" bIns="0" anchor="ctr">
             <a:spAutoFit/>
           </a:bodyPr>
           <a:lstStyle/>
@@ -13522,7 +15137,7 @@
           <a:noFill/>
         </p:spPr>
         <p:txBody>
-          <a:bodyPr wrap="square" anchor="t" lIns="0" rIns="0" tIns="0" bIns="0">
+          <a:bodyPr wrap="square" lIns="0" tIns="0" rIns="0" bIns="0" anchor="t">
             <a:spAutoFit/>
           </a:bodyPr>
           <a:lstStyle/>
@@ -13593,6 +15208,7 @@
           <a:lstStyle/>
           <a:p>
             <a:pPr algn="ctr"/>
+            <a:endParaRPr/>
           </a:p>
         </p:txBody>
       </p:sp>
@@ -13613,7 +15229,7 @@
           <a:noFill/>
         </p:spPr>
         <p:txBody>
-          <a:bodyPr wrap="square" anchor="ctr" lIns="0" rIns="0" tIns="0" bIns="0">
+          <a:bodyPr wrap="square" lIns="0" tIns="0" rIns="0" bIns="0" anchor="ctr">
             <a:spAutoFit/>
           </a:bodyPr>
           <a:lstStyle/>
@@ -13658,7 +15274,7 @@
           <a:noFill/>
         </p:spPr>
         <p:txBody>
-          <a:bodyPr wrap="square" anchor="t" lIns="0" rIns="0" tIns="0" bIns="0">
+          <a:bodyPr wrap="square" lIns="0" tIns="0" rIns="0" bIns="0" anchor="t">
             <a:spAutoFit/>
           </a:bodyPr>
           <a:lstStyle/>
@@ -13751,6 +15367,7 @@
           <a:lstStyle/>
           <a:p>
             <a:pPr algn="ctr"/>
+            <a:endParaRPr/>
           </a:p>
         </p:txBody>
       </p:sp>
@@ -13771,7 +15388,7 @@
           <a:noFill/>
         </p:spPr>
         <p:txBody>
-          <a:bodyPr wrap="square" anchor="ctr" lIns="0" rIns="0" tIns="0" bIns="0">
+          <a:bodyPr wrap="square" lIns="0" tIns="0" rIns="0" bIns="0" anchor="ctr">
             <a:spAutoFit/>
           </a:bodyPr>
           <a:lstStyle/>
@@ -13816,7 +15433,7 @@
           <a:noFill/>
         </p:spPr>
         <p:txBody>
-          <a:bodyPr wrap="square" anchor="t" lIns="0" rIns="0" tIns="0" bIns="0">
+          <a:bodyPr wrap="square" lIns="0" tIns="0" rIns="0" bIns="0" anchor="t">
             <a:spAutoFit/>
           </a:bodyPr>
           <a:lstStyle/>
@@ -13909,6 +15526,7 @@
           <a:lstStyle/>
           <a:p>
             <a:pPr algn="ctr"/>
+            <a:endParaRPr/>
           </a:p>
         </p:txBody>
       </p:sp>
@@ -13929,7 +15547,7 @@
           <a:noFill/>
         </p:spPr>
         <p:txBody>
-          <a:bodyPr wrap="square" anchor="ctr" lIns="0" rIns="0" tIns="0" bIns="0">
+          <a:bodyPr wrap="square" lIns="0" tIns="0" rIns="0" bIns="0" anchor="ctr">
             <a:spAutoFit/>
           </a:bodyPr>
           <a:lstStyle/>
@@ -13974,7 +15592,7 @@
           <a:noFill/>
         </p:spPr>
         <p:txBody>
-          <a:bodyPr wrap="square" anchor="t" lIns="0" rIns="0" tIns="0" bIns="0">
+          <a:bodyPr wrap="square" lIns="0" tIns="0" rIns="0" bIns="0" anchor="t">
             <a:spAutoFit/>
           </a:bodyPr>
           <a:lstStyle/>
@@ -14041,7 +15659,7 @@
           <a:noFill/>
         </p:spPr>
         <p:txBody>
-          <a:bodyPr wrap="square" anchor="t" lIns="0" rIns="0" tIns="0" bIns="0">
+          <a:bodyPr wrap="square" lIns="0" tIns="0" rIns="0" bIns="0" anchor="t">
             <a:spAutoFit/>
           </a:bodyPr>
           <a:lstStyle/>
@@ -14086,8 +15704,8 @@
         </p:nvSpPr>
         <p:spPr>
           <a:xfrm>
-            <a:off x="6181344" y="969263"/>
-            <a:ext cx="5513831" cy="3705424"/>
+            <a:off x="6089904" y="1243584"/>
+            <a:ext cx="5696712" cy="3159252"/>
           </a:xfrm>
           <a:prstGeom prst="roundRect">
             <a:avLst>
@@ -14129,12 +15747,13 @@
           <a:lstStyle/>
           <a:p>
             <a:pPr algn="ctr"/>
+            <a:endParaRPr/>
           </a:p>
         </p:txBody>
       </p:sp>
       <p:pic>
         <p:nvPicPr>
-          <p:cNvPr id="17" name="Picture 16" descr="shot_kasse.png"/>
+          <p:cNvPr id="17" name="Picture 16" descr="shot_v2_kasse.png"/>
           <p:cNvPicPr>
             <a:picLocks noChangeAspect="1"/>
           </p:cNvPicPr>
@@ -14148,8 +15767,8 @@
         </p:blipFill>
         <p:spPr>
           <a:xfrm>
-            <a:off x="6263640" y="1051560"/>
-            <a:ext cx="5349240" cy="3540832"/>
+            <a:off x="6172200" y="1325880"/>
+            <a:ext cx="5532120" cy="2994660"/>
           </a:xfrm>
           <a:prstGeom prst="rect">
             <a:avLst/>
@@ -14164,8 +15783,8 @@
         </p:nvSpPr>
         <p:spPr>
           <a:xfrm>
-            <a:off x="6181344" y="4784416"/>
-            <a:ext cx="5513831" cy="640080"/>
+            <a:off x="6089904" y="4512564"/>
+            <a:ext cx="5696712" cy="640080"/>
           </a:xfrm>
           <a:prstGeom prst="rect">
             <a:avLst/>
@@ -14173,7 +15792,7 @@
           <a:noFill/>
         </p:spPr>
         <p:txBody>
-          <a:bodyPr wrap="square" anchor="t" lIns="0" rIns="0" tIns="0" bIns="0">
+          <a:bodyPr wrap="square" lIns="0" tIns="0" rIns="0" bIns="0" anchor="t">
             <a:spAutoFit/>
           </a:bodyPr>
           <a:lstStyle/>
@@ -14218,7 +15837,7 @@
           <a:noFill/>
         </p:spPr>
         <p:txBody>
-          <a:bodyPr wrap="square" anchor="t" lIns="0" rIns="0" tIns="0" bIns="0">
+          <a:bodyPr wrap="square" lIns="0" tIns="0" rIns="0" bIns="0" anchor="t">
             <a:spAutoFit/>
           </a:bodyPr>
           <a:lstStyle/>
@@ -14255,7 +15874,7 @@
 </file>
 
 <file path=ppt/slides/slide8.xml><?xml version="1.0" encoding="utf-8"?>
-<p:sld xmlns:a="http://schemas.openxmlformats.org/drawingml/2006/main" xmlns:p="http://schemas.openxmlformats.org/presentationml/2006/main" xmlns:r="http://schemas.openxmlformats.org/officeDocument/2006/relationships">
+<p:sld xmlns:a="http://schemas.openxmlformats.org/drawingml/2006/main" xmlns:r="http://schemas.openxmlformats.org/officeDocument/2006/relationships" xmlns:p="http://schemas.openxmlformats.org/presentationml/2006/main">
   <p:cSld>
     <p:bg>
       <p:bgPr>
@@ -14271,7 +15890,14 @@
         <p:cNvGrpSpPr/>
         <p:nvPr/>
       </p:nvGrpSpPr>
-      <p:grpSpPr/>
+      <p:grpSpPr>
+        <a:xfrm>
+          <a:off x="0" y="0"/>
+          <a:ext cx="0" cy="0"/>
+          <a:chOff x="0" y="0"/>
+          <a:chExt cx="0" cy="0"/>
+        </a:xfrm>
+      </p:grpSpPr>
       <p:sp>
         <p:nvSpPr>
           <p:cNvPr id="2" name="TextBox 1"/>
@@ -14289,7 +15915,7 @@
           <a:noFill/>
         </p:spPr>
         <p:txBody>
-          <a:bodyPr wrap="square" anchor="t" lIns="0" rIns="0" tIns="0" bIns="0">
+          <a:bodyPr wrap="square" lIns="0" tIns="0" rIns="0" bIns="0" anchor="t">
             <a:spAutoFit/>
           </a:bodyPr>
           <a:lstStyle/>
@@ -14368,6 +15994,7 @@
           <a:lstStyle/>
           <a:p>
             <a:pPr algn="ctr"/>
+            <a:endParaRPr/>
           </a:p>
         </p:txBody>
       </p:sp>
@@ -14414,6 +16041,7 @@
           <a:lstStyle/>
           <a:p>
             <a:pPr algn="ctr"/>
+            <a:endParaRPr/>
           </a:p>
         </p:txBody>
       </p:sp>
@@ -14434,7 +16062,7 @@
           <a:noFill/>
         </p:spPr>
         <p:txBody>
-          <a:bodyPr wrap="square" anchor="ctr" lIns="0" rIns="0" tIns="0" bIns="0">
+          <a:bodyPr wrap="square" lIns="0" tIns="0" rIns="0" bIns="0" anchor="ctr">
             <a:spAutoFit/>
           </a:bodyPr>
           <a:lstStyle/>
@@ -14479,7 +16107,7 @@
           <a:noFill/>
         </p:spPr>
         <p:txBody>
-          <a:bodyPr wrap="square" anchor="t" lIns="0" rIns="0" tIns="0" bIns="0">
+          <a:bodyPr wrap="square" lIns="0" tIns="0" rIns="0" bIns="0" anchor="t">
             <a:spAutoFit/>
           </a:bodyPr>
           <a:lstStyle/>
@@ -14524,7 +16152,7 @@
           <a:noFill/>
         </p:spPr>
         <p:txBody>
-          <a:bodyPr wrap="square" anchor="t" lIns="0" rIns="0" tIns="0" bIns="0">
+          <a:bodyPr wrap="square" lIns="0" tIns="0" rIns="0" bIns="0" anchor="t">
             <a:spAutoFit/>
           </a:bodyPr>
           <a:lstStyle/>
@@ -14603,6 +16231,7 @@
           <a:lstStyle/>
           <a:p>
             <a:pPr algn="ctr"/>
+            <a:endParaRPr/>
           </a:p>
         </p:txBody>
       </p:sp>
@@ -14649,6 +16278,7 @@
           <a:lstStyle/>
           <a:p>
             <a:pPr algn="ctr"/>
+            <a:endParaRPr/>
           </a:p>
         </p:txBody>
       </p:sp>
@@ -14669,7 +16299,7 @@
           <a:noFill/>
         </p:spPr>
         <p:txBody>
-          <a:bodyPr wrap="square" anchor="ctr" lIns="0" rIns="0" tIns="0" bIns="0">
+          <a:bodyPr wrap="square" lIns="0" tIns="0" rIns="0" bIns="0" anchor="ctr">
             <a:spAutoFit/>
           </a:bodyPr>
           <a:lstStyle/>
@@ -14714,7 +16344,7 @@
           <a:noFill/>
         </p:spPr>
         <p:txBody>
-          <a:bodyPr wrap="square" anchor="t" lIns="0" rIns="0" tIns="0" bIns="0">
+          <a:bodyPr wrap="square" lIns="0" tIns="0" rIns="0" bIns="0" anchor="t">
             <a:spAutoFit/>
           </a:bodyPr>
           <a:lstStyle/>
@@ -14759,7 +16389,7 @@
           <a:noFill/>
         </p:spPr>
         <p:txBody>
-          <a:bodyPr wrap="square" anchor="t" lIns="0" rIns="0" tIns="0" bIns="0">
+          <a:bodyPr wrap="square" lIns="0" tIns="0" rIns="0" bIns="0" anchor="t">
             <a:spAutoFit/>
           </a:bodyPr>
           <a:lstStyle/>
@@ -14838,6 +16468,7 @@
           <a:lstStyle/>
           <a:p>
             <a:pPr algn="ctr"/>
+            <a:endParaRPr/>
           </a:p>
         </p:txBody>
       </p:sp>
@@ -14884,6 +16515,7 @@
           <a:lstStyle/>
           <a:p>
             <a:pPr algn="ctr"/>
+            <a:endParaRPr/>
           </a:p>
         </p:txBody>
       </p:sp>
@@ -14904,7 +16536,7 @@
           <a:noFill/>
         </p:spPr>
         <p:txBody>
-          <a:bodyPr wrap="square" anchor="ctr" lIns="0" rIns="0" tIns="0" bIns="0">
+          <a:bodyPr wrap="square" lIns="0" tIns="0" rIns="0" bIns="0" anchor="ctr">
             <a:spAutoFit/>
           </a:bodyPr>
           <a:lstStyle/>
@@ -14949,7 +16581,7 @@
           <a:noFill/>
         </p:spPr>
         <p:txBody>
-          <a:bodyPr wrap="square" anchor="t" lIns="0" rIns="0" tIns="0" bIns="0">
+          <a:bodyPr wrap="square" lIns="0" tIns="0" rIns="0" bIns="0" anchor="t">
             <a:spAutoFit/>
           </a:bodyPr>
           <a:lstStyle/>
@@ -14994,7 +16626,7 @@
           <a:noFill/>
         </p:spPr>
         <p:txBody>
-          <a:bodyPr wrap="square" anchor="t" lIns="0" rIns="0" tIns="0" bIns="0">
+          <a:bodyPr wrap="square" lIns="0" tIns="0" rIns="0" bIns="0" anchor="t">
             <a:spAutoFit/>
           </a:bodyPr>
           <a:lstStyle/>
@@ -15073,6 +16705,7 @@
           <a:lstStyle/>
           <a:p>
             <a:pPr algn="ctr"/>
+            <a:endParaRPr/>
           </a:p>
         </p:txBody>
       </p:sp>
@@ -15119,6 +16752,7 @@
           <a:lstStyle/>
           <a:p>
             <a:pPr algn="ctr"/>
+            <a:endParaRPr/>
           </a:p>
         </p:txBody>
       </p:sp>
@@ -15139,7 +16773,7 @@
           <a:noFill/>
         </p:spPr>
         <p:txBody>
-          <a:bodyPr wrap="square" anchor="ctr" lIns="0" rIns="0" tIns="0" bIns="0">
+          <a:bodyPr wrap="square" lIns="0" tIns="0" rIns="0" bIns="0" anchor="ctr">
             <a:spAutoFit/>
           </a:bodyPr>
           <a:lstStyle/>
@@ -15184,7 +16818,7 @@
           <a:noFill/>
         </p:spPr>
         <p:txBody>
-          <a:bodyPr wrap="square" anchor="t" lIns="0" rIns="0" tIns="0" bIns="0">
+          <a:bodyPr wrap="square" lIns="0" tIns="0" rIns="0" bIns="0" anchor="t">
             <a:spAutoFit/>
           </a:bodyPr>
           <a:lstStyle/>
@@ -15207,7 +16841,7 @@
                 </a:solidFill>
                 <a:latin typeface="Trebuchet MS"/>
               </a:rPr>
-              <a:t>Daten im Haus</a:t>
+              <a:t>Volle Datenhoheit</a:t>
             </a:r>
           </a:p>
         </p:txBody>
@@ -15229,7 +16863,7 @@
           <a:noFill/>
         </p:spPr>
         <p:txBody>
-          <a:bodyPr wrap="square" anchor="t" lIns="0" rIns="0" tIns="0" bIns="0">
+          <a:bodyPr wrap="square" lIns="0" tIns="0" rIns="0" bIns="0" anchor="t">
             <a:spAutoFit/>
           </a:bodyPr>
           <a:lstStyle/>
@@ -15252,7 +16886,7 @@
                 </a:solidFill>
                 <a:latin typeface="Calibri"/>
               </a:rPr>
-              <a:t>Lokale Datenbank – keine Cloud, keine sensiblen Apotheken-Daten bei Dritten.</a:t>
+              <a:t>Sensible Apotheken-Daten bleiben unter eigener Kontrolle, DSGVO-konform.</a:t>
             </a:r>
           </a:p>
         </p:txBody>
@@ -15308,6 +16942,7 @@
           <a:lstStyle/>
           <a:p>
             <a:pPr algn="ctr"/>
+            <a:endParaRPr/>
           </a:p>
         </p:txBody>
       </p:sp>
@@ -15354,6 +16989,7 @@
           <a:lstStyle/>
           <a:p>
             <a:pPr algn="ctr"/>
+            <a:endParaRPr/>
           </a:p>
         </p:txBody>
       </p:sp>
@@ -15374,7 +17010,7 @@
           <a:noFill/>
         </p:spPr>
         <p:txBody>
-          <a:bodyPr wrap="square" anchor="ctr" lIns="0" rIns="0" tIns="0" bIns="0">
+          <a:bodyPr wrap="square" lIns="0" tIns="0" rIns="0" bIns="0" anchor="ctr">
             <a:spAutoFit/>
           </a:bodyPr>
           <a:lstStyle/>
@@ -15419,7 +17055,7 @@
           <a:noFill/>
         </p:spPr>
         <p:txBody>
-          <a:bodyPr wrap="square" anchor="t" lIns="0" rIns="0" tIns="0" bIns="0">
+          <a:bodyPr wrap="square" lIns="0" tIns="0" rIns="0" bIns="0" anchor="t">
             <a:spAutoFit/>
           </a:bodyPr>
           <a:lstStyle/>
@@ -15442,7 +17078,7 @@
                 </a:solidFill>
                 <a:latin typeface="Trebuchet MS"/>
               </a:rPr>
-              <a:t>Keine Fremdkosten</a:t>
+              <a:t>Zukunftssicher</a:t>
             </a:r>
           </a:p>
         </p:txBody>
@@ -15464,7 +17100,7 @@
           <a:noFill/>
         </p:spPr>
         <p:txBody>
-          <a:bodyPr wrap="square" anchor="t" lIns="0" rIns="0" tIns="0" bIns="0">
+          <a:bodyPr wrap="square" lIns="0" tIns="0" rIns="0" bIns="0" anchor="t">
             <a:spAutoFit/>
           </a:bodyPr>
           <a:lstStyle/>
@@ -15487,7 +17123,7 @@
                 </a:solidFill>
                 <a:latin typeface="Calibri"/>
               </a:rPr>
-              <a:t>Eigenentwicklung – keine laufenden Lizenzgebühren für externe Software.</a:t>
+              <a:t>Modular aufgebaut und für zentrales, ortsunabhängiges Arbeiten vorbereitet.</a:t>
             </a:r>
           </a:p>
         </p:txBody>
@@ -15543,6 +17179,7 @@
           <a:lstStyle/>
           <a:p>
             <a:pPr algn="ctr"/>
+            <a:endParaRPr/>
           </a:p>
         </p:txBody>
       </p:sp>
@@ -15589,6 +17226,7 @@
           <a:lstStyle/>
           <a:p>
             <a:pPr algn="ctr"/>
+            <a:endParaRPr/>
           </a:p>
         </p:txBody>
       </p:sp>
@@ -15609,7 +17247,7 @@
           <a:noFill/>
         </p:spPr>
         <p:txBody>
-          <a:bodyPr wrap="square" anchor="ctr" lIns="0" rIns="0" tIns="0" bIns="0">
+          <a:bodyPr wrap="square" lIns="0" tIns="0" rIns="0" bIns="0" anchor="ctr">
             <a:spAutoFit/>
           </a:bodyPr>
           <a:lstStyle/>
@@ -15654,7 +17292,7 @@
           <a:noFill/>
         </p:spPr>
         <p:txBody>
-          <a:bodyPr wrap="square" anchor="t" lIns="0" rIns="0" tIns="0" bIns="0">
+          <a:bodyPr wrap="square" lIns="0" tIns="0" rIns="0" bIns="0" anchor="t">
             <a:spAutoFit/>
           </a:bodyPr>
           <a:lstStyle/>
@@ -15699,7 +17337,7 @@
           <a:noFill/>
         </p:spPr>
         <p:txBody>
-          <a:bodyPr wrap="square" anchor="t" lIns="0" rIns="0" tIns="0" bIns="0">
+          <a:bodyPr wrap="square" lIns="0" tIns="0" rIns="0" bIns="0" anchor="t">
             <a:spAutoFit/>
           </a:bodyPr>
           <a:lstStyle/>
@@ -15744,7 +17382,7 @@
           <a:noFill/>
         </p:spPr>
         <p:txBody>
-          <a:bodyPr wrap="square" anchor="t" lIns="0" rIns="0" tIns="0" bIns="0">
+          <a:bodyPr wrap="square" lIns="0" tIns="0" rIns="0" bIns="0" anchor="t">
             <a:spAutoFit/>
           </a:bodyPr>
           <a:lstStyle/>
@@ -15781,7 +17419,7 @@
 </file>
 
 <file path=ppt/slides/slide9.xml><?xml version="1.0" encoding="utf-8"?>
-<p:sld xmlns:a="http://schemas.openxmlformats.org/drawingml/2006/main" xmlns:p="http://schemas.openxmlformats.org/presentationml/2006/main" xmlns:r="http://schemas.openxmlformats.org/officeDocument/2006/relationships">
+<p:sld xmlns:a="http://schemas.openxmlformats.org/drawingml/2006/main" xmlns:r="http://schemas.openxmlformats.org/officeDocument/2006/relationships" xmlns:p="http://schemas.openxmlformats.org/presentationml/2006/main">
   <p:cSld>
     <p:bg>
       <p:bgPr>
@@ -15797,7 +17435,14 @@
         <p:cNvGrpSpPr/>
         <p:nvPr/>
       </p:nvGrpSpPr>
-      <p:grpSpPr/>
+      <p:grpSpPr>
+        <a:xfrm>
+          <a:off x="0" y="0"/>
+          <a:ext cx="0" cy="0"/>
+          <a:chOff x="0" y="0"/>
+          <a:chExt cx="0" cy="0"/>
+        </a:xfrm>
+      </p:grpSpPr>
       <p:sp>
         <p:nvSpPr>
           <p:cNvPr id="2" name="TextBox 1"/>
@@ -15815,7 +17460,7 @@
           <a:noFill/>
         </p:spPr>
         <p:txBody>
-          <a:bodyPr wrap="square" anchor="t" lIns="0" rIns="0" tIns="0" bIns="0">
+          <a:bodyPr wrap="square" lIns="0" tIns="0" rIns="0" bIns="0" anchor="t">
             <a:spAutoFit/>
           </a:bodyPr>
           <a:lstStyle/>
@@ -15894,6 +17539,7 @@
           <a:lstStyle/>
           <a:p>
             <a:pPr algn="ctr"/>
+            <a:endParaRPr/>
           </a:p>
         </p:txBody>
       </p:sp>
@@ -15938,6 +17584,7 @@
           <a:lstStyle/>
           <a:p>
             <a:pPr algn="ctr"/>
+            <a:endParaRPr/>
           </a:p>
         </p:txBody>
       </p:sp>
@@ -15958,7 +17605,7 @@
           <a:noFill/>
         </p:spPr>
         <p:txBody>
-          <a:bodyPr wrap="square" anchor="t" lIns="0" rIns="0" tIns="0" bIns="0">
+          <a:bodyPr wrap="square" lIns="0" tIns="0" rIns="0" bIns="0" anchor="t">
             <a:spAutoFit/>
           </a:bodyPr>
           <a:lstStyle/>
@@ -16003,7 +17650,7 @@
           <a:noFill/>
         </p:spPr>
         <p:txBody>
-          <a:bodyPr wrap="square" anchor="t" lIns="0" rIns="0" tIns="0" bIns="0">
+          <a:bodyPr wrap="square" lIns="0" tIns="0" rIns="0" bIns="0" anchor="t">
             <a:spAutoFit/>
           </a:bodyPr>
           <a:lstStyle/>
@@ -16082,6 +17729,7 @@
           <a:lstStyle/>
           <a:p>
             <a:pPr algn="ctr"/>
+            <a:endParaRPr/>
           </a:p>
         </p:txBody>
       </p:sp>
@@ -16126,6 +17774,7 @@
           <a:lstStyle/>
           <a:p>
             <a:pPr algn="ctr"/>
+            <a:endParaRPr/>
           </a:p>
         </p:txBody>
       </p:sp>
@@ -16146,7 +17795,7 @@
           <a:noFill/>
         </p:spPr>
         <p:txBody>
-          <a:bodyPr wrap="square" anchor="t" lIns="0" rIns="0" tIns="0" bIns="0">
+          <a:bodyPr wrap="square" lIns="0" tIns="0" rIns="0" bIns="0" anchor="t">
             <a:spAutoFit/>
           </a:bodyPr>
           <a:lstStyle/>
@@ -16191,7 +17840,7 @@
           <a:noFill/>
         </p:spPr>
         <p:txBody>
-          <a:bodyPr wrap="square" anchor="t" lIns="0" rIns="0" tIns="0" bIns="0">
+          <a:bodyPr wrap="square" lIns="0" tIns="0" rIns="0" bIns="0" anchor="t">
             <a:spAutoFit/>
           </a:bodyPr>
           <a:lstStyle/>
@@ -16270,6 +17919,7 @@
           <a:lstStyle/>
           <a:p>
             <a:pPr algn="ctr"/>
+            <a:endParaRPr/>
           </a:p>
         </p:txBody>
       </p:sp>
@@ -16314,6 +17964,7 @@
           <a:lstStyle/>
           <a:p>
             <a:pPr algn="ctr"/>
+            <a:endParaRPr/>
           </a:p>
         </p:txBody>
       </p:sp>
@@ -16334,7 +17985,7 @@
           <a:noFill/>
         </p:spPr>
         <p:txBody>
-          <a:bodyPr wrap="square" anchor="t" lIns="0" rIns="0" tIns="0" bIns="0">
+          <a:bodyPr wrap="square" lIns="0" tIns="0" rIns="0" bIns="0" anchor="t">
             <a:spAutoFit/>
           </a:bodyPr>
           <a:lstStyle/>
@@ -16379,7 +18030,7 @@
           <a:noFill/>
         </p:spPr>
         <p:txBody>
-          <a:bodyPr wrap="square" anchor="t" lIns="0" rIns="0" tIns="0" bIns="0">
+          <a:bodyPr wrap="square" lIns="0" tIns="0" rIns="0" bIns="0" anchor="t">
             <a:spAutoFit/>
           </a:bodyPr>
           <a:lstStyle/>
@@ -16458,6 +18109,7 @@
           <a:lstStyle/>
           <a:p>
             <a:pPr algn="ctr"/>
+            <a:endParaRPr/>
           </a:p>
         </p:txBody>
       </p:sp>
@@ -16502,6 +18154,7 @@
           <a:lstStyle/>
           <a:p>
             <a:pPr algn="ctr"/>
+            <a:endParaRPr/>
           </a:p>
         </p:txBody>
       </p:sp>
@@ -16522,7 +18175,7 @@
           <a:noFill/>
         </p:spPr>
         <p:txBody>
-          <a:bodyPr wrap="square" anchor="t" lIns="0" rIns="0" tIns="0" bIns="0">
+          <a:bodyPr wrap="square" lIns="0" tIns="0" rIns="0" bIns="0" anchor="t">
             <a:spAutoFit/>
           </a:bodyPr>
           <a:lstStyle/>
@@ -16567,7 +18220,7 @@
           <a:noFill/>
         </p:spPr>
         <p:txBody>
-          <a:bodyPr wrap="square" anchor="t" lIns="0" rIns="0" tIns="0" bIns="0">
+          <a:bodyPr wrap="square" lIns="0" tIns="0" rIns="0" bIns="0" anchor="t">
             <a:spAutoFit/>
           </a:bodyPr>
           <a:lstStyle/>
@@ -16646,6 +18299,7 @@
           <a:lstStyle/>
           <a:p>
             <a:pPr algn="ctr"/>
+            <a:endParaRPr/>
           </a:p>
         </p:txBody>
       </p:sp>
@@ -16690,6 +18344,7 @@
           <a:lstStyle/>
           <a:p>
             <a:pPr algn="ctr"/>
+            <a:endParaRPr/>
           </a:p>
         </p:txBody>
       </p:sp>
@@ -16710,7 +18365,7 @@
           <a:noFill/>
         </p:spPr>
         <p:txBody>
-          <a:bodyPr wrap="square" anchor="t" lIns="0" rIns="0" tIns="0" bIns="0">
+          <a:bodyPr wrap="square" lIns="0" tIns="0" rIns="0" bIns="0" anchor="t">
             <a:spAutoFit/>
           </a:bodyPr>
           <a:lstStyle/>
@@ -16755,7 +18410,7 @@
           <a:noFill/>
         </p:spPr>
         <p:txBody>
-          <a:bodyPr wrap="square" anchor="t" lIns="0" rIns="0" tIns="0" bIns="0">
+          <a:bodyPr wrap="square" lIns="0" tIns="0" rIns="0" bIns="0" anchor="t">
             <a:spAutoFit/>
           </a:bodyPr>
           <a:lstStyle/>
@@ -16834,6 +18489,7 @@
           <a:lstStyle/>
           <a:p>
             <a:pPr algn="ctr"/>
+            <a:endParaRPr/>
           </a:p>
         </p:txBody>
       </p:sp>
@@ -16878,6 +18534,7 @@
           <a:lstStyle/>
           <a:p>
             <a:pPr algn="ctr"/>
+            <a:endParaRPr/>
           </a:p>
         </p:txBody>
       </p:sp>
@@ -16898,7 +18555,7 @@
           <a:noFill/>
         </p:spPr>
         <p:txBody>
-          <a:bodyPr wrap="square" anchor="t" lIns="0" rIns="0" tIns="0" bIns="0">
+          <a:bodyPr wrap="square" lIns="0" tIns="0" rIns="0" bIns="0" anchor="t">
             <a:spAutoFit/>
           </a:bodyPr>
           <a:lstStyle/>
@@ -16921,7 +18578,7 @@
                 </a:solidFill>
                 <a:latin typeface="Trebuchet MS"/>
               </a:rPr>
-              <a:t>Eigene Codebasis</a:t>
+              <a:t>Vollständige Eigenentwicklung</a:t>
             </a:r>
           </a:p>
         </p:txBody>
@@ -16943,7 +18600,7 @@
           <a:noFill/>
         </p:spPr>
         <p:txBody>
-          <a:bodyPr wrap="square" anchor="t" lIns="0" rIns="0" tIns="0" bIns="0">
+          <a:bodyPr wrap="square" lIns="0" tIns="0" rIns="0" bIns="0" anchor="t">
             <a:spAutoFit/>
           </a:bodyPr>
           <a:lstStyle/>
@@ -16966,7 +18623,7 @@
                 </a:solidFill>
                 <a:latin typeface="Calibri"/>
               </a:rPr>
-              <a:t>Vollständig im Haus entwickelt – unabhängig von Fremdanbietern.</a:t>
+              <a:t>Unabhängig von Fremdanbietern und jederzeit an neue Anforderungen anpassbar.</a:t>
             </a:r>
           </a:p>
         </p:txBody>
@@ -16988,7 +18645,7 @@
           <a:noFill/>
         </p:spPr>
         <p:txBody>
-          <a:bodyPr wrap="square" anchor="t" lIns="0" rIns="0" tIns="0" bIns="0">
+          <a:bodyPr wrap="square" lIns="0" tIns="0" rIns="0" bIns="0" anchor="t">
             <a:spAutoFit/>
           </a:bodyPr>
           <a:lstStyle/>
